--- a/Progression_P6/P6-L07_Paper_3_Topic_Conversation.pptx
+++ b/Progression_P6/P6-L07_Paper_3_Topic_Conversation.pptx
@@ -1,6 +1,6 @@
 
 <file path=ppt/presentation.xml><?xml version="1.0" encoding="utf-8"?>
-<p:presentation xmlns:a="http://schemas.openxmlformats.org/drawingml/2006/main" xmlns:r="http://schemas.openxmlformats.org/officeDocument/2006/relationships" xmlns:p="http://schemas.openxmlformats.org/presentationml/2006/main" saveSubsetFonts="1" autoCompressPictures="0">
+<p:presentation xmlns:a="http://schemas.openxmlformats.org/drawingml/2006/main" xmlns:r="http://schemas.openxmlformats.org/officeDocument/2006/relationships" xmlns:p="http://schemas.openxmlformats.org/presentationml/2006/main" embedTrueTypeFonts="1" saveSubsetFonts="1" autoCompressPictures="0">
   <p:sldMasterIdLst>
     <p:sldMasterId id="2147483648" r:id="rId1"/>
   </p:sldMasterIdLst>
@@ -31,6 +31,13 @@
   </p:notesMasterIdLst>
   <p:sldSz cx="12192000" cy="6858000"/>
   <p:notesSz cx="6858000" cy="12192000"/>
+  <p:embeddedFontLst>
+    <p:embeddedFont>
+      <p:font typeface="Amiri" pitchFamily="2" charset="-78"/>
+      <p:regular r:id="rIdFont1"/>
+      <p:bold r:id="rIdFont2"/>
+    </p:embeddedFont>
+  </p:embeddedFontLst>
   <p:defaultTextStyle>
     <a:lvl1pPr marL="0" algn="l" defTabSz="914400" rtl="0" eaLnBrk="1" latinLnBrk="0" hangingPunct="1">
       <a:defRPr sz="1800" kern="1200">
@@ -387,8 +394,7 @@
           <a:schemeClr val="tx1"/>
         </a:solidFill>
         <a:latin typeface="+mn-lt"/>
-        <a:ea typeface="+mn-ea"/>
-        <a:cs typeface="+mn-cs"/>
+        <a:cs typeface="Amiri" pitchFamily="2" charset="-78"/>
       </a:defRPr>
     </a:lvl1pPr>
     <a:lvl2pPr marL="457200" algn="l" defTabSz="914400" rtl="0" eaLnBrk="1" latinLnBrk="0" hangingPunct="1">
@@ -397,8 +403,7 @@
           <a:schemeClr val="tx1"/>
         </a:solidFill>
         <a:latin typeface="+mn-lt"/>
-        <a:ea typeface="+mn-ea"/>
-        <a:cs typeface="+mn-cs"/>
+        <a:cs typeface="Amiri" pitchFamily="2" charset="-78"/>
       </a:defRPr>
     </a:lvl2pPr>
     <a:lvl3pPr marL="914400" algn="l" defTabSz="914400" rtl="0" eaLnBrk="1" latinLnBrk="0" hangingPunct="1">
@@ -407,8 +412,7 @@
           <a:schemeClr val="tx1"/>
         </a:solidFill>
         <a:latin typeface="+mn-lt"/>
-        <a:ea typeface="+mn-ea"/>
-        <a:cs typeface="+mn-cs"/>
+        <a:cs typeface="Amiri" pitchFamily="2" charset="-78"/>
       </a:defRPr>
     </a:lvl3pPr>
     <a:lvl4pPr marL="1371600" algn="l" defTabSz="914400" rtl="0" eaLnBrk="1" latinLnBrk="0" hangingPunct="1">
@@ -417,8 +421,7 @@
           <a:schemeClr val="tx1"/>
         </a:solidFill>
         <a:latin typeface="+mn-lt"/>
-        <a:ea typeface="+mn-ea"/>
-        <a:cs typeface="+mn-cs"/>
+        <a:cs typeface="Amiri" pitchFamily="2" charset="-78"/>
       </a:defRPr>
     </a:lvl4pPr>
     <a:lvl5pPr marL="1828800" algn="l" defTabSz="914400" rtl="0" eaLnBrk="1" latinLnBrk="0" hangingPunct="1">
@@ -427,8 +430,7 @@
           <a:schemeClr val="tx1"/>
         </a:solidFill>
         <a:latin typeface="+mn-lt"/>
-        <a:ea typeface="+mn-ea"/>
-        <a:cs typeface="+mn-cs"/>
+        <a:cs typeface="Amiri" pitchFamily="2" charset="-78"/>
       </a:defRPr>
     </a:lvl5pPr>
     <a:lvl6pPr marL="2286000" algn="l" defTabSz="914400" rtl="0" eaLnBrk="1" latinLnBrk="0" hangingPunct="1">
@@ -437,8 +439,7 @@
           <a:schemeClr val="tx1"/>
         </a:solidFill>
         <a:latin typeface="+mn-lt"/>
-        <a:ea typeface="+mn-ea"/>
-        <a:cs typeface="+mn-cs"/>
+        <a:cs typeface="Amiri" pitchFamily="2" charset="-78"/>
       </a:defRPr>
     </a:lvl6pPr>
     <a:lvl7pPr marL="2743200" algn="l" defTabSz="914400" rtl="0" eaLnBrk="1" latinLnBrk="0" hangingPunct="1">
@@ -447,8 +448,7 @@
           <a:schemeClr val="tx1"/>
         </a:solidFill>
         <a:latin typeface="+mn-lt"/>
-        <a:ea typeface="+mn-ea"/>
-        <a:cs typeface="+mn-cs"/>
+        <a:cs typeface="Amiri" pitchFamily="2" charset="-78"/>
       </a:defRPr>
     </a:lvl7pPr>
     <a:lvl8pPr marL="3200400" algn="l" defTabSz="914400" rtl="0" eaLnBrk="1" latinLnBrk="0" hangingPunct="1">
@@ -457,8 +457,7 @@
           <a:schemeClr val="tx1"/>
         </a:solidFill>
         <a:latin typeface="+mn-lt"/>
-        <a:ea typeface="+mn-ea"/>
-        <a:cs typeface="+mn-cs"/>
+        <a:cs typeface="Amiri" pitchFamily="2" charset="-78"/>
       </a:defRPr>
     </a:lvl8pPr>
     <a:lvl9pPr marL="3657600" algn="l" defTabSz="914400" rtl="0" eaLnBrk="1" latinLnBrk="0" hangingPunct="1">
@@ -467,8 +466,7 @@
           <a:schemeClr val="tx1"/>
         </a:solidFill>
         <a:latin typeface="+mn-lt"/>
-        <a:ea typeface="+mn-ea"/>
-        <a:cs typeface="+mn-cs"/>
+        <a:cs typeface="Amiri" pitchFamily="2" charset="-78"/>
       </a:defRPr>
     </a:lvl9pPr>
   </p:notesStyle>
@@ -2349,8 +2347,7 @@
             <a:schemeClr val="tx1"/>
           </a:solidFill>
           <a:latin typeface="+mj-lt"/>
-          <a:ea typeface="+mj-ea"/>
-          <a:cs typeface="+mj-cs"/>
+          <a:cs typeface="Amiri" pitchFamily="2" charset="-78"/>
         </a:defRPr>
       </a:lvl1pPr>
     </p:titleStyle>
@@ -2366,8 +2363,7 @@
             <a:schemeClr val="tx1"/>
           </a:solidFill>
           <a:latin typeface="+mn-lt"/>
-          <a:ea typeface="+mn-ea"/>
-          <a:cs typeface="+mn-cs"/>
+          <a:cs typeface="Amiri" pitchFamily="2" charset="-78"/>
         </a:defRPr>
       </a:lvl1pPr>
       <a:lvl2pPr marL="742950" indent="-285750" algn="l" defTabSz="914400" rtl="0" eaLnBrk="1" latinLnBrk="0" hangingPunct="1">
@@ -2381,8 +2377,7 @@
             <a:schemeClr val="tx1"/>
           </a:solidFill>
           <a:latin typeface="+mn-lt"/>
-          <a:ea typeface="+mn-ea"/>
-          <a:cs typeface="+mn-cs"/>
+          <a:cs typeface="Amiri" pitchFamily="2" charset="-78"/>
         </a:defRPr>
       </a:lvl2pPr>
       <a:lvl3pPr marL="1143000" indent="-228600" algn="l" defTabSz="914400" rtl="0" eaLnBrk="1" latinLnBrk="0" hangingPunct="1">
@@ -2396,8 +2391,7 @@
             <a:schemeClr val="tx1"/>
           </a:solidFill>
           <a:latin typeface="+mn-lt"/>
-          <a:ea typeface="+mn-ea"/>
-          <a:cs typeface="+mn-cs"/>
+          <a:cs typeface="Amiri" pitchFamily="2" charset="-78"/>
         </a:defRPr>
       </a:lvl3pPr>
       <a:lvl4pPr marL="1600200" indent="-228600" algn="l" defTabSz="914400" rtl="0" eaLnBrk="1" latinLnBrk="0" hangingPunct="1">
@@ -2411,8 +2405,7 @@
             <a:schemeClr val="tx1"/>
           </a:solidFill>
           <a:latin typeface="+mn-lt"/>
-          <a:ea typeface="+mn-ea"/>
-          <a:cs typeface="+mn-cs"/>
+          <a:cs typeface="Amiri" pitchFamily="2" charset="-78"/>
         </a:defRPr>
       </a:lvl4pPr>
       <a:lvl5pPr marL="2057400" indent="-228600" algn="l" defTabSz="914400" rtl="0" eaLnBrk="1" latinLnBrk="0" hangingPunct="1">
@@ -2426,8 +2419,7 @@
             <a:schemeClr val="tx1"/>
           </a:solidFill>
           <a:latin typeface="+mn-lt"/>
-          <a:ea typeface="+mn-ea"/>
-          <a:cs typeface="+mn-cs"/>
+          <a:cs typeface="Amiri" pitchFamily="2" charset="-78"/>
         </a:defRPr>
       </a:lvl5pPr>
       <a:lvl6pPr marL="2514600" indent="-228600" algn="l" defTabSz="914400" rtl="0" eaLnBrk="1" latinLnBrk="0" hangingPunct="1">
@@ -2441,8 +2433,7 @@
             <a:schemeClr val="tx1"/>
           </a:solidFill>
           <a:latin typeface="+mn-lt"/>
-          <a:ea typeface="+mn-ea"/>
-          <a:cs typeface="+mn-cs"/>
+          <a:cs typeface="Amiri" pitchFamily="2" charset="-78"/>
         </a:defRPr>
       </a:lvl6pPr>
       <a:lvl7pPr marL="2971800" indent="-228600" algn="l" defTabSz="914400" rtl="0" eaLnBrk="1" latinLnBrk="0" hangingPunct="1">
@@ -2456,8 +2447,7 @@
             <a:schemeClr val="tx1"/>
           </a:solidFill>
           <a:latin typeface="+mn-lt"/>
-          <a:ea typeface="+mn-ea"/>
-          <a:cs typeface="+mn-cs"/>
+          <a:cs typeface="Amiri" pitchFamily="2" charset="-78"/>
         </a:defRPr>
       </a:lvl7pPr>
       <a:lvl8pPr marL="3429000" indent="-228600" algn="l" defTabSz="914400" rtl="0" eaLnBrk="1" latinLnBrk="0" hangingPunct="1">
@@ -2471,8 +2461,7 @@
             <a:schemeClr val="tx1"/>
           </a:solidFill>
           <a:latin typeface="+mn-lt"/>
-          <a:ea typeface="+mn-ea"/>
-          <a:cs typeface="+mn-cs"/>
+          <a:cs typeface="Amiri" pitchFamily="2" charset="-78"/>
         </a:defRPr>
       </a:lvl8pPr>
       <a:lvl9pPr marL="3886200" indent="-228600" algn="l" defTabSz="914400" rtl="0" eaLnBrk="1" latinLnBrk="0" hangingPunct="1">
@@ -2486,8 +2475,7 @@
             <a:schemeClr val="tx1"/>
           </a:solidFill>
           <a:latin typeface="+mn-lt"/>
-          <a:ea typeface="+mn-ea"/>
-          <a:cs typeface="+mn-cs"/>
+          <a:cs typeface="Amiri" pitchFamily="2" charset="-78"/>
         </a:defRPr>
       </a:lvl9pPr>
     </p:bodyStyle>
@@ -2501,8 +2489,7 @@
             <a:schemeClr val="tx1"/>
           </a:solidFill>
           <a:latin typeface="+mn-lt"/>
-          <a:ea typeface="+mn-ea"/>
-          <a:cs typeface="+mn-cs"/>
+          <a:cs typeface="Amiri" pitchFamily="2" charset="-78"/>
         </a:defRPr>
       </a:lvl1pPr>
       <a:lvl2pPr marL="457200" algn="l" defTabSz="914400" rtl="0" eaLnBrk="1" latinLnBrk="0" hangingPunct="1">
@@ -2511,8 +2498,7 @@
             <a:schemeClr val="tx1"/>
           </a:solidFill>
           <a:latin typeface="+mn-lt"/>
-          <a:ea typeface="+mn-ea"/>
-          <a:cs typeface="+mn-cs"/>
+          <a:cs typeface="Amiri" pitchFamily="2" charset="-78"/>
         </a:defRPr>
       </a:lvl2pPr>
       <a:lvl3pPr marL="914400" algn="l" defTabSz="914400" rtl="0" eaLnBrk="1" latinLnBrk="0" hangingPunct="1">
@@ -2521,8 +2507,7 @@
             <a:schemeClr val="tx1"/>
           </a:solidFill>
           <a:latin typeface="+mn-lt"/>
-          <a:ea typeface="+mn-ea"/>
-          <a:cs typeface="+mn-cs"/>
+          <a:cs typeface="Amiri" pitchFamily="2" charset="-78"/>
         </a:defRPr>
       </a:lvl3pPr>
       <a:lvl4pPr marL="1371600" algn="l" defTabSz="914400" rtl="0" eaLnBrk="1" latinLnBrk="0" hangingPunct="1">
@@ -2531,8 +2516,7 @@
             <a:schemeClr val="tx1"/>
           </a:solidFill>
           <a:latin typeface="+mn-lt"/>
-          <a:ea typeface="+mn-ea"/>
-          <a:cs typeface="+mn-cs"/>
+          <a:cs typeface="Amiri" pitchFamily="2" charset="-78"/>
         </a:defRPr>
       </a:lvl4pPr>
       <a:lvl5pPr marL="1828800" algn="l" defTabSz="914400" rtl="0" eaLnBrk="1" latinLnBrk="0" hangingPunct="1">
@@ -2541,8 +2525,7 @@
             <a:schemeClr val="tx1"/>
           </a:solidFill>
           <a:latin typeface="+mn-lt"/>
-          <a:ea typeface="+mn-ea"/>
-          <a:cs typeface="+mn-cs"/>
+          <a:cs typeface="Amiri" pitchFamily="2" charset="-78"/>
         </a:defRPr>
       </a:lvl5pPr>
       <a:lvl6pPr marL="2286000" algn="l" defTabSz="914400" rtl="0" eaLnBrk="1" latinLnBrk="0" hangingPunct="1">
@@ -2551,8 +2534,7 @@
             <a:schemeClr val="tx1"/>
           </a:solidFill>
           <a:latin typeface="+mn-lt"/>
-          <a:ea typeface="+mn-ea"/>
-          <a:cs typeface="+mn-cs"/>
+          <a:cs typeface="Amiri" pitchFamily="2" charset="-78"/>
         </a:defRPr>
       </a:lvl6pPr>
       <a:lvl7pPr marL="2743200" algn="l" defTabSz="914400" rtl="0" eaLnBrk="1" latinLnBrk="0" hangingPunct="1">
@@ -2561,8 +2543,7 @@
             <a:schemeClr val="tx1"/>
           </a:solidFill>
           <a:latin typeface="+mn-lt"/>
-          <a:ea typeface="+mn-ea"/>
-          <a:cs typeface="+mn-cs"/>
+          <a:cs typeface="Amiri" pitchFamily="2" charset="-78"/>
         </a:defRPr>
       </a:lvl7pPr>
       <a:lvl8pPr marL="3200400" algn="l" defTabSz="914400" rtl="0" eaLnBrk="1" latinLnBrk="0" hangingPunct="1">
@@ -2571,8 +2552,7 @@
             <a:schemeClr val="tx1"/>
           </a:solidFill>
           <a:latin typeface="+mn-lt"/>
-          <a:ea typeface="+mn-ea"/>
-          <a:cs typeface="+mn-cs"/>
+          <a:cs typeface="Amiri" pitchFamily="2" charset="-78"/>
         </a:defRPr>
       </a:lvl8pPr>
       <a:lvl9pPr marL="3657600" algn="l" defTabSz="914400" rtl="0" eaLnBrk="1" latinLnBrk="0" hangingPunct="1">
@@ -2581,8 +2561,7 @@
             <a:schemeClr val="tx1"/>
           </a:solidFill>
           <a:latin typeface="+mn-lt"/>
-          <a:ea typeface="+mn-ea"/>
-          <a:cs typeface="+mn-cs"/>
+          <a:cs typeface="Amiri" pitchFamily="2" charset="-78"/>
         </a:defRPr>
       </a:lvl9pPr>
     </p:otherStyle>
@@ -2742,9 +2721,8 @@
                 <a:solidFill>
                   <a:srgbClr val="D4AF37"/>
                 </a:solidFill>
-                <a:latin typeface="Amiri" pitchFamily="34" charset="0"/>
-                <a:ea typeface="Amiri" pitchFamily="34" charset="-122"/>
-                <a:cs typeface="Amiri" pitchFamily="34" charset="-120"/>
+                <a:latin typeface="Amiri" pitchFamily="2" charset="-78"/>
+                <a:cs typeface="Amiri" pitchFamily="2" charset="-78"/>
               </a:rPr>
               <a:t>م</a:t>
             </a:r>
@@ -2782,8 +2760,7 @@
                   <a:srgbClr val="FFFFFF"/>
                 </a:solidFill>
                 <a:latin typeface="Cambria" pitchFamily="34" charset="0"/>
-                <a:ea typeface="Cambria" pitchFamily="34" charset="-122"/>
-                <a:cs typeface="Cambria" pitchFamily="34" charset="-120"/>
+                <a:cs typeface="Amiri" pitchFamily="2" charset="-78"/>
               </a:rPr>
               <a:t>Al Madina Online School</a:t>
             </a:r>
@@ -2799,8 +2776,7 @@
                   <a:srgbClr val="D4AF37"/>
                 </a:solidFill>
                 <a:latin typeface="Calibri" pitchFamily="34" charset="0"/>
-                <a:ea typeface="Calibri" pitchFamily="34" charset="-122"/>
-                <a:cs typeface="Calibri" pitchFamily="34" charset="-120"/>
+                <a:cs typeface="Amiri" pitchFamily="2" charset="-78"/>
               </a:rPr>
               <a:t>ARABIC DEPARTMENT · MIFTAH ARABIC</a:t>
             </a:r>
@@ -2838,8 +2814,7 @@
                   <a:srgbClr val="D4AF37"/>
                 </a:solidFill>
                 <a:latin typeface="Calibri" pitchFamily="34" charset="0"/>
-                <a:ea typeface="Calibri" pitchFamily="34" charset="-122"/>
-                <a:cs typeface="Calibri" pitchFamily="34" charset="-120"/>
+                <a:cs typeface="Amiri" pitchFamily="2" charset="-78"/>
               </a:rPr>
               <a:t>CAMBRIDGE IGCSE ARABIC 0544  ·  YEAR 9  ·  PROGRESSION P6  ·  P6-L07</a:t>
             </a:r>
@@ -2877,8 +2852,7 @@
                   <a:srgbClr val="9FB3D1"/>
                 </a:solidFill>
                 <a:latin typeface="Cambria" pitchFamily="34" charset="0"/>
-                <a:ea typeface="Cambria" pitchFamily="34" charset="-122"/>
-                <a:cs typeface="Cambria" pitchFamily="34" charset="-120"/>
+                <a:cs typeface="Amiri" pitchFamily="2" charset="-78"/>
               </a:rPr>
               <a:t>P6-L07</a:t>
             </a:r>
@@ -2916,8 +2890,7 @@
                   <a:srgbClr val="FFFFFF"/>
                 </a:solidFill>
                 <a:latin typeface="Cambria" pitchFamily="34" charset="0"/>
-                <a:ea typeface="Cambria" pitchFamily="34" charset="-122"/>
-                <a:cs typeface="Cambria" pitchFamily="34" charset="-120"/>
+                <a:cs typeface="Amiri" pitchFamily="2" charset="-78"/>
               </a:rPr>
               <a:t>Paper 3 Topic Conversation — Extended Speaking at IGCSE Level</a:t>
             </a:r>
@@ -2954,9 +2927,8 @@
                 <a:solidFill>
                   <a:srgbClr val="D4AF37"/>
                 </a:solidFill>
-                <a:latin typeface="Amiri" pitchFamily="34" charset="0"/>
-                <a:ea typeface="Amiri" pitchFamily="34" charset="-122"/>
-                <a:cs typeface="Amiri" pitchFamily="34" charset="-120"/>
+                <a:latin typeface="Amiri" pitchFamily="2" charset="-78"/>
+                <a:cs typeface="Amiri" pitchFamily="2" charset="-78"/>
               </a:rPr>
               <a:t>الوَرَقَةُ الثَّالِثَةُ — المُحَادَثَةُ المَوْضُوعِيَّةُ</a:t>
             </a:r>
@@ -2994,8 +2966,7 @@
                   <a:srgbClr val="C6D2E6"/>
                 </a:solidFill>
                 <a:latin typeface="Calibri" pitchFamily="34" charset="0"/>
-                <a:ea typeface="Calibri" pitchFamily="34" charset="-122"/>
-                <a:cs typeface="Calibri" pitchFamily="34" charset="-120"/>
+                <a:cs typeface="Amiri" pitchFamily="2" charset="-78"/>
               </a:rPr>
               <a:t>Turn a one-line answer into a Band 5 answer: opinion → reason → example → concession → conditional → subjunctive conclusion — and keep talking when a question surprises you.</a:t>
             </a:r>
@@ -3060,8 +3031,7 @@
                   <a:srgbClr val="D4AF37"/>
                 </a:solidFill>
                 <a:latin typeface="Calibri" pitchFamily="34" charset="0"/>
-                <a:ea typeface="Calibri" pitchFamily="34" charset="-122"/>
-                <a:cs typeface="Calibri" pitchFamily="34" charset="-120"/>
+                <a:cs typeface="Amiri" pitchFamily="2" charset="-78"/>
               </a:rPr>
               <a:t>LESSON</a:t>
             </a:r>
@@ -3077,8 +3047,7 @@
                   <a:srgbClr val="FFFFFF"/>
                 </a:solidFill>
                 <a:latin typeface="Calibri" pitchFamily="34" charset="0"/>
-                <a:ea typeface="Calibri" pitchFamily="34" charset="-122"/>
-                <a:cs typeface="Calibri" pitchFamily="34" charset="-120"/>
+                <a:cs typeface="Amiri" pitchFamily="2" charset="-78"/>
               </a:rPr>
               <a:t>P6-L07 · Progression P6 · IGCSE Bridge</a:t>
             </a:r>
@@ -3143,8 +3112,7 @@
                   <a:srgbClr val="D4AF37"/>
                 </a:solidFill>
                 <a:latin typeface="Calibri" pitchFamily="34" charset="0"/>
-                <a:ea typeface="Calibri" pitchFamily="34" charset="-122"/>
-                <a:cs typeface="Calibri" pitchFamily="34" charset="-120"/>
+                <a:cs typeface="Amiri" pitchFamily="2" charset="-78"/>
               </a:rPr>
               <a:t>DURATION</a:t>
             </a:r>
@@ -3160,8 +3128,7 @@
                   <a:srgbClr val="FFFFFF"/>
                 </a:solidFill>
                 <a:latin typeface="Calibri" pitchFamily="34" charset="0"/>
-                <a:ea typeface="Calibri" pitchFamily="34" charset="-122"/>
-                <a:cs typeface="Calibri" pitchFamily="34" charset="-120"/>
+                <a:cs typeface="Amiri" pitchFamily="2" charset="-78"/>
               </a:rPr>
               <a:t>60 minutes · Teams</a:t>
             </a:r>
@@ -3226,8 +3193,7 @@
                   <a:srgbClr val="D4AF37"/>
                 </a:solidFill>
                 <a:latin typeface="Calibri" pitchFamily="34" charset="0"/>
-                <a:ea typeface="Calibri" pitchFamily="34" charset="-122"/>
-                <a:cs typeface="Calibri" pitchFamily="34" charset="-120"/>
+                <a:cs typeface="Amiri" pitchFamily="2" charset="-78"/>
               </a:rPr>
               <a:t>LEVEL</a:t>
             </a:r>
@@ -3243,8 +3209,7 @@
                   <a:srgbClr val="FFFFFF"/>
                 </a:solidFill>
                 <a:latin typeface="Calibri" pitchFamily="34" charset="0"/>
-                <a:ea typeface="Calibri" pitchFamily="34" charset="-122"/>
-                <a:cs typeface="Calibri" pitchFamily="34" charset="-120"/>
+                <a:cs typeface="Amiri" pitchFamily="2" charset="-78"/>
               </a:rPr>
               <a:t>Progression · B1 → B2</a:t>
             </a:r>
@@ -3309,8 +3274,7 @@
                   <a:srgbClr val="D4AF37"/>
                 </a:solidFill>
                 <a:latin typeface="Calibri" pitchFamily="34" charset="0"/>
-                <a:ea typeface="Calibri" pitchFamily="34" charset="-122"/>
-                <a:cs typeface="Calibri" pitchFamily="34" charset="-120"/>
+                <a:cs typeface="Amiri" pitchFamily="2" charset="-78"/>
               </a:rPr>
               <a:t>ON THE WEBSITE</a:t>
             </a:r>
@@ -3326,8 +3290,7 @@
                   <a:srgbClr val="FFFFFF"/>
                 </a:solidFill>
                 <a:latin typeface="Calibri" pitchFamily="34" charset="0"/>
-                <a:ea typeface="Calibri" pitchFamily="34" charset="-122"/>
-                <a:cs typeface="Calibri" pitchFamily="34" charset="-120"/>
+                <a:cs typeface="Amiri" pitchFamily="2" charset="-78"/>
               </a:rPr>
               <a:t>Pathways › Progression › P6 › P6-L07</a:t>
             </a:r>
@@ -3421,9 +3384,8 @@
                 <a:solidFill>
                   <a:srgbClr val="D4AF37"/>
                 </a:solidFill>
-                <a:latin typeface="Amiri" pitchFamily="34" charset="0"/>
-                <a:ea typeface="Amiri" pitchFamily="34" charset="-122"/>
-                <a:cs typeface="Amiri" pitchFamily="34" charset="-120"/>
+                <a:latin typeface="Amiri" pitchFamily="2" charset="-78"/>
+                <a:cs typeface="Amiri" pitchFamily="2" charset="-78"/>
               </a:rPr>
               <a:t>م</a:t>
             </a:r>
@@ -3461,8 +3423,7 @@
                   <a:srgbClr val="1B3B6F"/>
                 </a:solidFill>
                 <a:latin typeface="Cambria" pitchFamily="34" charset="0"/>
-                <a:ea typeface="Cambria" pitchFamily="34" charset="-122"/>
-                <a:cs typeface="Cambria" pitchFamily="34" charset="-120"/>
+                <a:cs typeface="Amiri" pitchFamily="2" charset="-78"/>
               </a:rPr>
               <a:t>Al Madina Online School</a:t>
             </a:r>
@@ -3500,8 +3461,7 @@
                   <a:srgbClr val="8A6D1E"/>
                 </a:solidFill>
                 <a:latin typeface="Calibri" pitchFamily="34" charset="0"/>
-                <a:ea typeface="Calibri" pitchFamily="34" charset="-122"/>
-                <a:cs typeface="Calibri" pitchFamily="34" charset="-120"/>
+                <a:cs typeface="Amiri" pitchFamily="2" charset="-78"/>
               </a:rPr>
               <a:t>ARABIC DEPARTMENT · MIFTAH ARABIC · IGCSE 0544</a:t>
             </a:r>
@@ -3566,8 +3526,7 @@
                   <a:srgbClr val="FFFFFF"/>
                 </a:solidFill>
                 <a:latin typeface="Calibri" pitchFamily="34" charset="0"/>
-                <a:ea typeface="Calibri" pitchFamily="34" charset="-122"/>
-                <a:cs typeface="Calibri" pitchFamily="34" charset="-120"/>
+                <a:cs typeface="Amiri" pitchFamily="2" charset="-78"/>
               </a:rPr>
               <a:t>P6-L07 · IGCSE Bridge</a:t>
             </a:r>
@@ -3632,8 +3591,7 @@
                   <a:srgbClr val="FFFFFF"/>
                 </a:solidFill>
                 <a:latin typeface="Calibri" pitchFamily="34" charset="0"/>
-                <a:ea typeface="Calibri" pitchFamily="34" charset="-122"/>
-                <a:cs typeface="Calibri" pitchFamily="34" charset="-120"/>
+                <a:cs typeface="Amiri" pitchFamily="2" charset="-78"/>
               </a:rPr>
               <a:t>TEACHER INSTRUCTION · 3 MIN</a:t>
             </a:r>
@@ -3671,8 +3629,7 @@
                   <a:srgbClr val="1B3B6F"/>
                 </a:solidFill>
                 <a:latin typeface="Calibri" pitchFamily="34" charset="0"/>
-                <a:ea typeface="Calibri" pitchFamily="34" charset="-122"/>
-                <a:cs typeface="Calibri" pitchFamily="34" charset="-120"/>
+                <a:cs typeface="Amiri" pitchFamily="2" charset="-78"/>
               </a:rPr>
               <a:t>TEACH · THREE ANSWERS TO ONE QUESTION (WEBSITE)</a:t>
             </a:r>
@@ -3710,8 +3667,7 @@
                   <a:srgbClr val="1B3B6F"/>
                 </a:solidFill>
                 <a:latin typeface="Cambria" pitchFamily="34" charset="0"/>
-                <a:ea typeface="Cambria" pitchFamily="34" charset="-122"/>
-                <a:cs typeface="Cambria" pitchFamily="34" charset="-120"/>
+                <a:cs typeface="Amiri" pitchFamily="2" charset="-78"/>
               </a:rPr>
               <a:t>What lifts an answer from Band 2 to Band 5</a:t>
             </a:r>
@@ -3748,9 +3704,8 @@
                 <a:solidFill>
                   <a:srgbClr val="8A6D1E"/>
                 </a:solidFill>
-                <a:latin typeface="Amiri" pitchFamily="34" charset="0"/>
-                <a:ea typeface="Amiri" pitchFamily="34" charset="-122"/>
-                <a:cs typeface="Amiri" pitchFamily="34" charset="-120"/>
+                <a:latin typeface="Amiri" pitchFamily="2" charset="-78"/>
+                <a:cs typeface="Amiri" pitchFamily="2" charset="-78"/>
               </a:rPr>
               <a:t>مِنْ ٢ إِلَى ٥</a:t>
             </a:r>
@@ -3788,8 +3743,7 @@
                   <a:srgbClr val="8A93A0"/>
                 </a:solidFill>
                 <a:latin typeface="Calibri" pitchFamily="34" charset="0"/>
-                <a:ea typeface="Calibri" pitchFamily="34" charset="-122"/>
-                <a:cs typeface="Calibri" pitchFamily="34" charset="-120"/>
+                <a:cs typeface="Amiri" pitchFamily="2" charset="-78"/>
               </a:rPr>
               <a:t>Miftah Arabic · Progression P6 · IGCSE Bridge · P6-L07</a:t>
             </a:r>
@@ -3861,8 +3815,7 @@
                   <a:srgbClr val="1B3B6F"/>
                 </a:solidFill>
                 <a:latin typeface="Calibri" pitchFamily="34" charset="0"/>
-                <a:ea typeface="Calibri" pitchFamily="34" charset="-122"/>
-                <a:cs typeface="Calibri" pitchFamily="34" charset="-120"/>
+                <a:cs typeface="Amiri" pitchFamily="2" charset="-78"/>
               </a:rPr>
               <a:t>WHAT A BAND 5 ANSWER LOOKS LIKE</a:t>
             </a:r>
@@ -3925,8 +3878,7 @@
                   <a:srgbClr val="D4AF37"/>
                 </a:solidFill>
                 <a:latin typeface="Calibri" pitchFamily="34" charset="0"/>
-                <a:ea typeface="Calibri" pitchFamily="34" charset="-122"/>
-                <a:cs typeface="Calibri" pitchFamily="34" charset="-120"/>
+                <a:cs typeface="Amiri" pitchFamily="2" charset="-78"/>
               </a:rPr>
               <a:t>1</a:t>
             </a:r>
@@ -3964,8 +3916,7 @@
                   <a:srgbClr val="1F2A37"/>
                 </a:solidFill>
                 <a:latin typeface="Calibri" pitchFamily="34" charset="0"/>
-                <a:ea typeface="Calibri" pitchFamily="34" charset="-122"/>
-                <a:cs typeface="Calibri" pitchFamily="34" charset="-120"/>
+                <a:cs typeface="Amiri" pitchFamily="2" charset="-78"/>
               </a:rPr>
               <a:t>Band 2 — minimal — A bare opinion, no development.</a:t>
             </a:r>
@@ -4028,8 +3979,7 @@
                   <a:srgbClr val="D4AF37"/>
                 </a:solidFill>
                 <a:latin typeface="Calibri" pitchFamily="34" charset="0"/>
-                <a:ea typeface="Calibri" pitchFamily="34" charset="-122"/>
-                <a:cs typeface="Calibri" pitchFamily="34" charset="-120"/>
+                <a:cs typeface="Amiri" pitchFamily="2" charset="-78"/>
               </a:rPr>
               <a:t>2</a:t>
             </a:r>
@@ -4067,8 +4017,7 @@
                   <a:srgbClr val="1F2A37"/>
                 </a:solidFill>
                 <a:latin typeface="Calibri" pitchFamily="34" charset="0"/>
-                <a:ea typeface="Calibri" pitchFamily="34" charset="-122"/>
-                <a:cs typeface="Calibri" pitchFamily="34" charset="-120"/>
+                <a:cs typeface="Amiri" pitchFamily="2" charset="-78"/>
               </a:rPr>
               <a:t>Band 3 — adequate — An opinion with one reason.</a:t>
             </a:r>
@@ -4131,8 +4080,7 @@
                   <a:srgbClr val="D4AF37"/>
                 </a:solidFill>
                 <a:latin typeface="Calibri" pitchFamily="34" charset="0"/>
-                <a:ea typeface="Calibri" pitchFamily="34" charset="-122"/>
-                <a:cs typeface="Calibri" pitchFamily="34" charset="-120"/>
+                <a:cs typeface="Amiri" pitchFamily="2" charset="-78"/>
               </a:rPr>
               <a:t>3</a:t>
             </a:r>
@@ -4170,8 +4118,7 @@
                   <a:srgbClr val="1F2A37"/>
                 </a:solidFill>
                 <a:latin typeface="Calibri" pitchFamily="34" charset="0"/>
-                <a:ea typeface="Calibri" pitchFamily="34" charset="-122"/>
-                <a:cs typeface="Calibri" pitchFamily="34" charset="-120"/>
+                <a:cs typeface="Amiri" pitchFamily="2" charset="-78"/>
               </a:rPr>
               <a:t>Band 5 — developed — Evidence + concession-refutation + conditional + subjunctive.</a:t>
             </a:r>
@@ -4243,8 +4190,7 @@
                   <a:srgbClr val="8A6D1E"/>
                 </a:solidFill>
                 <a:latin typeface="Calibri" pitchFamily="34" charset="0"/>
-                <a:ea typeface="Calibri" pitchFamily="34" charset="-122"/>
-                <a:cs typeface="Calibri" pitchFamily="34" charset="-120"/>
+                <a:cs typeface="Amiri" pitchFamily="2" charset="-78"/>
               </a:rPr>
               <a:t>IN ARABIC</a:t>
             </a:r>
@@ -4281,9 +4227,8 @@
                 <a:solidFill>
                   <a:srgbClr val="1B3B6F"/>
                 </a:solidFill>
-                <a:latin typeface="Amiri" pitchFamily="34" charset="0"/>
-                <a:ea typeface="Amiri" pitchFamily="34" charset="-122"/>
-                <a:cs typeface="Amiri" pitchFamily="34" charset="-120"/>
+                <a:latin typeface="Amiri" pitchFamily="2" charset="-78"/>
+                <a:cs typeface="Amiri" pitchFamily="2" charset="-78"/>
               </a:rPr>
               <a:t>الضَّغْطُ الدِّرَاسِيُّ صَعْبٌ. لَا أُحِبُّهُ.</a:t>
             </a:r>
@@ -4321,8 +4266,7 @@
                   <a:srgbClr val="5A6472"/>
                 </a:solidFill>
                 <a:latin typeface="Calibri" pitchFamily="34" charset="0"/>
-                <a:ea typeface="Calibri" pitchFamily="34" charset="-122"/>
-                <a:cs typeface="Calibri" pitchFamily="34" charset="-120"/>
+                <a:cs typeface="Amiri" pitchFamily="2" charset="-78"/>
               </a:rPr>
               <a:t>Band 2: “Study pressure is hard. I don’t like it.”</a:t>
             </a:r>
@@ -4382,9 +4326,8 @@
                 <a:solidFill>
                   <a:srgbClr val="1B3B6F"/>
                 </a:solidFill>
-                <a:latin typeface="Amiri" pitchFamily="34" charset="0"/>
-                <a:ea typeface="Amiri" pitchFamily="34" charset="-122"/>
-                <a:cs typeface="Amiri" pitchFamily="34" charset="-120"/>
+                <a:latin typeface="Amiri" pitchFamily="2" charset="-78"/>
+                <a:cs typeface="Amiri" pitchFamily="2" charset="-78"/>
               </a:rPr>
               <a:t>فِي رَأْيِي هُوَ مُفِيدٌ أَحْيَانًا لِأَنَّهُ يُحَفِّزُ.</a:t>
             </a:r>
@@ -4422,8 +4365,7 @@
                   <a:srgbClr val="5A6472"/>
                 </a:solidFill>
                 <a:latin typeface="Calibri" pitchFamily="34" charset="0"/>
-                <a:ea typeface="Calibri" pitchFamily="34" charset="-122"/>
-                <a:cs typeface="Calibri" pitchFamily="34" charset="-120"/>
+                <a:cs typeface="Amiri" pitchFamily="2" charset="-78"/>
               </a:rPr>
               <a:t>Band 3: “In my opinion it is sometimes useful because it motivates.”</a:t>
             </a:r>
@@ -4483,9 +4425,8 @@
                 <a:solidFill>
                   <a:srgbClr val="1B3B6F"/>
                 </a:solidFill>
-                <a:latin typeface="Amiri" pitchFamily="34" charset="0"/>
-                <a:ea typeface="Amiri" pitchFamily="34" charset="-122"/>
-                <a:cs typeface="Amiri" pitchFamily="34" charset="-120"/>
+                <a:latin typeface="Amiri" pitchFamily="2" charset="-78"/>
+                <a:cs typeface="Amiri" pitchFamily="2" charset="-78"/>
               </a:rPr>
               <a:t>صَحِيحٌ أَنَّ بَعْضَهُ يُحَفِّزُ، غَيْرَ أَنَّهُ …</a:t>
             </a:r>
@@ -4523,8 +4464,7 @@
                   <a:srgbClr val="5A6472"/>
                 </a:solidFill>
                 <a:latin typeface="Calibri" pitchFamily="34" charset="0"/>
-                <a:ea typeface="Calibri" pitchFamily="34" charset="-122"/>
-                <a:cs typeface="Calibri" pitchFamily="34" charset="-120"/>
+                <a:cs typeface="Amiri" pitchFamily="2" charset="-78"/>
               </a:rPr>
               <a:t>Band 5: concession + conditional + subjunctive (next slides).</a:t>
             </a:r>
@@ -4596,8 +4536,7 @@
                   <a:srgbClr val="8A6D1E"/>
                 </a:solidFill>
                 <a:latin typeface="Calibri" pitchFamily="34" charset="0"/>
-                <a:ea typeface="Calibri" pitchFamily="34" charset="-122"/>
-                <a:cs typeface="Calibri" pitchFamily="34" charset="-120"/>
+                <a:cs typeface="Amiri" pitchFamily="2" charset="-78"/>
               </a:rPr>
               <a:t>THE QUESTION</a:t>
             </a:r>
@@ -4635,8 +4574,7 @@
                   <a:srgbClr val="1F2A37"/>
                 </a:solidFill>
                 <a:latin typeface="Calibri" pitchFamily="34" charset="0"/>
-                <a:ea typeface="Calibri" pitchFamily="34" charset="-122"/>
-                <a:cs typeface="Calibri" pitchFamily="34" charset="-120"/>
+                <a:cs typeface="Amiri" pitchFamily="2" charset="-78"/>
               </a:rPr>
               <a:t>mā ra’yuka fī ḍ-ḍaghṭi d-dirāsiyy? — What do you think about study pressure?</a:t>
             </a:r>
@@ -4674,8 +4612,7 @@
                   <a:srgbClr val="8A93A0"/>
                 </a:solidFill>
                 <a:latin typeface="Calibri" pitchFamily="34" charset="0"/>
-                <a:ea typeface="Calibri" pitchFamily="34" charset="-122"/>
-                <a:cs typeface="Calibri" pitchFamily="34" charset="-120"/>
+                <a:cs typeface="Amiri" pitchFamily="2" charset="-78"/>
               </a:rPr>
               <a:t>10 / 20</a:t>
             </a:r>
@@ -4769,9 +4706,8 @@
                 <a:solidFill>
                   <a:srgbClr val="D4AF37"/>
                 </a:solidFill>
-                <a:latin typeface="Amiri" pitchFamily="34" charset="0"/>
-                <a:ea typeface="Amiri" pitchFamily="34" charset="-122"/>
-                <a:cs typeface="Amiri" pitchFamily="34" charset="-120"/>
+                <a:latin typeface="Amiri" pitchFamily="2" charset="-78"/>
+                <a:cs typeface="Amiri" pitchFamily="2" charset="-78"/>
               </a:rPr>
               <a:t>م</a:t>
             </a:r>
@@ -4809,8 +4745,7 @@
                   <a:srgbClr val="1B3B6F"/>
                 </a:solidFill>
                 <a:latin typeface="Cambria" pitchFamily="34" charset="0"/>
-                <a:ea typeface="Cambria" pitchFamily="34" charset="-122"/>
-                <a:cs typeface="Cambria" pitchFamily="34" charset="-120"/>
+                <a:cs typeface="Amiri" pitchFamily="2" charset="-78"/>
               </a:rPr>
               <a:t>Al Madina Online School</a:t>
             </a:r>
@@ -4848,8 +4783,7 @@
                   <a:srgbClr val="8A6D1E"/>
                 </a:solidFill>
                 <a:latin typeface="Calibri" pitchFamily="34" charset="0"/>
-                <a:ea typeface="Calibri" pitchFamily="34" charset="-122"/>
-                <a:cs typeface="Calibri" pitchFamily="34" charset="-120"/>
+                <a:cs typeface="Amiri" pitchFamily="2" charset="-78"/>
               </a:rPr>
               <a:t>ARABIC DEPARTMENT · MIFTAH ARABIC · IGCSE 0544</a:t>
             </a:r>
@@ -4914,8 +4848,7 @@
                   <a:srgbClr val="FFFFFF"/>
                 </a:solidFill>
                 <a:latin typeface="Calibri" pitchFamily="34" charset="0"/>
-                <a:ea typeface="Calibri" pitchFamily="34" charset="-122"/>
-                <a:cs typeface="Calibri" pitchFamily="34" charset="-120"/>
+                <a:cs typeface="Amiri" pitchFamily="2" charset="-78"/>
               </a:rPr>
               <a:t>P6-L07 · IGCSE Bridge</a:t>
             </a:r>
@@ -4980,8 +4913,7 @@
                   <a:srgbClr val="FFFFFF"/>
                 </a:solidFill>
                 <a:latin typeface="Calibri" pitchFamily="34" charset="0"/>
-                <a:ea typeface="Calibri" pitchFamily="34" charset="-122"/>
-                <a:cs typeface="Calibri" pitchFamily="34" charset="-120"/>
+                <a:cs typeface="Amiri" pitchFamily="2" charset="-78"/>
               </a:rPr>
               <a:t>TEACHER INSTRUCTION · 2 MIN</a:t>
             </a:r>
@@ -5019,8 +4951,7 @@
                   <a:srgbClr val="1B3B6F"/>
                 </a:solidFill>
                 <a:latin typeface="Calibri" pitchFamily="34" charset="0"/>
-                <a:ea typeface="Calibri" pitchFamily="34" charset="-122"/>
-                <a:cs typeface="Calibri" pitchFamily="34" charset="-120"/>
+                <a:cs typeface="Amiri" pitchFamily="2" charset="-78"/>
               </a:rPr>
               <a:t>TEACH · KNOW HOW YOU ARE MARKED</a:t>
             </a:r>
@@ -5058,8 +4989,7 @@
                   <a:srgbClr val="1B3B6F"/>
                 </a:solidFill>
                 <a:latin typeface="Cambria" pitchFamily="34" charset="0"/>
-                <a:ea typeface="Cambria" pitchFamily="34" charset="-122"/>
-                <a:cs typeface="Cambria" pitchFamily="34" charset="-120"/>
+                <a:cs typeface="Amiri" pitchFamily="2" charset="-78"/>
               </a:rPr>
               <a:t>The topic-conversation mark scheme: 20 marks</a:t>
             </a:r>
@@ -5096,9 +5026,8 @@
                 <a:solidFill>
                   <a:srgbClr val="8A6D1E"/>
                 </a:solidFill>
-                <a:latin typeface="Amiri" pitchFamily="34" charset="0"/>
-                <a:ea typeface="Amiri" pitchFamily="34" charset="-122"/>
-                <a:cs typeface="Amiri" pitchFamily="34" charset="-120"/>
+                <a:latin typeface="Amiri" pitchFamily="2" charset="-78"/>
+                <a:cs typeface="Amiri" pitchFamily="2" charset="-78"/>
               </a:rPr>
               <a:t>مِعْيَارُ المُحَادَثَةِ</a:t>
             </a:r>
@@ -5136,8 +5065,7 @@
                   <a:srgbClr val="8A93A0"/>
                 </a:solidFill>
                 <a:latin typeface="Calibri" pitchFamily="34" charset="0"/>
-                <a:ea typeface="Calibri" pitchFamily="34" charset="-122"/>
-                <a:cs typeface="Calibri" pitchFamily="34" charset="-120"/>
+                <a:cs typeface="Amiri" pitchFamily="2" charset="-78"/>
               </a:rPr>
               <a:t>Miftah Arabic · Progression P6 · IGCSE Bridge · P6-L07</a:t>
             </a:r>
@@ -5200,8 +5128,7 @@
                   <a:srgbClr val="FFFFFF"/>
                 </a:solidFill>
                 <a:latin typeface="Calibri" pitchFamily="34" charset="0"/>
-                <a:ea typeface="Calibri" pitchFamily="34" charset="-122"/>
-                <a:cs typeface="Calibri" pitchFamily="34" charset="-120"/>
+                <a:cs typeface="Amiri" pitchFamily="2" charset="-78"/>
               </a:rPr>
               <a:t>What the examiner looks for (website)</a:t>
             </a:r>
@@ -5239,8 +5166,7 @@
                   <a:srgbClr val="FFFFFF"/>
                 </a:solidFill>
                 <a:latin typeface="Calibri" pitchFamily="34" charset="0"/>
-                <a:ea typeface="Calibri" pitchFamily="34" charset="-122"/>
-                <a:cs typeface="Calibri" pitchFamily="34" charset="-120"/>
+                <a:cs typeface="Amiri" pitchFamily="2" charset="-78"/>
               </a:rPr>
               <a:t>Marks</a:t>
             </a:r>
@@ -5278,8 +5204,7 @@
                   <a:srgbClr val="FFFFFF"/>
                 </a:solidFill>
                 <a:latin typeface="Calibri" pitchFamily="34" charset="0"/>
-                <a:ea typeface="Calibri" pitchFamily="34" charset="-122"/>
-                <a:cs typeface="Calibri" pitchFamily="34" charset="-120"/>
+                <a:cs typeface="Amiri" pitchFamily="2" charset="-78"/>
               </a:rPr>
               <a:t>Criterion</a:t>
             </a:r>
@@ -5344,8 +5269,7 @@
                   <a:srgbClr val="5A6472"/>
                 </a:solidFill>
                 <a:latin typeface="Calibri" pitchFamily="34" charset="0"/>
-                <a:ea typeface="Calibri" pitchFamily="34" charset="-122"/>
-                <a:cs typeface="Calibri" pitchFamily="34" charset="-120"/>
+                <a:cs typeface="Amiri" pitchFamily="2" charset="-78"/>
               </a:rPr>
               <a:t>5 marks per question across three questions. · Band 5 fully develops the answer with opinion, reasons and examples. · Band 3 is an adequate answer; Band 1 is minimal.</a:t>
             </a:r>
@@ -5383,8 +5307,7 @@
                   <a:srgbClr val="5A6472"/>
                 </a:solidFill>
                 <a:latin typeface="Calibri" pitchFamily="34" charset="0"/>
-                <a:ea typeface="Calibri" pitchFamily="34" charset="-122"/>
-                <a:cs typeface="Calibri" pitchFamily="34" charset="-120"/>
+                <a:cs typeface="Amiri" pitchFamily="2" charset="-78"/>
               </a:rPr>
               <a:t>15</a:t>
             </a:r>
@@ -5422,8 +5345,7 @@
                   <a:srgbClr val="5A6472"/>
                 </a:solidFill>
                 <a:latin typeface="Calibri" pitchFamily="34" charset="0"/>
-                <a:ea typeface="Calibri" pitchFamily="34" charset="-122"/>
-                <a:cs typeface="Calibri" pitchFamily="34" charset="-120"/>
+                <a:cs typeface="Amiri" pitchFamily="2" charset="-78"/>
               </a:rPr>
               <a:t>Communication</a:t>
             </a:r>
@@ -5488,8 +5410,7 @@
                   <a:srgbClr val="FFFFFF"/>
                 </a:solidFill>
                 <a:latin typeface="Calibri" pitchFamily="34" charset="0"/>
-                <a:ea typeface="Calibri" pitchFamily="34" charset="-122"/>
-                <a:cs typeface="Calibri" pitchFamily="34" charset="-120"/>
+                <a:cs typeface="Amiri" pitchFamily="2" charset="-78"/>
               </a:rPr>
               <a:t>CORE</a:t>
             </a:r>
@@ -5554,8 +5475,7 @@
                   <a:srgbClr val="5A6472"/>
                 </a:solidFill>
                 <a:latin typeface="Calibri" pitchFamily="34" charset="0"/>
-                <a:ea typeface="Calibri" pitchFamily="34" charset="-122"/>
-                <a:cs typeface="Calibri" pitchFamily="34" charset="-120"/>
+                <a:cs typeface="Amiri" pitchFamily="2" charset="-78"/>
               </a:rPr>
               <a:t>Band 5 consistently uses complex structures. · At least two tenses, a conditional and a subjunctive across the answers. · Range is rewarded even if a vowel is occasionally imperfect.</a:t>
             </a:r>
@@ -5593,8 +5513,7 @@
                   <a:srgbClr val="5A6472"/>
                 </a:solidFill>
                 <a:latin typeface="Calibri" pitchFamily="34" charset="0"/>
-                <a:ea typeface="Calibri" pitchFamily="34" charset="-122"/>
-                <a:cs typeface="Calibri" pitchFamily="34" charset="-120"/>
+                <a:cs typeface="Amiri" pitchFamily="2" charset="-78"/>
               </a:rPr>
               <a:t>5</a:t>
             </a:r>
@@ -5632,8 +5551,7 @@
                   <a:srgbClr val="5A6472"/>
                 </a:solidFill>
                 <a:latin typeface="Calibri" pitchFamily="34" charset="0"/>
-                <a:ea typeface="Calibri" pitchFamily="34" charset="-122"/>
-                <a:cs typeface="Calibri" pitchFamily="34" charset="-120"/>
+                <a:cs typeface="Amiri" pitchFamily="2" charset="-78"/>
               </a:rPr>
               <a:t>Quality of Language</a:t>
             </a:r>
@@ -5671,8 +5589,7 @@
                   <a:srgbClr val="1B3B6F"/>
                 </a:solidFill>
                 <a:latin typeface="Calibri" pitchFamily="34" charset="0"/>
-                <a:ea typeface="Calibri" pitchFamily="34" charset="-122"/>
-                <a:cs typeface="Calibri" pitchFamily="34" charset="-120"/>
+                <a:cs typeface="Amiri" pitchFamily="2" charset="-78"/>
               </a:rPr>
               <a:t>Two sentences ≈ Band 3. Four or five developed sentences with opinion, evidence and a conditional ≈ Band 5.</a:t>
             </a:r>
@@ -5710,8 +5627,7 @@
                   <a:srgbClr val="8A93A0"/>
                 </a:solidFill>
                 <a:latin typeface="Calibri" pitchFamily="34" charset="0"/>
-                <a:ea typeface="Calibri" pitchFamily="34" charset="-122"/>
-                <a:cs typeface="Calibri" pitchFamily="34" charset="-120"/>
+                <a:cs typeface="Amiri" pitchFamily="2" charset="-78"/>
               </a:rPr>
               <a:t>11 / 20</a:t>
             </a:r>
@@ -5805,9 +5721,8 @@
                 <a:solidFill>
                   <a:srgbClr val="D4AF37"/>
                 </a:solidFill>
-                <a:latin typeface="Amiri" pitchFamily="34" charset="0"/>
-                <a:ea typeface="Amiri" pitchFamily="34" charset="-122"/>
-                <a:cs typeface="Amiri" pitchFamily="34" charset="-120"/>
+                <a:latin typeface="Amiri" pitchFamily="2" charset="-78"/>
+                <a:cs typeface="Amiri" pitchFamily="2" charset="-78"/>
               </a:rPr>
               <a:t>م</a:t>
             </a:r>
@@ -5845,8 +5760,7 @@
                   <a:srgbClr val="1B3B6F"/>
                 </a:solidFill>
                 <a:latin typeface="Cambria" pitchFamily="34" charset="0"/>
-                <a:ea typeface="Cambria" pitchFamily="34" charset="-122"/>
-                <a:cs typeface="Cambria" pitchFamily="34" charset="-120"/>
+                <a:cs typeface="Amiri" pitchFamily="2" charset="-78"/>
               </a:rPr>
               <a:t>Al Madina Online School</a:t>
             </a:r>
@@ -5884,8 +5798,7 @@
                   <a:srgbClr val="8A6D1E"/>
                 </a:solidFill>
                 <a:latin typeface="Calibri" pitchFamily="34" charset="0"/>
-                <a:ea typeface="Calibri" pitchFamily="34" charset="-122"/>
-                <a:cs typeface="Calibri" pitchFamily="34" charset="-120"/>
+                <a:cs typeface="Amiri" pitchFamily="2" charset="-78"/>
               </a:rPr>
               <a:t>ARABIC DEPARTMENT · MIFTAH ARABIC · IGCSE 0544</a:t>
             </a:r>
@@ -5950,8 +5863,7 @@
                   <a:srgbClr val="FFFFFF"/>
                 </a:solidFill>
                 <a:latin typeface="Calibri" pitchFamily="34" charset="0"/>
-                <a:ea typeface="Calibri" pitchFamily="34" charset="-122"/>
-                <a:cs typeface="Calibri" pitchFamily="34" charset="-120"/>
+                <a:cs typeface="Amiri" pitchFamily="2" charset="-78"/>
               </a:rPr>
               <a:t>P6-L07 · IGCSE Bridge</a:t>
             </a:r>
@@ -6016,8 +5928,7 @@
                   <a:srgbClr val="FFFFFF"/>
                 </a:solidFill>
                 <a:latin typeface="Calibri" pitchFamily="34" charset="0"/>
-                <a:ea typeface="Calibri" pitchFamily="34" charset="-122"/>
-                <a:cs typeface="Calibri" pitchFamily="34" charset="-120"/>
+                <a:cs typeface="Amiri" pitchFamily="2" charset="-78"/>
               </a:rPr>
               <a:t>I DO · 4 MIN</a:t>
             </a:r>
@@ -6055,8 +5966,7 @@
                   <a:srgbClr val="6B4C9A"/>
                 </a:solidFill>
                 <a:latin typeface="Calibri" pitchFamily="34" charset="0"/>
-                <a:ea typeface="Calibri" pitchFamily="34" charset="-122"/>
-                <a:cs typeface="Calibri" pitchFamily="34" charset="-120"/>
+                <a:cs typeface="Amiri" pitchFamily="2" charset="-78"/>
               </a:rPr>
               <a:t>I DO · A BAND 5 ANSWER, BUILT STEP BY STEP (WEBSITE CARD)</a:t>
             </a:r>
@@ -6094,8 +6004,7 @@
                   <a:srgbClr val="1B3B6F"/>
                 </a:solidFill>
                 <a:latin typeface="Cambria" pitchFamily="34" charset="0"/>
-                <a:ea typeface="Cambria" pitchFamily="34" charset="-122"/>
-                <a:cs typeface="Cambria" pitchFamily="34" charset="-120"/>
+                <a:cs typeface="Amiri" pitchFamily="2" charset="-78"/>
               </a:rPr>
               <a:t>Watch me build a Band 5 answer</a:t>
             </a:r>
@@ -6132,9 +6041,8 @@
                 <a:solidFill>
                   <a:srgbClr val="8A6D1E"/>
                 </a:solidFill>
-                <a:latin typeface="Amiri" pitchFamily="34" charset="0"/>
-                <a:ea typeface="Amiri" pitchFamily="34" charset="-122"/>
-                <a:cs typeface="Amiri" pitchFamily="34" charset="-120"/>
+                <a:latin typeface="Amiri" pitchFamily="2" charset="-78"/>
+                <a:cs typeface="Amiri" pitchFamily="2" charset="-78"/>
               </a:rPr>
               <a:t>إِجَابَةُ المُسْتَوَى الخَامِسِ</a:t>
             </a:r>
@@ -6172,8 +6080,7 @@
                   <a:srgbClr val="8A93A0"/>
                 </a:solidFill>
                 <a:latin typeface="Calibri" pitchFamily="34" charset="0"/>
-                <a:ea typeface="Calibri" pitchFamily="34" charset="-122"/>
-                <a:cs typeface="Calibri" pitchFamily="34" charset="-120"/>
+                <a:cs typeface="Amiri" pitchFamily="2" charset="-78"/>
               </a:rPr>
               <a:t>Miftah Arabic · Progression P6 · IGCSE Bridge · P6-L07</a:t>
             </a:r>
@@ -6247,9 +6154,8 @@
                 <a:solidFill>
                   <a:srgbClr val="1F2A37"/>
                 </a:solidFill>
-                <a:latin typeface="Amiri" pitchFamily="34" charset="0"/>
-                <a:ea typeface="Amiri" pitchFamily="34" charset="-122"/>
-                <a:cs typeface="Amiri" pitchFamily="34" charset="-120"/>
+                <a:latin typeface="Amiri" pitchFamily="2" charset="-78"/>
+                <a:cs typeface="Amiri" pitchFamily="2" charset="-78"/>
               </a:rPr>
               <a:t>يُشَارُ إِلَى أَنَّ الضَّغْطَ فِي تَصَاعُدٍ. صَحِيحٌ أَنَّ بَعْضَهُ يُحَفِّزُ، غَيْرَ أَنَّهُ إِذَا تَجَاوَزَ حَدَّهُ سَيُؤَدِّي إِلَى الاحْتِرَاقِ. لِذَا يَتَطَلَّبُ الأَمْرُ أَنْ تُوَفِّرَ المَدَارِسُ بِيئَةً أَقَلَّ ضَغْطًا.</a:t>
             </a:r>
@@ -6314,8 +6220,7 @@
                   <a:srgbClr val="5A6472"/>
                 </a:solidFill>
                 <a:latin typeface="Calibri" pitchFamily="34" charset="0"/>
-                <a:ea typeface="Calibri" pitchFamily="34" charset="-122"/>
-                <a:cs typeface="Calibri" pitchFamily="34" charset="-120"/>
+                <a:cs typeface="Amiri" pitchFamily="2" charset="-78"/>
               </a:rPr>
               <a:t>“It is reported that pressure is rising. It is true that some of it motivates; however, if it goes beyond its limit, it will lead to burnout. So it is necessary that schools provide a less stressful environment.” — evidence · concession · conditional · subjunctive.</a:t>
             </a:r>
@@ -6353,8 +6258,7 @@
                   <a:srgbClr val="8A6D1E"/>
                 </a:solidFill>
                 <a:latin typeface="Calibri" pitchFamily="34" charset="0"/>
-                <a:ea typeface="Calibri" pitchFamily="34" charset="-122"/>
-                <a:cs typeface="Calibri" pitchFamily="34" charset="-120"/>
+                <a:cs typeface="Amiri" pitchFamily="2" charset="-78"/>
               </a:rPr>
               <a:t>FIND IN THE MODEL:</a:t>
             </a:r>
@@ -6419,8 +6323,7 @@
                   <a:srgbClr val="FFFFFF"/>
                 </a:solidFill>
                 <a:latin typeface="Calibri" pitchFamily="34" charset="0"/>
-                <a:ea typeface="Calibri" pitchFamily="34" charset="-122"/>
-                <a:cs typeface="Calibri" pitchFamily="34" charset="-120"/>
+                <a:cs typeface="Amiri" pitchFamily="2" charset="-78"/>
               </a:rPr>
               <a:t>يُشَارُ إِلَى أَنَّ</a:t>
             </a:r>
@@ -6485,8 +6388,7 @@
                   <a:srgbClr val="FFFFFF"/>
                 </a:solidFill>
                 <a:latin typeface="Calibri" pitchFamily="34" charset="0"/>
-                <a:ea typeface="Calibri" pitchFamily="34" charset="-122"/>
-                <a:cs typeface="Calibri" pitchFamily="34" charset="-120"/>
+                <a:cs typeface="Amiri" pitchFamily="2" charset="-78"/>
               </a:rPr>
               <a:t>صَحِيحٌ أَنَّ … غَيْرَ أَنَّ</a:t>
             </a:r>
@@ -6551,8 +6453,7 @@
                   <a:srgbClr val="FFFFFF"/>
                 </a:solidFill>
                 <a:latin typeface="Calibri" pitchFamily="34" charset="0"/>
-                <a:ea typeface="Calibri" pitchFamily="34" charset="-122"/>
-                <a:cs typeface="Calibri" pitchFamily="34" charset="-120"/>
+                <a:cs typeface="Amiri" pitchFamily="2" charset="-78"/>
               </a:rPr>
               <a:t>إِذَا … سَيُؤَدِّي</a:t>
             </a:r>
@@ -6617,8 +6518,7 @@
                   <a:srgbClr val="FFFFFF"/>
                 </a:solidFill>
                 <a:latin typeface="Calibri" pitchFamily="34" charset="0"/>
-                <a:ea typeface="Calibri" pitchFamily="34" charset="-122"/>
-                <a:cs typeface="Calibri" pitchFamily="34" charset="-120"/>
+                <a:cs typeface="Amiri" pitchFamily="2" charset="-78"/>
               </a:rPr>
               <a:t>يَتَطَلَّبُ الأَمْرُ أَنْ</a:t>
             </a:r>
@@ -6656,8 +6556,7 @@
                   <a:srgbClr val="8A93A0"/>
                 </a:solidFill>
                 <a:latin typeface="Calibri" pitchFamily="34" charset="0"/>
-                <a:ea typeface="Calibri" pitchFamily="34" charset="-122"/>
-                <a:cs typeface="Calibri" pitchFamily="34" charset="-120"/>
+                <a:cs typeface="Amiri" pitchFamily="2" charset="-78"/>
               </a:rPr>
               <a:t>12 / 20</a:t>
             </a:r>
@@ -6751,9 +6650,8 @@
                 <a:solidFill>
                   <a:srgbClr val="D4AF37"/>
                 </a:solidFill>
-                <a:latin typeface="Amiri" pitchFamily="34" charset="0"/>
-                <a:ea typeface="Amiri" pitchFamily="34" charset="-122"/>
-                <a:cs typeface="Amiri" pitchFamily="34" charset="-120"/>
+                <a:latin typeface="Amiri" pitchFamily="2" charset="-78"/>
+                <a:cs typeface="Amiri" pitchFamily="2" charset="-78"/>
               </a:rPr>
               <a:t>م</a:t>
             </a:r>
@@ -6791,8 +6689,7 @@
                   <a:srgbClr val="1B3B6F"/>
                 </a:solidFill>
                 <a:latin typeface="Cambria" pitchFamily="34" charset="0"/>
-                <a:ea typeface="Cambria" pitchFamily="34" charset="-122"/>
-                <a:cs typeface="Cambria" pitchFamily="34" charset="-120"/>
+                <a:cs typeface="Amiri" pitchFamily="2" charset="-78"/>
               </a:rPr>
               <a:t>Al Madina Online School</a:t>
             </a:r>
@@ -6830,8 +6727,7 @@
                   <a:srgbClr val="8A6D1E"/>
                 </a:solidFill>
                 <a:latin typeface="Calibri" pitchFamily="34" charset="0"/>
-                <a:ea typeface="Calibri" pitchFamily="34" charset="-122"/>
-                <a:cs typeface="Calibri" pitchFamily="34" charset="-120"/>
+                <a:cs typeface="Amiri" pitchFamily="2" charset="-78"/>
               </a:rPr>
               <a:t>ARABIC DEPARTMENT · MIFTAH ARABIC · IGCSE 0544</a:t>
             </a:r>
@@ -6896,8 +6792,7 @@
                   <a:srgbClr val="FFFFFF"/>
                 </a:solidFill>
                 <a:latin typeface="Calibri" pitchFamily="34" charset="0"/>
-                <a:ea typeface="Calibri" pitchFamily="34" charset="-122"/>
-                <a:cs typeface="Calibri" pitchFamily="34" charset="-120"/>
+                <a:cs typeface="Amiri" pitchFamily="2" charset="-78"/>
               </a:rPr>
               <a:t>P6-L07 · IGCSE Bridge</a:t>
             </a:r>
@@ -6962,8 +6857,7 @@
                   <a:srgbClr val="FFFFFF"/>
                 </a:solidFill>
                 <a:latin typeface="Calibri" pitchFamily="34" charset="0"/>
-                <a:ea typeface="Calibri" pitchFamily="34" charset="-122"/>
-                <a:cs typeface="Calibri" pitchFamily="34" charset="-120"/>
+                <a:cs typeface="Amiri" pitchFamily="2" charset="-78"/>
               </a:rPr>
               <a:t>TEACHER INSTRUCTION · 2 MIN</a:t>
             </a:r>
@@ -7001,8 +6895,7 @@
                   <a:srgbClr val="1B3B6F"/>
                 </a:solidFill>
                 <a:latin typeface="Calibri" pitchFamily="34" charset="0"/>
-                <a:ea typeface="Calibri" pitchFamily="34" charset="-122"/>
-                <a:cs typeface="Calibri" pitchFamily="34" charset="-120"/>
+                <a:cs typeface="Amiri" pitchFamily="2" charset="-78"/>
               </a:rPr>
               <a:t>TEACH · WHEN A QUESTION SURPRISES YOU (TEACHER)</a:t>
             </a:r>
@@ -7040,8 +6933,7 @@
                   <a:srgbClr val="1B3B6F"/>
                 </a:solidFill>
                 <a:latin typeface="Cambria" pitchFamily="34" charset="0"/>
-                <a:ea typeface="Cambria" pitchFamily="34" charset="-122"/>
-                <a:cs typeface="Cambria" pitchFamily="34" charset="-120"/>
+                <a:cs typeface="Amiri" pitchFamily="2" charset="-78"/>
               </a:rPr>
               <a:t>Never go blank: pause, then develop</a:t>
             </a:r>
@@ -7078,9 +6970,8 @@
                 <a:solidFill>
                   <a:srgbClr val="8A6D1E"/>
                 </a:solidFill>
-                <a:latin typeface="Amiri" pitchFamily="34" charset="0"/>
-                <a:ea typeface="Amiri" pitchFamily="34" charset="-122"/>
-                <a:cs typeface="Amiri" pitchFamily="34" charset="-120"/>
+                <a:latin typeface="Amiri" pitchFamily="2" charset="-78"/>
+                <a:cs typeface="Amiri" pitchFamily="2" charset="-78"/>
               </a:rPr>
               <a:t>لُغَةُ التَّوَقُّفِ وَالتَّفْكِيرِ</a:t>
             </a:r>
@@ -7118,8 +7009,7 @@
                   <a:srgbClr val="8A93A0"/>
                 </a:solidFill>
                 <a:latin typeface="Calibri" pitchFamily="34" charset="0"/>
-                <a:ea typeface="Calibri" pitchFamily="34" charset="-122"/>
-                <a:cs typeface="Calibri" pitchFamily="34" charset="-120"/>
+                <a:cs typeface="Amiri" pitchFamily="2" charset="-78"/>
               </a:rPr>
               <a:t>Miftah Arabic · Progression P6 · IGCSE Bridge · P6-L07</a:t>
             </a:r>
@@ -7191,8 +7081,7 @@
                   <a:srgbClr val="1B3B6F"/>
                 </a:solidFill>
                 <a:latin typeface="Calibri" pitchFamily="34" charset="0"/>
-                <a:ea typeface="Calibri" pitchFamily="34" charset="-122"/>
-                <a:cs typeface="Calibri" pitchFamily="34" charset="-120"/>
+                <a:cs typeface="Amiri" pitchFamily="2" charset="-78"/>
               </a:rPr>
               <a:t>WHAT YOU NEED TO KNOW</a:t>
             </a:r>
@@ -7255,8 +7144,7 @@
                   <a:srgbClr val="D4AF37"/>
                 </a:solidFill>
                 <a:latin typeface="Calibri" pitchFamily="34" charset="0"/>
-                <a:ea typeface="Calibri" pitchFamily="34" charset="-122"/>
-                <a:cs typeface="Calibri" pitchFamily="34" charset="-120"/>
+                <a:cs typeface="Amiri" pitchFamily="2" charset="-78"/>
               </a:rPr>
               <a:t>1</a:t>
             </a:r>
@@ -7294,8 +7182,7 @@
                   <a:srgbClr val="1F2A37"/>
                 </a:solidFill>
                 <a:latin typeface="Calibri" pitchFamily="34" charset="0"/>
-                <a:ea typeface="Calibri" pitchFamily="34" charset="-122"/>
-                <a:cs typeface="Calibri" pitchFamily="34" charset="-120"/>
+                <a:cs typeface="Amiri" pitchFamily="2" charset="-78"/>
               </a:rPr>
               <a:t>Silence scores nothing; a natural pause phrase buys you three or four seconds.</a:t>
             </a:r>
@@ -7358,8 +7245,7 @@
                   <a:srgbClr val="D4AF37"/>
                 </a:solidFill>
                 <a:latin typeface="Calibri" pitchFamily="34" charset="0"/>
-                <a:ea typeface="Calibri" pitchFamily="34" charset="-122"/>
-                <a:cs typeface="Calibri" pitchFamily="34" charset="-120"/>
+                <a:cs typeface="Amiri" pitchFamily="2" charset="-78"/>
               </a:rPr>
               <a:t>2</a:t>
             </a:r>
@@ -7397,8 +7283,7 @@
                   <a:srgbClr val="1F2A37"/>
                 </a:solidFill>
                 <a:latin typeface="Calibri" pitchFamily="34" charset="0"/>
-                <a:ea typeface="Calibri" pitchFamily="34" charset="-122"/>
-                <a:cs typeface="Calibri" pitchFamily="34" charset="-120"/>
+                <a:cs typeface="Amiri" pitchFamily="2" charset="-78"/>
               </a:rPr>
               <a:t>Then use an EMERGENCY SENTENCE you prepared — it fits almost any topic.</a:t>
             </a:r>
@@ -7461,8 +7346,7 @@
                   <a:srgbClr val="D4AF37"/>
                 </a:solidFill>
                 <a:latin typeface="Calibri" pitchFamily="34" charset="0"/>
-                <a:ea typeface="Calibri" pitchFamily="34" charset="-122"/>
-                <a:cs typeface="Calibri" pitchFamily="34" charset="-120"/>
+                <a:cs typeface="Amiri" pitchFamily="2" charset="-78"/>
               </a:rPr>
               <a:t>3</a:t>
             </a:r>
@@ -7500,8 +7384,7 @@
                   <a:srgbClr val="1F2A37"/>
                 </a:solidFill>
                 <a:latin typeface="Calibri" pitchFamily="34" charset="0"/>
-                <a:ea typeface="Calibri" pitchFamily="34" charset="-122"/>
-                <a:cs typeface="Calibri" pitchFamily="34" charset="-120"/>
+                <a:cs typeface="Amiri" pitchFamily="2" charset="-78"/>
               </a:rPr>
               <a:t>If you make a mistake, correct it calmly (</a:t>
             </a:r>
@@ -7513,9 +7396,8 @@
                 <a:solidFill>
                   <a:srgbClr val="1F2A37"/>
                 </a:solidFill>
-                <a:latin typeface="Amiri" pitchFamily="34" charset="0"/>
-                <a:ea typeface="Amiri" pitchFamily="34" charset="-122"/>
-                <a:cs typeface="Amiri" pitchFamily="34" charset="-120"/>
+                <a:latin typeface="Amiri" pitchFamily="2" charset="-78"/>
+                <a:cs typeface="Amiri" pitchFamily="2" charset="-78"/>
               </a:rPr>
               <a:t>عَفْوًا، أَقْصِدُ</a:t>
             </a:r>
@@ -7528,8 +7410,7 @@
                   <a:srgbClr val="1F2A37"/>
                 </a:solidFill>
                 <a:latin typeface="Calibri" pitchFamily="34" charset="0"/>
-                <a:ea typeface="Calibri" pitchFamily="34" charset="-122"/>
-                <a:cs typeface="Calibri" pitchFamily="34" charset="-120"/>
+                <a:cs typeface="Amiri" pitchFamily="2" charset="-78"/>
               </a:rPr>
               <a:t> …) and carry on — recovering is rewarded.</a:t>
             </a:r>
@@ -7592,8 +7473,7 @@
                   <a:srgbClr val="D4AF37"/>
                 </a:solidFill>
                 <a:latin typeface="Calibri" pitchFamily="34" charset="0"/>
-                <a:ea typeface="Calibri" pitchFamily="34" charset="-122"/>
-                <a:cs typeface="Calibri" pitchFamily="34" charset="-120"/>
+                <a:cs typeface="Amiri" pitchFamily="2" charset="-78"/>
               </a:rPr>
               <a:t>4</a:t>
             </a:r>
@@ -7631,8 +7511,7 @@
                   <a:srgbClr val="1F2A37"/>
                 </a:solidFill>
                 <a:latin typeface="Calibri" pitchFamily="34" charset="0"/>
-                <a:ea typeface="Calibri" pitchFamily="34" charset="-122"/>
-                <a:cs typeface="Calibri" pitchFamily="34" charset="-120"/>
+                <a:cs typeface="Amiri" pitchFamily="2" charset="-78"/>
               </a:rPr>
               <a:t>Develop with a question to yourself: why? for example? what if?</a:t>
             </a:r>
@@ -7704,8 +7583,7 @@
                   <a:srgbClr val="8A6D1E"/>
                 </a:solidFill>
                 <a:latin typeface="Calibri" pitchFamily="34" charset="0"/>
-                <a:ea typeface="Calibri" pitchFamily="34" charset="-122"/>
-                <a:cs typeface="Calibri" pitchFamily="34" charset="-120"/>
+                <a:cs typeface="Amiri" pitchFamily="2" charset="-78"/>
               </a:rPr>
               <a:t>PAUSE-AND-THINK PHRASES</a:t>
             </a:r>
@@ -7742,9 +7620,8 @@
                 <a:solidFill>
                   <a:srgbClr val="1B3B6F"/>
                 </a:solidFill>
-                <a:latin typeface="Amiri" pitchFamily="34" charset="0"/>
-                <a:ea typeface="Amiri" pitchFamily="34" charset="-122"/>
-                <a:cs typeface="Amiri" pitchFamily="34" charset="-120"/>
+                <a:latin typeface="Amiri" pitchFamily="2" charset="-78"/>
+                <a:cs typeface="Amiri" pitchFamily="2" charset="-78"/>
               </a:rPr>
               <a:t>هٰذَا سُؤَالٌ مُهِمٌّ …</a:t>
             </a:r>
@@ -7782,8 +7659,7 @@
                   <a:srgbClr val="5A6472"/>
                 </a:solidFill>
                 <a:latin typeface="Calibri" pitchFamily="34" charset="0"/>
-                <a:ea typeface="Calibri" pitchFamily="34" charset="-122"/>
-                <a:cs typeface="Calibri" pitchFamily="34" charset="-120"/>
+                <a:cs typeface="Amiri" pitchFamily="2" charset="-78"/>
               </a:rPr>
               <a:t>That is an important question …</a:t>
             </a:r>
@@ -7843,9 +7719,8 @@
                 <a:solidFill>
                   <a:srgbClr val="1B3B6F"/>
                 </a:solidFill>
-                <a:latin typeface="Amiri" pitchFamily="34" charset="0"/>
-                <a:ea typeface="Amiri" pitchFamily="34" charset="-122"/>
-                <a:cs typeface="Amiri" pitchFamily="34" charset="-120"/>
+                <a:latin typeface="Amiri" pitchFamily="2" charset="-78"/>
+                <a:cs typeface="Amiri" pitchFamily="2" charset="-78"/>
               </a:rPr>
               <a:t>فِي الحَقِيقَةِ، لَمْ أُفَكِّرْ فِي ذٰلِكَ مِنْ قَبْلُ، لٰكِنْ …</a:t>
             </a:r>
@@ -7883,8 +7758,7 @@
                   <a:srgbClr val="5A6472"/>
                 </a:solidFill>
                 <a:latin typeface="Calibri" pitchFamily="34" charset="0"/>
-                <a:ea typeface="Calibri" pitchFamily="34" charset="-122"/>
-                <a:cs typeface="Calibri" pitchFamily="34" charset="-120"/>
+                <a:cs typeface="Amiri" pitchFamily="2" charset="-78"/>
               </a:rPr>
               <a:t>Actually, I hadn’t thought about that before, but …</a:t>
             </a:r>
@@ -7944,9 +7818,8 @@
                 <a:solidFill>
                   <a:srgbClr val="1B3B6F"/>
                 </a:solidFill>
-                <a:latin typeface="Amiri" pitchFamily="34" charset="0"/>
-                <a:ea typeface="Amiri" pitchFamily="34" charset="-122"/>
-                <a:cs typeface="Amiri" pitchFamily="34" charset="-120"/>
+                <a:latin typeface="Amiri" pitchFamily="2" charset="-78"/>
+                <a:cs typeface="Amiri" pitchFamily="2" charset="-78"/>
               </a:rPr>
               <a:t>مِنْ نَاحِيَةٍ … وَمِنْ نَاحِيَةٍ أُخْرَى …</a:t>
             </a:r>
@@ -7984,8 +7857,7 @@
                   <a:srgbClr val="5A6472"/>
                 </a:solidFill>
                 <a:latin typeface="Calibri" pitchFamily="34" charset="0"/>
-                <a:ea typeface="Calibri" pitchFamily="34" charset="-122"/>
-                <a:cs typeface="Calibri" pitchFamily="34" charset="-120"/>
+                <a:cs typeface="Amiri" pitchFamily="2" charset="-78"/>
               </a:rPr>
               <a:t>On one hand … on the other hand …</a:t>
             </a:r>
@@ -8023,8 +7895,7 @@
                   <a:srgbClr val="8A93A0"/>
                 </a:solidFill>
                 <a:latin typeface="Calibri" pitchFamily="34" charset="0"/>
-                <a:ea typeface="Calibri" pitchFamily="34" charset="-122"/>
-                <a:cs typeface="Calibri" pitchFamily="34" charset="-120"/>
+                <a:cs typeface="Amiri" pitchFamily="2" charset="-78"/>
               </a:rPr>
               <a:t>13 / 20</a:t>
             </a:r>
@@ -8118,9 +7989,8 @@
                 <a:solidFill>
                   <a:srgbClr val="D4AF37"/>
                 </a:solidFill>
-                <a:latin typeface="Amiri" pitchFamily="34" charset="0"/>
-                <a:ea typeface="Amiri" pitchFamily="34" charset="-122"/>
-                <a:cs typeface="Amiri" pitchFamily="34" charset="-120"/>
+                <a:latin typeface="Amiri" pitchFamily="2" charset="-78"/>
+                <a:cs typeface="Amiri" pitchFamily="2" charset="-78"/>
               </a:rPr>
               <a:t>م</a:t>
             </a:r>
@@ -8158,8 +8028,7 @@
                   <a:srgbClr val="1B3B6F"/>
                 </a:solidFill>
                 <a:latin typeface="Cambria" pitchFamily="34" charset="0"/>
-                <a:ea typeface="Cambria" pitchFamily="34" charset="-122"/>
-                <a:cs typeface="Cambria" pitchFamily="34" charset="-120"/>
+                <a:cs typeface="Amiri" pitchFamily="2" charset="-78"/>
               </a:rPr>
               <a:t>Al Madina Online School</a:t>
             </a:r>
@@ -8197,8 +8066,7 @@
                   <a:srgbClr val="8A6D1E"/>
                 </a:solidFill>
                 <a:latin typeface="Calibri" pitchFamily="34" charset="0"/>
-                <a:ea typeface="Calibri" pitchFamily="34" charset="-122"/>
-                <a:cs typeface="Calibri" pitchFamily="34" charset="-120"/>
+                <a:cs typeface="Amiri" pitchFamily="2" charset="-78"/>
               </a:rPr>
               <a:t>ARABIC DEPARTMENT · MIFTAH ARABIC · IGCSE 0544</a:t>
             </a:r>
@@ -8263,8 +8131,7 @@
                   <a:srgbClr val="FFFFFF"/>
                 </a:solidFill>
                 <a:latin typeface="Calibri" pitchFamily="34" charset="0"/>
-                <a:ea typeface="Calibri" pitchFamily="34" charset="-122"/>
-                <a:cs typeface="Calibri" pitchFamily="34" charset="-120"/>
+                <a:cs typeface="Amiri" pitchFamily="2" charset="-78"/>
               </a:rPr>
               <a:t>P6-L07 · IGCSE Bridge</a:t>
             </a:r>
@@ -8329,8 +8196,7 @@
                   <a:srgbClr val="FFFFFF"/>
                 </a:solidFill>
                 <a:latin typeface="Calibri" pitchFamily="34" charset="0"/>
-                <a:ea typeface="Calibri" pitchFamily="34" charset="-122"/>
-                <a:cs typeface="Calibri" pitchFamily="34" charset="-120"/>
+                <a:cs typeface="Amiri" pitchFamily="2" charset="-78"/>
               </a:rPr>
               <a:t>YOU DO · 15 MIN</a:t>
             </a:r>
@@ -8368,8 +8234,7 @@
                   <a:srgbClr val="1E6B52"/>
                 </a:solidFill>
                 <a:latin typeface="Calibri" pitchFamily="34" charset="0"/>
-                <a:ea typeface="Calibri" pitchFamily="34" charset="-122"/>
-                <a:cs typeface="Calibri" pitchFamily="34" charset="-120"/>
+                <a:cs typeface="Amiri" pitchFamily="2" charset="-78"/>
               </a:rPr>
               <a:t>YOU DO · THE FULL TOPIC CONVERSATION · 3 QUESTIONS (WEBSITE)</a:t>
             </a:r>
@@ -8407,8 +8272,7 @@
                   <a:srgbClr val="1B3B6F"/>
                 </a:solidFill>
                 <a:latin typeface="Cambria" pitchFamily="34" charset="0"/>
-                <a:ea typeface="Cambria" pitchFamily="34" charset="-122"/>
-                <a:cs typeface="Cambria" pitchFamily="34" charset="-120"/>
+                <a:cs typeface="Amiri" pitchFamily="2" charset="-78"/>
               </a:rPr>
               <a:t>Topic conversation — full practice</a:t>
             </a:r>
@@ -8445,9 +8309,8 @@
                 <a:solidFill>
                   <a:srgbClr val="8A6D1E"/>
                 </a:solidFill>
-                <a:latin typeface="Amiri" pitchFamily="34" charset="0"/>
-                <a:ea typeface="Amiri" pitchFamily="34" charset="-122"/>
-                <a:cs typeface="Amiri" pitchFamily="34" charset="-120"/>
+                <a:latin typeface="Amiri" pitchFamily="2" charset="-78"/>
+                <a:cs typeface="Amiri" pitchFamily="2" charset="-78"/>
               </a:rPr>
               <a:t>المُحَادَثَةُ الكَامِلَةُ</a:t>
             </a:r>
@@ -8485,8 +8348,7 @@
                   <a:srgbClr val="8A93A0"/>
                 </a:solidFill>
                 <a:latin typeface="Calibri" pitchFamily="34" charset="0"/>
-                <a:ea typeface="Calibri" pitchFamily="34" charset="-122"/>
-                <a:cs typeface="Calibri" pitchFamily="34" charset="-120"/>
+                <a:cs typeface="Amiri" pitchFamily="2" charset="-78"/>
               </a:rPr>
               <a:t>Miftah Arabic · Progression P6 · IGCSE Bridge · P6-L07</a:t>
             </a:r>
@@ -8549,8 +8411,7 @@
                   <a:srgbClr val="FFFFFF"/>
                 </a:solidFill>
                 <a:latin typeface="Calibri" pitchFamily="34" charset="0"/>
-                <a:ea typeface="Calibri" pitchFamily="34" charset="-122"/>
-                <a:cs typeface="Calibri" pitchFamily="34" charset="-120"/>
+                <a:cs typeface="Amiri" pitchFamily="2" charset="-78"/>
               </a:rPr>
               <a:t>Start like this</a:t>
             </a:r>
@@ -8588,8 +8449,7 @@
                   <a:srgbClr val="FFFFFF"/>
                 </a:solidFill>
                 <a:latin typeface="Calibri" pitchFamily="34" charset="0"/>
-                <a:ea typeface="Calibri" pitchFamily="34" charset="-122"/>
-                <a:cs typeface="Calibri" pitchFamily="34" charset="-120"/>
+                <a:cs typeface="Amiri" pitchFamily="2" charset="-78"/>
               </a:rPr>
               <a:t>Meaning</a:t>
             </a:r>
@@ -8627,8 +8487,7 @@
                   <a:srgbClr val="FFFFFF"/>
                 </a:solidFill>
                 <a:latin typeface="Calibri" pitchFamily="34" charset="0"/>
-                <a:ea typeface="Calibri" pitchFamily="34" charset="-122"/>
-                <a:cs typeface="Calibri" pitchFamily="34" charset="-120"/>
+                <a:cs typeface="Amiri" pitchFamily="2" charset="-78"/>
               </a:rPr>
               <a:t>Prompt (website)</a:t>
             </a:r>
@@ -8692,9 +8551,8 @@
                 <a:solidFill>
                   <a:srgbClr val="1B3B6F"/>
                 </a:solidFill>
-                <a:latin typeface="Amiri" pitchFamily="34" charset="0"/>
-                <a:ea typeface="Amiri" pitchFamily="34" charset="-122"/>
-                <a:cs typeface="Amiri" pitchFamily="34" charset="-120"/>
+                <a:latin typeface="Amiri" pitchFamily="2" charset="-78"/>
+                <a:cs typeface="Amiri" pitchFamily="2" charset="-78"/>
               </a:rPr>
               <a:t>فِي رَأْيِي، الضَّغْطُ الدِّرَاسِيُّ … لِأَنَّ … فَمَثَلًا …</a:t>
             </a:r>
@@ -8732,8 +8590,7 @@
                   <a:srgbClr val="5A6472"/>
                 </a:solidFill>
                 <a:latin typeface="Calibri" pitchFamily="34" charset="0"/>
-                <a:ea typeface="Calibri" pitchFamily="34" charset="-122"/>
-                <a:cs typeface="Calibri" pitchFamily="34" charset="-120"/>
+                <a:cs typeface="Amiri" pitchFamily="2" charset="-78"/>
               </a:rPr>
               <a:t>What do you think about study pressure, and how can it be dealt with? (opinion · reason · example)</a:t>
             </a:r>
@@ -8773,9 +8630,8 @@
                 <a:solidFill>
                   <a:srgbClr val="1B3B6F"/>
                 </a:solidFill>
-                <a:latin typeface="Amiri" pitchFamily="34" charset="0"/>
-                <a:ea typeface="Amiri" pitchFamily="34" charset="-122"/>
-                <a:cs typeface="Amiri" pitchFamily="34" charset="-120"/>
+                <a:latin typeface="Amiri" pitchFamily="2" charset="-78"/>
+                <a:cs typeface="Amiri" pitchFamily="2" charset="-78"/>
               </a:rPr>
               <a:t>مَا رَأْيُكَ فِي الضَّغْطِ الدِّرَاسِيِّ، وَكَيْفَ يُمْكِنُ التَّعَامُلُ مَعَهُ؟</a:t>
             </a:r>
@@ -8840,8 +8696,7 @@
                   <a:srgbClr val="FFFFFF"/>
                 </a:solidFill>
                 <a:latin typeface="Calibri" pitchFamily="34" charset="0"/>
-                <a:ea typeface="Calibri" pitchFamily="34" charset="-122"/>
-                <a:cs typeface="Calibri" pitchFamily="34" charset="-120"/>
+                <a:cs typeface="Amiri" pitchFamily="2" charset="-78"/>
               </a:rPr>
               <a:t>CORE</a:t>
             </a:r>
@@ -8905,9 +8760,8 @@
                 <a:solidFill>
                   <a:srgbClr val="1B3B6F"/>
                 </a:solidFill>
-                <a:latin typeface="Amiri" pitchFamily="34" charset="0"/>
-                <a:ea typeface="Amiri" pitchFamily="34" charset="-122"/>
-                <a:cs typeface="Amiri" pitchFamily="34" charset="-120"/>
+                <a:latin typeface="Amiri" pitchFamily="2" charset="-78"/>
+                <a:cs typeface="Amiri" pitchFamily="2" charset="-78"/>
               </a:rPr>
               <a:t>صَحِيحٌ أَنَّ التِّقْنِيَّةَ تُسَاعِدُ، غَيْرَ أَنَّ …</a:t>
             </a:r>
@@ -8945,8 +8799,7 @@
                   <a:srgbClr val="5A6472"/>
                 </a:solidFill>
                 <a:latin typeface="Calibri" pitchFamily="34" charset="0"/>
-                <a:ea typeface="Calibri" pitchFamily="34" charset="-122"/>
-                <a:cs typeface="Calibri" pitchFamily="34" charset="-120"/>
+                <a:cs typeface="Amiri" pitchFamily="2" charset="-78"/>
               </a:rPr>
               <a:t>Does technology deepen inequality or reduce it? (concede, then refute)</a:t>
             </a:r>
@@ -8983,9 +8836,8 @@
                 <a:solidFill>
                   <a:srgbClr val="1B3B6F"/>
                 </a:solidFill>
-                <a:latin typeface="Amiri" pitchFamily="34" charset="0"/>
-                <a:ea typeface="Amiri" pitchFamily="34" charset="-122"/>
-                <a:cs typeface="Amiri" pitchFamily="34" charset="-120"/>
+                <a:latin typeface="Amiri" pitchFamily="2" charset="-78"/>
+                <a:cs typeface="Amiri" pitchFamily="2" charset="-78"/>
               </a:rPr>
               <a:t>هَلْ تُعَمِّقُ التِّقْنِيَّةُ عَدَمَ المُسَاوَاةِ أَمْ تُقَلِّلُهَا؟</a:t>
             </a:r>
@@ -9049,9 +8901,8 @@
                 <a:solidFill>
                   <a:srgbClr val="1B3B6F"/>
                 </a:solidFill>
-                <a:latin typeface="Amiri" pitchFamily="34" charset="0"/>
-                <a:ea typeface="Amiri" pitchFamily="34" charset="-122"/>
-                <a:cs typeface="Amiri" pitchFamily="34" charset="-120"/>
+                <a:latin typeface="Amiri" pitchFamily="2" charset="-78"/>
+                <a:cs typeface="Amiri" pitchFamily="2" charset="-78"/>
               </a:rPr>
               <a:t>لَوْ كُنْتُ مَسْؤُولًا عَنِ البِيئَةِ، لَمَنَعْتُ …</a:t>
             </a:r>
@@ -9089,8 +8940,7 @@
                   <a:srgbClr val="5A6472"/>
                 </a:solidFill>
                 <a:latin typeface="Calibri" pitchFamily="34" charset="0"/>
-                <a:ea typeface="Calibri" pitchFamily="34" charset="-122"/>
-                <a:cs typeface="Calibri" pitchFamily="34" charset="-120"/>
+                <a:cs typeface="Amiri" pitchFamily="2" charset="-78"/>
               </a:rPr>
               <a:t>If you were in charge of the environment, what would you change first? (lau …)</a:t>
             </a:r>
@@ -9127,9 +8977,8 @@
                 <a:solidFill>
                   <a:srgbClr val="1B3B6F"/>
                 </a:solidFill>
-                <a:latin typeface="Amiri" pitchFamily="34" charset="0"/>
-                <a:ea typeface="Amiri" pitchFamily="34" charset="-122"/>
-                <a:cs typeface="Amiri" pitchFamily="34" charset="-120"/>
+                <a:latin typeface="Amiri" pitchFamily="2" charset="-78"/>
+                <a:cs typeface="Amiri" pitchFamily="2" charset="-78"/>
               </a:rPr>
               <a:t>لَوْ كُنْتَ مَسْؤُولًا عَنِ البِيئَةِ، مَاذَا كُنْتَ سَتُغَيِّرُ أَوَّلًا؟</a:t>
             </a:r>
@@ -9167,8 +9016,7 @@
                   <a:srgbClr val="1B3B6F"/>
                 </a:solidFill>
                 <a:latin typeface="Calibri" pitchFamily="34" charset="0"/>
-                <a:ea typeface="Calibri" pitchFamily="34" charset="-122"/>
-                <a:cs typeface="Calibri" pitchFamily="34" charset="-120"/>
+                <a:cs typeface="Amiri" pitchFamily="2" charset="-78"/>
               </a:rPr>
               <a:t>Marks (website): Communication 15 (5 per question) · Quality of Language 5. One minute per question.</a:t>
             </a:r>
@@ -9206,8 +9054,7 @@
                   <a:srgbClr val="8A93A0"/>
                 </a:solidFill>
                 <a:latin typeface="Calibri" pitchFamily="34" charset="0"/>
-                <a:ea typeface="Calibri" pitchFamily="34" charset="-122"/>
-                <a:cs typeface="Calibri" pitchFamily="34" charset="-120"/>
+                <a:cs typeface="Amiri" pitchFamily="2" charset="-78"/>
               </a:rPr>
               <a:t>14 / 20</a:t>
             </a:r>
@@ -9301,9 +9148,8 @@
                 <a:solidFill>
                   <a:srgbClr val="D4AF37"/>
                 </a:solidFill>
-                <a:latin typeface="Amiri" pitchFamily="34" charset="0"/>
-                <a:ea typeface="Amiri" pitchFamily="34" charset="-122"/>
-                <a:cs typeface="Amiri" pitchFamily="34" charset="-120"/>
+                <a:latin typeface="Amiri" pitchFamily="2" charset="-78"/>
+                <a:cs typeface="Amiri" pitchFamily="2" charset="-78"/>
               </a:rPr>
               <a:t>م</a:t>
             </a:r>
@@ -9341,8 +9187,7 @@
                   <a:srgbClr val="1B3B6F"/>
                 </a:solidFill>
                 <a:latin typeface="Cambria" pitchFamily="34" charset="0"/>
-                <a:ea typeface="Cambria" pitchFamily="34" charset="-122"/>
-                <a:cs typeface="Cambria" pitchFamily="34" charset="-120"/>
+                <a:cs typeface="Amiri" pitchFamily="2" charset="-78"/>
               </a:rPr>
               <a:t>Al Madina Online School</a:t>
             </a:r>
@@ -9380,8 +9225,7 @@
                   <a:srgbClr val="8A6D1E"/>
                 </a:solidFill>
                 <a:latin typeface="Calibri" pitchFamily="34" charset="0"/>
-                <a:ea typeface="Calibri" pitchFamily="34" charset="-122"/>
-                <a:cs typeface="Calibri" pitchFamily="34" charset="-120"/>
+                <a:cs typeface="Amiri" pitchFamily="2" charset="-78"/>
               </a:rPr>
               <a:t>ARABIC DEPARTMENT · MIFTAH ARABIC · IGCSE 0544</a:t>
             </a:r>
@@ -9446,8 +9290,7 @@
                   <a:srgbClr val="FFFFFF"/>
                 </a:solidFill>
                 <a:latin typeface="Calibri" pitchFamily="34" charset="0"/>
-                <a:ea typeface="Calibri" pitchFamily="34" charset="-122"/>
-                <a:cs typeface="Calibri" pitchFamily="34" charset="-120"/>
+                <a:cs typeface="Amiri" pitchFamily="2" charset="-78"/>
               </a:rPr>
               <a:t>P6-L07 · IGCSE Bridge</a:t>
             </a:r>
@@ -9512,8 +9355,7 @@
                   <a:srgbClr val="FFFFFF"/>
                 </a:solidFill>
                 <a:latin typeface="Calibri" pitchFamily="34" charset="0"/>
-                <a:ea typeface="Calibri" pitchFamily="34" charset="-122"/>
-                <a:cs typeface="Calibri" pitchFamily="34" charset="-120"/>
+                <a:cs typeface="Amiri" pitchFamily="2" charset="-78"/>
               </a:rPr>
               <a:t>YOU DO · 7 MIN</a:t>
             </a:r>
@@ -9551,8 +9393,7 @@
                   <a:srgbClr val="1E6B52"/>
                 </a:solidFill>
                 <a:latin typeface="Calibri" pitchFamily="34" charset="0"/>
-                <a:ea typeface="Calibri" pitchFamily="34" charset="-122"/>
-                <a:cs typeface="Calibri" pitchFamily="34" charset="-120"/>
+                <a:cs typeface="Amiri" pitchFamily="2" charset="-78"/>
               </a:rPr>
               <a:t>YOU DO · EXTRA QUESTION BANK · MIXED TOPICS (WEBSITE)</a:t>
             </a:r>
@@ -9590,8 +9431,7 @@
                   <a:srgbClr val="1B3B6F"/>
                 </a:solidFill>
                 <a:latin typeface="Cambria" pitchFamily="34" charset="0"/>
-                <a:ea typeface="Cambria" pitchFamily="34" charset="-122"/>
-                <a:cs typeface="Cambria" pitchFamily="34" charset="-120"/>
+                <a:cs typeface="Amiri" pitchFamily="2" charset="-78"/>
               </a:rPr>
               <a:t>Question bank: four more topics</a:t>
             </a:r>
@@ -9628,9 +9468,8 @@
                 <a:solidFill>
                   <a:srgbClr val="8A6D1E"/>
                 </a:solidFill>
-                <a:latin typeface="Amiri" pitchFamily="34" charset="0"/>
-                <a:ea typeface="Amiri" pitchFamily="34" charset="-122"/>
-                <a:cs typeface="Amiri" pitchFamily="34" charset="-120"/>
+                <a:latin typeface="Amiri" pitchFamily="2" charset="-78"/>
+                <a:cs typeface="Amiri" pitchFamily="2" charset="-78"/>
               </a:rPr>
               <a:t>بَنْكُ الأَسْئِلَةِ</a:t>
             </a:r>
@@ -9668,8 +9507,7 @@
                   <a:srgbClr val="8A93A0"/>
                 </a:solidFill>
                 <a:latin typeface="Calibri" pitchFamily="34" charset="0"/>
-                <a:ea typeface="Calibri" pitchFamily="34" charset="-122"/>
-                <a:cs typeface="Calibri" pitchFamily="34" charset="-120"/>
+                <a:cs typeface="Amiri" pitchFamily="2" charset="-78"/>
               </a:rPr>
               <a:t>Miftah Arabic · Progression P6 · IGCSE Bridge · P6-L07</a:t>
             </a:r>
@@ -9732,8 +9570,7 @@
                   <a:srgbClr val="FFFFFF"/>
                 </a:solidFill>
                 <a:latin typeface="Calibri" pitchFamily="34" charset="0"/>
-                <a:ea typeface="Calibri" pitchFamily="34" charset="-122"/>
-                <a:cs typeface="Calibri" pitchFamily="34" charset="-120"/>
+                <a:cs typeface="Amiri" pitchFamily="2" charset="-78"/>
               </a:rPr>
               <a:t>Start like this</a:t>
             </a:r>
@@ -9771,8 +9608,7 @@
                   <a:srgbClr val="FFFFFF"/>
                 </a:solidFill>
                 <a:latin typeface="Calibri" pitchFamily="34" charset="0"/>
-                <a:ea typeface="Calibri" pitchFamily="34" charset="-122"/>
-                <a:cs typeface="Calibri" pitchFamily="34" charset="-120"/>
+                <a:cs typeface="Amiri" pitchFamily="2" charset="-78"/>
               </a:rPr>
               <a:t>Meaning</a:t>
             </a:r>
@@ -9810,8 +9646,7 @@
                   <a:srgbClr val="FFFFFF"/>
                 </a:solidFill>
                 <a:latin typeface="Calibri" pitchFamily="34" charset="0"/>
-                <a:ea typeface="Calibri" pitchFamily="34" charset="-122"/>
-                <a:cs typeface="Calibri" pitchFamily="34" charset="-120"/>
+                <a:cs typeface="Amiri" pitchFamily="2" charset="-78"/>
               </a:rPr>
               <a:t>Prompt (website)</a:t>
             </a:r>
@@ -9875,9 +9710,8 @@
                 <a:solidFill>
                   <a:srgbClr val="1B3B6F"/>
                 </a:solidFill>
-                <a:latin typeface="Amiri" pitchFamily="34" charset="0"/>
-                <a:ea typeface="Amiri" pitchFamily="34" charset="-122"/>
-                <a:cs typeface="Amiri" pitchFamily="34" charset="-120"/>
+                <a:latin typeface="Amiri" pitchFamily="2" charset="-78"/>
+                <a:cs typeface="Amiri" pitchFamily="2" charset="-78"/>
               </a:rPr>
               <a:t>أُحَافِظُ عَلَى المَشْيِ يَوْمِيًّا لِأَنَّهُ …</a:t>
             </a:r>
@@ -9915,8 +9749,7 @@
                   <a:srgbClr val="5A6472"/>
                 </a:solidFill>
                 <a:latin typeface="Calibri" pitchFamily="34" charset="0"/>
-                <a:ea typeface="Calibri" pitchFamily="34" charset="-122"/>
-                <a:cs typeface="Calibri" pitchFamily="34" charset="-120"/>
+                <a:cs typeface="Amiri" pitchFamily="2" charset="-78"/>
               </a:rPr>
               <a:t>Describe a healthy habit you keep, and why. (Health)</a:t>
             </a:r>
@@ -9953,9 +9786,8 @@
                 <a:solidFill>
                   <a:srgbClr val="1B3B6F"/>
                 </a:solidFill>
-                <a:latin typeface="Amiri" pitchFamily="34" charset="0"/>
-                <a:ea typeface="Amiri" pitchFamily="34" charset="-122"/>
-                <a:cs typeface="Amiri" pitchFamily="34" charset="-120"/>
+                <a:latin typeface="Amiri" pitchFamily="2" charset="-78"/>
+                <a:cs typeface="Amiri" pitchFamily="2" charset="-78"/>
               </a:rPr>
               <a:t>صِفْ عَادَةً صِحِّيَّةً تُحَافِظُ عَلَيْهَا، وَلِمَاذَا.</a:t>
             </a:r>
@@ -10020,8 +9852,7 @@
                   <a:srgbClr val="FFFFFF"/>
                 </a:solidFill>
                 <a:latin typeface="Calibri" pitchFamily="34" charset="0"/>
-                <a:ea typeface="Calibri" pitchFamily="34" charset="-122"/>
-                <a:cs typeface="Calibri" pitchFamily="34" charset="-120"/>
+                <a:cs typeface="Amiri" pitchFamily="2" charset="-78"/>
               </a:rPr>
               <a:t>CORE</a:t>
             </a:r>
@@ -10085,9 +9916,8 @@
                 <a:solidFill>
                   <a:srgbClr val="1B3B6F"/>
                 </a:solidFill>
-                <a:latin typeface="Amiri" pitchFamily="34" charset="0"/>
-                <a:ea typeface="Amiri" pitchFamily="34" charset="-122"/>
-                <a:cs typeface="Amiri" pitchFamily="34" charset="-120"/>
+                <a:latin typeface="Amiri" pitchFamily="2" charset="-78"/>
+                <a:cs typeface="Amiri" pitchFamily="2" charset="-78"/>
               </a:rPr>
               <a:t>أَرَى أَنَّ التُّرَاثَ يَرْبِطُنَا بِتَارِيخِنَا، فَمَثَلًا …</a:t>
             </a:r>
@@ -10125,8 +9955,7 @@
                   <a:srgbClr val="5A6472"/>
                 </a:solidFill>
                 <a:latin typeface="Calibri" pitchFamily="34" charset="0"/>
-                <a:ea typeface="Calibri" pitchFamily="34" charset="-122"/>
-                <a:cs typeface="Calibri" pitchFamily="34" charset="-120"/>
+                <a:cs typeface="Amiri" pitchFamily="2" charset="-78"/>
               </a:rPr>
               <a:t>Why is preserving heritage important? (Culture)</a:t>
             </a:r>
@@ -10163,9 +9992,8 @@
                 <a:solidFill>
                   <a:srgbClr val="1B3B6F"/>
                 </a:solidFill>
-                <a:latin typeface="Amiri" pitchFamily="34" charset="0"/>
-                <a:ea typeface="Amiri" pitchFamily="34" charset="-122"/>
-                <a:cs typeface="Amiri" pitchFamily="34" charset="-120"/>
+                <a:latin typeface="Amiri" pitchFamily="2" charset="-78"/>
+                <a:cs typeface="Amiri" pitchFamily="2" charset="-78"/>
               </a:rPr>
               <a:t>مَا أَهَمِّيَّةُ الحِفَاظِ عَلَى التُّرَاثِ فِي رَأْيِكَ؟</a:t>
             </a:r>
@@ -10229,9 +10057,8 @@
                 <a:solidFill>
                   <a:srgbClr val="1B3B6F"/>
                 </a:solidFill>
-                <a:latin typeface="Amiri" pitchFamily="34" charset="0"/>
-                <a:ea typeface="Amiri" pitchFamily="34" charset="-122"/>
-                <a:cs typeface="Amiri" pitchFamily="34" charset="-120"/>
+                <a:latin typeface="Amiri" pitchFamily="2" charset="-78"/>
+                <a:cs typeface="Amiri" pitchFamily="2" charset="-78"/>
               </a:rPr>
               <a:t>كُنْتُ أَقْضِي وَقْتِي فِي …، أَمَّا الآنَ فَأَقْضِيهِ فِي …</a:t>
             </a:r>
@@ -10269,8 +10096,7 @@
                   <a:srgbClr val="5A6472"/>
                 </a:solidFill>
                 <a:latin typeface="Calibri" pitchFamily="34" charset="0"/>
-                <a:ea typeface="Calibri" pitchFamily="34" charset="-122"/>
-                <a:cs typeface="Calibri" pitchFamily="34" charset="-120"/>
+                <a:cs typeface="Amiri" pitchFamily="2" charset="-78"/>
               </a:rPr>
               <a:t>How do you spend your free time — has it changed? (past and present)</a:t>
             </a:r>
@@ -10307,9 +10133,8 @@
                 <a:solidFill>
                   <a:srgbClr val="1B3B6F"/>
                 </a:solidFill>
-                <a:latin typeface="Amiri" pitchFamily="34" charset="0"/>
-                <a:ea typeface="Amiri" pitchFamily="34" charset="-122"/>
-                <a:cs typeface="Amiri" pitchFamily="34" charset="-120"/>
+                <a:latin typeface="Amiri" pitchFamily="2" charset="-78"/>
+                <a:cs typeface="Amiri" pitchFamily="2" charset="-78"/>
               </a:rPr>
               <a:t>كَيْفَ تَقْضِي وَقْتَ فَرَاغِكَ، وَهَلْ تَغَيَّرَ ذٰلِكَ؟</a:t>
             </a:r>
@@ -10374,8 +10199,7 @@
                   <a:srgbClr val="FFFFFF"/>
                 </a:solidFill>
                 <a:latin typeface="Calibri" pitchFamily="34" charset="0"/>
-                <a:ea typeface="Calibri" pitchFamily="34" charset="-122"/>
-                <a:cs typeface="Calibri" pitchFamily="34" charset="-120"/>
+                <a:cs typeface="Amiri" pitchFamily="2" charset="-78"/>
               </a:rPr>
               <a:t>CORE</a:t>
             </a:r>
@@ -10439,9 +10263,8 @@
                 <a:solidFill>
                   <a:srgbClr val="1B3B6F"/>
                 </a:solidFill>
-                <a:latin typeface="Amiri" pitchFamily="34" charset="0"/>
-                <a:ea typeface="Amiri" pitchFamily="34" charset="-122"/>
-                <a:cs typeface="Amiri" pitchFamily="34" charset="-120"/>
+                <a:latin typeface="Amiri" pitchFamily="2" charset="-78"/>
+                <a:cs typeface="Amiri" pitchFamily="2" charset="-78"/>
               </a:rPr>
               <a:t>يَجِبُ عَلَى الشَّبَابِ أَنْ يُشَارِكُوا فِي …</a:t>
             </a:r>
@@ -10479,8 +10302,7 @@
                   <a:srgbClr val="5A6472"/>
                 </a:solidFill>
                 <a:latin typeface="Calibri" pitchFamily="34" charset="0"/>
-                <a:ea typeface="Calibri" pitchFamily="34" charset="-122"/>
-                <a:cs typeface="Calibri" pitchFamily="34" charset="-120"/>
+                <a:cs typeface="Amiri" pitchFamily="2" charset="-78"/>
               </a:rPr>
               <a:t>What is the role of young people in changing society? (subjunctive of demand)</a:t>
             </a:r>
@@ -10517,9 +10339,8 @@
                 <a:solidFill>
                   <a:srgbClr val="1B3B6F"/>
                 </a:solidFill>
-                <a:latin typeface="Amiri" pitchFamily="34" charset="0"/>
-                <a:ea typeface="Amiri" pitchFamily="34" charset="-122"/>
-                <a:cs typeface="Amiri" pitchFamily="34" charset="-120"/>
+                <a:latin typeface="Amiri" pitchFamily="2" charset="-78"/>
+                <a:cs typeface="Amiri" pitchFamily="2" charset="-78"/>
               </a:rPr>
               <a:t>مَا دَوْرُ الشَّبَابِ فِي تَغْيِيرِ المُجْتَمَعِ؟</a:t>
             </a:r>
@@ -10557,8 +10378,7 @@
                   <a:srgbClr val="1B3B6F"/>
                 </a:solidFill>
                 <a:latin typeface="Calibri" pitchFamily="34" charset="0"/>
-                <a:ea typeface="Calibri" pitchFamily="34" charset="-122"/>
-                <a:cs typeface="Calibri" pitchFamily="34" charset="-120"/>
+                <a:cs typeface="Amiri" pitchFamily="2" charset="-78"/>
               </a:rPr>
               <a:t>Practice questions — no marks recorded. Choose two; aim for four or five sentences each.</a:t>
             </a:r>
@@ -10596,8 +10416,7 @@
                   <a:srgbClr val="8A93A0"/>
                 </a:solidFill>
                 <a:latin typeface="Calibri" pitchFamily="34" charset="0"/>
-                <a:ea typeface="Calibri" pitchFamily="34" charset="-122"/>
-                <a:cs typeface="Calibri" pitchFamily="34" charset="-120"/>
+                <a:cs typeface="Amiri" pitchFamily="2" charset="-78"/>
               </a:rPr>
               <a:t>15 / 20</a:t>
             </a:r>
@@ -10691,9 +10510,8 @@
                 <a:solidFill>
                   <a:srgbClr val="D4AF37"/>
                 </a:solidFill>
-                <a:latin typeface="Amiri" pitchFamily="34" charset="0"/>
-                <a:ea typeface="Amiri" pitchFamily="34" charset="-122"/>
-                <a:cs typeface="Amiri" pitchFamily="34" charset="-120"/>
+                <a:latin typeface="Amiri" pitchFamily="2" charset="-78"/>
+                <a:cs typeface="Amiri" pitchFamily="2" charset="-78"/>
               </a:rPr>
               <a:t>م</a:t>
             </a:r>
@@ -10731,8 +10549,7 @@
                   <a:srgbClr val="1B3B6F"/>
                 </a:solidFill>
                 <a:latin typeface="Cambria" pitchFamily="34" charset="0"/>
-                <a:ea typeface="Cambria" pitchFamily="34" charset="-122"/>
-                <a:cs typeface="Cambria" pitchFamily="34" charset="-120"/>
+                <a:cs typeface="Amiri" pitchFamily="2" charset="-78"/>
               </a:rPr>
               <a:t>Al Madina Online School</a:t>
             </a:r>
@@ -10770,8 +10587,7 @@
                   <a:srgbClr val="8A6D1E"/>
                 </a:solidFill>
                 <a:latin typeface="Calibri" pitchFamily="34" charset="0"/>
-                <a:ea typeface="Calibri" pitchFamily="34" charset="-122"/>
-                <a:cs typeface="Calibri" pitchFamily="34" charset="-120"/>
+                <a:cs typeface="Amiri" pitchFamily="2" charset="-78"/>
               </a:rPr>
               <a:t>ARABIC DEPARTMENT · MIFTAH ARABIC · IGCSE 0544</a:t>
             </a:r>
@@ -10836,8 +10652,7 @@
                   <a:srgbClr val="FFFFFF"/>
                 </a:solidFill>
                 <a:latin typeface="Calibri" pitchFamily="34" charset="0"/>
-                <a:ea typeface="Calibri" pitchFamily="34" charset="-122"/>
-                <a:cs typeface="Calibri" pitchFamily="34" charset="-120"/>
+                <a:cs typeface="Amiri" pitchFamily="2" charset="-78"/>
               </a:rPr>
               <a:t>P6-L07 · IGCSE Bridge</a:t>
             </a:r>
@@ -10902,8 +10717,7 @@
                   <a:srgbClr val="FFFFFF"/>
                 </a:solidFill>
                 <a:latin typeface="Calibri" pitchFamily="34" charset="0"/>
-                <a:ea typeface="Calibri" pitchFamily="34" charset="-122"/>
-                <a:cs typeface="Calibri" pitchFamily="34" charset="-120"/>
+                <a:cs typeface="Amiri" pitchFamily="2" charset="-78"/>
               </a:rPr>
               <a:t>YOU DO · 6 MIN</a:t>
             </a:r>
@@ -10941,8 +10755,7 @@
                   <a:srgbClr val="1E6B52"/>
                 </a:solidFill>
                 <a:latin typeface="Calibri" pitchFamily="34" charset="0"/>
-                <a:ea typeface="Calibri" pitchFamily="34" charset="-122"/>
-                <a:cs typeface="Calibri" pitchFamily="34" charset="-120"/>
+                <a:cs typeface="Amiri" pitchFamily="2" charset="-78"/>
               </a:rPr>
               <a:t>YOU DO · EMERGENCY SENTENCES FOR YOUR WEAKEST TOPICS (WEBSITE)</a:t>
             </a:r>
@@ -10980,8 +10793,7 @@
                   <a:srgbClr val="1B3B6F"/>
                 </a:solidFill>
                 <a:latin typeface="Cambria" pitchFamily="34" charset="0"/>
-                <a:ea typeface="Cambria" pitchFamily="34" charset="-122"/>
-                <a:cs typeface="Cambria" pitchFamily="34" charset="-120"/>
+                <a:cs typeface="Amiri" pitchFamily="2" charset="-78"/>
               </a:rPr>
               <a:t>Emergency sentences for your weakest topics</a:t>
             </a:r>
@@ -11018,9 +10830,8 @@
                 <a:solidFill>
                   <a:srgbClr val="8A6D1E"/>
                 </a:solidFill>
-                <a:latin typeface="Amiri" pitchFamily="34" charset="0"/>
-                <a:ea typeface="Amiri" pitchFamily="34" charset="-122"/>
-                <a:cs typeface="Amiri" pitchFamily="34" charset="-120"/>
+                <a:latin typeface="Amiri" pitchFamily="2" charset="-78"/>
+                <a:cs typeface="Amiri" pitchFamily="2" charset="-78"/>
               </a:rPr>
               <a:t>جُمَلُ الطَّوَارِئِ</a:t>
             </a:r>
@@ -11058,8 +10869,7 @@
                   <a:srgbClr val="8A93A0"/>
                 </a:solidFill>
                 <a:latin typeface="Calibri" pitchFamily="34" charset="0"/>
-                <a:ea typeface="Calibri" pitchFamily="34" charset="-122"/>
-                <a:cs typeface="Calibri" pitchFamily="34" charset="-120"/>
+                <a:cs typeface="Amiri" pitchFamily="2" charset="-78"/>
               </a:rPr>
               <a:t>Miftah Arabic · Progression P6 · IGCSE Bridge · P6-L07</a:t>
             </a:r>
@@ -11122,8 +10932,7 @@
                   <a:srgbClr val="FFFFFF"/>
                 </a:solidFill>
                 <a:latin typeface="Calibri" pitchFamily="34" charset="0"/>
-                <a:ea typeface="Calibri" pitchFamily="34" charset="-122"/>
-                <a:cs typeface="Calibri" pitchFamily="34" charset="-120"/>
+                <a:cs typeface="Amiri" pitchFamily="2" charset="-78"/>
               </a:rPr>
               <a:t>Yours</a:t>
             </a:r>
@@ -11161,8 +10970,7 @@
                   <a:srgbClr val="FFFFFF"/>
                 </a:solidFill>
                 <a:latin typeface="Calibri" pitchFamily="34" charset="0"/>
-                <a:ea typeface="Calibri" pitchFamily="34" charset="-122"/>
-                <a:cs typeface="Calibri" pitchFamily="34" charset="-120"/>
+                <a:cs typeface="Amiri" pitchFamily="2" charset="-78"/>
               </a:rPr>
               <a:t>Example</a:t>
             </a:r>
@@ -11200,8 +11008,7 @@
                   <a:srgbClr val="FFFFFF"/>
                 </a:solidFill>
                 <a:latin typeface="Calibri" pitchFamily="34" charset="0"/>
-                <a:ea typeface="Calibri" pitchFamily="34" charset="-122"/>
-                <a:cs typeface="Calibri" pitchFamily="34" charset="-120"/>
+                <a:cs typeface="Amiri" pitchFamily="2" charset="-78"/>
               </a:rPr>
               <a:t>Emergency sentence</a:t>
             </a:r>
@@ -11266,8 +11073,7 @@
                   <a:srgbClr val="5A6472"/>
                 </a:solidFill>
                 <a:latin typeface="Calibri" pitchFamily="34" charset="0"/>
-                <a:ea typeface="Calibri" pitchFamily="34" charset="-122"/>
-                <a:cs typeface="Calibri" pitchFamily="34" charset="-120"/>
+                <a:cs typeface="Amiri" pitchFamily="2" charset="-78"/>
               </a:rPr>
               <a:t>______________</a:t>
             </a:r>
@@ -11304,9 +11110,8 @@
                 <a:solidFill>
                   <a:srgbClr val="1B3B6F"/>
                 </a:solidFill>
-                <a:latin typeface="Amiri" pitchFamily="34" charset="0"/>
-                <a:ea typeface="Amiri" pitchFamily="34" charset="-122"/>
-                <a:cs typeface="Amiri" pitchFamily="34" charset="-120"/>
+                <a:latin typeface="Amiri" pitchFamily="2" charset="-78"/>
+                <a:cs typeface="Amiri" pitchFamily="2" charset="-78"/>
               </a:rPr>
               <a:t>يُشَارُ إِلَى أَنَّ الشَّبَابَ يَقْضُونَ وَقْتًا طَوِيلًا أَمَامَ الشَّاشَاتِ.</a:t>
             </a:r>
@@ -11344,8 +11149,7 @@
                   <a:srgbClr val="5A6472"/>
                 </a:solidFill>
                 <a:latin typeface="Calibri" pitchFamily="34" charset="0"/>
-                <a:ea typeface="Calibri" pitchFamily="34" charset="-122"/>
-                <a:cs typeface="Calibri" pitchFamily="34" charset="-120"/>
+                <a:cs typeface="Amiri" pitchFamily="2" charset="-78"/>
               </a:rPr>
               <a:t>A general observation (yushāru ilā anna …)</a:t>
             </a:r>
@@ -11410,8 +11214,7 @@
                   <a:srgbClr val="FFFFFF"/>
                 </a:solidFill>
                 <a:latin typeface="Calibri" pitchFamily="34" charset="0"/>
-                <a:ea typeface="Calibri" pitchFamily="34" charset="-122"/>
-                <a:cs typeface="Calibri" pitchFamily="34" charset="-120"/>
+                <a:cs typeface="Amiri" pitchFamily="2" charset="-78"/>
               </a:rPr>
               <a:t>CORE</a:t>
             </a:r>
@@ -11476,8 +11279,7 @@
                   <a:srgbClr val="5A6472"/>
                 </a:solidFill>
                 <a:latin typeface="Calibri" pitchFamily="34" charset="0"/>
-                <a:ea typeface="Calibri" pitchFamily="34" charset="-122"/>
-                <a:cs typeface="Calibri" pitchFamily="34" charset="-120"/>
+                <a:cs typeface="Amiri" pitchFamily="2" charset="-78"/>
               </a:rPr>
               <a:t>______________</a:t>
             </a:r>
@@ -11514,9 +11316,8 @@
                 <a:solidFill>
                   <a:srgbClr val="1B3B6F"/>
                 </a:solidFill>
-                <a:latin typeface="Amiri" pitchFamily="34" charset="0"/>
-                <a:ea typeface="Amiri" pitchFamily="34" charset="-122"/>
-                <a:cs typeface="Amiri" pitchFamily="34" charset="-120"/>
+                <a:latin typeface="Amiri" pitchFamily="2" charset="-78"/>
+                <a:cs typeface="Amiri" pitchFamily="2" charset="-78"/>
               </a:rPr>
               <a:t>إِذَا تَعَاوَنَّا، سَنُحَقِّقُ نَتَائِجَ أَفْضَلَ.</a:t>
             </a:r>
@@ -11554,8 +11355,7 @@
                   <a:srgbClr val="5A6472"/>
                 </a:solidFill>
                 <a:latin typeface="Calibri" pitchFamily="34" charset="0"/>
-                <a:ea typeface="Calibri" pitchFamily="34" charset="-122"/>
-                <a:cs typeface="Calibri" pitchFamily="34" charset="-120"/>
+                <a:cs typeface="Amiri" pitchFamily="2" charset="-78"/>
               </a:rPr>
               <a:t>A Type 1 conditional (idhā … sa- …)</a:t>
             </a:r>
@@ -11620,8 +11420,7 @@
                   <a:srgbClr val="FFFFFF"/>
                 </a:solidFill>
                 <a:latin typeface="Calibri" pitchFamily="34" charset="0"/>
-                <a:ea typeface="Calibri" pitchFamily="34" charset="-122"/>
-                <a:cs typeface="Calibri" pitchFamily="34" charset="-120"/>
+                <a:cs typeface="Amiri" pitchFamily="2" charset="-78"/>
               </a:rPr>
               <a:t>CORE</a:t>
             </a:r>
@@ -11686,8 +11485,7 @@
                   <a:srgbClr val="5A6472"/>
                 </a:solidFill>
                 <a:latin typeface="Calibri" pitchFamily="34" charset="0"/>
-                <a:ea typeface="Calibri" pitchFamily="34" charset="-122"/>
-                <a:cs typeface="Calibri" pitchFamily="34" charset="-120"/>
+                <a:cs typeface="Amiri" pitchFamily="2" charset="-78"/>
               </a:rPr>
               <a:t>______________</a:t>
             </a:r>
@@ -11724,9 +11522,8 @@
                 <a:solidFill>
                   <a:srgbClr val="1B3B6F"/>
                 </a:solidFill>
-                <a:latin typeface="Amiri" pitchFamily="34" charset="0"/>
-                <a:ea typeface="Amiri" pitchFamily="34" charset="-122"/>
-                <a:cs typeface="Amiri" pitchFamily="34" charset="-120"/>
+                <a:latin typeface="Amiri" pitchFamily="2" charset="-78"/>
+                <a:cs typeface="Amiri" pitchFamily="2" charset="-78"/>
               </a:rPr>
               <a:t>لِذَا يَتَطَلَّبُ الأَمْرُ أَنْ نَتَحَمَّلَ مَسْؤُولِيَّتَنَا جَمِيعًا.</a:t>
             </a:r>
@@ -11764,8 +11561,7 @@
                   <a:srgbClr val="5A6472"/>
                 </a:solidFill>
                 <a:latin typeface="Calibri" pitchFamily="34" charset="0"/>
-                <a:ea typeface="Calibri" pitchFamily="34" charset="-122"/>
-                <a:cs typeface="Calibri" pitchFamily="34" charset="-120"/>
+                <a:cs typeface="Amiri" pitchFamily="2" charset="-78"/>
               </a:rPr>
               <a:t>A subjunctive conclusion (yataṭallabu an …)</a:t>
             </a:r>
@@ -11830,8 +11626,7 @@
                   <a:srgbClr val="FFFFFF"/>
                 </a:solidFill>
                 <a:latin typeface="Calibri" pitchFamily="34" charset="0"/>
-                <a:ea typeface="Calibri" pitchFamily="34" charset="-122"/>
-                <a:cs typeface="Calibri" pitchFamily="34" charset="-120"/>
+                <a:cs typeface="Amiri" pitchFamily="2" charset="-78"/>
               </a:rPr>
               <a:t>CORE</a:t>
             </a:r>
@@ -11869,8 +11664,7 @@
                   <a:srgbClr val="1B3B6F"/>
                 </a:solidFill>
                 <a:latin typeface="Calibri" pitchFamily="34" charset="0"/>
-                <a:ea typeface="Calibri" pitchFamily="34" charset="-122"/>
-                <a:cs typeface="Calibri" pitchFamily="34" charset="-120"/>
+                <a:cs typeface="Amiri" pitchFamily="2" charset="-78"/>
               </a:rPr>
               <a:t>Write three for each of your two weakest topics — they work in the mock and the real exam.</a:t>
             </a:r>
@@ -11908,8 +11702,7 @@
                   <a:srgbClr val="8A93A0"/>
                 </a:solidFill>
                 <a:latin typeface="Calibri" pitchFamily="34" charset="0"/>
-                <a:ea typeface="Calibri" pitchFamily="34" charset="-122"/>
-                <a:cs typeface="Calibri" pitchFamily="34" charset="-120"/>
+                <a:cs typeface="Amiri" pitchFamily="2" charset="-78"/>
               </a:rPr>
               <a:t>16 / 20</a:t>
             </a:r>
@@ -12003,9 +11796,8 @@
                 <a:solidFill>
                   <a:srgbClr val="D4AF37"/>
                 </a:solidFill>
-                <a:latin typeface="Amiri" pitchFamily="34" charset="0"/>
-                <a:ea typeface="Amiri" pitchFamily="34" charset="-122"/>
-                <a:cs typeface="Amiri" pitchFamily="34" charset="-120"/>
+                <a:latin typeface="Amiri" pitchFamily="2" charset="-78"/>
+                <a:cs typeface="Amiri" pitchFamily="2" charset="-78"/>
               </a:rPr>
               <a:t>م</a:t>
             </a:r>
@@ -12043,8 +11835,7 @@
                   <a:srgbClr val="1B3B6F"/>
                 </a:solidFill>
                 <a:latin typeface="Cambria" pitchFamily="34" charset="0"/>
-                <a:ea typeface="Cambria" pitchFamily="34" charset="-122"/>
-                <a:cs typeface="Cambria" pitchFamily="34" charset="-120"/>
+                <a:cs typeface="Amiri" pitchFamily="2" charset="-78"/>
               </a:rPr>
               <a:t>Al Madina Online School</a:t>
             </a:r>
@@ -12082,8 +11873,7 @@
                   <a:srgbClr val="8A6D1E"/>
                 </a:solidFill>
                 <a:latin typeface="Calibri" pitchFamily="34" charset="0"/>
-                <a:ea typeface="Calibri" pitchFamily="34" charset="-122"/>
-                <a:cs typeface="Calibri" pitchFamily="34" charset="-120"/>
+                <a:cs typeface="Amiri" pitchFamily="2" charset="-78"/>
               </a:rPr>
               <a:t>ARABIC DEPARTMENT · MIFTAH ARABIC · IGCSE 0544</a:t>
             </a:r>
@@ -12148,8 +11938,7 @@
                   <a:srgbClr val="FFFFFF"/>
                 </a:solidFill>
                 <a:latin typeface="Calibri" pitchFamily="34" charset="0"/>
-                <a:ea typeface="Calibri" pitchFamily="34" charset="-122"/>
-                <a:cs typeface="Calibri" pitchFamily="34" charset="-120"/>
+                <a:cs typeface="Amiri" pitchFamily="2" charset="-78"/>
               </a:rPr>
               <a:t>P6-L07 · IGCSE Bridge</a:t>
             </a:r>
@@ -12214,8 +12003,7 @@
                   <a:srgbClr val="FFFFFF"/>
                 </a:solidFill>
                 <a:latin typeface="Calibri" pitchFamily="34" charset="0"/>
-                <a:ea typeface="Calibri" pitchFamily="34" charset="-122"/>
-                <a:cs typeface="Calibri" pitchFamily="34" charset="-120"/>
+                <a:cs typeface="Amiri" pitchFamily="2" charset="-78"/>
               </a:rPr>
               <a:t>FEEDBACK · 2 MIN</a:t>
             </a:r>
@@ -12253,8 +12041,7 @@
                   <a:srgbClr val="8A6D1E"/>
                 </a:solidFill>
                 <a:latin typeface="Calibri" pitchFamily="34" charset="0"/>
-                <a:ea typeface="Calibri" pitchFamily="34" charset="-122"/>
-                <a:cs typeface="Calibri" pitchFamily="34" charset="-120"/>
+                <a:cs typeface="Amiri" pitchFamily="2" charset="-78"/>
               </a:rPr>
               <a:t>FEEDBACK · DEVELOPMENT EARNS THE BAND (WEBSITE)</a:t>
             </a:r>
@@ -12292,8 +12079,7 @@
                   <a:srgbClr val="1B3B6F"/>
                 </a:solidFill>
                 <a:latin typeface="Cambria" pitchFamily="34" charset="0"/>
-                <a:ea typeface="Cambria" pitchFamily="34" charset="-122"/>
-                <a:cs typeface="Cambria" pitchFamily="34" charset="-120"/>
+                <a:cs typeface="Amiri" pitchFamily="2" charset="-78"/>
               </a:rPr>
               <a:t>Topic-conversation reflection</a:t>
             </a:r>
@@ -12330,9 +12116,8 @@
                 <a:solidFill>
                   <a:srgbClr val="8A6D1E"/>
                 </a:solidFill>
-                <a:latin typeface="Amiri" pitchFamily="34" charset="0"/>
-                <a:ea typeface="Amiri" pitchFamily="34" charset="-122"/>
-                <a:cs typeface="Amiri" pitchFamily="34" charset="-120"/>
+                <a:latin typeface="Amiri" pitchFamily="2" charset="-78"/>
+                <a:cs typeface="Amiri" pitchFamily="2" charset="-78"/>
               </a:rPr>
               <a:t>التَّأَمُّلُ</a:t>
             </a:r>
@@ -12370,8 +12155,7 @@
                   <a:srgbClr val="8A93A0"/>
                 </a:solidFill>
                 <a:latin typeface="Calibri" pitchFamily="34" charset="0"/>
-                <a:ea typeface="Calibri" pitchFamily="34" charset="-122"/>
-                <a:cs typeface="Calibri" pitchFamily="34" charset="-120"/>
+                <a:cs typeface="Amiri" pitchFamily="2" charset="-78"/>
               </a:rPr>
               <a:t>Miftah Arabic · Progression P6 · IGCSE Bridge · P6-L07</a:t>
             </a:r>
@@ -12434,8 +12218,7 @@
                   <a:srgbClr val="FFFFFF"/>
                 </a:solidFill>
                 <a:latin typeface="Calibri" pitchFamily="34" charset="0"/>
-                <a:ea typeface="Calibri" pitchFamily="34" charset="-122"/>
-                <a:cs typeface="Calibri" pitchFamily="34" charset="-120"/>
+                <a:cs typeface="Amiri" pitchFamily="2" charset="-78"/>
               </a:rPr>
               <a:t>Model ending</a:t>
             </a:r>
@@ -12473,8 +12256,7 @@
                   <a:srgbClr val="FFFFFF"/>
                 </a:solidFill>
                 <a:latin typeface="Calibri" pitchFamily="34" charset="0"/>
-                <a:ea typeface="Calibri" pitchFamily="34" charset="-122"/>
-                <a:cs typeface="Calibri" pitchFamily="34" charset="-120"/>
+                <a:cs typeface="Amiri" pitchFamily="2" charset="-78"/>
               </a:rPr>
               <a:t>Meaning</a:t>
             </a:r>
@@ -12512,8 +12294,7 @@
                   <a:srgbClr val="FFFFFF"/>
                 </a:solidFill>
                 <a:latin typeface="Calibri" pitchFamily="34" charset="0"/>
-                <a:ea typeface="Calibri" pitchFamily="34" charset="-122"/>
-                <a:cs typeface="Calibri" pitchFamily="34" charset="-120"/>
+                <a:cs typeface="Amiri" pitchFamily="2" charset="-78"/>
               </a:rPr>
               <a:t>Reflection frame (website)</a:t>
             </a:r>
@@ -12578,8 +12359,7 @@
                   <a:srgbClr val="5A6472"/>
                 </a:solidFill>
                 <a:latin typeface="Calibri" pitchFamily="34" charset="0"/>
-                <a:ea typeface="Calibri" pitchFamily="34" charset="-122"/>
-                <a:cs typeface="Calibri" pitchFamily="34" charset="-120"/>
+                <a:cs typeface="Amiri" pitchFamily="2" charset="-78"/>
               </a:rPr>
               <a:t>education — study pressure</a:t>
             </a:r>
@@ -12617,8 +12397,7 @@
                   <a:srgbClr val="5A6472"/>
                 </a:solidFill>
                 <a:latin typeface="Calibri" pitchFamily="34" charset="0"/>
-                <a:ea typeface="Calibri" pitchFamily="34" charset="-122"/>
-                <a:cs typeface="Calibri" pitchFamily="34" charset="-120"/>
+                <a:cs typeface="Amiri" pitchFamily="2" charset="-78"/>
               </a:rPr>
               <a:t>the topic I develop most confidently</a:t>
             </a:r>
@@ -12656,8 +12435,7 @@
                   <a:srgbClr val="5A6472"/>
                 </a:solidFill>
                 <a:latin typeface="Calibri" pitchFamily="34" charset="0"/>
-                <a:ea typeface="Calibri" pitchFamily="34" charset="-122"/>
-                <a:cs typeface="Calibri" pitchFamily="34" charset="-120"/>
+                <a:cs typeface="Amiri" pitchFamily="2" charset="-78"/>
               </a:rPr>
               <a:t>The topic I develop most confidently is…</a:t>
             </a:r>
@@ -12722,8 +12500,7 @@
                   <a:srgbClr val="5A6472"/>
                 </a:solidFill>
                 <a:latin typeface="Calibri" pitchFamily="34" charset="0"/>
-                <a:ea typeface="Calibri" pitchFamily="34" charset="-122"/>
-                <a:cs typeface="Calibri" pitchFamily="34" charset="-120"/>
+                <a:cs typeface="Amiri" pitchFamily="2" charset="-78"/>
               </a:rPr>
               <a:t>the environment and technology</a:t>
             </a:r>
@@ -12761,8 +12538,7 @@
                   <a:srgbClr val="5A6472"/>
                 </a:solidFill>
                 <a:latin typeface="Calibri" pitchFamily="34" charset="0"/>
-                <a:ea typeface="Calibri" pitchFamily="34" charset="-122"/>
-                <a:cs typeface="Calibri" pitchFamily="34" charset="-120"/>
+                <a:cs typeface="Amiri" pitchFamily="2" charset="-78"/>
               </a:rPr>
               <a:t>my emergency sentences for the mock</a:t>
             </a:r>
@@ -12800,8 +12576,7 @@
                   <a:srgbClr val="5A6472"/>
                 </a:solidFill>
                 <a:latin typeface="Calibri" pitchFamily="34" charset="0"/>
-                <a:ea typeface="Calibri" pitchFamily="34" charset="-122"/>
-                <a:cs typeface="Calibri" pitchFamily="34" charset="-120"/>
+                <a:cs typeface="Amiri" pitchFamily="2" charset="-78"/>
               </a:rPr>
               <a:t>For the mock I will prepare emergency sentences for…</a:t>
             </a:r>
@@ -12865,9 +12640,8 @@
                 <a:solidFill>
                   <a:srgbClr val="1B3B6F"/>
                 </a:solidFill>
-                <a:latin typeface="Amiri" pitchFamily="34" charset="0"/>
-                <a:ea typeface="Amiri" pitchFamily="34" charset="-122"/>
-                <a:cs typeface="Amiri" pitchFamily="34" charset="-120"/>
+                <a:latin typeface="Amiri" pitchFamily="2" charset="-78"/>
+                <a:cs typeface="Amiri" pitchFamily="2" charset="-78"/>
               </a:rPr>
               <a:t>سَبَبٍ وَمِثَالٍ</a:t>
             </a:r>
@@ -12905,8 +12679,7 @@
                   <a:srgbClr val="5A6472"/>
                 </a:solidFill>
                 <a:latin typeface="Calibri" pitchFamily="34" charset="0"/>
-                <a:ea typeface="Calibri" pitchFamily="34" charset="-122"/>
-                <a:cs typeface="Calibri" pitchFamily="34" charset="-120"/>
+                <a:cs typeface="Amiri" pitchFamily="2" charset="-78"/>
               </a:rPr>
               <a:t>Now I can develop my answer with …</a:t>
             </a:r>
@@ -12943,9 +12716,8 @@
                 <a:solidFill>
                   <a:srgbClr val="1B3B6F"/>
                 </a:solidFill>
-                <a:latin typeface="Amiri" pitchFamily="34" charset="0"/>
-                <a:ea typeface="Amiri" pitchFamily="34" charset="-122"/>
-                <a:cs typeface="Amiri" pitchFamily="34" charset="-120"/>
+                <a:latin typeface="Amiri" pitchFamily="2" charset="-78"/>
+                <a:cs typeface="Amiri" pitchFamily="2" charset="-78"/>
               </a:rPr>
               <a:t>أَسْتَطِيعُ الآنَ أَنْ أُطَوِّرَ إِجَابَتِي بِإِضَافَةِ ______ .</a:t>
             </a:r>
@@ -12983,8 +12755,7 @@
                   <a:srgbClr val="1B3B6F"/>
                 </a:solidFill>
                 <a:latin typeface="Calibri" pitchFamily="34" charset="0"/>
-                <a:ea typeface="Calibri" pitchFamily="34" charset="-122"/>
-                <a:cs typeface="Calibri" pitchFamily="34" charset="-120"/>
+                <a:cs typeface="Amiri" pitchFamily="2" charset="-78"/>
               </a:rPr>
               <a:t>Development earns the band: opinion → reason → example → analysis.</a:t>
             </a:r>
@@ -13022,8 +12793,7 @@
                   <a:srgbClr val="8A93A0"/>
                 </a:solidFill>
                 <a:latin typeface="Calibri" pitchFamily="34" charset="0"/>
-                <a:ea typeface="Calibri" pitchFamily="34" charset="-122"/>
-                <a:cs typeface="Calibri" pitchFamily="34" charset="-120"/>
+                <a:cs typeface="Amiri" pitchFamily="2" charset="-78"/>
               </a:rPr>
               <a:t>17 / 20</a:t>
             </a:r>
@@ -13117,9 +12887,8 @@
                 <a:solidFill>
                   <a:srgbClr val="D4AF37"/>
                 </a:solidFill>
-                <a:latin typeface="Amiri" pitchFamily="34" charset="0"/>
-                <a:ea typeface="Amiri" pitchFamily="34" charset="-122"/>
-                <a:cs typeface="Amiri" pitchFamily="34" charset="-120"/>
+                <a:latin typeface="Amiri" pitchFamily="2" charset="-78"/>
+                <a:cs typeface="Amiri" pitchFamily="2" charset="-78"/>
               </a:rPr>
               <a:t>م</a:t>
             </a:r>
@@ -13157,8 +12926,7 @@
                   <a:srgbClr val="1B3B6F"/>
                 </a:solidFill>
                 <a:latin typeface="Cambria" pitchFamily="34" charset="0"/>
-                <a:ea typeface="Cambria" pitchFamily="34" charset="-122"/>
-                <a:cs typeface="Cambria" pitchFamily="34" charset="-120"/>
+                <a:cs typeface="Amiri" pitchFamily="2" charset="-78"/>
               </a:rPr>
               <a:t>Al Madina Online School</a:t>
             </a:r>
@@ -13196,8 +12964,7 @@
                   <a:srgbClr val="8A6D1E"/>
                 </a:solidFill>
                 <a:latin typeface="Calibri" pitchFamily="34" charset="0"/>
-                <a:ea typeface="Calibri" pitchFamily="34" charset="-122"/>
-                <a:cs typeface="Calibri" pitchFamily="34" charset="-120"/>
+                <a:cs typeface="Amiri" pitchFamily="2" charset="-78"/>
               </a:rPr>
               <a:t>ARABIC DEPARTMENT · MIFTAH ARABIC · IGCSE 0544</a:t>
             </a:r>
@@ -13262,8 +13029,7 @@
                   <a:srgbClr val="FFFFFF"/>
                 </a:solidFill>
                 <a:latin typeface="Calibri" pitchFamily="34" charset="0"/>
-                <a:ea typeface="Calibri" pitchFamily="34" charset="-122"/>
-                <a:cs typeface="Calibri" pitchFamily="34" charset="-120"/>
+                <a:cs typeface="Amiri" pitchFamily="2" charset="-78"/>
               </a:rPr>
               <a:t>P6-L07 · IGCSE Bridge</a:t>
             </a:r>
@@ -13328,8 +13094,7 @@
                   <a:srgbClr val="FFFFFF"/>
                 </a:solidFill>
                 <a:latin typeface="Calibri" pitchFamily="34" charset="0"/>
-                <a:ea typeface="Calibri" pitchFamily="34" charset="-122"/>
-                <a:cs typeface="Calibri" pitchFamily="34" charset="-120"/>
+                <a:cs typeface="Amiri" pitchFamily="2" charset="-78"/>
               </a:rPr>
               <a:t>FEEDBACK · 1 MIN</a:t>
             </a:r>
@@ -13367,8 +13132,7 @@
                   <a:srgbClr val="8A6D1E"/>
                 </a:solidFill>
                 <a:latin typeface="Calibri" pitchFamily="34" charset="0"/>
-                <a:ea typeface="Calibri" pitchFamily="34" charset="-122"/>
-                <a:cs typeface="Calibri" pitchFamily="34" charset="-120"/>
+                <a:cs typeface="Amiri" pitchFamily="2" charset="-78"/>
               </a:rPr>
               <a:t>FEEDBACK · SUCCESS CRITERIA</a:t>
             </a:r>
@@ -13406,8 +13170,7 @@
                   <a:srgbClr val="1B3B6F"/>
                 </a:solidFill>
                 <a:latin typeface="Cambria" pitchFamily="34" charset="0"/>
-                <a:ea typeface="Cambria" pitchFamily="34" charset="-122"/>
-                <a:cs typeface="Cambria" pitchFamily="34" charset="-120"/>
+                <a:cs typeface="Amiri" pitchFamily="2" charset="-78"/>
               </a:rPr>
               <a:t>Check your work</a:t>
             </a:r>
@@ -13444,9 +13207,8 @@
                 <a:solidFill>
                   <a:srgbClr val="8A6D1E"/>
                 </a:solidFill>
-                <a:latin typeface="Amiri" pitchFamily="34" charset="0"/>
-                <a:ea typeface="Amiri" pitchFamily="34" charset="-122"/>
-                <a:cs typeface="Amiri" pitchFamily="34" charset="-120"/>
+                <a:latin typeface="Amiri" pitchFamily="2" charset="-78"/>
+                <a:cs typeface="Amiri" pitchFamily="2" charset="-78"/>
               </a:rPr>
               <a:t>قَيِّمْ عَمَلَكَ</a:t>
             </a:r>
@@ -13484,8 +13246,7 @@
                   <a:srgbClr val="8A93A0"/>
                 </a:solidFill>
                 <a:latin typeface="Calibri" pitchFamily="34" charset="0"/>
-                <a:ea typeface="Calibri" pitchFamily="34" charset="-122"/>
-                <a:cs typeface="Calibri" pitchFamily="34" charset="-120"/>
+                <a:cs typeface="Amiri" pitchFamily="2" charset="-78"/>
               </a:rPr>
               <a:t>Miftah Arabic · Progression P6 · IGCSE Bridge · P6-L07</a:t>
             </a:r>
@@ -13582,8 +13343,7 @@
                   <a:srgbClr val="1F2A37"/>
                 </a:solidFill>
                 <a:latin typeface="Calibri" pitchFamily="34" charset="0"/>
-                <a:ea typeface="Calibri" pitchFamily="34" charset="-122"/>
-                <a:cs typeface="Calibri" pitchFamily="34" charset="-120"/>
+                <a:cs typeface="Amiri" pitchFamily="2" charset="-78"/>
               </a:rPr>
               <a:t>I extended each answer beyond a single sentence.</a:t>
             </a:r>
@@ -13648,8 +13408,7 @@
                   <a:srgbClr val="FFFFFF"/>
                 </a:solidFill>
                 <a:latin typeface="Calibri" pitchFamily="34" charset="0"/>
-                <a:ea typeface="Calibri" pitchFamily="34" charset="-122"/>
-                <a:cs typeface="Calibri" pitchFamily="34" charset="-120"/>
+                <a:cs typeface="Amiri" pitchFamily="2" charset="-78"/>
               </a:rPr>
               <a:t>CORE</a:t>
             </a:r>
@@ -13746,8 +13505,7 @@
                   <a:srgbClr val="1F2A37"/>
                 </a:solidFill>
                 <a:latin typeface="Calibri" pitchFamily="34" charset="0"/>
-                <a:ea typeface="Calibri" pitchFamily="34" charset="-122"/>
-                <a:cs typeface="Calibri" pitchFamily="34" charset="-120"/>
+                <a:cs typeface="Amiri" pitchFamily="2" charset="-78"/>
               </a:rPr>
               <a:t>I gave an opinion with a reason and an example.</a:t>
             </a:r>
@@ -13812,8 +13570,7 @@
                   <a:srgbClr val="FFFFFF"/>
                 </a:solidFill>
                 <a:latin typeface="Calibri" pitchFamily="34" charset="0"/>
-                <a:ea typeface="Calibri" pitchFamily="34" charset="-122"/>
-                <a:cs typeface="Calibri" pitchFamily="34" charset="-120"/>
+                <a:cs typeface="Amiri" pitchFamily="2" charset="-78"/>
               </a:rPr>
               <a:t>CORE</a:t>
             </a:r>
@@ -13910,8 +13667,7 @@
                   <a:srgbClr val="1F2A37"/>
                 </a:solidFill>
                 <a:latin typeface="Calibri" pitchFamily="34" charset="0"/>
-                <a:ea typeface="Calibri" pitchFamily="34" charset="-122"/>
-                <a:cs typeface="Calibri" pitchFamily="34" charset="-120"/>
+                <a:cs typeface="Amiri" pitchFamily="2" charset="-78"/>
               </a:rPr>
               <a:t>I added a concession (ṣaḥīḥun anna … ghayra anna).</a:t>
             </a:r>
@@ -13976,8 +13732,7 @@
                   <a:srgbClr val="FFFFFF"/>
                 </a:solidFill>
                 <a:latin typeface="Calibri" pitchFamily="34" charset="0"/>
-                <a:ea typeface="Calibri" pitchFamily="34" charset="-122"/>
-                <a:cs typeface="Calibri" pitchFamily="34" charset="-120"/>
+                <a:cs typeface="Amiri" pitchFamily="2" charset="-78"/>
               </a:rPr>
               <a:t>DEVELOP</a:t>
             </a:r>
@@ -14074,8 +13829,7 @@
                   <a:srgbClr val="1F2A37"/>
                 </a:solidFill>
                 <a:latin typeface="Calibri" pitchFamily="34" charset="0"/>
-                <a:ea typeface="Calibri" pitchFamily="34" charset="-122"/>
-                <a:cs typeface="Calibri" pitchFamily="34" charset="-120"/>
+                <a:cs typeface="Amiri" pitchFamily="2" charset="-78"/>
               </a:rPr>
               <a:t>I recovered from an unexpected question without going blank.</a:t>
             </a:r>
@@ -14140,8 +13894,7 @@
                   <a:srgbClr val="FFFFFF"/>
                 </a:solidFill>
                 <a:latin typeface="Calibri" pitchFamily="34" charset="0"/>
-                <a:ea typeface="Calibri" pitchFamily="34" charset="-122"/>
-                <a:cs typeface="Calibri" pitchFamily="34" charset="-120"/>
+                <a:cs typeface="Amiri" pitchFamily="2" charset="-78"/>
               </a:rPr>
               <a:t>DEVELOP</a:t>
             </a:r>
@@ -14238,8 +13991,7 @@
                   <a:srgbClr val="1F2A37"/>
                 </a:solidFill>
                 <a:latin typeface="Calibri" pitchFamily="34" charset="0"/>
-                <a:ea typeface="Calibri" pitchFamily="34" charset="-122"/>
-                <a:cs typeface="Calibri" pitchFamily="34" charset="-120"/>
+                <a:cs typeface="Amiri" pitchFamily="2" charset="-78"/>
               </a:rPr>
               <a:t>I used two tenses, a conditional and a subjunctive.</a:t>
             </a:r>
@@ -14304,8 +14056,7 @@
                   <a:srgbClr val="FFFFFF"/>
                 </a:solidFill>
                 <a:latin typeface="Calibri" pitchFamily="34" charset="0"/>
-                <a:ea typeface="Calibri" pitchFamily="34" charset="-122"/>
-                <a:cs typeface="Calibri" pitchFamily="34" charset="-120"/>
+                <a:cs typeface="Amiri" pitchFamily="2" charset="-78"/>
               </a:rPr>
               <a:t>STRETCH</a:t>
             </a:r>
@@ -14377,8 +14128,7 @@
                   <a:srgbClr val="2E8B57"/>
                 </a:solidFill>
                 <a:latin typeface="Calibri" pitchFamily="34" charset="0"/>
-                <a:ea typeface="Calibri" pitchFamily="34" charset="-122"/>
-                <a:cs typeface="Calibri" pitchFamily="34" charset="-120"/>
+                <a:cs typeface="Amiri" pitchFamily="2" charset="-78"/>
               </a:rPr>
               <a:t>WWW</a:t>
             </a:r>
@@ -14394,8 +14144,7 @@
                   <a:srgbClr val="1F2A37"/>
                 </a:solidFill>
                 <a:latin typeface="Calibri" pitchFamily="34" charset="0"/>
-                <a:ea typeface="Calibri" pitchFamily="34" charset="-122"/>
-                <a:cs typeface="Calibri" pitchFamily="34" charset="-120"/>
+                <a:cs typeface="Amiri" pitchFamily="2" charset="-78"/>
               </a:rPr>
               <a:t>What went well? One thing you did accurately.</a:t>
             </a:r>
@@ -14467,8 +14216,7 @@
                   <a:srgbClr val="C9780A"/>
                 </a:solidFill>
                 <a:latin typeface="Calibri" pitchFamily="34" charset="0"/>
-                <a:ea typeface="Calibri" pitchFamily="34" charset="-122"/>
-                <a:cs typeface="Calibri" pitchFamily="34" charset="-120"/>
+                <a:cs typeface="Amiri" pitchFamily="2" charset="-78"/>
               </a:rPr>
               <a:t>EBI</a:t>
             </a:r>
@@ -14484,8 +14232,7 @@
                   <a:srgbClr val="1F2A37"/>
                 </a:solidFill>
                 <a:latin typeface="Calibri" pitchFamily="34" charset="0"/>
-                <a:ea typeface="Calibri" pitchFamily="34" charset="-122"/>
-                <a:cs typeface="Calibri" pitchFamily="34" charset="-120"/>
+                <a:cs typeface="Amiri" pitchFamily="2" charset="-78"/>
               </a:rPr>
               <a:t>Even better if… One thing you will fix or add.</a:t>
             </a:r>
@@ -14523,8 +14270,7 @@
                   <a:srgbClr val="8A93A0"/>
                 </a:solidFill>
                 <a:latin typeface="Calibri" pitchFamily="34" charset="0"/>
-                <a:ea typeface="Calibri" pitchFamily="34" charset="-122"/>
-                <a:cs typeface="Calibri" pitchFamily="34" charset="-120"/>
+                <a:cs typeface="Amiri" pitchFamily="2" charset="-78"/>
               </a:rPr>
               <a:t>18 / 20</a:t>
             </a:r>
@@ -14618,9 +14364,8 @@
                 <a:solidFill>
                   <a:srgbClr val="D4AF37"/>
                 </a:solidFill>
-                <a:latin typeface="Amiri" pitchFamily="34" charset="0"/>
-                <a:ea typeface="Amiri" pitchFamily="34" charset="-122"/>
-                <a:cs typeface="Amiri" pitchFamily="34" charset="-120"/>
+                <a:latin typeface="Amiri" pitchFamily="2" charset="-78"/>
+                <a:cs typeface="Amiri" pitchFamily="2" charset="-78"/>
               </a:rPr>
               <a:t>م</a:t>
             </a:r>
@@ -14658,8 +14403,7 @@
                   <a:srgbClr val="1B3B6F"/>
                 </a:solidFill>
                 <a:latin typeface="Cambria" pitchFamily="34" charset="0"/>
-                <a:ea typeface="Cambria" pitchFamily="34" charset="-122"/>
-                <a:cs typeface="Cambria" pitchFamily="34" charset="-120"/>
+                <a:cs typeface="Amiri" pitchFamily="2" charset="-78"/>
               </a:rPr>
               <a:t>Al Madina Online School</a:t>
             </a:r>
@@ -14697,8 +14441,7 @@
                   <a:srgbClr val="8A6D1E"/>
                 </a:solidFill>
                 <a:latin typeface="Calibri" pitchFamily="34" charset="0"/>
-                <a:ea typeface="Calibri" pitchFamily="34" charset="-122"/>
-                <a:cs typeface="Calibri" pitchFamily="34" charset="-120"/>
+                <a:cs typeface="Amiri" pitchFamily="2" charset="-78"/>
               </a:rPr>
               <a:t>ARABIC DEPARTMENT · MIFTAH ARABIC · IGCSE 0544</a:t>
             </a:r>
@@ -14763,8 +14506,7 @@
                   <a:srgbClr val="FFFFFF"/>
                 </a:solidFill>
                 <a:latin typeface="Calibri" pitchFamily="34" charset="0"/>
-                <a:ea typeface="Calibri" pitchFamily="34" charset="-122"/>
-                <a:cs typeface="Calibri" pitchFamily="34" charset="-120"/>
+                <a:cs typeface="Amiri" pitchFamily="2" charset="-78"/>
               </a:rPr>
               <a:t>P6-L07 · IGCSE Bridge</a:t>
             </a:r>
@@ -14829,8 +14571,7 @@
                   <a:srgbClr val="FFFFFF"/>
                 </a:solidFill>
                 <a:latin typeface="Calibri" pitchFamily="34" charset="0"/>
-                <a:ea typeface="Calibri" pitchFamily="34" charset="-122"/>
-                <a:cs typeface="Calibri" pitchFamily="34" charset="-120"/>
+                <a:cs typeface="Amiri" pitchFamily="2" charset="-78"/>
               </a:rPr>
               <a:t>PREPARATION · 2 MIN</a:t>
             </a:r>
@@ -14868,8 +14609,7 @@
                   <a:srgbClr val="C45A3C"/>
                 </a:solidFill>
                 <a:latin typeface="Calibri" pitchFamily="34" charset="0"/>
-                <a:ea typeface="Calibri" pitchFamily="34" charset="-122"/>
-                <a:cs typeface="Calibri" pitchFamily="34" charset="-120"/>
+                <a:cs typeface="Amiri" pitchFamily="2" charset="-78"/>
               </a:rPr>
               <a:t>PREPARATION FOR NEXT LESSON · ABOUT 10 MINUTES</a:t>
             </a:r>
@@ -14907,8 +14647,7 @@
                   <a:srgbClr val="1B3B6F"/>
                 </a:solidFill>
                 <a:latin typeface="Cambria" pitchFamily="34" charset="0"/>
-                <a:ea typeface="Cambria" pitchFamily="34" charset="-122"/>
-                <a:cs typeface="Cambria" pitchFamily="34" charset="-120"/>
+                <a:cs typeface="Amiri" pitchFamily="2" charset="-78"/>
               </a:rPr>
               <a:t>Before P6-L08: get ready at home</a:t>
             </a:r>
@@ -14945,9 +14684,8 @@
                 <a:solidFill>
                   <a:srgbClr val="8A6D1E"/>
                 </a:solidFill>
-                <a:latin typeface="Amiri" pitchFamily="34" charset="0"/>
-                <a:ea typeface="Amiri" pitchFamily="34" charset="-122"/>
-                <a:cs typeface="Amiri" pitchFamily="34" charset="-120"/>
+                <a:latin typeface="Amiri" pitchFamily="2" charset="-78"/>
+                <a:cs typeface="Amiri" pitchFamily="2" charset="-78"/>
               </a:rPr>
               <a:t>التَّحْضِيرُ لِلدَّرْسِ القَادِمِ</a:t>
             </a:r>
@@ -14985,8 +14723,7 @@
                   <a:srgbClr val="8A93A0"/>
                 </a:solidFill>
                 <a:latin typeface="Calibri" pitchFamily="34" charset="0"/>
-                <a:ea typeface="Calibri" pitchFamily="34" charset="-122"/>
-                <a:cs typeface="Calibri" pitchFamily="34" charset="-120"/>
+                <a:cs typeface="Amiri" pitchFamily="2" charset="-78"/>
               </a:rPr>
               <a:t>Miftah Arabic · Progression P6 · IGCSE Bridge · P6-L07</a:t>
             </a:r>
@@ -15107,8 +14844,7 @@
                   <a:srgbClr val="C45A3C"/>
                 </a:solidFill>
                 <a:latin typeface="Calibri" pitchFamily="34" charset="0"/>
-                <a:ea typeface="Calibri" pitchFamily="34" charset="-122"/>
-                <a:cs typeface="Calibri" pitchFamily="34" charset="-120"/>
+                <a:cs typeface="Amiri" pitchFamily="2" charset="-78"/>
               </a:rPr>
               <a:t>LEARN THESE 5 WORDS</a:t>
             </a:r>
@@ -15124,8 +14860,7 @@
                   <a:srgbClr val="5A6472"/>
                 </a:solidFill>
                 <a:latin typeface="Calibri" pitchFamily="34" charset="0"/>
-                <a:ea typeface="Calibri" pitchFamily="34" charset="-122"/>
-                <a:cs typeface="Calibri" pitchFamily="34" charset="-120"/>
+                <a:cs typeface="Amiri" pitchFamily="2" charset="-78"/>
               </a:rPr>
               <a:t>for P6-L08 · Mock Examination — Paper 1 Listening (Full Exam Conditions)</a:t>
             </a:r>
@@ -15162,9 +14897,8 @@
                 <a:solidFill>
                   <a:srgbClr val="1B3B6F"/>
                 </a:solidFill>
-                <a:latin typeface="Amiri" pitchFamily="34" charset="0"/>
-                <a:ea typeface="Amiri" pitchFamily="34" charset="-122"/>
-                <a:cs typeface="Amiri" pitchFamily="34" charset="-120"/>
+                <a:latin typeface="Amiri" pitchFamily="2" charset="-78"/>
+                <a:cs typeface="Amiri" pitchFamily="2" charset="-78"/>
               </a:rPr>
               <a:t>اسْتِرَاتِيجِيَّاتُ الاسْتِمَاعِ</a:t>
             </a:r>
@@ -15202,8 +14936,7 @@
                   <a:srgbClr val="1F2A37"/>
                 </a:solidFill>
                 <a:latin typeface="Calibri" pitchFamily="34" charset="0"/>
-                <a:ea typeface="Calibri" pitchFamily="34" charset="-122"/>
-                <a:cs typeface="Calibri" pitchFamily="34" charset="-120"/>
+                <a:cs typeface="Amiri" pitchFamily="2" charset="-78"/>
               </a:rPr>
               <a:t>listening strategies</a:t>
             </a:r>
@@ -15216,8 +14949,7 @@
                   <a:srgbClr val="5A6472"/>
                 </a:solidFill>
                 <a:latin typeface="Calibri" pitchFamily="34" charset="0"/>
-                <a:ea typeface="Calibri" pitchFamily="34" charset="-122"/>
-                <a:cs typeface="Calibri" pitchFamily="34" charset="-120"/>
+                <a:cs typeface="Amiri" pitchFamily="2" charset="-78"/>
               </a:rPr>
               <a:t>  —</a:t>
             </a:r>
@@ -15254,9 +14986,8 @@
                 <a:solidFill>
                   <a:srgbClr val="1B3B6F"/>
                 </a:solidFill>
-                <a:latin typeface="Amiri" pitchFamily="34" charset="0"/>
-                <a:ea typeface="Amiri" pitchFamily="34" charset="-122"/>
-                <a:cs typeface="Amiri" pitchFamily="34" charset="-120"/>
+                <a:latin typeface="Amiri" pitchFamily="2" charset="-78"/>
+                <a:cs typeface="Amiri" pitchFamily="2" charset="-78"/>
               </a:rPr>
               <a:t>قِرَاءَةُ الأَسْئِلَةِ مُسْبَقًا</a:t>
             </a:r>
@@ -15294,8 +15025,7 @@
                   <a:srgbClr val="1F2A37"/>
                 </a:solidFill>
                 <a:latin typeface="Calibri" pitchFamily="34" charset="0"/>
-                <a:ea typeface="Calibri" pitchFamily="34" charset="-122"/>
-                <a:cs typeface="Calibri" pitchFamily="34" charset="-120"/>
+                <a:cs typeface="Amiri" pitchFamily="2" charset="-78"/>
               </a:rPr>
               <a:t>reading the questions in advance</a:t>
             </a:r>
@@ -15308,8 +15038,7 @@
                   <a:srgbClr val="5A6472"/>
                 </a:solidFill>
                 <a:latin typeface="Calibri" pitchFamily="34" charset="0"/>
-                <a:ea typeface="Calibri" pitchFamily="34" charset="-122"/>
-                <a:cs typeface="Calibri" pitchFamily="34" charset="-120"/>
+                <a:cs typeface="Amiri" pitchFamily="2" charset="-78"/>
               </a:rPr>
               <a:t>  —</a:t>
             </a:r>
@@ -15346,9 +15075,8 @@
                 <a:solidFill>
                   <a:srgbClr val="1B3B6F"/>
                 </a:solidFill>
-                <a:latin typeface="Amiri" pitchFamily="34" charset="0"/>
-                <a:ea typeface="Amiri" pitchFamily="34" charset="-122"/>
-                <a:cs typeface="Amiri" pitchFamily="34" charset="-120"/>
+                <a:latin typeface="Amiri" pitchFamily="2" charset="-78"/>
+                <a:cs typeface="Amiri" pitchFamily="2" charset="-78"/>
               </a:rPr>
               <a:t>التَّنَبُّؤُ بِالمُحْتَوَى</a:t>
             </a:r>
@@ -15386,8 +15114,7 @@
                   <a:srgbClr val="1F2A37"/>
                 </a:solidFill>
                 <a:latin typeface="Calibri" pitchFamily="34" charset="0"/>
-                <a:ea typeface="Calibri" pitchFamily="34" charset="-122"/>
-                <a:cs typeface="Calibri" pitchFamily="34" charset="-120"/>
+                <a:cs typeface="Amiri" pitchFamily="2" charset="-78"/>
               </a:rPr>
               <a:t>predicting the content</a:t>
             </a:r>
@@ -15400,8 +15127,7 @@
                   <a:srgbClr val="5A6472"/>
                 </a:solidFill>
                 <a:latin typeface="Calibri" pitchFamily="34" charset="0"/>
-                <a:ea typeface="Calibri" pitchFamily="34" charset="-122"/>
-                <a:cs typeface="Calibri" pitchFamily="34" charset="-120"/>
+                <a:cs typeface="Amiri" pitchFamily="2" charset="-78"/>
               </a:rPr>
               <a:t>  —</a:t>
             </a:r>
@@ -15438,9 +15164,8 @@
                 <a:solidFill>
                   <a:srgbClr val="1B3B6F"/>
                 </a:solidFill>
-                <a:latin typeface="Amiri" pitchFamily="34" charset="0"/>
-                <a:ea typeface="Amiri" pitchFamily="34" charset="-122"/>
-                <a:cs typeface="Amiri" pitchFamily="34" charset="-120"/>
+                <a:latin typeface="Amiri" pitchFamily="2" charset="-78"/>
+                <a:cs typeface="Amiri" pitchFamily="2" charset="-78"/>
               </a:rPr>
               <a:t>مُشَتِّتَاتُ الاسْتِمَاعِ</a:t>
             </a:r>
@@ -15478,8 +15203,7 @@
                   <a:srgbClr val="1F2A37"/>
                 </a:solidFill>
                 <a:latin typeface="Calibri" pitchFamily="34" charset="0"/>
-                <a:ea typeface="Calibri" pitchFamily="34" charset="-122"/>
-                <a:cs typeface="Calibri" pitchFamily="34" charset="-120"/>
+                <a:cs typeface="Amiri" pitchFamily="2" charset="-78"/>
               </a:rPr>
               <a:t>listening distractors</a:t>
             </a:r>
@@ -15492,8 +15216,7 @@
                   <a:srgbClr val="5A6472"/>
                 </a:solidFill>
                 <a:latin typeface="Calibri" pitchFamily="34" charset="0"/>
-                <a:ea typeface="Calibri" pitchFamily="34" charset="-122"/>
-                <a:cs typeface="Calibri" pitchFamily="34" charset="-120"/>
+                <a:cs typeface="Amiri" pitchFamily="2" charset="-78"/>
               </a:rPr>
               <a:t>  sg. مُشَتِّتٌ</a:t>
             </a:r>
@@ -15530,9 +15253,8 @@
                 <a:solidFill>
                   <a:srgbClr val="1B3B6F"/>
                 </a:solidFill>
-                <a:latin typeface="Amiri" pitchFamily="34" charset="0"/>
-                <a:ea typeface="Amiri" pitchFamily="34" charset="-122"/>
-                <a:cs typeface="Amiri" pitchFamily="34" charset="-120"/>
+                <a:latin typeface="Amiri" pitchFamily="2" charset="-78"/>
+                <a:cs typeface="Amiri" pitchFamily="2" charset="-78"/>
               </a:rPr>
               <a:t>التَّحَقُّقُ فِي الاسْتِمَاعِ الثَّانِي</a:t>
             </a:r>
@@ -15570,8 +15292,7 @@
                   <a:srgbClr val="1F2A37"/>
                 </a:solidFill>
                 <a:latin typeface="Calibri" pitchFamily="34" charset="0"/>
-                <a:ea typeface="Calibri" pitchFamily="34" charset="-122"/>
-                <a:cs typeface="Calibri" pitchFamily="34" charset="-120"/>
+                <a:cs typeface="Amiri" pitchFamily="2" charset="-78"/>
               </a:rPr>
               <a:t>verifying on the second listen</a:t>
             </a:r>
@@ -15584,8 +15305,7 @@
                   <a:srgbClr val="5A6472"/>
                 </a:solidFill>
                 <a:latin typeface="Calibri" pitchFamily="34" charset="0"/>
-                <a:ea typeface="Calibri" pitchFamily="34" charset="-122"/>
-                <a:cs typeface="Calibri" pitchFamily="34" charset="-120"/>
+                <a:cs typeface="Amiri" pitchFamily="2" charset="-78"/>
               </a:rPr>
               <a:t>  —</a:t>
             </a:r>
@@ -15623,8 +15343,7 @@
                   <a:srgbClr val="C45A3C"/>
                 </a:solidFill>
                 <a:latin typeface="Calibri" pitchFamily="34" charset="0"/>
-                <a:ea typeface="Calibri" pitchFamily="34" charset="-122"/>
-                <a:cs typeface="Calibri" pitchFamily="34" charset="-120"/>
+                <a:cs typeface="Amiri" pitchFamily="2" charset="-78"/>
               </a:rPr>
               <a:t>AND ANSWER ONE QUESTION</a:t>
             </a:r>
@@ -15662,8 +15381,7 @@
                   <a:srgbClr val="1F2A37"/>
                 </a:solidFill>
                 <a:latin typeface="Calibri" pitchFamily="34" charset="0"/>
-                <a:ea typeface="Calibri" pitchFamily="34" charset="-122"/>
-                <a:cs typeface="Calibri" pitchFamily="34" charset="-120"/>
+                <a:cs typeface="Amiri" pitchFamily="2" charset="-78"/>
               </a:rPr>
               <a:t>What will you do in the two minutes before each listening text?</a:t>
             </a:r>
@@ -15703,9 +15421,8 @@
                 <a:solidFill>
                   <a:srgbClr val="1B3B6F"/>
                 </a:solidFill>
-                <a:latin typeface="Amiri" pitchFamily="34" charset="0"/>
-                <a:ea typeface="Amiri" pitchFamily="34" charset="-122"/>
-                <a:cs typeface="Amiri" pitchFamily="34" charset="-120"/>
+                <a:latin typeface="Amiri" pitchFamily="2" charset="-78"/>
+                <a:cs typeface="Amiri" pitchFamily="2" charset="-78"/>
               </a:rPr>
               <a:t>سَأَقْرَأُ ______ مُسْبَقًا، ثُمَّ سَأُرَكِّزُ عَلَى ______ .</a:t>
             </a:r>
@@ -15743,8 +15460,7 @@
                   <a:srgbClr val="1B3B6F"/>
                 </a:solidFill>
                 <a:latin typeface="Calibri" pitchFamily="34" charset="0"/>
-                <a:ea typeface="Calibri" pitchFamily="34" charset="-122"/>
-                <a:cs typeface="Calibri" pitchFamily="34" charset="-120"/>
+                <a:cs typeface="Amiri" pitchFamily="2" charset="-78"/>
               </a:rPr>
               <a:t>HOMEWORK — CHOOSE YOUR ROUTE</a:t>
             </a:r>
@@ -15843,8 +15559,7 @@
                   <a:srgbClr val="FFFFFF"/>
                 </a:solidFill>
                 <a:latin typeface="Calibri" pitchFamily="34" charset="0"/>
-                <a:ea typeface="Calibri" pitchFamily="34" charset="-122"/>
-                <a:cs typeface="Calibri" pitchFamily="34" charset="-120"/>
+                <a:cs typeface="Amiri" pitchFamily="2" charset="-78"/>
               </a:rPr>
               <a:t>CORE</a:t>
             </a:r>
@@ -15882,8 +15597,7 @@
                   <a:srgbClr val="1F2A37"/>
                 </a:solidFill>
                 <a:latin typeface="Calibri" pitchFamily="34" charset="0"/>
-                <a:ea typeface="Calibri" pitchFamily="34" charset="-122"/>
-                <a:cs typeface="Calibri" pitchFamily="34" charset="-120"/>
+                <a:cs typeface="Amiri" pitchFamily="2" charset="-78"/>
               </a:rPr>
               <a:t>Record question 1 with opinion + reason + example; revise the five listening words.</a:t>
             </a:r>
@@ -15982,8 +15696,7 @@
                   <a:srgbClr val="FFFFFF"/>
                 </a:solidFill>
                 <a:latin typeface="Calibri" pitchFamily="34" charset="0"/>
-                <a:ea typeface="Calibri" pitchFamily="34" charset="-122"/>
-                <a:cs typeface="Calibri" pitchFamily="34" charset="-120"/>
+                <a:cs typeface="Amiri" pitchFamily="2" charset="-78"/>
               </a:rPr>
               <a:t>DEVELOP</a:t>
             </a:r>
@@ -16021,8 +15734,7 @@
                   <a:srgbClr val="1F2A37"/>
                 </a:solidFill>
                 <a:latin typeface="Calibri" pitchFamily="34" charset="0"/>
-                <a:ea typeface="Calibri" pitchFamily="34" charset="-122"/>
-                <a:cs typeface="Calibri" pitchFamily="34" charset="-120"/>
+                <a:cs typeface="Amiri" pitchFamily="2" charset="-78"/>
               </a:rPr>
               <a:t>Record all three questions with a concession in each; revise the five listening words.</a:t>
             </a:r>
@@ -16121,8 +15833,7 @@
                   <a:srgbClr val="FFFFFF"/>
                 </a:solidFill>
                 <a:latin typeface="Calibri" pitchFamily="34" charset="0"/>
-                <a:ea typeface="Calibri" pitchFamily="34" charset="-122"/>
-                <a:cs typeface="Calibri" pitchFamily="34" charset="-120"/>
+                <a:cs typeface="Amiri" pitchFamily="2" charset="-78"/>
               </a:rPr>
               <a:t>STRETCH</a:t>
             </a:r>
@@ -16160,8 +15871,7 @@
                   <a:srgbClr val="1F2A37"/>
                 </a:solidFill>
                 <a:latin typeface="Calibri" pitchFamily="34" charset="0"/>
-                <a:ea typeface="Calibri" pitchFamily="34" charset="-122"/>
-                <a:cs typeface="Calibri" pitchFamily="34" charset="-120"/>
+                <a:cs typeface="Amiri" pitchFamily="2" charset="-78"/>
               </a:rPr>
               <a:t>Record two question-bank answers unprepared, one minute each; revise the five listening words.</a:t>
             </a:r>
@@ -16199,8 +15909,7 @@
                   <a:srgbClr val="8A93A0"/>
                 </a:solidFill>
                 <a:latin typeface="Calibri" pitchFamily="34" charset="0"/>
-                <a:ea typeface="Calibri" pitchFamily="34" charset="-122"/>
-                <a:cs typeface="Calibri" pitchFamily="34" charset="-120"/>
+                <a:cs typeface="Amiri" pitchFamily="2" charset="-78"/>
               </a:rPr>
               <a:t>19 / 20</a:t>
             </a:r>
@@ -16294,9 +16003,8 @@
                 <a:solidFill>
                   <a:srgbClr val="D4AF37"/>
                 </a:solidFill>
-                <a:latin typeface="Amiri" pitchFamily="34" charset="0"/>
-                <a:ea typeface="Amiri" pitchFamily="34" charset="-122"/>
-                <a:cs typeface="Amiri" pitchFamily="34" charset="-120"/>
+                <a:latin typeface="Amiri" pitchFamily="2" charset="-78"/>
+                <a:cs typeface="Amiri" pitchFamily="2" charset="-78"/>
               </a:rPr>
               <a:t>م</a:t>
             </a:r>
@@ -16334,8 +16042,7 @@
                   <a:srgbClr val="1B3B6F"/>
                 </a:solidFill>
                 <a:latin typeface="Cambria" pitchFamily="34" charset="0"/>
-                <a:ea typeface="Cambria" pitchFamily="34" charset="-122"/>
-                <a:cs typeface="Cambria" pitchFamily="34" charset="-120"/>
+                <a:cs typeface="Amiri" pitchFamily="2" charset="-78"/>
               </a:rPr>
               <a:t>Al Madina Online School</a:t>
             </a:r>
@@ -16373,8 +16080,7 @@
                   <a:srgbClr val="8A6D1E"/>
                 </a:solidFill>
                 <a:latin typeface="Calibri" pitchFamily="34" charset="0"/>
-                <a:ea typeface="Calibri" pitchFamily="34" charset="-122"/>
-                <a:cs typeface="Calibri" pitchFamily="34" charset="-120"/>
+                <a:cs typeface="Amiri" pitchFamily="2" charset="-78"/>
               </a:rPr>
               <a:t>ARABIC DEPARTMENT · MIFTAH ARABIC · IGCSE 0544</a:t>
             </a:r>
@@ -16439,8 +16145,7 @@
                   <a:srgbClr val="FFFFFF"/>
                 </a:solidFill>
                 <a:latin typeface="Calibri" pitchFamily="34" charset="0"/>
-                <a:ea typeface="Calibri" pitchFamily="34" charset="-122"/>
-                <a:cs typeface="Calibri" pitchFamily="34" charset="-120"/>
+                <a:cs typeface="Amiri" pitchFamily="2" charset="-78"/>
               </a:rPr>
               <a:t>P6-L07 · IGCSE Bridge</a:t>
             </a:r>
@@ -16505,8 +16210,7 @@
                   <a:srgbClr val="FFFFFF"/>
                 </a:solidFill>
                 <a:latin typeface="Calibri" pitchFamily="34" charset="0"/>
-                <a:ea typeface="Calibri" pitchFamily="34" charset="-122"/>
-                <a:cs typeface="Calibri" pitchFamily="34" charset="-120"/>
+                <a:cs typeface="Amiri" pitchFamily="2" charset="-78"/>
               </a:rPr>
               <a:t>WELCOME · 1 MIN</a:t>
             </a:r>
@@ -16544,8 +16248,7 @@
                   <a:srgbClr val="5A6472"/>
                 </a:solidFill>
                 <a:latin typeface="Calibri" pitchFamily="34" charset="0"/>
-                <a:ea typeface="Calibri" pitchFamily="34" charset="-122"/>
-                <a:cs typeface="Calibri" pitchFamily="34" charset="-120"/>
+                <a:cs typeface="Amiri" pitchFamily="2" charset="-78"/>
               </a:rPr>
               <a:t>BEFORE WE BEGIN</a:t>
             </a:r>
@@ -16583,8 +16286,7 @@
                   <a:srgbClr val="1B3B6F"/>
                 </a:solidFill>
                 <a:latin typeface="Cambria" pitchFamily="34" charset="0"/>
-                <a:ea typeface="Cambria" pitchFamily="34" charset="-122"/>
-                <a:cs typeface="Cambria" pitchFamily="34" charset="-120"/>
+                <a:cs typeface="Amiri" pitchFamily="2" charset="-78"/>
               </a:rPr>
               <a:t>Our online classroom</a:t>
             </a:r>
@@ -16621,9 +16323,8 @@
                 <a:solidFill>
                   <a:srgbClr val="8A6D1E"/>
                 </a:solidFill>
-                <a:latin typeface="Amiri" pitchFamily="34" charset="0"/>
-                <a:ea typeface="Amiri" pitchFamily="34" charset="-122"/>
-                <a:cs typeface="Amiri" pitchFamily="34" charset="-120"/>
+                <a:latin typeface="Amiri" pitchFamily="2" charset="-78"/>
+                <a:cs typeface="Amiri" pitchFamily="2" charset="-78"/>
               </a:rPr>
               <a:t>آدَابُ الصَّفِّ</a:t>
             </a:r>
@@ -16661,8 +16362,7 @@
                   <a:srgbClr val="8A93A0"/>
                 </a:solidFill>
                 <a:latin typeface="Calibri" pitchFamily="34" charset="0"/>
-                <a:ea typeface="Calibri" pitchFamily="34" charset="-122"/>
-                <a:cs typeface="Calibri" pitchFamily="34" charset="-120"/>
+                <a:cs typeface="Amiri" pitchFamily="2" charset="-78"/>
               </a:rPr>
               <a:t>Miftah Arabic · Progression P6 · IGCSE Bridge · P6-L07</a:t>
             </a:r>
@@ -16783,8 +16483,7 @@
                   <a:srgbClr val="1B3B6F"/>
                 </a:solidFill>
                 <a:latin typeface="Calibri" pitchFamily="34" charset="0"/>
-                <a:ea typeface="Calibri" pitchFamily="34" charset="-122"/>
-                <a:cs typeface="Calibri" pitchFamily="34" charset="-120"/>
+                <a:cs typeface="Amiri" pitchFamily="2" charset="-78"/>
               </a:rPr>
               <a:t>Camera on</a:t>
             </a:r>
@@ -16800,8 +16499,7 @@
                   <a:srgbClr val="5A6472"/>
                 </a:solidFill>
                 <a:latin typeface="Calibri" pitchFamily="34" charset="0"/>
-                <a:ea typeface="Calibri" pitchFamily="34" charset="-122"/>
-                <a:cs typeface="Calibri" pitchFamily="34" charset="-120"/>
+                <a:cs typeface="Amiri" pitchFamily="2" charset="-78"/>
               </a:rPr>
               <a:t>So I can see you learning and help you quickly.</a:t>
             </a:r>
@@ -16922,8 +16620,7 @@
                   <a:srgbClr val="1B3B6F"/>
                 </a:solidFill>
                 <a:latin typeface="Calibri" pitchFamily="34" charset="0"/>
-                <a:ea typeface="Calibri" pitchFamily="34" charset="-122"/>
-                <a:cs typeface="Calibri" pitchFamily="34" charset="-120"/>
+                <a:cs typeface="Amiri" pitchFamily="2" charset="-78"/>
               </a:rPr>
               <a:t>Mic muted</a:t>
             </a:r>
@@ -16939,8 +16636,7 @@
                   <a:srgbClr val="5A6472"/>
                 </a:solidFill>
                 <a:latin typeface="Calibri" pitchFamily="34" charset="0"/>
-                <a:ea typeface="Calibri" pitchFamily="34" charset="-122"/>
-                <a:cs typeface="Calibri" pitchFamily="34" charset="-120"/>
+                <a:cs typeface="Amiri" pitchFamily="2" charset="-78"/>
               </a:rPr>
               <a:t>Unmute only when invited to speak.</a:t>
             </a:r>
@@ -17061,8 +16757,7 @@
                   <a:srgbClr val="1B3B6F"/>
                 </a:solidFill>
                 <a:latin typeface="Calibri" pitchFamily="34" charset="0"/>
-                <a:ea typeface="Calibri" pitchFamily="34" charset="-122"/>
-                <a:cs typeface="Calibri" pitchFamily="34" charset="-120"/>
+                <a:cs typeface="Amiri" pitchFamily="2" charset="-78"/>
               </a:rPr>
               <a:t>Chat for learning</a:t>
             </a:r>
@@ -17078,8 +16773,7 @@
                   <a:srgbClr val="5A6472"/>
                 </a:solidFill>
                 <a:latin typeface="Calibri" pitchFamily="34" charset="0"/>
-                <a:ea typeface="Calibri" pitchFamily="34" charset="-122"/>
-                <a:cs typeface="Calibri" pitchFamily="34" charset="-120"/>
+                <a:cs typeface="Amiri" pitchFamily="2" charset="-78"/>
               </a:rPr>
               <a:t>Answers, questions and Arabic only.</a:t>
             </a:r>
@@ -17200,8 +16894,7 @@
                   <a:srgbClr val="1B3B6F"/>
                 </a:solidFill>
                 <a:latin typeface="Calibri" pitchFamily="34" charset="0"/>
-                <a:ea typeface="Calibri" pitchFamily="34" charset="-122"/>
-                <a:cs typeface="Calibri" pitchFamily="34" charset="-120"/>
+                <a:cs typeface="Amiri" pitchFamily="2" charset="-78"/>
               </a:rPr>
               <a:t>Raise your hand</a:t>
             </a:r>
@@ -17217,8 +16910,7 @@
                   <a:srgbClr val="5A6472"/>
                 </a:solidFill>
                 <a:latin typeface="Calibri" pitchFamily="34" charset="0"/>
-                <a:ea typeface="Calibri" pitchFamily="34" charset="-122"/>
-                <a:cs typeface="Calibri" pitchFamily="34" charset="-120"/>
+                <a:cs typeface="Amiri" pitchFamily="2" charset="-78"/>
               </a:rPr>
               <a:t>Use the hand button to ask for help.</a:t>
             </a:r>
@@ -17290,8 +16982,7 @@
                   <a:srgbClr val="1B3B6F"/>
                 </a:solidFill>
                 <a:latin typeface="Calibri" pitchFamily="34" charset="0"/>
-                <a:ea typeface="Calibri" pitchFamily="34" charset="-122"/>
-                <a:cs typeface="Calibri" pitchFamily="34" charset="-120"/>
+                <a:cs typeface="Amiri" pitchFamily="2" charset="-78"/>
               </a:rPr>
               <a:t>HOW WE TALK — THE ORACY CODE</a:t>
             </a:r>
@@ -17354,8 +17045,7 @@
                   <a:srgbClr val="D4AF37"/>
                 </a:solidFill>
                 <a:latin typeface="Arial" pitchFamily="34" charset="0"/>
-                <a:ea typeface="Arial" pitchFamily="34" charset="-122"/>
-                <a:cs typeface="Arial" pitchFamily="34" charset="-120"/>
+                <a:cs typeface="Amiri" pitchFamily="2" charset="-78"/>
               </a:rPr>
               <a:t>●</a:t>
             </a:r>
@@ -17393,8 +17083,7 @@
                   <a:srgbClr val="1B3B6F"/>
                 </a:solidFill>
                 <a:latin typeface="Calibri" pitchFamily="34" charset="0"/>
-                <a:ea typeface="Calibri" pitchFamily="34" charset="-122"/>
-                <a:cs typeface="Calibri" pitchFamily="34" charset="-120"/>
+                <a:cs typeface="Amiri" pitchFamily="2" charset="-78"/>
               </a:rPr>
               <a:t>Think</a:t>
             </a:r>
@@ -17410,8 +17099,7 @@
                   <a:srgbClr val="5A6472"/>
                 </a:solidFill>
                 <a:latin typeface="Calibri" pitchFamily="34" charset="0"/>
-                <a:ea typeface="Calibri" pitchFamily="34" charset="-122"/>
-                <a:cs typeface="Calibri" pitchFamily="34" charset="-120"/>
+                <a:cs typeface="Amiri" pitchFamily="2" charset="-78"/>
               </a:rPr>
               <a:t>silent preparation</a:t>
             </a:r>
@@ -17474,8 +17162,7 @@
                   <a:srgbClr val="D4AF37"/>
                 </a:solidFill>
                 <a:latin typeface="Arial" pitchFamily="34" charset="0"/>
-                <a:ea typeface="Arial" pitchFamily="34" charset="-122"/>
-                <a:cs typeface="Arial" pitchFamily="34" charset="-120"/>
+                <a:cs typeface="Amiri" pitchFamily="2" charset="-78"/>
               </a:rPr>
               <a:t>↔</a:t>
             </a:r>
@@ -17513,8 +17200,7 @@
                   <a:srgbClr val="1B3B6F"/>
                 </a:solidFill>
                 <a:latin typeface="Calibri" pitchFamily="34" charset="0"/>
-                <a:ea typeface="Calibri" pitchFamily="34" charset="-122"/>
-                <a:cs typeface="Calibri" pitchFamily="34" charset="-120"/>
+                <a:cs typeface="Amiri" pitchFamily="2" charset="-78"/>
               </a:rPr>
               <a:t>Rehearse</a:t>
             </a:r>
@@ -17530,8 +17216,7 @@
                   <a:srgbClr val="5A6472"/>
                 </a:solidFill>
                 <a:latin typeface="Calibri" pitchFamily="34" charset="0"/>
-                <a:ea typeface="Calibri" pitchFamily="34" charset="-122"/>
-                <a:cs typeface="Calibri" pitchFamily="34" charset="-120"/>
+                <a:cs typeface="Amiri" pitchFamily="2" charset="-78"/>
               </a:rPr>
               <a:t>both partners speak</a:t>
             </a:r>
@@ -17594,8 +17279,7 @@
                   <a:srgbClr val="D4AF37"/>
                 </a:solidFill>
                 <a:latin typeface="Arial" pitchFamily="34" charset="0"/>
-                <a:ea typeface="Arial" pitchFamily="34" charset="-122"/>
-                <a:cs typeface="Arial" pitchFamily="34" charset="-120"/>
+                <a:cs typeface="Amiri" pitchFamily="2" charset="-78"/>
               </a:rPr>
               <a:t>+</a:t>
             </a:r>
@@ -17633,8 +17317,7 @@
                   <a:srgbClr val="1B3B6F"/>
                 </a:solidFill>
                 <a:latin typeface="Calibri" pitchFamily="34" charset="0"/>
-                <a:ea typeface="Calibri" pitchFamily="34" charset="-122"/>
-                <a:cs typeface="Calibri" pitchFamily="34" charset="-120"/>
+                <a:cs typeface="Amiri" pitchFamily="2" charset="-78"/>
               </a:rPr>
               <a:t>Build</a:t>
             </a:r>
@@ -17650,8 +17333,7 @@
                   <a:srgbClr val="5A6472"/>
                 </a:solidFill>
                 <a:latin typeface="Calibri" pitchFamily="34" charset="0"/>
-                <a:ea typeface="Calibri" pitchFamily="34" charset="-122"/>
-                <a:cs typeface="Calibri" pitchFamily="34" charset="-120"/>
+                <a:cs typeface="Amiri" pitchFamily="2" charset="-78"/>
               </a:rPr>
               <a:t>add a reason or detail</a:t>
             </a:r>
@@ -17714,8 +17396,7 @@
                   <a:srgbClr val="D4AF37"/>
                 </a:solidFill>
                 <a:latin typeface="Arial" pitchFamily="34" charset="0"/>
-                <a:ea typeface="Arial" pitchFamily="34" charset="-122"/>
-                <a:cs typeface="Arial" pitchFamily="34" charset="-120"/>
+                <a:cs typeface="Amiri" pitchFamily="2" charset="-78"/>
               </a:rPr>
               <a:t>?</a:t>
             </a:r>
@@ -17753,8 +17434,7 @@
                   <a:srgbClr val="1B3B6F"/>
                 </a:solidFill>
                 <a:latin typeface="Calibri" pitchFamily="34" charset="0"/>
-                <a:ea typeface="Calibri" pitchFamily="34" charset="-122"/>
-                <a:cs typeface="Calibri" pitchFamily="34" charset="-120"/>
+                <a:cs typeface="Amiri" pitchFamily="2" charset="-78"/>
               </a:rPr>
               <a:t>Challenge</a:t>
             </a:r>
@@ -17770,8 +17450,7 @@
                   <a:srgbClr val="5A6472"/>
                 </a:solidFill>
                 <a:latin typeface="Calibri" pitchFamily="34" charset="0"/>
-                <a:ea typeface="Calibri" pitchFamily="34" charset="-122"/>
-                <a:cs typeface="Calibri" pitchFamily="34" charset="-120"/>
+                <a:cs typeface="Amiri" pitchFamily="2" charset="-78"/>
               </a:rPr>
               <a:t>question respectfully</a:t>
             </a:r>
@@ -17834,8 +17513,7 @@
                   <a:srgbClr val="D4AF37"/>
                 </a:solidFill>
                 <a:latin typeface="Arial" pitchFamily="34" charset="0"/>
-                <a:ea typeface="Arial" pitchFamily="34" charset="-122"/>
-                <a:cs typeface="Arial" pitchFamily="34" charset="-120"/>
+                <a:cs typeface="Amiri" pitchFamily="2" charset="-78"/>
               </a:rPr>
               <a:t>◎</a:t>
             </a:r>
@@ -17873,8 +17551,7 @@
                   <a:srgbClr val="1B3B6F"/>
                 </a:solidFill>
                 <a:latin typeface="Calibri" pitchFamily="34" charset="0"/>
-                <a:ea typeface="Calibri" pitchFamily="34" charset="-122"/>
-                <a:cs typeface="Calibri" pitchFamily="34" charset="-120"/>
+                <a:cs typeface="Amiri" pitchFamily="2" charset="-78"/>
               </a:rPr>
               <a:t>Share</a:t>
             </a:r>
@@ -17890,8 +17567,7 @@
                   <a:srgbClr val="5A6472"/>
                 </a:solidFill>
                 <a:latin typeface="Calibri" pitchFamily="34" charset="0"/>
-                <a:ea typeface="Calibri" pitchFamily="34" charset="-122"/>
-                <a:cs typeface="Calibri" pitchFamily="34" charset="-120"/>
+                <a:cs typeface="Amiri" pitchFamily="2" charset="-78"/>
               </a:rPr>
               <a:t>anyone may be invited</a:t>
             </a:r>
@@ -17954,8 +17630,7 @@
                   <a:srgbClr val="D4AF37"/>
                 </a:solidFill>
                 <a:latin typeface="Arial" pitchFamily="34" charset="0"/>
-                <a:ea typeface="Arial" pitchFamily="34" charset="-122"/>
-                <a:cs typeface="Arial" pitchFamily="34" charset="-120"/>
+                <a:cs typeface="Amiri" pitchFamily="2" charset="-78"/>
               </a:rPr>
               <a:t>↺</a:t>
             </a:r>
@@ -17993,8 +17668,7 @@
                   <a:srgbClr val="1B3B6F"/>
                 </a:solidFill>
                 <a:latin typeface="Calibri" pitchFamily="34" charset="0"/>
-                <a:ea typeface="Calibri" pitchFamily="34" charset="-122"/>
-                <a:cs typeface="Calibri" pitchFamily="34" charset="-120"/>
+                <a:cs typeface="Amiri" pitchFamily="2" charset="-78"/>
               </a:rPr>
               <a:t>Summarise</a:t>
             </a:r>
@@ -18010,8 +17684,7 @@
                   <a:srgbClr val="5A6472"/>
                 </a:solidFill>
                 <a:latin typeface="Calibri" pitchFamily="34" charset="0"/>
-                <a:ea typeface="Calibri" pitchFamily="34" charset="-122"/>
-                <a:cs typeface="Calibri" pitchFamily="34" charset="-120"/>
+                <a:cs typeface="Amiri" pitchFamily="2" charset="-78"/>
               </a:rPr>
               <a:t>say it more precisely</a:t>
             </a:r>
@@ -18049,8 +17722,7 @@
                   <a:srgbClr val="8A6D1E"/>
                 </a:solidFill>
                 <a:latin typeface="Calibri" pitchFamily="34" charset="0"/>
-                <a:ea typeface="Calibri" pitchFamily="34" charset="-122"/>
-                <a:cs typeface="Calibri" pitchFamily="34" charset="-120"/>
+                <a:cs typeface="Amiri" pitchFamily="2" charset="-78"/>
               </a:rPr>
               <a:t>I will always give you thinking and practice time before I ask anyone. Reading aloud is by invitation — you can always say “pass, please come back to me”.</a:t>
             </a:r>
@@ -18088,8 +17760,7 @@
                   <a:srgbClr val="8A93A0"/>
                 </a:solidFill>
                 <a:latin typeface="Calibri" pitchFamily="34" charset="0"/>
-                <a:ea typeface="Calibri" pitchFamily="34" charset="-122"/>
-                <a:cs typeface="Calibri" pitchFamily="34" charset="-120"/>
+                <a:cs typeface="Amiri" pitchFamily="2" charset="-78"/>
               </a:rPr>
               <a:t>2 / 20</a:t>
             </a:r>
@@ -18233,8 +17904,7 @@
                   <a:srgbClr val="D4AF37"/>
                 </a:solidFill>
                 <a:latin typeface="Calibri" pitchFamily="34" charset="0"/>
-                <a:ea typeface="Calibri" pitchFamily="34" charset="-122"/>
-                <a:cs typeface="Calibri" pitchFamily="34" charset="-120"/>
+                <a:cs typeface="Amiri" pitchFamily="2" charset="-78"/>
               </a:rPr>
               <a:t>P6-L07 COMPLETE</a:t>
             </a:r>
@@ -18271,9 +17941,8 @@
                 <a:solidFill>
                   <a:srgbClr val="FFFFFF"/>
                 </a:solidFill>
-                <a:latin typeface="Amiri" pitchFamily="34" charset="0"/>
-                <a:ea typeface="Amiri" pitchFamily="34" charset="-122"/>
-                <a:cs typeface="Amiri" pitchFamily="34" charset="-120"/>
+                <a:latin typeface="Amiri" pitchFamily="2" charset="-78"/>
+                <a:cs typeface="Amiri" pitchFamily="2" charset="-78"/>
               </a:rPr>
               <a:t>أَحْسَنْتُمْ! إِلَى اللِّقَاءِ</a:t>
             </a:r>
@@ -18311,8 +17980,7 @@
                   <a:srgbClr val="C6D2E6"/>
                 </a:solidFill>
                 <a:latin typeface="Calibri" pitchFamily="34" charset="0"/>
-                <a:ea typeface="Calibri" pitchFamily="34" charset="-122"/>
-                <a:cs typeface="Calibri" pitchFamily="34" charset="-120"/>
+                <a:cs typeface="Amiri" pitchFamily="2" charset="-78"/>
               </a:rPr>
               <a:t>Well done — see you next lesson.</a:t>
             </a:r>
@@ -18350,8 +18018,7 @@
                   <a:srgbClr val="D4AF37"/>
                 </a:solidFill>
                 <a:latin typeface="Calibri" pitchFamily="34" charset="0"/>
-                <a:ea typeface="Calibri" pitchFamily="34" charset="-122"/>
-                <a:cs typeface="Calibri" pitchFamily="34" charset="-120"/>
+                <a:cs typeface="Amiri" pitchFamily="2" charset="-78"/>
               </a:rPr>
               <a:t>NEXT LESSON</a:t>
             </a:r>
@@ -18389,8 +18056,7 @@
                   <a:srgbClr val="FFFFFF"/>
                 </a:solidFill>
                 <a:latin typeface="Cambria" pitchFamily="34" charset="0"/>
-                <a:ea typeface="Cambria" pitchFamily="34" charset="-122"/>
-                <a:cs typeface="Cambria" pitchFamily="34" charset="-120"/>
+                <a:cs typeface="Amiri" pitchFamily="2" charset="-78"/>
               </a:rPr>
               <a:t>P6-L08 · Mock Examination — Paper 1 Listening (Full Exam Conditions)</a:t>
             </a:r>
@@ -18427,9 +18093,8 @@
                 <a:solidFill>
                   <a:srgbClr val="D4AF37"/>
                 </a:solidFill>
-                <a:latin typeface="Amiri" pitchFamily="34" charset="0"/>
-                <a:ea typeface="Amiri" pitchFamily="34" charset="-122"/>
-                <a:cs typeface="Amiri" pitchFamily="34" charset="-120"/>
+                <a:latin typeface="Amiri" pitchFamily="2" charset="-78"/>
+                <a:cs typeface="Amiri" pitchFamily="2" charset="-78"/>
               </a:rPr>
               <a:t>امْتِحَانٌ تَجْرِيبِيٌّ — الوَرَقَةُ الأُولَى: الاسْتِمَاعُ</a:t>
             </a:r>
@@ -18467,8 +18132,7 @@
                   <a:srgbClr val="FFFFFF"/>
                 </a:solidFill>
                 <a:latin typeface="Calibri" pitchFamily="34" charset="0"/>
-                <a:ea typeface="Calibri" pitchFamily="34" charset="-122"/>
-                <a:cs typeface="Calibri" pitchFamily="34" charset="-120"/>
+                <a:cs typeface="Amiri" pitchFamily="2" charset="-78"/>
               </a:rPr>
               <a:t>Remember: development earns the band — opinion, reason, example, then a concession, a conditional and a subjunctive. If a question surprises you: pause, then use an emergency sentence.</a:t>
             </a:r>
@@ -18562,9 +18226,8 @@
                 <a:solidFill>
                   <a:srgbClr val="D4AF37"/>
                 </a:solidFill>
-                <a:latin typeface="Amiri" pitchFamily="34" charset="0"/>
-                <a:ea typeface="Amiri" pitchFamily="34" charset="-122"/>
-                <a:cs typeface="Amiri" pitchFamily="34" charset="-120"/>
+                <a:latin typeface="Amiri" pitchFamily="2" charset="-78"/>
+                <a:cs typeface="Amiri" pitchFamily="2" charset="-78"/>
               </a:rPr>
               <a:t>م</a:t>
             </a:r>
@@ -18602,8 +18265,7 @@
                   <a:srgbClr val="1B3B6F"/>
                 </a:solidFill>
                 <a:latin typeface="Cambria" pitchFamily="34" charset="0"/>
-                <a:ea typeface="Cambria" pitchFamily="34" charset="-122"/>
-                <a:cs typeface="Cambria" pitchFamily="34" charset="-120"/>
+                <a:cs typeface="Amiri" pitchFamily="2" charset="-78"/>
               </a:rPr>
               <a:t>Al Madina Online School</a:t>
             </a:r>
@@ -18641,8 +18303,7 @@
                   <a:srgbClr val="8A6D1E"/>
                 </a:solidFill>
                 <a:latin typeface="Calibri" pitchFamily="34" charset="0"/>
-                <a:ea typeface="Calibri" pitchFamily="34" charset="-122"/>
-                <a:cs typeface="Calibri" pitchFamily="34" charset="-120"/>
+                <a:cs typeface="Amiri" pitchFamily="2" charset="-78"/>
               </a:rPr>
               <a:t>ARABIC DEPARTMENT · MIFTAH ARABIC · IGCSE 0544</a:t>
             </a:r>
@@ -18707,8 +18368,7 @@
                   <a:srgbClr val="FFFFFF"/>
                 </a:solidFill>
                 <a:latin typeface="Calibri" pitchFamily="34" charset="0"/>
-                <a:ea typeface="Calibri" pitchFamily="34" charset="-122"/>
-                <a:cs typeface="Calibri" pitchFamily="34" charset="-120"/>
+                <a:cs typeface="Amiri" pitchFamily="2" charset="-78"/>
               </a:rPr>
               <a:t>P6-L07 · IGCSE Bridge</a:t>
             </a:r>
@@ -18773,8 +18433,7 @@
                   <a:srgbClr val="FFFFFF"/>
                 </a:solidFill>
                 <a:latin typeface="Calibri" pitchFamily="34" charset="0"/>
-                <a:ea typeface="Calibri" pitchFamily="34" charset="-122"/>
-                <a:cs typeface="Calibri" pitchFamily="34" charset="-120"/>
+                <a:cs typeface="Amiri" pitchFamily="2" charset="-78"/>
               </a:rPr>
               <a:t>WELCOME</a:t>
             </a:r>
@@ -18812,8 +18471,7 @@
                   <a:srgbClr val="5A6472"/>
                 </a:solidFill>
                 <a:latin typeface="Calibri" pitchFamily="34" charset="0"/>
-                <a:ea typeface="Calibri" pitchFamily="34" charset="-122"/>
-                <a:cs typeface="Calibri" pitchFamily="34" charset="-120"/>
+                <a:cs typeface="Amiri" pitchFamily="2" charset="-78"/>
               </a:rPr>
               <a:t>TODAY’S LESSON MAP</a:t>
             </a:r>
@@ -18851,8 +18509,7 @@
                   <a:srgbClr val="1B3B6F"/>
                 </a:solidFill>
                 <a:latin typeface="Cambria" pitchFamily="34" charset="0"/>
-                <a:ea typeface="Cambria" pitchFamily="34" charset="-122"/>
-                <a:cs typeface="Cambria" pitchFamily="34" charset="-120"/>
+                <a:cs typeface="Amiri" pitchFamily="2" charset="-78"/>
               </a:rPr>
               <a:t>Our lesson today, step by step</a:t>
             </a:r>
@@ -18889,9 +18546,8 @@
                 <a:solidFill>
                   <a:srgbClr val="8A6D1E"/>
                 </a:solidFill>
-                <a:latin typeface="Amiri" pitchFamily="34" charset="0"/>
-                <a:ea typeface="Amiri" pitchFamily="34" charset="-122"/>
-                <a:cs typeface="Amiri" pitchFamily="34" charset="-120"/>
+                <a:latin typeface="Amiri" pitchFamily="2" charset="-78"/>
+                <a:cs typeface="Amiri" pitchFamily="2" charset="-78"/>
               </a:rPr>
               <a:t>خَرِيطَةُ الدَّرْسِ</a:t>
             </a:r>
@@ -18929,8 +18585,7 @@
                   <a:srgbClr val="8A93A0"/>
                 </a:solidFill>
                 <a:latin typeface="Calibri" pitchFamily="34" charset="0"/>
-                <a:ea typeface="Calibri" pitchFamily="34" charset="-122"/>
-                <a:cs typeface="Calibri" pitchFamily="34" charset="-120"/>
+                <a:cs typeface="Amiri" pitchFamily="2" charset="-78"/>
               </a:rPr>
               <a:t>Miftah Arabic · Progression P6 · IGCSE Bridge · P6-L07</a:t>
             </a:r>
@@ -19029,8 +18684,7 @@
                   <a:srgbClr val="FFFFFF"/>
                 </a:solidFill>
                 <a:latin typeface="Calibri" pitchFamily="34" charset="0"/>
-                <a:ea typeface="Calibri" pitchFamily="34" charset="-122"/>
-                <a:cs typeface="Calibri" pitchFamily="34" charset="-120"/>
+                <a:cs typeface="Amiri" pitchFamily="2" charset="-78"/>
               </a:rPr>
               <a:t>DO NOW</a:t>
             </a:r>
@@ -19068,8 +18722,7 @@
                   <a:srgbClr val="E8EDF5"/>
                 </a:solidFill>
                 <a:latin typeface="Calibri" pitchFamily="34" charset="0"/>
-                <a:ea typeface="Calibri" pitchFamily="34" charset="-122"/>
-                <a:cs typeface="Calibri" pitchFamily="34" charset="-120"/>
+                <a:cs typeface="Amiri" pitchFamily="2" charset="-78"/>
               </a:rPr>
               <a:t>6 min</a:t>
             </a:r>
@@ -19132,8 +18785,7 @@
                   <a:srgbClr val="1B3B6F"/>
                 </a:solidFill>
                 <a:latin typeface="Calibri" pitchFamily="34" charset="0"/>
-                <a:ea typeface="Calibri" pitchFamily="34" charset="-122"/>
-                <a:cs typeface="Calibri" pitchFamily="34" charset="-120"/>
+                <a:cs typeface="Amiri" pitchFamily="2" charset="-78"/>
               </a:rPr>
               <a:t>1</a:t>
             </a:r>
@@ -19171,8 +18823,7 @@
                   <a:srgbClr val="1F2A37"/>
                 </a:solidFill>
                 <a:latin typeface="Calibri" pitchFamily="34" charset="0"/>
-                <a:ea typeface="Calibri" pitchFamily="34" charset="-122"/>
-                <a:cs typeface="Calibri" pitchFamily="34" charset="-120"/>
+                <a:cs typeface="Amiri" pitchFamily="2" charset="-78"/>
               </a:rPr>
               <a:t>Retrieval: conversation words and Band 5 structures.</a:t>
             </a:r>
@@ -19209,9 +18860,8 @@
                 <a:solidFill>
                   <a:srgbClr val="0E7C86"/>
                 </a:solidFill>
-                <a:latin typeface="Amiri" pitchFamily="34" charset="0"/>
-                <a:ea typeface="Amiri" pitchFamily="34" charset="-122"/>
-                <a:cs typeface="Amiri" pitchFamily="34" charset="-120"/>
+                <a:latin typeface="Amiri" pitchFamily="2" charset="-78"/>
+                <a:cs typeface="Amiri" pitchFamily="2" charset="-78"/>
               </a:rPr>
               <a:t>اِبْدَأِ الآنَ</a:t>
             </a:r>
@@ -19310,8 +18960,7 @@
                   <a:srgbClr val="FFFFFF"/>
                 </a:solidFill>
                 <a:latin typeface="Calibri" pitchFamily="34" charset="0"/>
-                <a:ea typeface="Calibri" pitchFamily="34" charset="-122"/>
-                <a:cs typeface="Calibri" pitchFamily="34" charset="-120"/>
+                <a:cs typeface="Amiri" pitchFamily="2" charset="-78"/>
               </a:rPr>
               <a:t>TEACHER INSTRUCTION</a:t>
             </a:r>
@@ -19349,8 +18998,7 @@
                   <a:srgbClr val="E8EDF5"/>
                 </a:solidFill>
                 <a:latin typeface="Calibri" pitchFamily="34" charset="0"/>
-                <a:ea typeface="Calibri" pitchFamily="34" charset="-122"/>
-                <a:cs typeface="Calibri" pitchFamily="34" charset="-120"/>
+                <a:cs typeface="Amiri" pitchFamily="2" charset="-78"/>
               </a:rPr>
               <a:t>5 min</a:t>
             </a:r>
@@ -19413,8 +19061,7 @@
                   <a:srgbClr val="1B3B6F"/>
                 </a:solidFill>
                 <a:latin typeface="Calibri" pitchFamily="34" charset="0"/>
-                <a:ea typeface="Calibri" pitchFamily="34" charset="-122"/>
-                <a:cs typeface="Calibri" pitchFamily="34" charset="-120"/>
+                <a:cs typeface="Amiri" pitchFamily="2" charset="-78"/>
               </a:rPr>
               <a:t>2</a:t>
             </a:r>
@@ -19452,8 +19099,7 @@
                   <a:srgbClr val="1F2A37"/>
                 </a:solidFill>
                 <a:latin typeface="Calibri" pitchFamily="34" charset="0"/>
-                <a:ea typeface="Calibri" pitchFamily="34" charset="-122"/>
-                <a:cs typeface="Calibri" pitchFamily="34" charset="-120"/>
+                <a:cs typeface="Amiri" pitchFamily="2" charset="-78"/>
               </a:rPr>
               <a:t>Band 2 · 3 · 5 and the mark scheme.</a:t>
             </a:r>
@@ -19490,9 +19136,8 @@
                 <a:solidFill>
                   <a:srgbClr val="1B3B6F"/>
                 </a:solidFill>
-                <a:latin typeface="Amiri" pitchFamily="34" charset="0"/>
-                <a:ea typeface="Amiri" pitchFamily="34" charset="-122"/>
-                <a:cs typeface="Amiri" pitchFamily="34" charset="-120"/>
+                <a:latin typeface="Amiri" pitchFamily="2" charset="-78"/>
+                <a:cs typeface="Amiri" pitchFamily="2" charset="-78"/>
               </a:rPr>
               <a:t>المَعَايِيرُ</a:t>
             </a:r>
@@ -19591,8 +19236,7 @@
                   <a:srgbClr val="FFFFFF"/>
                 </a:solidFill>
                 <a:latin typeface="Calibri" pitchFamily="34" charset="0"/>
-                <a:ea typeface="Calibri" pitchFamily="34" charset="-122"/>
-                <a:cs typeface="Calibri" pitchFamily="34" charset="-120"/>
+                <a:cs typeface="Amiri" pitchFamily="2" charset="-78"/>
               </a:rPr>
               <a:t>I DO</a:t>
             </a:r>
@@ -19630,8 +19274,7 @@
                   <a:srgbClr val="E8EDF5"/>
                 </a:solidFill>
                 <a:latin typeface="Calibri" pitchFamily="34" charset="0"/>
-                <a:ea typeface="Calibri" pitchFamily="34" charset="-122"/>
-                <a:cs typeface="Calibri" pitchFamily="34" charset="-120"/>
+                <a:cs typeface="Amiri" pitchFamily="2" charset="-78"/>
               </a:rPr>
               <a:t>5 min</a:t>
             </a:r>
@@ -19694,8 +19337,7 @@
                   <a:srgbClr val="1B3B6F"/>
                 </a:solidFill>
                 <a:latin typeface="Calibri" pitchFamily="34" charset="0"/>
-                <a:ea typeface="Calibri" pitchFamily="34" charset="-122"/>
-                <a:cs typeface="Calibri" pitchFamily="34" charset="-120"/>
+                <a:cs typeface="Amiri" pitchFamily="2" charset="-78"/>
               </a:rPr>
               <a:t>3</a:t>
             </a:r>
@@ -19733,8 +19375,7 @@
                   <a:srgbClr val="1F2A37"/>
                 </a:solidFill>
                 <a:latin typeface="Calibri" pitchFamily="34" charset="0"/>
-                <a:ea typeface="Calibri" pitchFamily="34" charset="-122"/>
-                <a:cs typeface="Calibri" pitchFamily="34" charset="-120"/>
+                <a:cs typeface="Amiri" pitchFamily="2" charset="-78"/>
               </a:rPr>
               <a:t>Watch me build a Band 5 answer.</a:t>
             </a:r>
@@ -19771,9 +19412,8 @@
                 <a:solidFill>
                   <a:srgbClr val="6B4C9A"/>
                 </a:solidFill>
-                <a:latin typeface="Amiri" pitchFamily="34" charset="0"/>
-                <a:ea typeface="Amiri" pitchFamily="34" charset="-122"/>
-                <a:cs typeface="Amiri" pitchFamily="34" charset="-120"/>
+                <a:latin typeface="Amiri" pitchFamily="2" charset="-78"/>
+                <a:cs typeface="Amiri" pitchFamily="2" charset="-78"/>
               </a:rPr>
               <a:t>شَاهِدْ</a:t>
             </a:r>
@@ -19872,8 +19512,7 @@
                   <a:srgbClr val="FFFFFF"/>
                 </a:solidFill>
                 <a:latin typeface="Calibri" pitchFamily="34" charset="0"/>
-                <a:ea typeface="Calibri" pitchFamily="34" charset="-122"/>
-                <a:cs typeface="Calibri" pitchFamily="34" charset="-120"/>
+                <a:cs typeface="Amiri" pitchFamily="2" charset="-78"/>
               </a:rPr>
               <a:t>YOU DO</a:t>
             </a:r>
@@ -19911,8 +19550,7 @@
                   <a:srgbClr val="E8EDF5"/>
                 </a:solidFill>
                 <a:latin typeface="Calibri" pitchFamily="34" charset="0"/>
-                <a:ea typeface="Calibri" pitchFamily="34" charset="-122"/>
-                <a:cs typeface="Calibri" pitchFamily="34" charset="-120"/>
+                <a:cs typeface="Amiri" pitchFamily="2" charset="-78"/>
               </a:rPr>
               <a:t>28 min</a:t>
             </a:r>
@@ -19975,8 +19613,7 @@
                   <a:srgbClr val="1B3B6F"/>
                 </a:solidFill>
                 <a:latin typeface="Calibri" pitchFamily="34" charset="0"/>
-                <a:ea typeface="Calibri" pitchFamily="34" charset="-122"/>
-                <a:cs typeface="Calibri" pitchFamily="34" charset="-120"/>
+                <a:cs typeface="Amiri" pitchFamily="2" charset="-78"/>
               </a:rPr>
               <a:t>4</a:t>
             </a:r>
@@ -20014,8 +19651,7 @@
                   <a:srgbClr val="1F2A37"/>
                 </a:solidFill>
                 <a:latin typeface="Calibri" pitchFamily="34" charset="0"/>
-                <a:ea typeface="Calibri" pitchFamily="34" charset="-122"/>
-                <a:cs typeface="Calibri" pitchFamily="34" charset="-120"/>
+                <a:cs typeface="Amiri" pitchFamily="2" charset="-78"/>
               </a:rPr>
               <a:t>The full conversation, question bank, emergency sentences.</a:t>
             </a:r>
@@ -20052,9 +19688,8 @@
                 <a:solidFill>
                   <a:srgbClr val="1E6B52"/>
                 </a:solidFill>
-                <a:latin typeface="Amiri" pitchFamily="34" charset="0"/>
-                <a:ea typeface="Amiri" pitchFamily="34" charset="-122"/>
-                <a:cs typeface="Amiri" pitchFamily="34" charset="-120"/>
+                <a:latin typeface="Amiri" pitchFamily="2" charset="-78"/>
+                <a:cs typeface="Amiri" pitchFamily="2" charset="-78"/>
               </a:rPr>
               <a:t>تَحَدَّثْ</a:t>
             </a:r>
@@ -20153,8 +19788,7 @@
                   <a:srgbClr val="FFFFFF"/>
                 </a:solidFill>
                 <a:latin typeface="Calibri" pitchFamily="34" charset="0"/>
-                <a:ea typeface="Calibri" pitchFamily="34" charset="-122"/>
-                <a:cs typeface="Calibri" pitchFamily="34" charset="-120"/>
+                <a:cs typeface="Amiri" pitchFamily="2" charset="-78"/>
               </a:rPr>
               <a:t>FEEDBACK</a:t>
             </a:r>
@@ -20192,8 +19826,7 @@
                   <a:srgbClr val="E8EDF5"/>
                 </a:solidFill>
                 <a:latin typeface="Calibri" pitchFamily="34" charset="0"/>
-                <a:ea typeface="Calibri" pitchFamily="34" charset="-122"/>
-                <a:cs typeface="Calibri" pitchFamily="34" charset="-120"/>
+                <a:cs typeface="Amiri" pitchFamily="2" charset="-78"/>
               </a:rPr>
               <a:t>4 min</a:t>
             </a:r>
@@ -20256,8 +19889,7 @@
                   <a:srgbClr val="1B3B6F"/>
                 </a:solidFill>
                 <a:latin typeface="Calibri" pitchFamily="34" charset="0"/>
-                <a:ea typeface="Calibri" pitchFamily="34" charset="-122"/>
-                <a:cs typeface="Calibri" pitchFamily="34" charset="-120"/>
+                <a:cs typeface="Amiri" pitchFamily="2" charset="-78"/>
               </a:rPr>
               <a:t>5</a:t>
             </a:r>
@@ -20295,8 +19927,7 @@
                   <a:srgbClr val="1F2A37"/>
                 </a:solidFill>
                 <a:latin typeface="Calibri" pitchFamily="34" charset="0"/>
-                <a:ea typeface="Calibri" pitchFamily="34" charset="-122"/>
-                <a:cs typeface="Calibri" pitchFamily="34" charset="-120"/>
+                <a:cs typeface="Amiri" pitchFamily="2" charset="-78"/>
               </a:rPr>
               <a:t>Reflection and self-check.</a:t>
             </a:r>
@@ -20333,9 +19964,8 @@
                 <a:solidFill>
                   <a:srgbClr val="8A6D1E"/>
                 </a:solidFill>
-                <a:latin typeface="Amiri" pitchFamily="34" charset="0"/>
-                <a:ea typeface="Amiri" pitchFamily="34" charset="-122"/>
-                <a:cs typeface="Amiri" pitchFamily="34" charset="-120"/>
+                <a:latin typeface="Amiri" pitchFamily="2" charset="-78"/>
+                <a:cs typeface="Amiri" pitchFamily="2" charset="-78"/>
               </a:rPr>
               <a:t>قَيِّمْ</a:t>
             </a:r>
@@ -20434,8 +20064,7 @@
                   <a:srgbClr val="FFFFFF"/>
                 </a:solidFill>
                 <a:latin typeface="Calibri" pitchFamily="34" charset="0"/>
-                <a:ea typeface="Calibri" pitchFamily="34" charset="-122"/>
-                <a:cs typeface="Calibri" pitchFamily="34" charset="-120"/>
+                <a:cs typeface="Amiri" pitchFamily="2" charset="-78"/>
               </a:rPr>
               <a:t>PREPARATION</a:t>
             </a:r>
@@ -20473,8 +20102,7 @@
                   <a:srgbClr val="E8EDF5"/>
                 </a:solidFill>
                 <a:latin typeface="Calibri" pitchFamily="34" charset="0"/>
-                <a:ea typeface="Calibri" pitchFamily="34" charset="-122"/>
-                <a:cs typeface="Calibri" pitchFamily="34" charset="-120"/>
+                <a:cs typeface="Amiri" pitchFamily="2" charset="-78"/>
               </a:rPr>
               <a:t>2 min</a:t>
             </a:r>
@@ -20537,8 +20165,7 @@
                   <a:srgbClr val="1B3B6F"/>
                 </a:solidFill>
                 <a:latin typeface="Calibri" pitchFamily="34" charset="0"/>
-                <a:ea typeface="Calibri" pitchFamily="34" charset="-122"/>
-                <a:cs typeface="Calibri" pitchFamily="34" charset="-120"/>
+                <a:cs typeface="Amiri" pitchFamily="2" charset="-78"/>
               </a:rPr>
               <a:t>6</a:t>
             </a:r>
@@ -20576,8 +20203,7 @@
                   <a:srgbClr val="1F2A37"/>
                 </a:solidFill>
                 <a:latin typeface="Calibri" pitchFamily="34" charset="0"/>
-                <a:ea typeface="Calibri" pitchFamily="34" charset="-122"/>
-                <a:cs typeface="Calibri" pitchFamily="34" charset="-120"/>
+                <a:cs typeface="Amiri" pitchFamily="2" charset="-78"/>
               </a:rPr>
               <a:t>Get ready for the listening mock.</a:t>
             </a:r>
@@ -20614,9 +20240,8 @@
                 <a:solidFill>
                   <a:srgbClr val="C45A3C"/>
                 </a:solidFill>
-                <a:latin typeface="Amiri" pitchFamily="34" charset="0"/>
-                <a:ea typeface="Amiri" pitchFamily="34" charset="-122"/>
-                <a:cs typeface="Amiri" pitchFamily="34" charset="-120"/>
+                <a:latin typeface="Amiri" pitchFamily="2" charset="-78"/>
+                <a:cs typeface="Amiri" pitchFamily="2" charset="-78"/>
               </a:rPr>
               <a:t>اِسْتَعِدَّ</a:t>
             </a:r>
@@ -20688,8 +20313,7 @@
                   <a:srgbClr val="1E6B52"/>
                 </a:solidFill>
                 <a:latin typeface="Calibri" pitchFamily="34" charset="0"/>
-                <a:ea typeface="Calibri" pitchFamily="34" charset="-122"/>
-                <a:cs typeface="Calibri" pitchFamily="34" charset="-120"/>
+                <a:cs typeface="Amiri" pitchFamily="2" charset="-78"/>
               </a:rPr>
               <a:t>IF ARABIC FEELS HARD TODAY</a:t>
             </a:r>
@@ -20727,8 +20351,7 @@
                   <a:srgbClr val="1F2A37"/>
                 </a:solidFill>
                 <a:latin typeface="Calibri" pitchFamily="34" charset="0"/>
-                <a:ea typeface="Calibri" pitchFamily="34" charset="-122"/>
-                <a:cs typeface="Calibri" pitchFamily="34" charset="-120"/>
+                <a:cs typeface="Amiri" pitchFamily="2" charset="-78"/>
               </a:rPr>
               <a:t>This is an exam-preparation lesson. Every task uses the real IGCSE format — Core students use the green boxes, frames and English support; nobody is expected to get everything right first time.</a:t>
             </a:r>
@@ -20766,8 +20389,7 @@
                   <a:srgbClr val="8A93A0"/>
                 </a:solidFill>
                 <a:latin typeface="Calibri" pitchFamily="34" charset="0"/>
-                <a:ea typeface="Calibri" pitchFamily="34" charset="-122"/>
-                <a:cs typeface="Calibri" pitchFamily="34" charset="-120"/>
+                <a:cs typeface="Amiri" pitchFamily="2" charset="-78"/>
               </a:rPr>
               <a:t>3 / 20</a:t>
             </a:r>
@@ -20861,9 +20483,8 @@
                 <a:solidFill>
                   <a:srgbClr val="D4AF37"/>
                 </a:solidFill>
-                <a:latin typeface="Amiri" pitchFamily="34" charset="0"/>
-                <a:ea typeface="Amiri" pitchFamily="34" charset="-122"/>
-                <a:cs typeface="Amiri" pitchFamily="34" charset="-120"/>
+                <a:latin typeface="Amiri" pitchFamily="2" charset="-78"/>
+                <a:cs typeface="Amiri" pitchFamily="2" charset="-78"/>
               </a:rPr>
               <a:t>م</a:t>
             </a:r>
@@ -20901,8 +20522,7 @@
                   <a:srgbClr val="1B3B6F"/>
                 </a:solidFill>
                 <a:latin typeface="Cambria" pitchFamily="34" charset="0"/>
-                <a:ea typeface="Cambria" pitchFamily="34" charset="-122"/>
-                <a:cs typeface="Cambria" pitchFamily="34" charset="-120"/>
+                <a:cs typeface="Amiri" pitchFamily="2" charset="-78"/>
               </a:rPr>
               <a:t>Al Madina Online School</a:t>
             </a:r>
@@ -20940,8 +20560,7 @@
                   <a:srgbClr val="8A6D1E"/>
                 </a:solidFill>
                 <a:latin typeface="Calibri" pitchFamily="34" charset="0"/>
-                <a:ea typeface="Calibri" pitchFamily="34" charset="-122"/>
-                <a:cs typeface="Calibri" pitchFamily="34" charset="-120"/>
+                <a:cs typeface="Amiri" pitchFamily="2" charset="-78"/>
               </a:rPr>
               <a:t>ARABIC DEPARTMENT · MIFTAH ARABIC · IGCSE 0544</a:t>
             </a:r>
@@ -21006,8 +20625,7 @@
                   <a:srgbClr val="FFFFFF"/>
                 </a:solidFill>
                 <a:latin typeface="Calibri" pitchFamily="34" charset="0"/>
-                <a:ea typeface="Calibri" pitchFamily="34" charset="-122"/>
-                <a:cs typeface="Calibri" pitchFamily="34" charset="-120"/>
+                <a:cs typeface="Amiri" pitchFamily="2" charset="-78"/>
               </a:rPr>
               <a:t>P6-L07 · IGCSE Bridge</a:t>
             </a:r>
@@ -21072,8 +20690,7 @@
                   <a:srgbClr val="FFFFFF"/>
                 </a:solidFill>
                 <a:latin typeface="Calibri" pitchFamily="34" charset="0"/>
-                <a:ea typeface="Calibri" pitchFamily="34" charset="-122"/>
-                <a:cs typeface="Calibri" pitchFamily="34" charset="-120"/>
+                <a:cs typeface="Amiri" pitchFamily="2" charset="-78"/>
               </a:rPr>
               <a:t>DO NOW · 5 MIN</a:t>
             </a:r>
@@ -21111,8 +20728,7 @@
                   <a:srgbClr val="0E7C86"/>
                 </a:solidFill>
                 <a:latin typeface="Calibri" pitchFamily="34" charset="0"/>
-                <a:ea typeface="Calibri" pitchFamily="34" charset="-122"/>
-                <a:cs typeface="Calibri" pitchFamily="34" charset="-120"/>
+                <a:cs typeface="Amiri" pitchFamily="2" charset="-78"/>
               </a:rPr>
               <a:t>DO NOW · ON YOUR OWN · 5 MINUTES</a:t>
             </a:r>
@@ -21150,8 +20766,7 @@
                   <a:srgbClr val="1B3B6F"/>
                 </a:solidFill>
                 <a:latin typeface="Cambria" pitchFamily="34" charset="0"/>
-                <a:ea typeface="Cambria" pitchFamily="34" charset="-122"/>
-                <a:cs typeface="Cambria" pitchFamily="34" charset="-120"/>
+                <a:cs typeface="Amiri" pitchFamily="2" charset="-78"/>
               </a:rPr>
               <a:t>Retrieval: what do you remember?</a:t>
             </a:r>
@@ -21188,9 +20803,8 @@
                 <a:solidFill>
                   <a:srgbClr val="8A6D1E"/>
                 </a:solidFill>
-                <a:latin typeface="Amiri" pitchFamily="34" charset="0"/>
-                <a:ea typeface="Amiri" pitchFamily="34" charset="-122"/>
-                <a:cs typeface="Amiri" pitchFamily="34" charset="-120"/>
+                <a:latin typeface="Amiri" pitchFamily="2" charset="-78"/>
+                <a:cs typeface="Amiri" pitchFamily="2" charset="-78"/>
               </a:rPr>
               <a:t>اِبْدَأِ الآنَ</a:t>
             </a:r>
@@ -21228,8 +20842,7 @@
                   <a:srgbClr val="8A93A0"/>
                 </a:solidFill>
                 <a:latin typeface="Calibri" pitchFamily="34" charset="0"/>
-                <a:ea typeface="Calibri" pitchFamily="34" charset="-122"/>
-                <a:cs typeface="Calibri" pitchFamily="34" charset="-120"/>
+                <a:cs typeface="Amiri" pitchFamily="2" charset="-78"/>
               </a:rPr>
               <a:t>Miftah Arabic · Progression P6 · IGCSE Bridge · P6-L07</a:t>
             </a:r>
@@ -21326,8 +20939,7 @@
                   <a:srgbClr val="FFFFFF"/>
                 </a:solidFill>
                 <a:latin typeface="Calibri" pitchFamily="34" charset="0"/>
-                <a:ea typeface="Calibri" pitchFamily="34" charset="-122"/>
-                <a:cs typeface="Calibri" pitchFamily="34" charset="-120"/>
+                <a:cs typeface="Amiri" pitchFamily="2" charset="-78"/>
               </a:rPr>
               <a:t>1</a:t>
             </a:r>
@@ -21365,8 +20977,7 @@
                   <a:srgbClr val="1B3B6F"/>
                 </a:solidFill>
                 <a:latin typeface="Calibri" pitchFamily="34" charset="0"/>
-                <a:ea typeface="Calibri" pitchFamily="34" charset="-122"/>
-                <a:cs typeface="Calibri" pitchFamily="34" charset="-120"/>
+                <a:cs typeface="Amiri" pitchFamily="2" charset="-78"/>
               </a:rPr>
               <a:t>What does </a:t>
             </a:r>
@@ -21378,9 +20989,8 @@
                 <a:solidFill>
                   <a:srgbClr val="1B3B6F"/>
                 </a:solidFill>
-                <a:latin typeface="Amiri" pitchFamily="34" charset="0"/>
-                <a:ea typeface="Amiri" pitchFamily="34" charset="-122"/>
-                <a:cs typeface="Amiri" pitchFamily="34" charset="-120"/>
+                <a:latin typeface="Amiri" pitchFamily="2" charset="-78"/>
+                <a:cs typeface="Amiri" pitchFamily="2" charset="-78"/>
               </a:rPr>
               <a:t>التَّوْسِيعُ فِي الإِجَابَةِ</a:t>
             </a:r>
@@ -21393,8 +21003,7 @@
                   <a:srgbClr val="1B3B6F"/>
                 </a:solidFill>
                 <a:latin typeface="Calibri" pitchFamily="34" charset="0"/>
-                <a:ea typeface="Calibri" pitchFamily="34" charset="-122"/>
-                <a:cs typeface="Calibri" pitchFamily="34" charset="-120"/>
+                <a:cs typeface="Amiri" pitchFamily="2" charset="-78"/>
               </a:rPr>
               <a:t> mean?</a:t>
             </a:r>
@@ -21457,8 +21066,7 @@
                   <a:srgbClr val="1B3B6F"/>
                 </a:solidFill>
                 <a:latin typeface="Calibri" pitchFamily="34" charset="0"/>
-                <a:ea typeface="Calibri" pitchFamily="34" charset="-122"/>
-                <a:cs typeface="Calibri" pitchFamily="34" charset="-120"/>
+                <a:cs typeface="Amiri" pitchFamily="2" charset="-78"/>
               </a:rPr>
               <a:t>A</a:t>
             </a:r>
@@ -21496,8 +21104,7 @@
                   <a:srgbClr val="1F2A37"/>
                 </a:solidFill>
                 <a:latin typeface="Calibri" pitchFamily="34" charset="0"/>
-                <a:ea typeface="Calibri" pitchFamily="34" charset="-122"/>
-                <a:cs typeface="Calibri" pitchFamily="34" charset="-120"/>
+                <a:cs typeface="Amiri" pitchFamily="2" charset="-78"/>
               </a:rPr>
               <a:t>a short answer</a:t>
             </a:r>
@@ -21560,8 +21167,7 @@
                   <a:srgbClr val="1B3B6F"/>
                 </a:solidFill>
                 <a:latin typeface="Calibri" pitchFamily="34" charset="0"/>
-                <a:ea typeface="Calibri" pitchFamily="34" charset="-122"/>
-                <a:cs typeface="Calibri" pitchFamily="34" charset="-120"/>
+                <a:cs typeface="Amiri" pitchFamily="2" charset="-78"/>
               </a:rPr>
               <a:t>B</a:t>
             </a:r>
@@ -21599,8 +21205,7 @@
                   <a:srgbClr val="1F2A37"/>
                 </a:solidFill>
                 <a:latin typeface="Calibri" pitchFamily="34" charset="0"/>
-                <a:ea typeface="Calibri" pitchFamily="34" charset="-122"/>
-                <a:cs typeface="Calibri" pitchFamily="34" charset="-120"/>
+                <a:cs typeface="Amiri" pitchFamily="2" charset="-78"/>
               </a:rPr>
               <a:t>extending the answer</a:t>
             </a:r>
@@ -21663,8 +21268,7 @@
                   <a:srgbClr val="1B3B6F"/>
                 </a:solidFill>
                 <a:latin typeface="Calibri" pitchFamily="34" charset="0"/>
-                <a:ea typeface="Calibri" pitchFamily="34" charset="-122"/>
-                <a:cs typeface="Calibri" pitchFamily="34" charset="-120"/>
+                <a:cs typeface="Amiri" pitchFamily="2" charset="-78"/>
               </a:rPr>
               <a:t>C</a:t>
             </a:r>
@@ -21702,8 +21306,7 @@
                   <a:srgbClr val="1F2A37"/>
                 </a:solidFill>
                 <a:latin typeface="Calibri" pitchFamily="34" charset="0"/>
-                <a:ea typeface="Calibri" pitchFamily="34" charset="-122"/>
-                <a:cs typeface="Calibri" pitchFamily="34" charset="-120"/>
+                <a:cs typeface="Amiri" pitchFamily="2" charset="-78"/>
               </a:rPr>
               <a:t>a correct answer</a:t>
             </a:r>
@@ -21800,8 +21403,7 @@
                   <a:srgbClr val="FFFFFF"/>
                 </a:solidFill>
                 <a:latin typeface="Calibri" pitchFamily="34" charset="0"/>
-                <a:ea typeface="Calibri" pitchFamily="34" charset="-122"/>
-                <a:cs typeface="Calibri" pitchFamily="34" charset="-120"/>
+                <a:cs typeface="Amiri" pitchFamily="2" charset="-78"/>
               </a:rPr>
               <a:t>2</a:t>
             </a:r>
@@ -21839,8 +21441,7 @@
                   <a:srgbClr val="1B3B6F"/>
                 </a:solidFill>
                 <a:latin typeface="Calibri" pitchFamily="34" charset="0"/>
-                <a:ea typeface="Calibri" pitchFamily="34" charset="-122"/>
-                <a:cs typeface="Calibri" pitchFamily="34" charset="-120"/>
+                <a:cs typeface="Amiri" pitchFamily="2" charset="-78"/>
               </a:rPr>
               <a:t>What does </a:t>
             </a:r>
@@ -21852,9 +21453,8 @@
                 <a:solidFill>
                   <a:srgbClr val="1B3B6F"/>
                 </a:solidFill>
-                <a:latin typeface="Amiri" pitchFamily="34" charset="0"/>
-                <a:ea typeface="Amiri" pitchFamily="34" charset="-122"/>
-                <a:cs typeface="Amiri" pitchFamily="34" charset="-120"/>
+                <a:latin typeface="Amiri" pitchFamily="2" charset="-78"/>
+                <a:cs typeface="Amiri" pitchFamily="2" charset="-78"/>
               </a:rPr>
               <a:t>الرَّأْيُ مَعَ الأَسْبَابِ</a:t>
             </a:r>
@@ -21867,8 +21467,7 @@
                   <a:srgbClr val="1B3B6F"/>
                 </a:solidFill>
                 <a:latin typeface="Calibri" pitchFamily="34" charset="0"/>
-                <a:ea typeface="Calibri" pitchFamily="34" charset="-122"/>
-                <a:cs typeface="Calibri" pitchFamily="34" charset="-120"/>
+                <a:cs typeface="Amiri" pitchFamily="2" charset="-78"/>
               </a:rPr>
               <a:t> mean?</a:t>
             </a:r>
@@ -21931,8 +21530,7 @@
                   <a:srgbClr val="1B3B6F"/>
                 </a:solidFill>
                 <a:latin typeface="Calibri" pitchFamily="34" charset="0"/>
-                <a:ea typeface="Calibri" pitchFamily="34" charset="-122"/>
-                <a:cs typeface="Calibri" pitchFamily="34" charset="-120"/>
+                <a:cs typeface="Amiri" pitchFamily="2" charset="-78"/>
               </a:rPr>
               <a:t>A</a:t>
             </a:r>
@@ -21970,8 +21568,7 @@
                   <a:srgbClr val="1F2A37"/>
                 </a:solidFill>
                 <a:latin typeface="Calibri" pitchFamily="34" charset="0"/>
-                <a:ea typeface="Calibri" pitchFamily="34" charset="-122"/>
-                <a:cs typeface="Calibri" pitchFamily="34" charset="-120"/>
+                <a:cs typeface="Amiri" pitchFamily="2" charset="-78"/>
               </a:rPr>
               <a:t>opinion with reasons</a:t>
             </a:r>
@@ -22034,8 +21631,7 @@
                   <a:srgbClr val="1B3B6F"/>
                 </a:solidFill>
                 <a:latin typeface="Calibri" pitchFamily="34" charset="0"/>
-                <a:ea typeface="Calibri" pitchFamily="34" charset="-122"/>
-                <a:cs typeface="Calibri" pitchFamily="34" charset="-120"/>
+                <a:cs typeface="Amiri" pitchFamily="2" charset="-78"/>
               </a:rPr>
               <a:t>B</a:t>
             </a:r>
@@ -22073,8 +21669,7 @@
                   <a:srgbClr val="1F2A37"/>
                 </a:solidFill>
                 <a:latin typeface="Calibri" pitchFamily="34" charset="0"/>
-                <a:ea typeface="Calibri" pitchFamily="34" charset="-122"/>
-                <a:cs typeface="Calibri" pitchFamily="34" charset="-120"/>
+                <a:cs typeface="Amiri" pitchFamily="2" charset="-78"/>
               </a:rPr>
               <a:t>a reason without an opinion</a:t>
             </a:r>
@@ -22137,8 +21732,7 @@
                   <a:srgbClr val="1B3B6F"/>
                 </a:solidFill>
                 <a:latin typeface="Calibri" pitchFamily="34" charset="0"/>
-                <a:ea typeface="Calibri" pitchFamily="34" charset="-122"/>
-                <a:cs typeface="Calibri" pitchFamily="34" charset="-120"/>
+                <a:cs typeface="Amiri" pitchFamily="2" charset="-78"/>
               </a:rPr>
               <a:t>C</a:t>
             </a:r>
@@ -22176,8 +21770,7 @@
                   <a:srgbClr val="1F2A37"/>
                 </a:solidFill>
                 <a:latin typeface="Calibri" pitchFamily="34" charset="0"/>
-                <a:ea typeface="Calibri" pitchFamily="34" charset="-122"/>
-                <a:cs typeface="Calibri" pitchFamily="34" charset="-120"/>
+                <a:cs typeface="Amiri" pitchFamily="2" charset="-78"/>
               </a:rPr>
               <a:t>the other side</a:t>
             </a:r>
@@ -22274,8 +21867,7 @@
                   <a:srgbClr val="FFFFFF"/>
                 </a:solidFill>
                 <a:latin typeface="Calibri" pitchFamily="34" charset="0"/>
-                <a:ea typeface="Calibri" pitchFamily="34" charset="-122"/>
-                <a:cs typeface="Calibri" pitchFamily="34" charset="-120"/>
+                <a:cs typeface="Amiri" pitchFamily="2" charset="-78"/>
               </a:rPr>
               <a:t>3</a:t>
             </a:r>
@@ -22313,8 +21905,7 @@
                   <a:srgbClr val="1B3B6F"/>
                 </a:solidFill>
                 <a:latin typeface="Calibri" pitchFamily="34" charset="0"/>
-                <a:ea typeface="Calibri" pitchFamily="34" charset="-122"/>
-                <a:cs typeface="Calibri" pitchFamily="34" charset="-120"/>
+                <a:cs typeface="Amiri" pitchFamily="2" charset="-78"/>
               </a:rPr>
               <a:t>What does </a:t>
             </a:r>
@@ -22326,9 +21917,8 @@
                 <a:solidFill>
                   <a:srgbClr val="1B3B6F"/>
                 </a:solidFill>
-                <a:latin typeface="Amiri" pitchFamily="34" charset="0"/>
-                <a:ea typeface="Amiri" pitchFamily="34" charset="-122"/>
-                <a:cs typeface="Amiri" pitchFamily="34" charset="-120"/>
+                <a:latin typeface="Amiri" pitchFamily="2" charset="-78"/>
+                <a:cs typeface="Amiri" pitchFamily="2" charset="-78"/>
               </a:rPr>
               <a:t>التَّعَافِي مِنَ الأَخْطَاءِ</a:t>
             </a:r>
@@ -22341,8 +21931,7 @@
                   <a:srgbClr val="1B3B6F"/>
                 </a:solidFill>
                 <a:latin typeface="Calibri" pitchFamily="34" charset="0"/>
-                <a:ea typeface="Calibri" pitchFamily="34" charset="-122"/>
-                <a:cs typeface="Calibri" pitchFamily="34" charset="-120"/>
+                <a:cs typeface="Amiri" pitchFamily="2" charset="-78"/>
               </a:rPr>
               <a:t> mean?</a:t>
             </a:r>
@@ -22405,8 +21994,7 @@
                   <a:srgbClr val="1B3B6F"/>
                 </a:solidFill>
                 <a:latin typeface="Calibri" pitchFamily="34" charset="0"/>
-                <a:ea typeface="Calibri" pitchFamily="34" charset="-122"/>
-                <a:cs typeface="Calibri" pitchFamily="34" charset="-120"/>
+                <a:cs typeface="Amiri" pitchFamily="2" charset="-78"/>
               </a:rPr>
               <a:t>A</a:t>
             </a:r>
@@ -22444,8 +22032,7 @@
                   <a:srgbClr val="1F2A37"/>
                 </a:solidFill>
                 <a:latin typeface="Calibri" pitchFamily="34" charset="0"/>
-                <a:ea typeface="Calibri" pitchFamily="34" charset="-122"/>
-                <a:cs typeface="Calibri" pitchFamily="34" charset="-120"/>
+                <a:cs typeface="Amiri" pitchFamily="2" charset="-78"/>
               </a:rPr>
               <a:t>avoiding errors</a:t>
             </a:r>
@@ -22508,8 +22095,7 @@
                   <a:srgbClr val="1B3B6F"/>
                 </a:solidFill>
                 <a:latin typeface="Calibri" pitchFamily="34" charset="0"/>
-                <a:ea typeface="Calibri" pitchFamily="34" charset="-122"/>
-                <a:cs typeface="Calibri" pitchFamily="34" charset="-120"/>
+                <a:cs typeface="Amiri" pitchFamily="2" charset="-78"/>
               </a:rPr>
               <a:t>B</a:t>
             </a:r>
@@ -22547,8 +22133,7 @@
                   <a:srgbClr val="1F2A37"/>
                 </a:solidFill>
                 <a:latin typeface="Calibri" pitchFamily="34" charset="0"/>
-                <a:ea typeface="Calibri" pitchFamily="34" charset="-122"/>
-                <a:cs typeface="Calibri" pitchFamily="34" charset="-120"/>
+                <a:cs typeface="Amiri" pitchFamily="2" charset="-78"/>
               </a:rPr>
               <a:t>counting errors</a:t>
             </a:r>
@@ -22611,8 +22196,7 @@
                   <a:srgbClr val="1B3B6F"/>
                 </a:solidFill>
                 <a:latin typeface="Calibri" pitchFamily="34" charset="0"/>
-                <a:ea typeface="Calibri" pitchFamily="34" charset="-122"/>
-                <a:cs typeface="Calibri" pitchFamily="34" charset="-120"/>
+                <a:cs typeface="Amiri" pitchFamily="2" charset="-78"/>
               </a:rPr>
               <a:t>C</a:t>
             </a:r>
@@ -22650,8 +22234,7 @@
                   <a:srgbClr val="1F2A37"/>
                 </a:solidFill>
                 <a:latin typeface="Calibri" pitchFamily="34" charset="0"/>
-                <a:ea typeface="Calibri" pitchFamily="34" charset="-122"/>
-                <a:cs typeface="Calibri" pitchFamily="34" charset="-120"/>
+                <a:cs typeface="Amiri" pitchFamily="2" charset="-78"/>
               </a:rPr>
               <a:t>recovering from errors</a:t>
             </a:r>
@@ -22748,8 +22331,7 @@
                   <a:srgbClr val="FFFFFF"/>
                 </a:solidFill>
                 <a:latin typeface="Calibri" pitchFamily="34" charset="0"/>
-                <a:ea typeface="Calibri" pitchFamily="34" charset="-122"/>
-                <a:cs typeface="Calibri" pitchFamily="34" charset="-120"/>
+                <a:cs typeface="Amiri" pitchFamily="2" charset="-78"/>
               </a:rPr>
               <a:t>4</a:t>
             </a:r>
@@ -22787,8 +22369,7 @@
                   <a:srgbClr val="1B3B6F"/>
                 </a:solidFill>
                 <a:latin typeface="Calibri" pitchFamily="34" charset="0"/>
-                <a:ea typeface="Calibri" pitchFamily="34" charset="-122"/>
-                <a:cs typeface="Calibri" pitchFamily="34" charset="-120"/>
+                <a:cs typeface="Amiri" pitchFamily="2" charset="-78"/>
               </a:rPr>
               <a:t>Choose the concession: ___ </a:t>
             </a:r>
@@ -22800,9 +22381,8 @@
                 <a:solidFill>
                   <a:srgbClr val="1B3B6F"/>
                 </a:solidFill>
-                <a:latin typeface="Amiri" pitchFamily="34" charset="0"/>
-                <a:ea typeface="Amiri" pitchFamily="34" charset="-122"/>
-                <a:cs typeface="Amiri" pitchFamily="34" charset="-120"/>
+                <a:latin typeface="Amiri" pitchFamily="2" charset="-78"/>
+                <a:cs typeface="Amiri" pitchFamily="2" charset="-78"/>
               </a:rPr>
               <a:t>أَنَّ التِّقْنِيَّةَ مُفِيدَةٌ، غَيْرَ أَنَّ</a:t>
             </a:r>
@@ -22815,8 +22395,7 @@
                   <a:srgbClr val="1B3B6F"/>
                 </a:solidFill>
                 <a:latin typeface="Calibri" pitchFamily="34" charset="0"/>
-                <a:ea typeface="Calibri" pitchFamily="34" charset="-122"/>
-                <a:cs typeface="Calibri" pitchFamily="34" charset="-120"/>
+                <a:cs typeface="Amiri" pitchFamily="2" charset="-78"/>
               </a:rPr>
               <a:t> …</a:t>
             </a:r>
@@ -22879,8 +22458,7 @@
                   <a:srgbClr val="1B3B6F"/>
                 </a:solidFill>
                 <a:latin typeface="Calibri" pitchFamily="34" charset="0"/>
-                <a:ea typeface="Calibri" pitchFamily="34" charset="-122"/>
-                <a:cs typeface="Calibri" pitchFamily="34" charset="-120"/>
+                <a:cs typeface="Amiri" pitchFamily="2" charset="-78"/>
               </a:rPr>
               <a:t>A</a:t>
             </a:r>
@@ -22917,9 +22495,8 @@
                 <a:solidFill>
                   <a:srgbClr val="1F2A37"/>
                 </a:solidFill>
-                <a:latin typeface="Amiri" pitchFamily="34" charset="0"/>
-                <a:ea typeface="Amiri" pitchFamily="34" charset="-122"/>
-                <a:cs typeface="Amiri" pitchFamily="34" charset="-120"/>
+                <a:latin typeface="Amiri" pitchFamily="2" charset="-78"/>
+                <a:cs typeface="Amiri" pitchFamily="2" charset="-78"/>
               </a:rPr>
               <a:t>لِأَنَّ</a:t>
             </a:r>
@@ -22982,8 +22559,7 @@
                   <a:srgbClr val="1B3B6F"/>
                 </a:solidFill>
                 <a:latin typeface="Calibri" pitchFamily="34" charset="0"/>
-                <a:ea typeface="Calibri" pitchFamily="34" charset="-122"/>
-                <a:cs typeface="Calibri" pitchFamily="34" charset="-120"/>
+                <a:cs typeface="Amiri" pitchFamily="2" charset="-78"/>
               </a:rPr>
               <a:t>B</a:t>
             </a:r>
@@ -23020,9 +22596,8 @@
                 <a:solidFill>
                   <a:srgbClr val="1F2A37"/>
                 </a:solidFill>
-                <a:latin typeface="Amiri" pitchFamily="34" charset="0"/>
-                <a:ea typeface="Amiri" pitchFamily="34" charset="-122"/>
-                <a:cs typeface="Amiri" pitchFamily="34" charset="-120"/>
+                <a:latin typeface="Amiri" pitchFamily="2" charset="-78"/>
+                <a:cs typeface="Amiri" pitchFamily="2" charset="-78"/>
               </a:rPr>
               <a:t>لَوْ</a:t>
             </a:r>
@@ -23085,8 +22660,7 @@
                   <a:srgbClr val="1B3B6F"/>
                 </a:solidFill>
                 <a:latin typeface="Calibri" pitchFamily="34" charset="0"/>
-                <a:ea typeface="Calibri" pitchFamily="34" charset="-122"/>
-                <a:cs typeface="Calibri" pitchFamily="34" charset="-120"/>
+                <a:cs typeface="Amiri" pitchFamily="2" charset="-78"/>
               </a:rPr>
               <a:t>C</a:t>
             </a:r>
@@ -23123,9 +22697,8 @@
                 <a:solidFill>
                   <a:srgbClr val="1F2A37"/>
                 </a:solidFill>
-                <a:latin typeface="Amiri" pitchFamily="34" charset="0"/>
-                <a:ea typeface="Amiri" pitchFamily="34" charset="-122"/>
-                <a:cs typeface="Amiri" pitchFamily="34" charset="-120"/>
+                <a:latin typeface="Amiri" pitchFamily="2" charset="-78"/>
+                <a:cs typeface="Amiri" pitchFamily="2" charset="-78"/>
               </a:rPr>
               <a:t>صَحِيحٌ</a:t>
             </a:r>
@@ -23222,8 +22795,7 @@
                   <a:srgbClr val="FFFFFF"/>
                 </a:solidFill>
                 <a:latin typeface="Calibri" pitchFamily="34" charset="0"/>
-                <a:ea typeface="Calibri" pitchFamily="34" charset="-122"/>
-                <a:cs typeface="Calibri" pitchFamily="34" charset="-120"/>
+                <a:cs typeface="Amiri" pitchFamily="2" charset="-78"/>
               </a:rPr>
               <a:t>5</a:t>
             </a:r>
@@ -23261,8 +22833,7 @@
                   <a:srgbClr val="1B3B6F"/>
                 </a:solidFill>
                 <a:latin typeface="Calibri" pitchFamily="34" charset="0"/>
-                <a:ea typeface="Calibri" pitchFamily="34" charset="-122"/>
-                <a:cs typeface="Calibri" pitchFamily="34" charset="-120"/>
+                <a:cs typeface="Amiri" pitchFamily="2" charset="-78"/>
               </a:rPr>
               <a:t>Complete the demand: </a:t>
             </a:r>
@@ -23274,9 +22845,8 @@
                 <a:solidFill>
                   <a:srgbClr val="1B3B6F"/>
                 </a:solidFill>
-                <a:latin typeface="Amiri" pitchFamily="34" charset="0"/>
-                <a:ea typeface="Amiri" pitchFamily="34" charset="-122"/>
-                <a:cs typeface="Amiri" pitchFamily="34" charset="-120"/>
+                <a:latin typeface="Amiri" pitchFamily="2" charset="-78"/>
+                <a:cs typeface="Amiri" pitchFamily="2" charset="-78"/>
               </a:rPr>
               <a:t>يَتَطَلَّبُ الأَمْرُ أَنْ</a:t>
             </a:r>
@@ -23289,8 +22859,7 @@
                   <a:srgbClr val="1B3B6F"/>
                 </a:solidFill>
                 <a:latin typeface="Calibri" pitchFamily="34" charset="0"/>
-                <a:ea typeface="Calibri" pitchFamily="34" charset="-122"/>
-                <a:cs typeface="Calibri" pitchFamily="34" charset="-120"/>
+                <a:cs typeface="Amiri" pitchFamily="2" charset="-78"/>
               </a:rPr>
               <a:t> ___ </a:t>
             </a:r>
@@ -23302,9 +22871,8 @@
                 <a:solidFill>
                   <a:srgbClr val="1B3B6F"/>
                 </a:solidFill>
-                <a:latin typeface="Amiri" pitchFamily="34" charset="0"/>
-                <a:ea typeface="Amiri" pitchFamily="34" charset="-122"/>
-                <a:cs typeface="Amiri" pitchFamily="34" charset="-120"/>
+                <a:latin typeface="Amiri" pitchFamily="2" charset="-78"/>
+                <a:cs typeface="Amiri" pitchFamily="2" charset="-78"/>
               </a:rPr>
               <a:t>المَدَارِسُ دَعْمًا</a:t>
             </a:r>
@@ -23317,8 +22885,7 @@
                   <a:srgbClr val="1B3B6F"/>
                 </a:solidFill>
                 <a:latin typeface="Calibri" pitchFamily="34" charset="0"/>
-                <a:ea typeface="Calibri" pitchFamily="34" charset="-122"/>
-                <a:cs typeface="Calibri" pitchFamily="34" charset="-120"/>
+                <a:cs typeface="Amiri" pitchFamily="2" charset="-78"/>
               </a:rPr>
               <a:t>.</a:t>
             </a:r>
@@ -23381,8 +22948,7 @@
                   <a:srgbClr val="1B3B6F"/>
                 </a:solidFill>
                 <a:latin typeface="Calibri" pitchFamily="34" charset="0"/>
-                <a:ea typeface="Calibri" pitchFamily="34" charset="-122"/>
-                <a:cs typeface="Calibri" pitchFamily="34" charset="-120"/>
+                <a:cs typeface="Amiri" pitchFamily="2" charset="-78"/>
               </a:rPr>
               <a:t>A</a:t>
             </a:r>
@@ -23419,9 +22985,8 @@
                 <a:solidFill>
                   <a:srgbClr val="1F2A37"/>
                 </a:solidFill>
-                <a:latin typeface="Amiri" pitchFamily="34" charset="0"/>
-                <a:ea typeface="Amiri" pitchFamily="34" charset="-122"/>
-                <a:cs typeface="Amiri" pitchFamily="34" charset="-120"/>
+                <a:latin typeface="Amiri" pitchFamily="2" charset="-78"/>
+                <a:cs typeface="Amiri" pitchFamily="2" charset="-78"/>
               </a:rPr>
               <a:t>تُوَفِّرَ</a:t>
             </a:r>
@@ -23484,8 +23049,7 @@
                   <a:srgbClr val="1B3B6F"/>
                 </a:solidFill>
                 <a:latin typeface="Calibri" pitchFamily="34" charset="0"/>
-                <a:ea typeface="Calibri" pitchFamily="34" charset="-122"/>
-                <a:cs typeface="Calibri" pitchFamily="34" charset="-120"/>
+                <a:cs typeface="Amiri" pitchFamily="2" charset="-78"/>
               </a:rPr>
               <a:t>B</a:t>
             </a:r>
@@ -23522,9 +23086,8 @@
                 <a:solidFill>
                   <a:srgbClr val="1F2A37"/>
                 </a:solidFill>
-                <a:latin typeface="Amiri" pitchFamily="34" charset="0"/>
-                <a:ea typeface="Amiri" pitchFamily="34" charset="-122"/>
-                <a:cs typeface="Amiri" pitchFamily="34" charset="-120"/>
+                <a:latin typeface="Amiri" pitchFamily="2" charset="-78"/>
+                <a:cs typeface="Amiri" pitchFamily="2" charset="-78"/>
               </a:rPr>
               <a:t>تُوَفِّرُ</a:t>
             </a:r>
@@ -23587,8 +23150,7 @@
                   <a:srgbClr val="1B3B6F"/>
                 </a:solidFill>
                 <a:latin typeface="Calibri" pitchFamily="34" charset="0"/>
-                <a:ea typeface="Calibri" pitchFamily="34" charset="-122"/>
-                <a:cs typeface="Calibri" pitchFamily="34" charset="-120"/>
+                <a:cs typeface="Amiri" pitchFamily="2" charset="-78"/>
               </a:rPr>
               <a:t>C</a:t>
             </a:r>
@@ -23625,9 +23187,8 @@
                 <a:solidFill>
                   <a:srgbClr val="1F2A37"/>
                 </a:solidFill>
-                <a:latin typeface="Amiri" pitchFamily="34" charset="0"/>
-                <a:ea typeface="Amiri" pitchFamily="34" charset="-122"/>
-                <a:cs typeface="Amiri" pitchFamily="34" charset="-120"/>
+                <a:latin typeface="Amiri" pitchFamily="2" charset="-78"/>
+                <a:cs typeface="Amiri" pitchFamily="2" charset="-78"/>
               </a:rPr>
               <a:t>وَفَّرَتْ</a:t>
             </a:r>
@@ -23699,8 +23260,7 @@
                   <a:srgbClr val="0E7C86"/>
                 </a:solidFill>
                 <a:latin typeface="Calibri" pitchFamily="34" charset="0"/>
-                <a:ea typeface="Calibri" pitchFamily="34" charset="-122"/>
-                <a:cs typeface="Calibri" pitchFamily="34" charset="-120"/>
+                <a:cs typeface="Amiri" pitchFamily="2" charset="-78"/>
               </a:rPr>
               <a:t>HOW TO ANSWER</a:t>
             </a:r>
@@ -23738,8 +23298,7 @@
                   <a:srgbClr val="1F2A37"/>
                 </a:solidFill>
                 <a:latin typeface="Calibri" pitchFamily="34" charset="0"/>
-                <a:ea typeface="Calibri" pitchFamily="34" charset="-122"/>
-                <a:cs typeface="Calibri" pitchFamily="34" charset="-120"/>
+                <a:cs typeface="Amiri" pitchFamily="2" charset="-78"/>
               </a:rPr>
               <a:t>Work on your own in silence.</a:t>
             </a:r>
@@ -23755,8 +23314,7 @@
                   <a:srgbClr val="1F2A37"/>
                 </a:solidFill>
                 <a:latin typeface="Calibri" pitchFamily="34" charset="0"/>
-                <a:ea typeface="Calibri" pitchFamily="34" charset="-122"/>
-                <a:cs typeface="Calibri" pitchFamily="34" charset="-120"/>
+                <a:cs typeface="Amiri" pitchFamily="2" charset="-78"/>
               </a:rPr>
               <a:t>When the timer ends, type in the chat:</a:t>
             </a:r>
@@ -23794,8 +23352,7 @@
                   <a:srgbClr val="1B3B6F"/>
                 </a:solidFill>
                 <a:latin typeface="Consolas" pitchFamily="34" charset="0"/>
-                <a:ea typeface="Consolas" pitchFamily="34" charset="-122"/>
-                <a:cs typeface="Consolas" pitchFamily="34" charset="-120"/>
+                <a:cs typeface="Amiri" pitchFamily="2" charset="-78"/>
               </a:rPr>
               <a:t>1_  2_  3_  4_  5_</a:t>
             </a:r>
@@ -23833,8 +23390,7 @@
                   <a:srgbClr val="0E7C86"/>
                 </a:solidFill>
                 <a:latin typeface="Calibri" pitchFamily="34" charset="0"/>
-                <a:ea typeface="Calibri" pitchFamily="34" charset="-122"/>
-                <a:cs typeface="Calibri" pitchFamily="34" charset="-120"/>
+                <a:cs typeface="Amiri" pitchFamily="2" charset="-78"/>
               </a:rPr>
               <a:t>⏱  5 : 00</a:t>
             </a:r>
@@ -23872,8 +23428,7 @@
                   <a:srgbClr val="8A93A0"/>
                 </a:solidFill>
                 <a:latin typeface="Calibri" pitchFamily="34" charset="0"/>
-                <a:ea typeface="Calibri" pitchFamily="34" charset="-122"/>
-                <a:cs typeface="Calibri" pitchFamily="34" charset="-120"/>
+                <a:cs typeface="Amiri" pitchFamily="2" charset="-78"/>
               </a:rPr>
               <a:t>4 / 20</a:t>
             </a:r>
@@ -23967,9 +23522,8 @@
                 <a:solidFill>
                   <a:srgbClr val="D4AF37"/>
                 </a:solidFill>
-                <a:latin typeface="Amiri" pitchFamily="34" charset="0"/>
-                <a:ea typeface="Amiri" pitchFamily="34" charset="-122"/>
-                <a:cs typeface="Amiri" pitchFamily="34" charset="-120"/>
+                <a:latin typeface="Amiri" pitchFamily="2" charset="-78"/>
+                <a:cs typeface="Amiri" pitchFamily="2" charset="-78"/>
               </a:rPr>
               <a:t>م</a:t>
             </a:r>
@@ -24007,8 +23561,7 @@
                   <a:srgbClr val="1B3B6F"/>
                 </a:solidFill>
                 <a:latin typeface="Cambria" pitchFamily="34" charset="0"/>
-                <a:ea typeface="Cambria" pitchFamily="34" charset="-122"/>
-                <a:cs typeface="Cambria" pitchFamily="34" charset="-120"/>
+                <a:cs typeface="Amiri" pitchFamily="2" charset="-78"/>
               </a:rPr>
               <a:t>Al Madina Online School</a:t>
             </a:r>
@@ -24046,8 +23599,7 @@
                   <a:srgbClr val="8A6D1E"/>
                 </a:solidFill>
                 <a:latin typeface="Calibri" pitchFamily="34" charset="0"/>
-                <a:ea typeface="Calibri" pitchFamily="34" charset="-122"/>
-                <a:cs typeface="Calibri" pitchFamily="34" charset="-120"/>
+                <a:cs typeface="Amiri" pitchFamily="2" charset="-78"/>
               </a:rPr>
               <a:t>ARABIC DEPARTMENT · MIFTAH ARABIC · IGCSE 0544</a:t>
             </a:r>
@@ -24112,8 +23664,7 @@
                   <a:srgbClr val="FFFFFF"/>
                 </a:solidFill>
                 <a:latin typeface="Calibri" pitchFamily="34" charset="0"/>
-                <a:ea typeface="Calibri" pitchFamily="34" charset="-122"/>
-                <a:cs typeface="Calibri" pitchFamily="34" charset="-120"/>
+                <a:cs typeface="Amiri" pitchFamily="2" charset="-78"/>
               </a:rPr>
               <a:t>P6-L07 · IGCSE Bridge</a:t>
             </a:r>
@@ -24178,8 +23729,7 @@
                   <a:srgbClr val="FFFFFF"/>
                 </a:solidFill>
                 <a:latin typeface="Calibri" pitchFamily="34" charset="0"/>
-                <a:ea typeface="Calibri" pitchFamily="34" charset="-122"/>
-                <a:cs typeface="Calibri" pitchFamily="34" charset="-120"/>
+                <a:cs typeface="Amiri" pitchFamily="2" charset="-78"/>
               </a:rPr>
               <a:t>DO NOW · 2 MIN</a:t>
             </a:r>
@@ -24217,8 +23767,7 @@
                   <a:srgbClr val="0E7C86"/>
                 </a:solidFill>
                 <a:latin typeface="Calibri" pitchFamily="34" charset="0"/>
-                <a:ea typeface="Calibri" pitchFamily="34" charset="-122"/>
-                <a:cs typeface="Calibri" pitchFamily="34" charset="-120"/>
+                <a:cs typeface="Amiri" pitchFamily="2" charset="-78"/>
               </a:rPr>
               <a:t>DO NOW · ANSWERS AND REASONS</a:t>
             </a:r>
@@ -24256,8 +23805,7 @@
                   <a:srgbClr val="1B3B6F"/>
                 </a:solidFill>
                 <a:latin typeface="Cambria" pitchFamily="34" charset="0"/>
-                <a:ea typeface="Cambria" pitchFamily="34" charset="-122"/>
-                <a:cs typeface="Cambria" pitchFamily="34" charset="-120"/>
+                <a:cs typeface="Amiri" pitchFamily="2" charset="-78"/>
               </a:rPr>
               <a:t>Let’s check — and explain why</a:t>
             </a:r>
@@ -24294,9 +23842,8 @@
                 <a:solidFill>
                   <a:srgbClr val="8A6D1E"/>
                 </a:solidFill>
-                <a:latin typeface="Amiri" pitchFamily="34" charset="0"/>
-                <a:ea typeface="Amiri" pitchFamily="34" charset="-122"/>
-                <a:cs typeface="Amiri" pitchFamily="34" charset="-120"/>
+                <a:latin typeface="Amiri" pitchFamily="2" charset="-78"/>
+                <a:cs typeface="Amiri" pitchFamily="2" charset="-78"/>
               </a:rPr>
               <a:t>الإِجَابَاتُ وَالتَّعْلِيلُ</a:t>
             </a:r>
@@ -24334,8 +23881,7 @@
                   <a:srgbClr val="8A93A0"/>
                 </a:solidFill>
                 <a:latin typeface="Calibri" pitchFamily="34" charset="0"/>
-                <a:ea typeface="Calibri" pitchFamily="34" charset="-122"/>
-                <a:cs typeface="Calibri" pitchFamily="34" charset="-120"/>
+                <a:cs typeface="Amiri" pitchFamily="2" charset="-78"/>
               </a:rPr>
               <a:t>Miftah Arabic · Progression P6 · IGCSE Bridge · P6-L07</a:t>
             </a:r>
@@ -24432,8 +23978,7 @@
                   <a:srgbClr val="FFFFFF"/>
                 </a:solidFill>
                 <a:latin typeface="Calibri" pitchFamily="34" charset="0"/>
-                <a:ea typeface="Calibri" pitchFamily="34" charset="-122"/>
-                <a:cs typeface="Calibri" pitchFamily="34" charset="-120"/>
+                <a:cs typeface="Amiri" pitchFamily="2" charset="-78"/>
               </a:rPr>
               <a:t>1</a:t>
             </a:r>
@@ -24471,8 +24016,7 @@
                   <a:srgbClr val="1B3B6F"/>
                 </a:solidFill>
                 <a:latin typeface="Calibri" pitchFamily="34" charset="0"/>
-                <a:ea typeface="Calibri" pitchFamily="34" charset="-122"/>
-                <a:cs typeface="Calibri" pitchFamily="34" charset="-120"/>
+                <a:cs typeface="Amiri" pitchFamily="2" charset="-78"/>
               </a:rPr>
               <a:t>What does </a:t>
             </a:r>
@@ -24484,9 +24028,8 @@
                 <a:solidFill>
                   <a:srgbClr val="1B3B6F"/>
                 </a:solidFill>
-                <a:latin typeface="Amiri" pitchFamily="34" charset="0"/>
-                <a:ea typeface="Amiri" pitchFamily="34" charset="-122"/>
-                <a:cs typeface="Amiri" pitchFamily="34" charset="-120"/>
+                <a:latin typeface="Amiri" pitchFamily="2" charset="-78"/>
+                <a:cs typeface="Amiri" pitchFamily="2" charset="-78"/>
               </a:rPr>
               <a:t>التَّوْسِيعُ فِي الإِجَابَةِ</a:t>
             </a:r>
@@ -24499,8 +24042,7 @@
                   <a:srgbClr val="1B3B6F"/>
                 </a:solidFill>
                 <a:latin typeface="Calibri" pitchFamily="34" charset="0"/>
-                <a:ea typeface="Calibri" pitchFamily="34" charset="-122"/>
-                <a:cs typeface="Calibri" pitchFamily="34" charset="-120"/>
+                <a:cs typeface="Amiri" pitchFamily="2" charset="-78"/>
               </a:rPr>
               <a:t> mean?</a:t>
             </a:r>
@@ -24563,8 +24105,7 @@
                   <a:srgbClr val="1B3B6F"/>
                 </a:solidFill>
                 <a:latin typeface="Calibri" pitchFamily="34" charset="0"/>
-                <a:ea typeface="Calibri" pitchFamily="34" charset="-122"/>
-                <a:cs typeface="Calibri" pitchFamily="34" charset="-120"/>
+                <a:cs typeface="Amiri" pitchFamily="2" charset="-78"/>
               </a:rPr>
               <a:t>A</a:t>
             </a:r>
@@ -24602,8 +24143,7 @@
                   <a:srgbClr val="9AA1AB"/>
                 </a:solidFill>
                 <a:latin typeface="Calibri" pitchFamily="34" charset="0"/>
-                <a:ea typeface="Calibri" pitchFamily="34" charset="-122"/>
-                <a:cs typeface="Calibri" pitchFamily="34" charset="-120"/>
+                <a:cs typeface="Amiri" pitchFamily="2" charset="-78"/>
               </a:rPr>
               <a:t>a short answer</a:t>
             </a:r>
@@ -24693,8 +24233,7 @@
                   <a:srgbClr val="FFFFFF"/>
                 </a:solidFill>
                 <a:latin typeface="Calibri" pitchFamily="34" charset="0"/>
-                <a:ea typeface="Calibri" pitchFamily="34" charset="-122"/>
-                <a:cs typeface="Calibri" pitchFamily="34" charset="-120"/>
+                <a:cs typeface="Amiri" pitchFamily="2" charset="-78"/>
               </a:rPr>
               <a:t>B</a:t>
             </a:r>
@@ -24732,8 +24271,7 @@
                   <a:srgbClr val="1F2A37"/>
                 </a:solidFill>
                 <a:latin typeface="Calibri" pitchFamily="34" charset="0"/>
-                <a:ea typeface="Calibri" pitchFamily="34" charset="-122"/>
-                <a:cs typeface="Calibri" pitchFamily="34" charset="-120"/>
+                <a:cs typeface="Amiri" pitchFamily="2" charset="-78"/>
               </a:rPr>
               <a:t>extending the answer</a:t>
             </a:r>
@@ -24796,8 +24334,7 @@
                   <a:srgbClr val="1B3B6F"/>
                 </a:solidFill>
                 <a:latin typeface="Calibri" pitchFamily="34" charset="0"/>
-                <a:ea typeface="Calibri" pitchFamily="34" charset="-122"/>
-                <a:cs typeface="Calibri" pitchFamily="34" charset="-120"/>
+                <a:cs typeface="Amiri" pitchFamily="2" charset="-78"/>
               </a:rPr>
               <a:t>C</a:t>
             </a:r>
@@ -24835,8 +24372,7 @@
                   <a:srgbClr val="9AA1AB"/>
                 </a:solidFill>
                 <a:latin typeface="Calibri" pitchFamily="34" charset="0"/>
-                <a:ea typeface="Calibri" pitchFamily="34" charset="-122"/>
-                <a:cs typeface="Calibri" pitchFamily="34" charset="-120"/>
+                <a:cs typeface="Amiri" pitchFamily="2" charset="-78"/>
               </a:rPr>
               <a:t>a correct answer</a:t>
             </a:r>
@@ -24874,8 +24410,7 @@
                   <a:srgbClr val="8A6D1E"/>
                 </a:solidFill>
                 <a:latin typeface="Calibri" pitchFamily="34" charset="0"/>
-                <a:ea typeface="Calibri" pitchFamily="34" charset="-122"/>
-                <a:cs typeface="Calibri" pitchFamily="34" charset="-120"/>
+                <a:cs typeface="Amiri" pitchFamily="2" charset="-78"/>
               </a:rPr>
               <a:t>Prepared at home (P6-L06).</a:t>
             </a:r>
@@ -24972,8 +24507,7 @@
                   <a:srgbClr val="FFFFFF"/>
                 </a:solidFill>
                 <a:latin typeface="Calibri" pitchFamily="34" charset="0"/>
-                <a:ea typeface="Calibri" pitchFamily="34" charset="-122"/>
-                <a:cs typeface="Calibri" pitchFamily="34" charset="-120"/>
+                <a:cs typeface="Amiri" pitchFamily="2" charset="-78"/>
               </a:rPr>
               <a:t>2</a:t>
             </a:r>
@@ -25011,8 +24545,7 @@
                   <a:srgbClr val="1B3B6F"/>
                 </a:solidFill>
                 <a:latin typeface="Calibri" pitchFamily="34" charset="0"/>
-                <a:ea typeface="Calibri" pitchFamily="34" charset="-122"/>
-                <a:cs typeface="Calibri" pitchFamily="34" charset="-120"/>
+                <a:cs typeface="Amiri" pitchFamily="2" charset="-78"/>
               </a:rPr>
               <a:t>What does </a:t>
             </a:r>
@@ -25024,9 +24557,8 @@
                 <a:solidFill>
                   <a:srgbClr val="1B3B6F"/>
                 </a:solidFill>
-                <a:latin typeface="Amiri" pitchFamily="34" charset="0"/>
-                <a:ea typeface="Amiri" pitchFamily="34" charset="-122"/>
-                <a:cs typeface="Amiri" pitchFamily="34" charset="-120"/>
+                <a:latin typeface="Amiri" pitchFamily="2" charset="-78"/>
+                <a:cs typeface="Amiri" pitchFamily="2" charset="-78"/>
               </a:rPr>
               <a:t>الرَّأْيُ مَعَ الأَسْبَابِ</a:t>
             </a:r>
@@ -25039,8 +24571,7 @@
                   <a:srgbClr val="1B3B6F"/>
                 </a:solidFill>
                 <a:latin typeface="Calibri" pitchFamily="34" charset="0"/>
-                <a:ea typeface="Calibri" pitchFamily="34" charset="-122"/>
-                <a:cs typeface="Calibri" pitchFamily="34" charset="-120"/>
+                <a:cs typeface="Amiri" pitchFamily="2" charset="-78"/>
               </a:rPr>
               <a:t> mean?</a:t>
             </a:r>
@@ -25130,8 +24661,7 @@
                   <a:srgbClr val="FFFFFF"/>
                 </a:solidFill>
                 <a:latin typeface="Calibri" pitchFamily="34" charset="0"/>
-                <a:ea typeface="Calibri" pitchFamily="34" charset="-122"/>
-                <a:cs typeface="Calibri" pitchFamily="34" charset="-120"/>
+                <a:cs typeface="Amiri" pitchFamily="2" charset="-78"/>
               </a:rPr>
               <a:t>A</a:t>
             </a:r>
@@ -25169,8 +24699,7 @@
                   <a:srgbClr val="1F2A37"/>
                 </a:solidFill>
                 <a:latin typeface="Calibri" pitchFamily="34" charset="0"/>
-                <a:ea typeface="Calibri" pitchFamily="34" charset="-122"/>
-                <a:cs typeface="Calibri" pitchFamily="34" charset="-120"/>
+                <a:cs typeface="Amiri" pitchFamily="2" charset="-78"/>
               </a:rPr>
               <a:t>opinion with reasons</a:t>
             </a:r>
@@ -25233,8 +24762,7 @@
                   <a:srgbClr val="1B3B6F"/>
                 </a:solidFill>
                 <a:latin typeface="Calibri" pitchFamily="34" charset="0"/>
-                <a:ea typeface="Calibri" pitchFamily="34" charset="-122"/>
-                <a:cs typeface="Calibri" pitchFamily="34" charset="-120"/>
+                <a:cs typeface="Amiri" pitchFamily="2" charset="-78"/>
               </a:rPr>
               <a:t>B</a:t>
             </a:r>
@@ -25272,8 +24800,7 @@
                   <a:srgbClr val="9AA1AB"/>
                 </a:solidFill>
                 <a:latin typeface="Calibri" pitchFamily="34" charset="0"/>
-                <a:ea typeface="Calibri" pitchFamily="34" charset="-122"/>
-                <a:cs typeface="Calibri" pitchFamily="34" charset="-120"/>
+                <a:cs typeface="Amiri" pitchFamily="2" charset="-78"/>
               </a:rPr>
               <a:t>a reason without an opinion</a:t>
             </a:r>
@@ -25336,8 +24863,7 @@
                   <a:srgbClr val="1B3B6F"/>
                 </a:solidFill>
                 <a:latin typeface="Calibri" pitchFamily="34" charset="0"/>
-                <a:ea typeface="Calibri" pitchFamily="34" charset="-122"/>
-                <a:cs typeface="Calibri" pitchFamily="34" charset="-120"/>
+                <a:cs typeface="Amiri" pitchFamily="2" charset="-78"/>
               </a:rPr>
               <a:t>C</a:t>
             </a:r>
@@ -25375,8 +24901,7 @@
                   <a:srgbClr val="9AA1AB"/>
                 </a:solidFill>
                 <a:latin typeface="Calibri" pitchFamily="34" charset="0"/>
-                <a:ea typeface="Calibri" pitchFamily="34" charset="-122"/>
-                <a:cs typeface="Calibri" pitchFamily="34" charset="-120"/>
+                <a:cs typeface="Amiri" pitchFamily="2" charset="-78"/>
               </a:rPr>
               <a:t>the other side</a:t>
             </a:r>
@@ -25414,8 +24939,7 @@
                   <a:srgbClr val="8A6D1E"/>
                 </a:solidFill>
                 <a:latin typeface="Calibri" pitchFamily="34" charset="0"/>
-                <a:ea typeface="Calibri" pitchFamily="34" charset="-122"/>
-                <a:cs typeface="Calibri" pitchFamily="34" charset="-120"/>
+                <a:cs typeface="Amiri" pitchFamily="2" charset="-78"/>
               </a:rPr>
               <a:t>Prepared at home (P6-L06).</a:t>
             </a:r>
@@ -25512,8 +25036,7 @@
                   <a:srgbClr val="FFFFFF"/>
                 </a:solidFill>
                 <a:latin typeface="Calibri" pitchFamily="34" charset="0"/>
-                <a:ea typeface="Calibri" pitchFamily="34" charset="-122"/>
-                <a:cs typeface="Calibri" pitchFamily="34" charset="-120"/>
+                <a:cs typeface="Amiri" pitchFamily="2" charset="-78"/>
               </a:rPr>
               <a:t>3</a:t>
             </a:r>
@@ -25551,8 +25074,7 @@
                   <a:srgbClr val="1B3B6F"/>
                 </a:solidFill>
                 <a:latin typeface="Calibri" pitchFamily="34" charset="0"/>
-                <a:ea typeface="Calibri" pitchFamily="34" charset="-122"/>
-                <a:cs typeface="Calibri" pitchFamily="34" charset="-120"/>
+                <a:cs typeface="Amiri" pitchFamily="2" charset="-78"/>
               </a:rPr>
               <a:t>What does </a:t>
             </a:r>
@@ -25564,9 +25086,8 @@
                 <a:solidFill>
                   <a:srgbClr val="1B3B6F"/>
                 </a:solidFill>
-                <a:latin typeface="Amiri" pitchFamily="34" charset="0"/>
-                <a:ea typeface="Amiri" pitchFamily="34" charset="-122"/>
-                <a:cs typeface="Amiri" pitchFamily="34" charset="-120"/>
+                <a:latin typeface="Amiri" pitchFamily="2" charset="-78"/>
+                <a:cs typeface="Amiri" pitchFamily="2" charset="-78"/>
               </a:rPr>
               <a:t>التَّعَافِي مِنَ الأَخْطَاءِ</a:t>
             </a:r>
@@ -25579,8 +25100,7 @@
                   <a:srgbClr val="1B3B6F"/>
                 </a:solidFill>
                 <a:latin typeface="Calibri" pitchFamily="34" charset="0"/>
-                <a:ea typeface="Calibri" pitchFamily="34" charset="-122"/>
-                <a:cs typeface="Calibri" pitchFamily="34" charset="-120"/>
+                <a:cs typeface="Amiri" pitchFamily="2" charset="-78"/>
               </a:rPr>
               <a:t> mean?</a:t>
             </a:r>
@@ -25643,8 +25163,7 @@
                   <a:srgbClr val="1B3B6F"/>
                 </a:solidFill>
                 <a:latin typeface="Calibri" pitchFamily="34" charset="0"/>
-                <a:ea typeface="Calibri" pitchFamily="34" charset="-122"/>
-                <a:cs typeface="Calibri" pitchFamily="34" charset="-120"/>
+                <a:cs typeface="Amiri" pitchFamily="2" charset="-78"/>
               </a:rPr>
               <a:t>A</a:t>
             </a:r>
@@ -25682,8 +25201,7 @@
                   <a:srgbClr val="9AA1AB"/>
                 </a:solidFill>
                 <a:latin typeface="Calibri" pitchFamily="34" charset="0"/>
-                <a:ea typeface="Calibri" pitchFamily="34" charset="-122"/>
-                <a:cs typeface="Calibri" pitchFamily="34" charset="-120"/>
+                <a:cs typeface="Amiri" pitchFamily="2" charset="-78"/>
               </a:rPr>
               <a:t>avoiding errors</a:t>
             </a:r>
@@ -25746,8 +25264,7 @@
                   <a:srgbClr val="1B3B6F"/>
                 </a:solidFill>
                 <a:latin typeface="Calibri" pitchFamily="34" charset="0"/>
-                <a:ea typeface="Calibri" pitchFamily="34" charset="-122"/>
-                <a:cs typeface="Calibri" pitchFamily="34" charset="-120"/>
+                <a:cs typeface="Amiri" pitchFamily="2" charset="-78"/>
               </a:rPr>
               <a:t>B</a:t>
             </a:r>
@@ -25785,8 +25302,7 @@
                   <a:srgbClr val="9AA1AB"/>
                 </a:solidFill>
                 <a:latin typeface="Calibri" pitchFamily="34" charset="0"/>
-                <a:ea typeface="Calibri" pitchFamily="34" charset="-122"/>
-                <a:cs typeface="Calibri" pitchFamily="34" charset="-120"/>
+                <a:cs typeface="Amiri" pitchFamily="2" charset="-78"/>
               </a:rPr>
               <a:t>counting errors</a:t>
             </a:r>
@@ -25876,8 +25392,7 @@
                   <a:srgbClr val="FFFFFF"/>
                 </a:solidFill>
                 <a:latin typeface="Calibri" pitchFamily="34" charset="0"/>
-                <a:ea typeface="Calibri" pitchFamily="34" charset="-122"/>
-                <a:cs typeface="Calibri" pitchFamily="34" charset="-120"/>
+                <a:cs typeface="Amiri" pitchFamily="2" charset="-78"/>
               </a:rPr>
               <a:t>C</a:t>
             </a:r>
@@ -25915,8 +25430,7 @@
                   <a:srgbClr val="1F2A37"/>
                 </a:solidFill>
                 <a:latin typeface="Calibri" pitchFamily="34" charset="0"/>
-                <a:ea typeface="Calibri" pitchFamily="34" charset="-122"/>
-                <a:cs typeface="Calibri" pitchFamily="34" charset="-120"/>
+                <a:cs typeface="Amiri" pitchFamily="2" charset="-78"/>
               </a:rPr>
               <a:t>recovering from errors</a:t>
             </a:r>
@@ -25954,8 +25468,7 @@
                   <a:srgbClr val="8A6D1E"/>
                 </a:solidFill>
                 <a:latin typeface="Calibri" pitchFamily="34" charset="0"/>
-                <a:ea typeface="Calibri" pitchFamily="34" charset="-122"/>
-                <a:cs typeface="Calibri" pitchFamily="34" charset="-120"/>
+                <a:cs typeface="Amiri" pitchFamily="2" charset="-78"/>
               </a:rPr>
               <a:t>Prepared at home (P6-L06).</a:t>
             </a:r>
@@ -26052,8 +25565,7 @@
                   <a:srgbClr val="FFFFFF"/>
                 </a:solidFill>
                 <a:latin typeface="Calibri" pitchFamily="34" charset="0"/>
-                <a:ea typeface="Calibri" pitchFamily="34" charset="-122"/>
-                <a:cs typeface="Calibri" pitchFamily="34" charset="-120"/>
+                <a:cs typeface="Amiri" pitchFamily="2" charset="-78"/>
               </a:rPr>
               <a:t>4</a:t>
             </a:r>
@@ -26091,8 +25603,7 @@
                   <a:srgbClr val="1B3B6F"/>
                 </a:solidFill>
                 <a:latin typeface="Calibri" pitchFamily="34" charset="0"/>
-                <a:ea typeface="Calibri" pitchFamily="34" charset="-122"/>
-                <a:cs typeface="Calibri" pitchFamily="34" charset="-120"/>
+                <a:cs typeface="Amiri" pitchFamily="2" charset="-78"/>
               </a:rPr>
               <a:t>Choose the concession: ___ </a:t>
             </a:r>
@@ -26104,9 +25615,8 @@
                 <a:solidFill>
                   <a:srgbClr val="1B3B6F"/>
                 </a:solidFill>
-                <a:latin typeface="Amiri" pitchFamily="34" charset="0"/>
-                <a:ea typeface="Amiri" pitchFamily="34" charset="-122"/>
-                <a:cs typeface="Amiri" pitchFamily="34" charset="-120"/>
+                <a:latin typeface="Amiri" pitchFamily="2" charset="-78"/>
+                <a:cs typeface="Amiri" pitchFamily="2" charset="-78"/>
               </a:rPr>
               <a:t>أَنَّ التِّقْنِيَّةَ مُفِيدَةٌ، غَيْرَ أَنَّ</a:t>
             </a:r>
@@ -26119,8 +25629,7 @@
                   <a:srgbClr val="1B3B6F"/>
                 </a:solidFill>
                 <a:latin typeface="Calibri" pitchFamily="34" charset="0"/>
-                <a:ea typeface="Calibri" pitchFamily="34" charset="-122"/>
-                <a:cs typeface="Calibri" pitchFamily="34" charset="-120"/>
+                <a:cs typeface="Amiri" pitchFamily="2" charset="-78"/>
               </a:rPr>
               <a:t> …</a:t>
             </a:r>
@@ -26183,8 +25692,7 @@
                   <a:srgbClr val="1B3B6F"/>
                 </a:solidFill>
                 <a:latin typeface="Calibri" pitchFamily="34" charset="0"/>
-                <a:ea typeface="Calibri" pitchFamily="34" charset="-122"/>
-                <a:cs typeface="Calibri" pitchFamily="34" charset="-120"/>
+                <a:cs typeface="Amiri" pitchFamily="2" charset="-78"/>
               </a:rPr>
               <a:t>A</a:t>
             </a:r>
@@ -26221,9 +25729,8 @@
                 <a:solidFill>
                   <a:srgbClr val="9AA1AB"/>
                 </a:solidFill>
-                <a:latin typeface="Amiri" pitchFamily="34" charset="0"/>
-                <a:ea typeface="Amiri" pitchFamily="34" charset="-122"/>
-                <a:cs typeface="Amiri" pitchFamily="34" charset="-120"/>
+                <a:latin typeface="Amiri" pitchFamily="2" charset="-78"/>
+                <a:cs typeface="Amiri" pitchFamily="2" charset="-78"/>
               </a:rPr>
               <a:t>لِأَنَّ</a:t>
             </a:r>
@@ -26286,8 +25793,7 @@
                   <a:srgbClr val="1B3B6F"/>
                 </a:solidFill>
                 <a:latin typeface="Calibri" pitchFamily="34" charset="0"/>
-                <a:ea typeface="Calibri" pitchFamily="34" charset="-122"/>
-                <a:cs typeface="Calibri" pitchFamily="34" charset="-120"/>
+                <a:cs typeface="Amiri" pitchFamily="2" charset="-78"/>
               </a:rPr>
               <a:t>B</a:t>
             </a:r>
@@ -26324,9 +25830,8 @@
                 <a:solidFill>
                   <a:srgbClr val="9AA1AB"/>
                 </a:solidFill>
-                <a:latin typeface="Amiri" pitchFamily="34" charset="0"/>
-                <a:ea typeface="Amiri" pitchFamily="34" charset="-122"/>
-                <a:cs typeface="Amiri" pitchFamily="34" charset="-120"/>
+                <a:latin typeface="Amiri" pitchFamily="2" charset="-78"/>
+                <a:cs typeface="Amiri" pitchFamily="2" charset="-78"/>
               </a:rPr>
               <a:t>لَوْ</a:t>
             </a:r>
@@ -26416,8 +25921,7 @@
                   <a:srgbClr val="FFFFFF"/>
                 </a:solidFill>
                 <a:latin typeface="Calibri" pitchFamily="34" charset="0"/>
-                <a:ea typeface="Calibri" pitchFamily="34" charset="-122"/>
-                <a:cs typeface="Calibri" pitchFamily="34" charset="-120"/>
+                <a:cs typeface="Amiri" pitchFamily="2" charset="-78"/>
               </a:rPr>
               <a:t>C</a:t>
             </a:r>
@@ -26454,9 +25958,8 @@
                 <a:solidFill>
                   <a:srgbClr val="1F2A37"/>
                 </a:solidFill>
-                <a:latin typeface="Amiri" pitchFamily="34" charset="0"/>
-                <a:ea typeface="Amiri" pitchFamily="34" charset="-122"/>
-                <a:cs typeface="Amiri" pitchFamily="34" charset="-120"/>
+                <a:latin typeface="Amiri" pitchFamily="2" charset="-78"/>
+                <a:cs typeface="Amiri" pitchFamily="2" charset="-78"/>
               </a:rPr>
               <a:t>صَحِيحٌ</a:t>
             </a:r>
@@ -26494,8 +25997,7 @@
                   <a:srgbClr val="8A6D1E"/>
                 </a:solidFill>
                 <a:latin typeface="Calibri" pitchFamily="34" charset="0"/>
-                <a:ea typeface="Calibri" pitchFamily="34" charset="-122"/>
-                <a:cs typeface="Calibri" pitchFamily="34" charset="-120"/>
+                <a:cs typeface="Amiri" pitchFamily="2" charset="-78"/>
               </a:rPr>
               <a:t>P5: ṣaḥīḥun anna … ghayra anna.</a:t>
             </a:r>
@@ -26592,8 +26094,7 @@
                   <a:srgbClr val="FFFFFF"/>
                 </a:solidFill>
                 <a:latin typeface="Calibri" pitchFamily="34" charset="0"/>
-                <a:ea typeface="Calibri" pitchFamily="34" charset="-122"/>
-                <a:cs typeface="Calibri" pitchFamily="34" charset="-120"/>
+                <a:cs typeface="Amiri" pitchFamily="2" charset="-78"/>
               </a:rPr>
               <a:t>5</a:t>
             </a:r>
@@ -26631,8 +26132,7 @@
                   <a:srgbClr val="1B3B6F"/>
                 </a:solidFill>
                 <a:latin typeface="Calibri" pitchFamily="34" charset="0"/>
-                <a:ea typeface="Calibri" pitchFamily="34" charset="-122"/>
-                <a:cs typeface="Calibri" pitchFamily="34" charset="-120"/>
+                <a:cs typeface="Amiri" pitchFamily="2" charset="-78"/>
               </a:rPr>
               <a:t>Complete the demand: </a:t>
             </a:r>
@@ -26644,9 +26144,8 @@
                 <a:solidFill>
                   <a:srgbClr val="1B3B6F"/>
                 </a:solidFill>
-                <a:latin typeface="Amiri" pitchFamily="34" charset="0"/>
-                <a:ea typeface="Amiri" pitchFamily="34" charset="-122"/>
-                <a:cs typeface="Amiri" pitchFamily="34" charset="-120"/>
+                <a:latin typeface="Amiri" pitchFamily="2" charset="-78"/>
+                <a:cs typeface="Amiri" pitchFamily="2" charset="-78"/>
               </a:rPr>
               <a:t>يَتَطَلَّبُ الأَمْرُ أَنْ</a:t>
             </a:r>
@@ -26659,8 +26158,7 @@
                   <a:srgbClr val="1B3B6F"/>
                 </a:solidFill>
                 <a:latin typeface="Calibri" pitchFamily="34" charset="0"/>
-                <a:ea typeface="Calibri" pitchFamily="34" charset="-122"/>
-                <a:cs typeface="Calibri" pitchFamily="34" charset="-120"/>
+                <a:cs typeface="Amiri" pitchFamily="2" charset="-78"/>
               </a:rPr>
               <a:t> ___ </a:t>
             </a:r>
@@ -26672,9 +26170,8 @@
                 <a:solidFill>
                   <a:srgbClr val="1B3B6F"/>
                 </a:solidFill>
-                <a:latin typeface="Amiri" pitchFamily="34" charset="0"/>
-                <a:ea typeface="Amiri" pitchFamily="34" charset="-122"/>
-                <a:cs typeface="Amiri" pitchFamily="34" charset="-120"/>
+                <a:latin typeface="Amiri" pitchFamily="2" charset="-78"/>
+                <a:cs typeface="Amiri" pitchFamily="2" charset="-78"/>
               </a:rPr>
               <a:t>المَدَارِسُ دَعْمًا</a:t>
             </a:r>
@@ -26687,8 +26184,7 @@
                   <a:srgbClr val="1B3B6F"/>
                 </a:solidFill>
                 <a:latin typeface="Calibri" pitchFamily="34" charset="0"/>
-                <a:ea typeface="Calibri" pitchFamily="34" charset="-122"/>
-                <a:cs typeface="Calibri" pitchFamily="34" charset="-120"/>
+                <a:cs typeface="Amiri" pitchFamily="2" charset="-78"/>
               </a:rPr>
               <a:t>.</a:t>
             </a:r>
@@ -26778,8 +26274,7 @@
                   <a:srgbClr val="FFFFFF"/>
                 </a:solidFill>
                 <a:latin typeface="Calibri" pitchFamily="34" charset="0"/>
-                <a:ea typeface="Calibri" pitchFamily="34" charset="-122"/>
-                <a:cs typeface="Calibri" pitchFamily="34" charset="-120"/>
+                <a:cs typeface="Amiri" pitchFamily="2" charset="-78"/>
               </a:rPr>
               <a:t>A</a:t>
             </a:r>
@@ -26816,9 +26311,8 @@
                 <a:solidFill>
                   <a:srgbClr val="1F2A37"/>
                 </a:solidFill>
-                <a:latin typeface="Amiri" pitchFamily="34" charset="0"/>
-                <a:ea typeface="Amiri" pitchFamily="34" charset="-122"/>
-                <a:cs typeface="Amiri" pitchFamily="34" charset="-120"/>
+                <a:latin typeface="Amiri" pitchFamily="2" charset="-78"/>
+                <a:cs typeface="Amiri" pitchFamily="2" charset="-78"/>
               </a:rPr>
               <a:t>تُوَفِّرَ</a:t>
             </a:r>
@@ -26881,8 +26375,7 @@
                   <a:srgbClr val="1B3B6F"/>
                 </a:solidFill>
                 <a:latin typeface="Calibri" pitchFamily="34" charset="0"/>
-                <a:ea typeface="Calibri" pitchFamily="34" charset="-122"/>
-                <a:cs typeface="Calibri" pitchFamily="34" charset="-120"/>
+                <a:cs typeface="Amiri" pitchFamily="2" charset="-78"/>
               </a:rPr>
               <a:t>B</a:t>
             </a:r>
@@ -26919,9 +26412,8 @@
                 <a:solidFill>
                   <a:srgbClr val="9AA1AB"/>
                 </a:solidFill>
-                <a:latin typeface="Amiri" pitchFamily="34" charset="0"/>
-                <a:ea typeface="Amiri" pitchFamily="34" charset="-122"/>
-                <a:cs typeface="Amiri" pitchFamily="34" charset="-120"/>
+                <a:latin typeface="Amiri" pitchFamily="2" charset="-78"/>
+                <a:cs typeface="Amiri" pitchFamily="2" charset="-78"/>
               </a:rPr>
               <a:t>تُوَفِّرُ</a:t>
             </a:r>
@@ -26984,8 +26476,7 @@
                   <a:srgbClr val="1B3B6F"/>
                 </a:solidFill>
                 <a:latin typeface="Calibri" pitchFamily="34" charset="0"/>
-                <a:ea typeface="Calibri" pitchFamily="34" charset="-122"/>
-                <a:cs typeface="Calibri" pitchFamily="34" charset="-120"/>
+                <a:cs typeface="Amiri" pitchFamily="2" charset="-78"/>
               </a:rPr>
               <a:t>C</a:t>
             </a:r>
@@ -27022,9 +26513,8 @@
                 <a:solidFill>
                   <a:srgbClr val="9AA1AB"/>
                 </a:solidFill>
-                <a:latin typeface="Amiri" pitchFamily="34" charset="0"/>
-                <a:ea typeface="Amiri" pitchFamily="34" charset="-122"/>
-                <a:cs typeface="Amiri" pitchFamily="34" charset="-120"/>
+                <a:latin typeface="Amiri" pitchFamily="2" charset="-78"/>
+                <a:cs typeface="Amiri" pitchFamily="2" charset="-78"/>
               </a:rPr>
               <a:t>وَفَّرَتْ</a:t>
             </a:r>
@@ -27062,8 +26552,7 @@
                   <a:srgbClr val="8A6D1E"/>
                 </a:solidFill>
                 <a:latin typeface="Calibri" pitchFamily="34" charset="0"/>
-                <a:ea typeface="Calibri" pitchFamily="34" charset="-122"/>
-                <a:cs typeface="Calibri" pitchFamily="34" charset="-120"/>
+                <a:cs typeface="Amiri" pitchFamily="2" charset="-78"/>
               </a:rPr>
               <a:t>an + verb in -a (P5-L03).</a:t>
             </a:r>
@@ -27135,8 +26624,7 @@
                   <a:srgbClr val="8A6D1E"/>
                 </a:solidFill>
                 <a:latin typeface="Calibri" pitchFamily="34" charset="0"/>
-                <a:ea typeface="Calibri" pitchFamily="34" charset="-122"/>
-                <a:cs typeface="Calibri" pitchFamily="34" charset="-120"/>
+                <a:cs typeface="Amiri" pitchFamily="2" charset="-78"/>
               </a:rPr>
               <a:t>THE KEY IDEA FOR TODAY</a:t>
             </a:r>
@@ -27174,8 +26662,7 @@
                   <a:srgbClr val="1F2A37"/>
                 </a:solidFill>
                 <a:latin typeface="Calibri" pitchFamily="34" charset="0"/>
-                <a:ea typeface="Calibri" pitchFamily="34" charset="-122"/>
-                <a:cs typeface="Calibri" pitchFamily="34" charset="-120"/>
+                <a:cs typeface="Amiri" pitchFamily="2" charset="-78"/>
               </a:rPr>
               <a:t>Development earns the band: opinion → reason → example → analysis.</a:t>
             </a:r>
@@ -27215,9 +26702,8 @@
                 <a:solidFill>
                   <a:srgbClr val="1B3B6F"/>
                 </a:solidFill>
-                <a:latin typeface="Amiri" pitchFamily="34" charset="0"/>
-                <a:ea typeface="Amiri" pitchFamily="34" charset="-122"/>
-                <a:cs typeface="Amiri" pitchFamily="34" charset="-120"/>
+                <a:latin typeface="Amiri" pitchFamily="2" charset="-78"/>
+                <a:cs typeface="Amiri" pitchFamily="2" charset="-78"/>
               </a:rPr>
               <a:t>فِي رَأْيِي … لِأَنَّ … فَمَثَلًا … لِذَا يَتَطَلَّبُ الأَمْرُ أَنْ …</a:t>
             </a:r>
@@ -27255,8 +26741,7 @@
                   <a:srgbClr val="8A93A0"/>
                 </a:solidFill>
                 <a:latin typeface="Calibri" pitchFamily="34" charset="0"/>
-                <a:ea typeface="Calibri" pitchFamily="34" charset="-122"/>
-                <a:cs typeface="Calibri" pitchFamily="34" charset="-120"/>
+                <a:cs typeface="Amiri" pitchFamily="2" charset="-78"/>
               </a:rPr>
               <a:t>5 / 20</a:t>
             </a:r>
@@ -27350,9 +26835,8 @@
                 <a:solidFill>
                   <a:srgbClr val="D4AF37"/>
                 </a:solidFill>
-                <a:latin typeface="Amiri" pitchFamily="34" charset="0"/>
-                <a:ea typeface="Amiri" pitchFamily="34" charset="-122"/>
-                <a:cs typeface="Amiri" pitchFamily="34" charset="-120"/>
+                <a:latin typeface="Amiri" pitchFamily="2" charset="-78"/>
+                <a:cs typeface="Amiri" pitchFamily="2" charset="-78"/>
               </a:rPr>
               <a:t>م</a:t>
             </a:r>
@@ -27390,8 +26874,7 @@
                   <a:srgbClr val="1B3B6F"/>
                 </a:solidFill>
                 <a:latin typeface="Cambria" pitchFamily="34" charset="0"/>
-                <a:ea typeface="Cambria" pitchFamily="34" charset="-122"/>
-                <a:cs typeface="Cambria" pitchFamily="34" charset="-120"/>
+                <a:cs typeface="Amiri" pitchFamily="2" charset="-78"/>
               </a:rPr>
               <a:t>Al Madina Online School</a:t>
             </a:r>
@@ -27429,8 +26912,7 @@
                   <a:srgbClr val="8A6D1E"/>
                 </a:solidFill>
                 <a:latin typeface="Calibri" pitchFamily="34" charset="0"/>
-                <a:ea typeface="Calibri" pitchFamily="34" charset="-122"/>
-                <a:cs typeface="Calibri" pitchFamily="34" charset="-120"/>
+                <a:cs typeface="Amiri" pitchFamily="2" charset="-78"/>
               </a:rPr>
               <a:t>ARABIC DEPARTMENT · MIFTAH ARABIC · IGCSE 0544</a:t>
             </a:r>
@@ -27495,8 +26977,7 @@
                   <a:srgbClr val="FFFFFF"/>
                 </a:solidFill>
                 <a:latin typeface="Calibri" pitchFamily="34" charset="0"/>
-                <a:ea typeface="Calibri" pitchFamily="34" charset="-122"/>
-                <a:cs typeface="Calibri" pitchFamily="34" charset="-120"/>
+                <a:cs typeface="Amiri" pitchFamily="2" charset="-78"/>
               </a:rPr>
               <a:t>P6-L07 · IGCSE Bridge</a:t>
             </a:r>
@@ -27561,8 +27042,7 @@
                   <a:srgbClr val="FFFFFF"/>
                 </a:solidFill>
                 <a:latin typeface="Calibri" pitchFamily="34" charset="0"/>
-                <a:ea typeface="Calibri" pitchFamily="34" charset="-122"/>
-                <a:cs typeface="Calibri" pitchFamily="34" charset="-120"/>
+                <a:cs typeface="Amiri" pitchFamily="2" charset="-78"/>
               </a:rPr>
               <a:t>WELCOME · 1 MIN</a:t>
             </a:r>
@@ -27600,8 +27080,7 @@
                   <a:srgbClr val="5A6472"/>
                 </a:solidFill>
                 <a:latin typeface="Calibri" pitchFamily="34" charset="0"/>
-                <a:ea typeface="Calibri" pitchFamily="34" charset="-122"/>
-                <a:cs typeface="Calibri" pitchFamily="34" charset="-120"/>
+                <a:cs typeface="Amiri" pitchFamily="2" charset="-78"/>
               </a:rPr>
               <a:t>LESSON OBJECTIVES</a:t>
             </a:r>
@@ -27639,8 +27118,7 @@
                   <a:srgbClr val="1B3B6F"/>
                 </a:solidFill>
                 <a:latin typeface="Cambria" pitchFamily="34" charset="0"/>
-                <a:ea typeface="Cambria" pitchFamily="34" charset="-122"/>
-                <a:cs typeface="Cambria" pitchFamily="34" charset="-120"/>
+                <a:cs typeface="Amiri" pitchFamily="2" charset="-78"/>
               </a:rPr>
               <a:t>Objectives and success criteria</a:t>
             </a:r>
@@ -27677,9 +27155,8 @@
                 <a:solidFill>
                   <a:srgbClr val="8A6D1E"/>
                 </a:solidFill>
-                <a:latin typeface="Amiri" pitchFamily="34" charset="0"/>
-                <a:ea typeface="Amiri" pitchFamily="34" charset="-122"/>
-                <a:cs typeface="Amiri" pitchFamily="34" charset="-120"/>
+                <a:latin typeface="Amiri" pitchFamily="2" charset="-78"/>
+                <a:cs typeface="Amiri" pitchFamily="2" charset="-78"/>
               </a:rPr>
               <a:t>الأَهْدَافُ وَمَعَايِيرُ النَّجَاحِ</a:t>
             </a:r>
@@ -27717,8 +27194,7 @@
                   <a:srgbClr val="8A93A0"/>
                 </a:solidFill>
                 <a:latin typeface="Calibri" pitchFamily="34" charset="0"/>
-                <a:ea typeface="Calibri" pitchFamily="34" charset="-122"/>
-                <a:cs typeface="Calibri" pitchFamily="34" charset="-120"/>
+                <a:cs typeface="Amiri" pitchFamily="2" charset="-78"/>
               </a:rPr>
               <a:t>Miftah Arabic · Progression P6 · IGCSE Bridge · P6-L07</a:t>
             </a:r>
@@ -27790,8 +27266,7 @@
                   <a:srgbClr val="1B3B6F"/>
                 </a:solidFill>
                 <a:latin typeface="Calibri" pitchFamily="34" charset="0"/>
-                <a:ea typeface="Calibri" pitchFamily="34" charset="-122"/>
-                <a:cs typeface="Calibri" pitchFamily="34" charset="-120"/>
+                <a:cs typeface="Amiri" pitchFamily="2" charset="-78"/>
               </a:rPr>
               <a:t>TODAY YOU WILL</a:t>
             </a:r>
@@ -27828,9 +27303,8 @@
                 <a:solidFill>
                   <a:srgbClr val="8A6D1E"/>
                 </a:solidFill>
-                <a:latin typeface="Amiri" pitchFamily="34" charset="0"/>
-                <a:ea typeface="Amiri" pitchFamily="34" charset="-122"/>
-                <a:cs typeface="Amiri" pitchFamily="34" charset="-120"/>
+                <a:latin typeface="Amiri" pitchFamily="2" charset="-78"/>
+                <a:cs typeface="Amiri" pitchFamily="2" charset="-78"/>
               </a:rPr>
               <a:t>سَتَتَعَلَّمُ اليَوْمَ</a:t>
             </a:r>
@@ -27893,8 +27367,7 @@
                   <a:srgbClr val="D4AF37"/>
                 </a:solidFill>
                 <a:latin typeface="Calibri" pitchFamily="34" charset="0"/>
-                <a:ea typeface="Calibri" pitchFamily="34" charset="-122"/>
-                <a:cs typeface="Calibri" pitchFamily="34" charset="-120"/>
+                <a:cs typeface="Amiri" pitchFamily="2" charset="-78"/>
               </a:rPr>
               <a:t>1</a:t>
             </a:r>
@@ -27932,8 +27405,7 @@
                   <a:srgbClr val="1F2A37"/>
                 </a:solidFill>
                 <a:latin typeface="Calibri" pitchFamily="34" charset="0"/>
-                <a:ea typeface="Calibri" pitchFamily="34" charset="-122"/>
-                <a:cs typeface="Calibri" pitchFamily="34" charset="-120"/>
+                <a:cs typeface="Amiri" pitchFamily="2" charset="-78"/>
               </a:rPr>
               <a:t>Develop each answer with a point, a reason and an example.</a:t>
             </a:r>
@@ -27996,8 +27468,7 @@
                   <a:srgbClr val="D4AF37"/>
                 </a:solidFill>
                 <a:latin typeface="Calibri" pitchFamily="34" charset="0"/>
-                <a:ea typeface="Calibri" pitchFamily="34" charset="-122"/>
-                <a:cs typeface="Calibri" pitchFamily="34" charset="-120"/>
+                <a:cs typeface="Amiri" pitchFamily="2" charset="-78"/>
               </a:rPr>
               <a:t>2</a:t>
             </a:r>
@@ -28035,8 +27506,7 @@
                   <a:srgbClr val="1F2A37"/>
                 </a:solidFill>
                 <a:latin typeface="Calibri" pitchFamily="34" charset="0"/>
-                <a:ea typeface="Calibri" pitchFamily="34" charset="-122"/>
-                <a:cs typeface="Calibri" pitchFamily="34" charset="-120"/>
+                <a:cs typeface="Amiri" pitchFamily="2" charset="-78"/>
               </a:rPr>
               <a:t>Deploy complex grammar spontaneously for Quality of Language.</a:t>
             </a:r>
@@ -28099,8 +27569,7 @@
                   <a:srgbClr val="D4AF37"/>
                 </a:solidFill>
                 <a:latin typeface="Calibri" pitchFamily="34" charset="0"/>
-                <a:ea typeface="Calibri" pitchFamily="34" charset="-122"/>
-                <a:cs typeface="Calibri" pitchFamily="34" charset="-120"/>
+                <a:cs typeface="Amiri" pitchFamily="2" charset="-78"/>
               </a:rPr>
               <a:t>3</a:t>
             </a:r>
@@ -28138,8 +27607,7 @@
                   <a:srgbClr val="1F2A37"/>
                 </a:solidFill>
                 <a:latin typeface="Calibri" pitchFamily="34" charset="0"/>
-                <a:ea typeface="Calibri" pitchFamily="34" charset="-122"/>
-                <a:cs typeface="Calibri" pitchFamily="34" charset="-120"/>
+                <a:cs typeface="Amiri" pitchFamily="2" charset="-78"/>
               </a:rPr>
               <a:t>Handle unexpected questions with transferable “emergency” sentences.</a:t>
             </a:r>
@@ -28202,8 +27670,7 @@
                   <a:srgbClr val="D4AF37"/>
                 </a:solidFill>
                 <a:latin typeface="Calibri" pitchFamily="34" charset="0"/>
-                <a:ea typeface="Calibri" pitchFamily="34" charset="-122"/>
-                <a:cs typeface="Calibri" pitchFamily="34" charset="-120"/>
+                <a:cs typeface="Amiri" pitchFamily="2" charset="-78"/>
               </a:rPr>
               <a:t>4</a:t>
             </a:r>
@@ -28241,8 +27708,7 @@
                   <a:srgbClr val="1F2A37"/>
                 </a:solidFill>
                 <a:latin typeface="Calibri" pitchFamily="34" charset="0"/>
-                <a:ea typeface="Calibri" pitchFamily="34" charset="-122"/>
-                <a:cs typeface="Calibri" pitchFamily="34" charset="-120"/>
+                <a:cs typeface="Amiri" pitchFamily="2" charset="-78"/>
               </a:rPr>
               <a:t>Apply the topic-conversation mark scheme to self-assess.</a:t>
             </a:r>
@@ -28334,8 +27800,7 @@
                   <a:srgbClr val="FFFFFF"/>
                 </a:solidFill>
                 <a:latin typeface="Calibri" pitchFamily="34" charset="0"/>
-                <a:ea typeface="Calibri" pitchFamily="34" charset="-122"/>
-                <a:cs typeface="Calibri" pitchFamily="34" charset="-120"/>
+                <a:cs typeface="Amiri" pitchFamily="2" charset="-78"/>
               </a:rPr>
               <a:t>CORE</a:t>
             </a:r>
@@ -28373,8 +27838,7 @@
                   <a:srgbClr val="2E8B57"/>
                 </a:solidFill>
                 <a:latin typeface="Calibri" pitchFamily="34" charset="0"/>
-                <a:ea typeface="Calibri" pitchFamily="34" charset="-122"/>
-                <a:cs typeface="Calibri" pitchFamily="34" charset="-120"/>
+                <a:cs typeface="Amiri" pitchFamily="2" charset="-78"/>
               </a:rPr>
               <a:t>Everyone</a:t>
             </a:r>
@@ -28412,8 +27876,7 @@
                   <a:srgbClr val="2E8B57"/>
                 </a:solidFill>
                 <a:latin typeface="Calibri" pitchFamily="34" charset="0"/>
-                <a:ea typeface="Calibri" pitchFamily="34" charset="-122"/>
-                <a:cs typeface="Calibri" pitchFamily="34" charset="-120"/>
+                <a:cs typeface="Amiri" pitchFamily="2" charset="-78"/>
               </a:rPr>
               <a:t>☐  I can answer with an opinion, a reason and an example.</a:t>
             </a:r>
@@ -28451,8 +27914,7 @@
                   <a:srgbClr val="2E8B57"/>
                 </a:solidFill>
                 <a:latin typeface="Calibri" pitchFamily="34" charset="0"/>
-                <a:ea typeface="Calibri" pitchFamily="34" charset="-122"/>
-                <a:cs typeface="Calibri" pitchFamily="34" charset="-120"/>
+                <a:cs typeface="Amiri" pitchFamily="2" charset="-78"/>
               </a:rPr>
               <a:t>☐  I can speak for three sentences or more.</a:t>
             </a:r>
@@ -28544,8 +28006,7 @@
                   <a:srgbClr val="FFFFFF"/>
                 </a:solidFill>
                 <a:latin typeface="Calibri" pitchFamily="34" charset="0"/>
-                <a:ea typeface="Calibri" pitchFamily="34" charset="-122"/>
-                <a:cs typeface="Calibri" pitchFamily="34" charset="-120"/>
+                <a:cs typeface="Amiri" pitchFamily="2" charset="-78"/>
               </a:rPr>
               <a:t>DEVELOP</a:t>
             </a:r>
@@ -28583,8 +28044,7 @@
                   <a:srgbClr val="C9780A"/>
                 </a:solidFill>
                 <a:latin typeface="Calibri" pitchFamily="34" charset="0"/>
-                <a:ea typeface="Calibri" pitchFamily="34" charset="-122"/>
-                <a:cs typeface="Calibri" pitchFamily="34" charset="-120"/>
+                <a:cs typeface="Amiri" pitchFamily="2" charset="-78"/>
               </a:rPr>
               <a:t>Most of us</a:t>
             </a:r>
@@ -28622,8 +28082,7 @@
                   <a:srgbClr val="C9780A"/>
                 </a:solidFill>
                 <a:latin typeface="Calibri" pitchFamily="34" charset="0"/>
-                <a:ea typeface="Calibri" pitchFamily="34" charset="-122"/>
-                <a:cs typeface="Calibri" pitchFamily="34" charset="-120"/>
+                <a:cs typeface="Amiri" pitchFamily="2" charset="-78"/>
               </a:rPr>
               <a:t>☐  I can add a concession (ṣaḥīḥun anna … ghayra anna).</a:t>
             </a:r>
@@ -28661,8 +28120,7 @@
                   <a:srgbClr val="C9780A"/>
                 </a:solidFill>
                 <a:latin typeface="Calibri" pitchFamily="34" charset="0"/>
-                <a:ea typeface="Calibri" pitchFamily="34" charset="-122"/>
-                <a:cs typeface="Calibri" pitchFamily="34" charset="-120"/>
+                <a:cs typeface="Amiri" pitchFamily="2" charset="-78"/>
               </a:rPr>
               <a:t>☐  I can use a pause-and-think phrase instead of going blank.</a:t>
             </a:r>
@@ -28754,8 +28212,7 @@
                   <a:srgbClr val="FFFFFF"/>
                 </a:solidFill>
                 <a:latin typeface="Calibri" pitchFamily="34" charset="0"/>
-                <a:ea typeface="Calibri" pitchFamily="34" charset="-122"/>
-                <a:cs typeface="Calibri" pitchFamily="34" charset="-120"/>
+                <a:cs typeface="Amiri" pitchFamily="2" charset="-78"/>
               </a:rPr>
               <a:t>STRETCH</a:t>
             </a:r>
@@ -28793,8 +28250,7 @@
                   <a:srgbClr val="B83227"/>
                 </a:solidFill>
                 <a:latin typeface="Calibri" pitchFamily="34" charset="0"/>
-                <a:ea typeface="Calibri" pitchFamily="34" charset="-122"/>
-                <a:cs typeface="Calibri" pitchFamily="34" charset="-120"/>
+                <a:cs typeface="Amiri" pitchFamily="2" charset="-78"/>
               </a:rPr>
               <a:t>Aim high</a:t>
             </a:r>
@@ -28832,8 +28288,7 @@
                   <a:srgbClr val="B83227"/>
                 </a:solidFill>
                 <a:latin typeface="Calibri" pitchFamily="34" charset="0"/>
-                <a:ea typeface="Calibri" pitchFamily="34" charset="-122"/>
-                <a:cs typeface="Calibri" pitchFamily="34" charset="-120"/>
+                <a:cs typeface="Amiri" pitchFamily="2" charset="-78"/>
               </a:rPr>
               <a:t>☐  I can use two tenses, a conditional and a subjunctive.</a:t>
             </a:r>
@@ -28871,8 +28326,7 @@
                   <a:srgbClr val="B83227"/>
                 </a:solidFill>
                 <a:latin typeface="Calibri" pitchFamily="34" charset="0"/>
-                <a:ea typeface="Calibri" pitchFamily="34" charset="-122"/>
-                <a:cs typeface="Calibri" pitchFamily="34" charset="-120"/>
+                <a:cs typeface="Amiri" pitchFamily="2" charset="-78"/>
               </a:rPr>
               <a:t>☐  I can self-mark Communication and Quality of Language.</a:t>
             </a:r>
@@ -28910,8 +28364,7 @@
                   <a:srgbClr val="8A93A0"/>
                 </a:solidFill>
                 <a:latin typeface="Calibri" pitchFamily="34" charset="0"/>
-                <a:ea typeface="Calibri" pitchFamily="34" charset="-122"/>
-                <a:cs typeface="Calibri" pitchFamily="34" charset="-120"/>
+                <a:cs typeface="Amiri" pitchFamily="2" charset="-78"/>
               </a:rPr>
               <a:t>6 / 20</a:t>
             </a:r>
@@ -29033,8 +28486,7 @@
                   <a:srgbClr val="0D1F3C"/>
                 </a:solidFill>
                 <a:latin typeface="Calibri" pitchFamily="34" charset="0"/>
-                <a:ea typeface="Calibri" pitchFamily="34" charset="-122"/>
-                <a:cs typeface="Calibri" pitchFamily="34" charset="-120"/>
+                <a:cs typeface="Amiri" pitchFamily="2" charset="-78"/>
               </a:rPr>
               <a:t>TEACHER INSTRUCTION · 7 MIN</a:t>
             </a:r>
@@ -29072,8 +28524,7 @@
                   <a:srgbClr val="FFFFFF"/>
                 </a:solidFill>
                 <a:latin typeface="Cambria" pitchFamily="34" charset="0"/>
-                <a:ea typeface="Cambria" pitchFamily="34" charset="-122"/>
-                <a:cs typeface="Cambria" pitchFamily="34" charset="-120"/>
+                <a:cs typeface="Amiri" pitchFamily="2" charset="-78"/>
               </a:rPr>
               <a:t>Key words for today</a:t>
             </a:r>
@@ -29110,9 +28561,8 @@
                 <a:solidFill>
                   <a:srgbClr val="D4AF37"/>
                 </a:solidFill>
-                <a:latin typeface="Amiri" pitchFamily="34" charset="0"/>
-                <a:ea typeface="Amiri" pitchFamily="34" charset="-122"/>
-                <a:cs typeface="Amiri" pitchFamily="34" charset="-120"/>
+                <a:latin typeface="Amiri" pitchFamily="2" charset="-78"/>
+                <a:cs typeface="Amiri" pitchFamily="2" charset="-78"/>
               </a:rPr>
               <a:t>كَلِمَاتُ الدَّرْسِ</a:t>
             </a:r>
@@ -29150,8 +28600,7 @@
                   <a:srgbClr val="C6D2E6"/>
                 </a:solidFill>
                 <a:latin typeface="Calibri" pitchFamily="34" charset="0"/>
-                <a:ea typeface="Calibri" pitchFamily="34" charset="-122"/>
-                <a:cs typeface="Calibri" pitchFamily="34" charset="-120"/>
+                <a:cs typeface="Amiri" pitchFamily="2" charset="-78"/>
               </a:rPr>
               <a:t>8 exam words from the website in one group. </a:t>
             </a:r>
@@ -29216,8 +28665,7 @@
                   <a:srgbClr val="D4AF37"/>
                 </a:solidFill>
                 <a:latin typeface="Calibri" pitchFamily="34" charset="0"/>
-                <a:ea typeface="Calibri" pitchFamily="34" charset="-122"/>
-                <a:cs typeface="Calibri" pitchFamily="34" charset="-120"/>
+                <a:cs typeface="Amiri" pitchFamily="2" charset="-78"/>
               </a:rPr>
               <a:t>GROUP 1</a:t>
             </a:r>
@@ -29233,8 +28681,7 @@
                   <a:srgbClr val="FFFFFF"/>
                 </a:solidFill>
                 <a:latin typeface="Calibri" pitchFamily="34" charset="0"/>
-                <a:ea typeface="Calibri" pitchFamily="34" charset="-122"/>
-                <a:cs typeface="Calibri" pitchFamily="34" charset="-120"/>
+                <a:cs typeface="Amiri" pitchFamily="2" charset="-78"/>
               </a:rPr>
               <a:t>Extended speaking · 8</a:t>
             </a:r>
@@ -29299,8 +28746,7 @@
                   <a:srgbClr val="2E8B57"/>
                 </a:solidFill>
                 <a:latin typeface="Calibri" pitchFamily="34" charset="0"/>
-                <a:ea typeface="Calibri" pitchFamily="34" charset="-122"/>
-                <a:cs typeface="Calibri" pitchFamily="34" charset="-120"/>
+                <a:cs typeface="Amiri" pitchFamily="2" charset="-78"/>
               </a:rPr>
               <a:t>BRIDGE FROM URDU</a:t>
             </a:r>
@@ -29337,9 +28783,8 @@
                 <a:solidFill>
                   <a:srgbClr val="1B3B6F"/>
                 </a:solidFill>
-                <a:latin typeface="Amiri" pitchFamily="34" charset="0"/>
-                <a:ea typeface="Amiri" pitchFamily="34" charset="-122"/>
-                <a:cs typeface="Amiri" pitchFamily="34" charset="-120"/>
+                <a:latin typeface="Amiri" pitchFamily="2" charset="-78"/>
+                <a:cs typeface="Amiri" pitchFamily="2" charset="-78"/>
               </a:rPr>
               <a:t>رَأْيٌ</a:t>
             </a:r>
@@ -29376,9 +28821,8 @@
                 <a:solidFill>
                   <a:srgbClr val="2E8B57"/>
                 </a:solidFill>
-                <a:latin typeface="Amiri" pitchFamily="34" charset="0"/>
-                <a:ea typeface="Amiri" pitchFamily="34" charset="-122"/>
-                <a:cs typeface="Amiri" pitchFamily="34" charset="-120"/>
+                <a:latin typeface="Amiri" pitchFamily="2" charset="-78"/>
+                <a:cs typeface="Amiri" pitchFamily="2" charset="-78"/>
               </a:rPr>
               <a:t>‎رائے‎ </a:t>
             </a:r>
@@ -29391,8 +28835,7 @@
                   <a:srgbClr val="2E8B57"/>
                 </a:solidFill>
                 <a:latin typeface="Calibri" pitchFamily="34" charset="0"/>
-                <a:ea typeface="Calibri" pitchFamily="34" charset="-122"/>
-                <a:cs typeface="Calibri" pitchFamily="34" charset="-120"/>
+                <a:cs typeface="Amiri" pitchFamily="2" charset="-78"/>
               </a:rPr>
               <a:t> rāy · opinion</a:t>
             </a:r>
@@ -29429,9 +28872,8 @@
                 <a:solidFill>
                   <a:srgbClr val="1B3B6F"/>
                 </a:solidFill>
-                <a:latin typeface="Amiri" pitchFamily="34" charset="0"/>
-                <a:ea typeface="Amiri" pitchFamily="34" charset="-122"/>
-                <a:cs typeface="Amiri" pitchFamily="34" charset="-120"/>
+                <a:latin typeface="Amiri" pitchFamily="2" charset="-78"/>
+                <a:cs typeface="Amiri" pitchFamily="2" charset="-78"/>
               </a:rPr>
               <a:t>مِثَالٌ</a:t>
             </a:r>
@@ -29468,9 +28910,8 @@
                 <a:solidFill>
                   <a:srgbClr val="2E8B57"/>
                 </a:solidFill>
-                <a:latin typeface="Amiri" pitchFamily="34" charset="0"/>
-                <a:ea typeface="Amiri" pitchFamily="34" charset="-122"/>
-                <a:cs typeface="Amiri" pitchFamily="34" charset="-120"/>
+                <a:latin typeface="Amiri" pitchFamily="2" charset="-78"/>
+                <a:cs typeface="Amiri" pitchFamily="2" charset="-78"/>
               </a:rPr>
               <a:t>‎مثال‎ </a:t>
             </a:r>
@@ -29483,8 +28924,7 @@
                   <a:srgbClr val="2E8B57"/>
                 </a:solidFill>
                 <a:latin typeface="Calibri" pitchFamily="34" charset="0"/>
-                <a:ea typeface="Calibri" pitchFamily="34" charset="-122"/>
-                <a:cs typeface="Calibri" pitchFamily="34" charset="-120"/>
+                <a:cs typeface="Amiri" pitchFamily="2" charset="-78"/>
               </a:rPr>
               <a:t> misāl · example</a:t>
             </a:r>
@@ -29521,9 +28961,8 @@
                 <a:solidFill>
                   <a:srgbClr val="1B3B6F"/>
                 </a:solidFill>
-                <a:latin typeface="Amiri" pitchFamily="34" charset="0"/>
-                <a:ea typeface="Amiri" pitchFamily="34" charset="-122"/>
-                <a:cs typeface="Amiri" pitchFamily="34" charset="-120"/>
+                <a:latin typeface="Amiri" pitchFamily="2" charset="-78"/>
+                <a:cs typeface="Amiri" pitchFamily="2" charset="-78"/>
               </a:rPr>
               <a:t>سَبَبٌ</a:t>
             </a:r>
@@ -29560,9 +28999,8 @@
                 <a:solidFill>
                   <a:srgbClr val="2E8B57"/>
                 </a:solidFill>
-                <a:latin typeface="Amiri" pitchFamily="34" charset="0"/>
-                <a:ea typeface="Amiri" pitchFamily="34" charset="-122"/>
-                <a:cs typeface="Amiri" pitchFamily="34" charset="-120"/>
+                <a:latin typeface="Amiri" pitchFamily="2" charset="-78"/>
+                <a:cs typeface="Amiri" pitchFamily="2" charset="-78"/>
               </a:rPr>
               <a:t>‎سبب‎ </a:t>
             </a:r>
@@ -29575,8 +29013,7 @@
                   <a:srgbClr val="2E8B57"/>
                 </a:solidFill>
                 <a:latin typeface="Calibri" pitchFamily="34" charset="0"/>
-                <a:ea typeface="Calibri" pitchFamily="34" charset="-122"/>
-                <a:cs typeface="Calibri" pitchFamily="34" charset="-120"/>
+                <a:cs typeface="Amiri" pitchFamily="2" charset="-78"/>
               </a:rPr>
               <a:t> sabab · reason, cause</a:t>
             </a:r>
@@ -29613,9 +29050,8 @@
                 <a:solidFill>
                   <a:srgbClr val="1B3B6F"/>
                 </a:solidFill>
-                <a:latin typeface="Amiri" pitchFamily="34" charset="0"/>
-                <a:ea typeface="Amiri" pitchFamily="34" charset="-122"/>
-                <a:cs typeface="Amiri" pitchFamily="34" charset="-120"/>
+                <a:latin typeface="Amiri" pitchFamily="2" charset="-78"/>
+                <a:cs typeface="Amiri" pitchFamily="2" charset="-78"/>
               </a:rPr>
               <a:t>مَوْضُوعٌ</a:t>
             </a:r>
@@ -29652,9 +29088,8 @@
                 <a:solidFill>
                   <a:srgbClr val="2E8B57"/>
                 </a:solidFill>
-                <a:latin typeface="Amiri" pitchFamily="34" charset="0"/>
-                <a:ea typeface="Amiri" pitchFamily="34" charset="-122"/>
-                <a:cs typeface="Amiri" pitchFamily="34" charset="-120"/>
+                <a:latin typeface="Amiri" pitchFamily="2" charset="-78"/>
+                <a:cs typeface="Amiri" pitchFamily="2" charset="-78"/>
               </a:rPr>
               <a:t>‎موضوع‎ </a:t>
             </a:r>
@@ -29667,8 +29102,7 @@
                   <a:srgbClr val="2E8B57"/>
                 </a:solidFill>
                 <a:latin typeface="Calibri" pitchFamily="34" charset="0"/>
-                <a:ea typeface="Calibri" pitchFamily="34" charset="-122"/>
-                <a:cs typeface="Calibri" pitchFamily="34" charset="-120"/>
+                <a:cs typeface="Amiri" pitchFamily="2" charset="-78"/>
               </a:rPr>
               <a:t> mauzū · topic</a:t>
             </a:r>
@@ -29705,9 +29139,8 @@
                 <a:solidFill>
                   <a:srgbClr val="1B3B6F"/>
                 </a:solidFill>
-                <a:latin typeface="Amiri" pitchFamily="34" charset="0"/>
-                <a:ea typeface="Amiri" pitchFamily="34" charset="-122"/>
-                <a:cs typeface="Amiri" pitchFamily="34" charset="-120"/>
+                <a:latin typeface="Amiri" pitchFamily="2" charset="-78"/>
+                <a:cs typeface="Amiri" pitchFamily="2" charset="-78"/>
               </a:rPr>
               <a:t>دَلِيلٌ</a:t>
             </a:r>
@@ -29744,9 +29177,8 @@
                 <a:solidFill>
                   <a:srgbClr val="2E8B57"/>
                 </a:solidFill>
-                <a:latin typeface="Amiri" pitchFamily="34" charset="0"/>
-                <a:ea typeface="Amiri" pitchFamily="34" charset="-122"/>
-                <a:cs typeface="Amiri" pitchFamily="34" charset="-120"/>
+                <a:latin typeface="Amiri" pitchFamily="2" charset="-78"/>
+                <a:cs typeface="Amiri" pitchFamily="2" charset="-78"/>
               </a:rPr>
               <a:t>‎دلیل‎ </a:t>
             </a:r>
@@ -29759,8 +29191,7 @@
                   <a:srgbClr val="2E8B57"/>
                 </a:solidFill>
                 <a:latin typeface="Calibri" pitchFamily="34" charset="0"/>
-                <a:ea typeface="Calibri" pitchFamily="34" charset="-122"/>
-                <a:cs typeface="Calibri" pitchFamily="34" charset="-120"/>
+                <a:cs typeface="Amiri" pitchFamily="2" charset="-78"/>
               </a:rPr>
               <a:t> dalīl · evidence, argument</a:t>
             </a:r>
@@ -29798,8 +29229,7 @@
                   <a:srgbClr val="8A93A0"/>
                 </a:solidFill>
                 <a:latin typeface="Calibri" pitchFamily="34" charset="0"/>
-                <a:ea typeface="Calibri" pitchFamily="34" charset="-122"/>
-                <a:cs typeface="Calibri" pitchFamily="34" charset="-120"/>
+                <a:cs typeface="Amiri" pitchFamily="2" charset="-78"/>
               </a:rPr>
               <a:t>7 / 20</a:t>
             </a:r>
@@ -29893,9 +29323,8 @@
                 <a:solidFill>
                   <a:srgbClr val="D4AF37"/>
                 </a:solidFill>
-                <a:latin typeface="Amiri" pitchFamily="34" charset="0"/>
-                <a:ea typeface="Amiri" pitchFamily="34" charset="-122"/>
-                <a:cs typeface="Amiri" pitchFamily="34" charset="-120"/>
+                <a:latin typeface="Amiri" pitchFamily="2" charset="-78"/>
+                <a:cs typeface="Amiri" pitchFamily="2" charset="-78"/>
               </a:rPr>
               <a:t>م</a:t>
             </a:r>
@@ -29933,8 +29362,7 @@
                   <a:srgbClr val="1B3B6F"/>
                 </a:solidFill>
                 <a:latin typeface="Cambria" pitchFamily="34" charset="0"/>
-                <a:ea typeface="Cambria" pitchFamily="34" charset="-122"/>
-                <a:cs typeface="Cambria" pitchFamily="34" charset="-120"/>
+                <a:cs typeface="Amiri" pitchFamily="2" charset="-78"/>
               </a:rPr>
               <a:t>Al Madina Online School</a:t>
             </a:r>
@@ -29972,8 +29400,7 @@
                   <a:srgbClr val="8A6D1E"/>
                 </a:solidFill>
                 <a:latin typeface="Calibri" pitchFamily="34" charset="0"/>
-                <a:ea typeface="Calibri" pitchFamily="34" charset="-122"/>
-                <a:cs typeface="Calibri" pitchFamily="34" charset="-120"/>
+                <a:cs typeface="Amiri" pitchFamily="2" charset="-78"/>
               </a:rPr>
               <a:t>ARABIC DEPARTMENT · MIFTAH ARABIC · IGCSE 0544</a:t>
             </a:r>
@@ -30038,8 +29465,7 @@
                   <a:srgbClr val="FFFFFF"/>
                 </a:solidFill>
                 <a:latin typeface="Calibri" pitchFamily="34" charset="0"/>
-                <a:ea typeface="Calibri" pitchFamily="34" charset="-122"/>
-                <a:cs typeface="Calibri" pitchFamily="34" charset="-120"/>
+                <a:cs typeface="Amiri" pitchFamily="2" charset="-78"/>
               </a:rPr>
               <a:t>P6-L07 · IGCSE Bridge</a:t>
             </a:r>
@@ -30104,8 +29530,7 @@
                   <a:srgbClr val="FFFFFF"/>
                 </a:solidFill>
                 <a:latin typeface="Calibri" pitchFamily="34" charset="0"/>
-                <a:ea typeface="Calibri" pitchFamily="34" charset="-122"/>
-                <a:cs typeface="Calibri" pitchFamily="34" charset="-120"/>
+                <a:cs typeface="Amiri" pitchFamily="2" charset="-78"/>
               </a:rPr>
               <a:t>TEACHER INSTRUCTION · 2 MIN</a:t>
             </a:r>
@@ -30143,8 +29568,7 @@
                   <a:srgbClr val="1B3B6F"/>
                 </a:solidFill>
                 <a:latin typeface="Calibri" pitchFamily="34" charset="0"/>
-                <a:ea typeface="Calibri" pitchFamily="34" charset="-122"/>
-                <a:cs typeface="Calibri" pitchFamily="34" charset="-120"/>
+                <a:cs typeface="Amiri" pitchFamily="2" charset="-78"/>
               </a:rPr>
               <a:t>KEY WORDS · GROUP 1</a:t>
             </a:r>
@@ -30182,8 +29606,7 @@
                   <a:srgbClr val="1B3B6F"/>
                 </a:solidFill>
                 <a:latin typeface="Cambria" pitchFamily="34" charset="0"/>
-                <a:ea typeface="Cambria" pitchFamily="34" charset="-122"/>
-                <a:cs typeface="Cambria" pitchFamily="34" charset="-120"/>
+                <a:cs typeface="Amiri" pitchFamily="2" charset="-78"/>
               </a:rPr>
               <a:t>Extended speaking (1 of 2)</a:t>
             </a:r>
@@ -30220,9 +29643,8 @@
                 <a:solidFill>
                   <a:srgbClr val="8A6D1E"/>
                 </a:solidFill>
-                <a:latin typeface="Amiri" pitchFamily="34" charset="0"/>
-                <a:ea typeface="Amiri" pitchFamily="34" charset="-122"/>
-                <a:cs typeface="Amiri" pitchFamily="34" charset="-120"/>
+                <a:latin typeface="Amiri" pitchFamily="2" charset="-78"/>
+                <a:cs typeface="Amiri" pitchFamily="2" charset="-78"/>
               </a:rPr>
               <a:t>كَلِمَاتُ الدَّرْسِ</a:t>
             </a:r>
@@ -30260,8 +29682,7 @@
                   <a:srgbClr val="8A93A0"/>
                 </a:solidFill>
                 <a:latin typeface="Calibri" pitchFamily="34" charset="0"/>
-                <a:ea typeface="Calibri" pitchFamily="34" charset="-122"/>
-                <a:cs typeface="Calibri" pitchFamily="34" charset="-120"/>
+                <a:cs typeface="Amiri" pitchFamily="2" charset="-78"/>
               </a:rPr>
               <a:t>Miftah Arabic · Progression P6 · IGCSE Bridge · P6-L07</a:t>
             </a:r>
@@ -30358,8 +29779,7 @@
                   <a:srgbClr val="1B3B6F"/>
                 </a:solidFill>
                 <a:latin typeface="Calibri" pitchFamily="34" charset="0"/>
-                <a:ea typeface="Calibri" pitchFamily="34" charset="-122"/>
-                <a:cs typeface="Calibri" pitchFamily="34" charset="-120"/>
+                <a:cs typeface="Amiri" pitchFamily="2" charset="-78"/>
               </a:rPr>
               <a:t>1</a:t>
             </a:r>
@@ -30424,8 +29844,7 @@
                   <a:srgbClr val="FFFFFF"/>
                 </a:solidFill>
                 <a:latin typeface="Calibri" pitchFamily="34" charset="0"/>
-                <a:ea typeface="Calibri" pitchFamily="34" charset="-122"/>
-                <a:cs typeface="Calibri" pitchFamily="34" charset="-120"/>
+                <a:cs typeface="Amiri" pitchFamily="2" charset="-78"/>
               </a:rPr>
               <a:t>CORE</a:t>
             </a:r>
@@ -30462,9 +29881,8 @@
                 <a:solidFill>
                   <a:srgbClr val="1B3B6F"/>
                 </a:solidFill>
-                <a:latin typeface="Amiri" pitchFamily="34" charset="0"/>
-                <a:ea typeface="Amiri" pitchFamily="34" charset="-122"/>
-                <a:cs typeface="Amiri" pitchFamily="34" charset="-120"/>
+                <a:latin typeface="Amiri" pitchFamily="2" charset="-78"/>
+                <a:cs typeface="Amiri" pitchFamily="2" charset="-78"/>
               </a:rPr>
               <a:t>المُحَادَثَةُ المَوْضُوعِيَّةُ</a:t>
             </a:r>
@@ -30502,8 +29920,7 @@
                   <a:srgbClr val="1F2A37"/>
                 </a:solidFill>
                 <a:latin typeface="Calibri" pitchFamily="34" charset="0"/>
-                <a:ea typeface="Calibri" pitchFamily="34" charset="-122"/>
-                <a:cs typeface="Calibri" pitchFamily="34" charset="-120"/>
+                <a:cs typeface="Amiri" pitchFamily="2" charset="-78"/>
               </a:rPr>
               <a:t>topic conversation</a:t>
             </a:r>
@@ -30519,8 +29936,7 @@
                   <a:srgbClr val="5A6472"/>
                 </a:solidFill>
                 <a:latin typeface="Calibri" pitchFamily="34" charset="0"/>
-                <a:ea typeface="Calibri" pitchFamily="34" charset="-122"/>
-                <a:cs typeface="Calibri" pitchFamily="34" charset="-120"/>
+                <a:cs typeface="Amiri" pitchFamily="2" charset="-78"/>
               </a:rPr>
               <a:t>al-mu-ḥā-da-tha-tu al-maw-ḍū-ʿiy-ya-tu</a:t>
             </a:r>
@@ -30617,8 +30033,7 @@
                   <a:srgbClr val="1B3B6F"/>
                 </a:solidFill>
                 <a:latin typeface="Calibri" pitchFamily="34" charset="0"/>
-                <a:ea typeface="Calibri" pitchFamily="34" charset="-122"/>
-                <a:cs typeface="Calibri" pitchFamily="34" charset="-120"/>
+                <a:cs typeface="Amiri" pitchFamily="2" charset="-78"/>
               </a:rPr>
               <a:t>2</a:t>
             </a:r>
@@ -30683,8 +30098,7 @@
                   <a:srgbClr val="FFFFFF"/>
                 </a:solidFill>
                 <a:latin typeface="Calibri" pitchFamily="34" charset="0"/>
-                <a:ea typeface="Calibri" pitchFamily="34" charset="-122"/>
-                <a:cs typeface="Calibri" pitchFamily="34" charset="-120"/>
+                <a:cs typeface="Amiri" pitchFamily="2" charset="-78"/>
               </a:rPr>
               <a:t>CORE</a:t>
             </a:r>
@@ -30721,9 +30135,8 @@
                 <a:solidFill>
                   <a:srgbClr val="1B3B6F"/>
                 </a:solidFill>
-                <a:latin typeface="Amiri" pitchFamily="34" charset="0"/>
-                <a:ea typeface="Amiri" pitchFamily="34" charset="-122"/>
-                <a:cs typeface="Amiri" pitchFamily="34" charset="-120"/>
+                <a:latin typeface="Amiri" pitchFamily="2" charset="-78"/>
+                <a:cs typeface="Amiri" pitchFamily="2" charset="-78"/>
               </a:rPr>
               <a:t>التَّوْسِيعُ فِي الإِجَابَةِ</a:t>
             </a:r>
@@ -30761,8 +30174,7 @@
                   <a:srgbClr val="1F2A37"/>
                 </a:solidFill>
                 <a:latin typeface="Calibri" pitchFamily="34" charset="0"/>
-                <a:ea typeface="Calibri" pitchFamily="34" charset="-122"/>
-                <a:cs typeface="Calibri" pitchFamily="34" charset="-120"/>
+                <a:cs typeface="Amiri" pitchFamily="2" charset="-78"/>
               </a:rPr>
               <a:t>extending the answer</a:t>
             </a:r>
@@ -30778,8 +30190,7 @@
                   <a:srgbClr val="5A6472"/>
                 </a:solidFill>
                 <a:latin typeface="Calibri" pitchFamily="34" charset="0"/>
-                <a:ea typeface="Calibri" pitchFamily="34" charset="-122"/>
-                <a:cs typeface="Calibri" pitchFamily="34" charset="-120"/>
+                <a:cs typeface="Amiri" pitchFamily="2" charset="-78"/>
               </a:rPr>
               <a:t>at-taw-sī-ʿu fī al-i-jā-ba-ti</a:t>
             </a:r>
@@ -30876,8 +30287,7 @@
                   <a:srgbClr val="1B3B6F"/>
                 </a:solidFill>
                 <a:latin typeface="Calibri" pitchFamily="34" charset="0"/>
-                <a:ea typeface="Calibri" pitchFamily="34" charset="-122"/>
-                <a:cs typeface="Calibri" pitchFamily="34" charset="-120"/>
+                <a:cs typeface="Amiri" pitchFamily="2" charset="-78"/>
               </a:rPr>
               <a:t>3</a:t>
             </a:r>
@@ -30942,8 +30352,7 @@
                   <a:srgbClr val="8A6D1E"/>
                 </a:solidFill>
                 <a:latin typeface="Calibri" pitchFamily="34" charset="0"/>
-                <a:ea typeface="Calibri" pitchFamily="34" charset="-122"/>
-                <a:cs typeface="Calibri" pitchFamily="34" charset="-120"/>
+                <a:cs typeface="Amiri" pitchFamily="2" charset="-78"/>
               </a:rPr>
               <a:t>sg · pl</a:t>
             </a:r>
@@ -31008,8 +30417,7 @@
                   <a:srgbClr val="FFFFFF"/>
                 </a:solidFill>
                 <a:latin typeface="Calibri" pitchFamily="34" charset="0"/>
-                <a:ea typeface="Calibri" pitchFamily="34" charset="-122"/>
-                <a:cs typeface="Calibri" pitchFamily="34" charset="-120"/>
+                <a:cs typeface="Amiri" pitchFamily="2" charset="-78"/>
               </a:rPr>
               <a:t>CORE</a:t>
             </a:r>
@@ -31046,9 +30454,8 @@
                 <a:solidFill>
                   <a:srgbClr val="1B3B6F"/>
                 </a:solidFill>
-                <a:latin typeface="Amiri" pitchFamily="34" charset="0"/>
-                <a:ea typeface="Amiri" pitchFamily="34" charset="-122"/>
-                <a:cs typeface="Amiri" pitchFamily="34" charset="-120"/>
+                <a:latin typeface="Amiri" pitchFamily="2" charset="-78"/>
+                <a:cs typeface="Amiri" pitchFamily="2" charset="-78"/>
               </a:rPr>
               <a:t>الرَّأْيُ مَعَ الأَسْبَابِ</a:t>
             </a:r>
@@ -31086,8 +30493,7 @@
                   <a:srgbClr val="1F2A37"/>
                 </a:solidFill>
                 <a:latin typeface="Calibri" pitchFamily="34" charset="0"/>
-                <a:ea typeface="Calibri" pitchFamily="34" charset="-122"/>
-                <a:cs typeface="Calibri" pitchFamily="34" charset="-120"/>
+                <a:cs typeface="Amiri" pitchFamily="2" charset="-78"/>
               </a:rPr>
               <a:t>opinion with reasons</a:t>
             </a:r>
@@ -31103,8 +30509,7 @@
                   <a:srgbClr val="5A6472"/>
                 </a:solidFill>
                 <a:latin typeface="Calibri" pitchFamily="34" charset="0"/>
-                <a:ea typeface="Calibri" pitchFamily="34" charset="-122"/>
-                <a:cs typeface="Calibri" pitchFamily="34" charset="-120"/>
+                <a:cs typeface="Amiri" pitchFamily="2" charset="-78"/>
               </a:rPr>
               <a:t>ar-raʾ-yu ma-ʿa al-as-bā-bi</a:t>
             </a:r>
@@ -31169,8 +30574,7 @@
                   <a:srgbClr val="8A6D1E"/>
                 </a:solidFill>
                 <a:latin typeface="Calibri" pitchFamily="34" charset="0"/>
-                <a:ea typeface="Calibri" pitchFamily="34" charset="-122"/>
-                <a:cs typeface="Calibri" pitchFamily="34" charset="-120"/>
+                <a:cs typeface="Amiri" pitchFamily="2" charset="-78"/>
               </a:rPr>
               <a:t>pl.</a:t>
             </a:r>
@@ -31207,9 +30611,8 @@
                 <a:solidFill>
                   <a:srgbClr val="1B3B6F"/>
                 </a:solidFill>
-                <a:latin typeface="Amiri" pitchFamily="34" charset="0"/>
-                <a:ea typeface="Amiri" pitchFamily="34" charset="-122"/>
-                <a:cs typeface="Amiri" pitchFamily="34" charset="-120"/>
+                <a:latin typeface="Amiri" pitchFamily="2" charset="-78"/>
+                <a:cs typeface="Amiri" pitchFamily="2" charset="-78"/>
               </a:rPr>
               <a:t>آرَاءٌ</a:t>
             </a:r>
@@ -31274,8 +30677,7 @@
                   <a:srgbClr val="8A6D1E"/>
                 </a:solidFill>
                 <a:latin typeface="Calibri" pitchFamily="34" charset="0"/>
-                <a:ea typeface="Calibri" pitchFamily="34" charset="-122"/>
-                <a:cs typeface="Calibri" pitchFamily="34" charset="-120"/>
+                <a:cs typeface="Amiri" pitchFamily="2" charset="-78"/>
               </a:rPr>
               <a:t>sg.</a:t>
             </a:r>
@@ -31312,9 +30714,8 @@
                 <a:solidFill>
                   <a:srgbClr val="1B3B6F"/>
                 </a:solidFill>
-                <a:latin typeface="Amiri" pitchFamily="34" charset="0"/>
-                <a:ea typeface="Amiri" pitchFamily="34" charset="-122"/>
-                <a:cs typeface="Amiri" pitchFamily="34" charset="-120"/>
+                <a:latin typeface="Amiri" pitchFamily="2" charset="-78"/>
+                <a:cs typeface="Amiri" pitchFamily="2" charset="-78"/>
               </a:rPr>
               <a:t>سَبَبٌ</a:t>
             </a:r>
@@ -31411,8 +30812,7 @@
                   <a:srgbClr val="1B3B6F"/>
                 </a:solidFill>
                 <a:latin typeface="Calibri" pitchFamily="34" charset="0"/>
-                <a:ea typeface="Calibri" pitchFamily="34" charset="-122"/>
-                <a:cs typeface="Calibri" pitchFamily="34" charset="-120"/>
+                <a:cs typeface="Amiri" pitchFamily="2" charset="-78"/>
               </a:rPr>
               <a:t>4</a:t>
             </a:r>
@@ -31477,8 +30877,7 @@
                   <a:srgbClr val="8A6D1E"/>
                 </a:solidFill>
                 <a:latin typeface="Calibri" pitchFamily="34" charset="0"/>
-                <a:ea typeface="Calibri" pitchFamily="34" charset="-122"/>
-                <a:cs typeface="Calibri" pitchFamily="34" charset="-120"/>
+                <a:cs typeface="Amiri" pitchFamily="2" charset="-78"/>
               </a:rPr>
               <a:t>pl · sg</a:t>
             </a:r>
@@ -31543,8 +30942,7 @@
                   <a:srgbClr val="FFFFFF"/>
                 </a:solidFill>
                 <a:latin typeface="Calibri" pitchFamily="34" charset="0"/>
-                <a:ea typeface="Calibri" pitchFamily="34" charset="-122"/>
-                <a:cs typeface="Calibri" pitchFamily="34" charset="-120"/>
+                <a:cs typeface="Amiri" pitchFamily="2" charset="-78"/>
               </a:rPr>
               <a:t>CORE</a:t>
             </a:r>
@@ -31581,9 +30979,8 @@
                 <a:solidFill>
                   <a:srgbClr val="1B3B6F"/>
                 </a:solidFill>
-                <a:latin typeface="Amiri" pitchFamily="34" charset="0"/>
-                <a:ea typeface="Amiri" pitchFamily="34" charset="-122"/>
-                <a:cs typeface="Amiri" pitchFamily="34" charset="-120"/>
+                <a:latin typeface="Amiri" pitchFamily="2" charset="-78"/>
+                <a:cs typeface="Amiri" pitchFamily="2" charset="-78"/>
               </a:rPr>
               <a:t>الأَمْثِلَةُ الدَّاعِمَةُ</a:t>
             </a:r>
@@ -31621,8 +31018,7 @@
                   <a:srgbClr val="1F2A37"/>
                 </a:solidFill>
                 <a:latin typeface="Calibri" pitchFamily="34" charset="0"/>
-                <a:ea typeface="Calibri" pitchFamily="34" charset="-122"/>
-                <a:cs typeface="Calibri" pitchFamily="34" charset="-120"/>
+                <a:cs typeface="Amiri" pitchFamily="2" charset="-78"/>
               </a:rPr>
               <a:t>supporting examples</a:t>
             </a:r>
@@ -31638,8 +31034,7 @@
                   <a:srgbClr val="5A6472"/>
                 </a:solidFill>
                 <a:latin typeface="Calibri" pitchFamily="34" charset="0"/>
-                <a:ea typeface="Calibri" pitchFamily="34" charset="-122"/>
-                <a:cs typeface="Calibri" pitchFamily="34" charset="-120"/>
+                <a:cs typeface="Amiri" pitchFamily="2" charset="-78"/>
               </a:rPr>
               <a:t>al-am-thi-la-tu ad-dā-ʿi-ma-tu</a:t>
             </a:r>
@@ -31704,8 +31099,7 @@
                   <a:srgbClr val="8A6D1E"/>
                 </a:solidFill>
                 <a:latin typeface="Calibri" pitchFamily="34" charset="0"/>
-                <a:ea typeface="Calibri" pitchFamily="34" charset="-122"/>
-                <a:cs typeface="Calibri" pitchFamily="34" charset="-120"/>
+                <a:cs typeface="Amiri" pitchFamily="2" charset="-78"/>
               </a:rPr>
               <a:t>sg.</a:t>
             </a:r>
@@ -31742,9 +31136,8 @@
                 <a:solidFill>
                   <a:srgbClr val="1B3B6F"/>
                 </a:solidFill>
-                <a:latin typeface="Amiri" pitchFamily="34" charset="0"/>
-                <a:ea typeface="Amiri" pitchFamily="34" charset="-122"/>
-                <a:cs typeface="Amiri" pitchFamily="34" charset="-120"/>
+                <a:latin typeface="Amiri" pitchFamily="2" charset="-78"/>
+                <a:cs typeface="Amiri" pitchFamily="2" charset="-78"/>
               </a:rPr>
               <a:t>مِثَالٌ دَاعِمٌ</a:t>
             </a:r>
@@ -31782,8 +31175,7 @@
                   <a:srgbClr val="8A93A0"/>
                 </a:solidFill>
                 <a:latin typeface="Calibri" pitchFamily="34" charset="0"/>
-                <a:ea typeface="Calibri" pitchFamily="34" charset="-122"/>
-                <a:cs typeface="Calibri" pitchFamily="34" charset="-120"/>
+                <a:cs typeface="Amiri" pitchFamily="2" charset="-78"/>
               </a:rPr>
               <a:t>8 / 20</a:t>
             </a:r>
@@ -31877,9 +31269,8 @@
                 <a:solidFill>
                   <a:srgbClr val="D4AF37"/>
                 </a:solidFill>
-                <a:latin typeface="Amiri" pitchFamily="34" charset="0"/>
-                <a:ea typeface="Amiri" pitchFamily="34" charset="-122"/>
-                <a:cs typeface="Amiri" pitchFamily="34" charset="-120"/>
+                <a:latin typeface="Amiri" pitchFamily="2" charset="-78"/>
+                <a:cs typeface="Amiri" pitchFamily="2" charset="-78"/>
               </a:rPr>
               <a:t>م</a:t>
             </a:r>
@@ -31917,8 +31308,7 @@
                   <a:srgbClr val="1B3B6F"/>
                 </a:solidFill>
                 <a:latin typeface="Cambria" pitchFamily="34" charset="0"/>
-                <a:ea typeface="Cambria" pitchFamily="34" charset="-122"/>
-                <a:cs typeface="Cambria" pitchFamily="34" charset="-120"/>
+                <a:cs typeface="Amiri" pitchFamily="2" charset="-78"/>
               </a:rPr>
               <a:t>Al Madina Online School</a:t>
             </a:r>
@@ -31956,8 +31346,7 @@
                   <a:srgbClr val="8A6D1E"/>
                 </a:solidFill>
                 <a:latin typeface="Calibri" pitchFamily="34" charset="0"/>
-                <a:ea typeface="Calibri" pitchFamily="34" charset="-122"/>
-                <a:cs typeface="Calibri" pitchFamily="34" charset="-120"/>
+                <a:cs typeface="Amiri" pitchFamily="2" charset="-78"/>
               </a:rPr>
               <a:t>ARABIC DEPARTMENT · MIFTAH ARABIC · IGCSE 0544</a:t>
             </a:r>
@@ -32022,8 +31411,7 @@
                   <a:srgbClr val="FFFFFF"/>
                 </a:solidFill>
                 <a:latin typeface="Calibri" pitchFamily="34" charset="0"/>
-                <a:ea typeface="Calibri" pitchFamily="34" charset="-122"/>
-                <a:cs typeface="Calibri" pitchFamily="34" charset="-120"/>
+                <a:cs typeface="Amiri" pitchFamily="2" charset="-78"/>
               </a:rPr>
               <a:t>P6-L07 · IGCSE Bridge</a:t>
             </a:r>
@@ -32088,8 +31476,7 @@
                   <a:srgbClr val="FFFFFF"/>
                 </a:solidFill>
                 <a:latin typeface="Calibri" pitchFamily="34" charset="0"/>
-                <a:ea typeface="Calibri" pitchFamily="34" charset="-122"/>
-                <a:cs typeface="Calibri" pitchFamily="34" charset="-120"/>
+                <a:cs typeface="Amiri" pitchFamily="2" charset="-78"/>
               </a:rPr>
               <a:t>TEACHER INSTRUCTION · 2 MIN</a:t>
             </a:r>
@@ -32127,8 +31514,7 @@
                   <a:srgbClr val="1B3B6F"/>
                 </a:solidFill>
                 <a:latin typeface="Calibri" pitchFamily="34" charset="0"/>
-                <a:ea typeface="Calibri" pitchFamily="34" charset="-122"/>
-                <a:cs typeface="Calibri" pitchFamily="34" charset="-120"/>
+                <a:cs typeface="Amiri" pitchFamily="2" charset="-78"/>
               </a:rPr>
               <a:t>KEY WORDS · GROUP 1</a:t>
             </a:r>
@@ -32166,8 +31552,7 @@
                   <a:srgbClr val="1B3B6F"/>
                 </a:solidFill>
                 <a:latin typeface="Cambria" pitchFamily="34" charset="0"/>
-                <a:ea typeface="Cambria" pitchFamily="34" charset="-122"/>
-                <a:cs typeface="Cambria" pitchFamily="34" charset="-120"/>
+                <a:cs typeface="Amiri" pitchFamily="2" charset="-78"/>
               </a:rPr>
               <a:t>Extended speaking (2 of 2)</a:t>
             </a:r>
@@ -32204,9 +31589,8 @@
                 <a:solidFill>
                   <a:srgbClr val="8A6D1E"/>
                 </a:solidFill>
-                <a:latin typeface="Amiri" pitchFamily="34" charset="0"/>
-                <a:ea typeface="Amiri" pitchFamily="34" charset="-122"/>
-                <a:cs typeface="Amiri" pitchFamily="34" charset="-120"/>
+                <a:latin typeface="Amiri" pitchFamily="2" charset="-78"/>
+                <a:cs typeface="Amiri" pitchFamily="2" charset="-78"/>
               </a:rPr>
               <a:t>كَلِمَاتُ الدَّرْسِ</a:t>
             </a:r>
@@ -32244,8 +31628,7 @@
                   <a:srgbClr val="8A93A0"/>
                 </a:solidFill>
                 <a:latin typeface="Calibri" pitchFamily="34" charset="0"/>
-                <a:ea typeface="Calibri" pitchFamily="34" charset="-122"/>
-                <a:cs typeface="Calibri" pitchFamily="34" charset="-120"/>
+                <a:cs typeface="Amiri" pitchFamily="2" charset="-78"/>
               </a:rPr>
               <a:t>Miftah Arabic · Progression P6 · IGCSE Bridge · P6-L07</a:t>
             </a:r>
@@ -32342,8 +31725,7 @@
                   <a:srgbClr val="1B3B6F"/>
                 </a:solidFill>
                 <a:latin typeface="Calibri" pitchFamily="34" charset="0"/>
-                <a:ea typeface="Calibri" pitchFamily="34" charset="-122"/>
-                <a:cs typeface="Calibri" pitchFamily="34" charset="-120"/>
+                <a:cs typeface="Amiri" pitchFamily="2" charset="-78"/>
               </a:rPr>
               <a:t>5</a:t>
             </a:r>
@@ -32380,9 +31762,8 @@
                 <a:solidFill>
                   <a:srgbClr val="1B3B6F"/>
                 </a:solidFill>
-                <a:latin typeface="Amiri" pitchFamily="34" charset="0"/>
-                <a:ea typeface="Amiri" pitchFamily="34" charset="-122"/>
-                <a:cs typeface="Amiri" pitchFamily="34" charset="-120"/>
+                <a:latin typeface="Amiri" pitchFamily="2" charset="-78"/>
+                <a:cs typeface="Amiri" pitchFamily="2" charset="-78"/>
               </a:rPr>
               <a:t>الطَّلَاقَةُ مَعَ الدِّقَّةِ</a:t>
             </a:r>
@@ -32420,8 +31801,7 @@
                   <a:srgbClr val="1F2A37"/>
                 </a:solidFill>
                 <a:latin typeface="Calibri" pitchFamily="34" charset="0"/>
-                <a:ea typeface="Calibri" pitchFamily="34" charset="-122"/>
-                <a:cs typeface="Calibri" pitchFamily="34" charset="-120"/>
+                <a:cs typeface="Amiri" pitchFamily="2" charset="-78"/>
               </a:rPr>
               <a:t>fluency with accuracy</a:t>
             </a:r>
@@ -32437,8 +31817,7 @@
                   <a:srgbClr val="5A6472"/>
                 </a:solidFill>
                 <a:latin typeface="Calibri" pitchFamily="34" charset="0"/>
-                <a:ea typeface="Calibri" pitchFamily="34" charset="-122"/>
-                <a:cs typeface="Calibri" pitchFamily="34" charset="-120"/>
+                <a:cs typeface="Amiri" pitchFamily="2" charset="-78"/>
               </a:rPr>
               <a:t>aṭ-ṭa-lā-qa-tu ma-ʿa ad-diq-qa-ti</a:t>
             </a:r>
@@ -32535,8 +31914,7 @@
                   <a:srgbClr val="1B3B6F"/>
                 </a:solidFill>
                 <a:latin typeface="Calibri" pitchFamily="34" charset="0"/>
-                <a:ea typeface="Calibri" pitchFamily="34" charset="-122"/>
-                <a:cs typeface="Calibri" pitchFamily="34" charset="-120"/>
+                <a:cs typeface="Amiri" pitchFamily="2" charset="-78"/>
               </a:rPr>
               <a:t>6</a:t>
             </a:r>
@@ -32573,9 +31951,8 @@
                 <a:solidFill>
                   <a:srgbClr val="1B3B6F"/>
                 </a:solidFill>
-                <a:latin typeface="Amiri" pitchFamily="34" charset="0"/>
-                <a:ea typeface="Amiri" pitchFamily="34" charset="-122"/>
-                <a:cs typeface="Amiri" pitchFamily="34" charset="-120"/>
+                <a:latin typeface="Amiri" pitchFamily="2" charset="-78"/>
+                <a:cs typeface="Amiri" pitchFamily="2" charset="-78"/>
               </a:rPr>
               <a:t>التَّعَافِي مِنَ الأَخْطَاءِ</a:t>
             </a:r>
@@ -32613,8 +31990,7 @@
                   <a:srgbClr val="1F2A37"/>
                 </a:solidFill>
                 <a:latin typeface="Calibri" pitchFamily="34" charset="0"/>
-                <a:ea typeface="Calibri" pitchFamily="34" charset="-122"/>
-                <a:cs typeface="Calibri" pitchFamily="34" charset="-120"/>
+                <a:cs typeface="Amiri" pitchFamily="2" charset="-78"/>
               </a:rPr>
               <a:t>recovering from errors</a:t>
             </a:r>
@@ -32630,8 +32006,7 @@
                   <a:srgbClr val="5A6472"/>
                 </a:solidFill>
                 <a:latin typeface="Calibri" pitchFamily="34" charset="0"/>
-                <a:ea typeface="Calibri" pitchFamily="34" charset="-122"/>
-                <a:cs typeface="Calibri" pitchFamily="34" charset="-120"/>
+                <a:cs typeface="Amiri" pitchFamily="2" charset="-78"/>
               </a:rPr>
               <a:t>at-ta-ʿā-fī mi-na al-akh-ṭā-ʾi</a:t>
             </a:r>
@@ -32728,8 +32103,7 @@
                   <a:srgbClr val="1B3B6F"/>
                 </a:solidFill>
                 <a:latin typeface="Calibri" pitchFamily="34" charset="0"/>
-                <a:ea typeface="Calibri" pitchFamily="34" charset="-122"/>
-                <a:cs typeface="Calibri" pitchFamily="34" charset="-120"/>
+                <a:cs typeface="Amiri" pitchFamily="2" charset="-78"/>
               </a:rPr>
               <a:t>7</a:t>
             </a:r>
@@ -32794,8 +32168,7 @@
                   <a:srgbClr val="FFFFFF"/>
                 </a:solidFill>
                 <a:latin typeface="Calibri" pitchFamily="34" charset="0"/>
-                <a:ea typeface="Calibri" pitchFamily="34" charset="-122"/>
-                <a:cs typeface="Calibri" pitchFamily="34" charset="-120"/>
+                <a:cs typeface="Amiri" pitchFamily="2" charset="-78"/>
               </a:rPr>
               <a:t>CORE</a:t>
             </a:r>
@@ -32832,9 +32205,8 @@
                 <a:solidFill>
                   <a:srgbClr val="1B3B6F"/>
                 </a:solidFill>
-                <a:latin typeface="Amiri" pitchFamily="34" charset="0"/>
-                <a:ea typeface="Amiri" pitchFamily="34" charset="-122"/>
-                <a:cs typeface="Amiri" pitchFamily="34" charset="-120"/>
+                <a:latin typeface="Amiri" pitchFamily="2" charset="-78"/>
+                <a:cs typeface="Amiri" pitchFamily="2" charset="-78"/>
               </a:rPr>
               <a:t>لُغَةُ التَّوَقُّفِ وَالتَّفْكِيرِ</a:t>
             </a:r>
@@ -32872,8 +32244,7 @@
                   <a:srgbClr val="1F2A37"/>
                 </a:solidFill>
                 <a:latin typeface="Calibri" pitchFamily="34" charset="0"/>
-                <a:ea typeface="Calibri" pitchFamily="34" charset="-122"/>
-                <a:cs typeface="Calibri" pitchFamily="34" charset="-120"/>
+                <a:cs typeface="Amiri" pitchFamily="2" charset="-78"/>
               </a:rPr>
               <a:t>pause-and-think language</a:t>
             </a:r>
@@ -32889,8 +32260,7 @@
                   <a:srgbClr val="5A6472"/>
                 </a:solidFill>
                 <a:latin typeface="Calibri" pitchFamily="34" charset="0"/>
-                <a:ea typeface="Calibri" pitchFamily="34" charset="-122"/>
-                <a:cs typeface="Calibri" pitchFamily="34" charset="-120"/>
+                <a:cs typeface="Amiri" pitchFamily="2" charset="-78"/>
               </a:rPr>
               <a:t>lu-gha-tu at-ta-waq-qu-fi wālt-taf-kī-ri</a:t>
             </a:r>
@@ -32987,8 +32357,7 @@
                   <a:srgbClr val="1B3B6F"/>
                 </a:solidFill>
                 <a:latin typeface="Calibri" pitchFamily="34" charset="0"/>
-                <a:ea typeface="Calibri" pitchFamily="34" charset="-122"/>
-                <a:cs typeface="Calibri" pitchFamily="34" charset="-120"/>
+                <a:cs typeface="Amiri" pitchFamily="2" charset="-78"/>
               </a:rPr>
               <a:t>8</a:t>
             </a:r>
@@ -33025,9 +32394,8 @@
                 <a:solidFill>
                   <a:srgbClr val="1B3B6F"/>
                 </a:solidFill>
-                <a:latin typeface="Amiri" pitchFamily="34" charset="0"/>
-                <a:ea typeface="Amiri" pitchFamily="34" charset="-122"/>
-                <a:cs typeface="Amiri" pitchFamily="34" charset="-120"/>
+                <a:latin typeface="Amiri" pitchFamily="2" charset="-78"/>
+                <a:cs typeface="Amiri" pitchFamily="2" charset="-78"/>
               </a:rPr>
               <a:t>المُبَادَرَةُ فِي المُحَادَثَةِ</a:t>
             </a:r>
@@ -33065,8 +32433,7 @@
                   <a:srgbClr val="1F2A37"/>
                 </a:solidFill>
                 <a:latin typeface="Calibri" pitchFamily="34" charset="0"/>
-                <a:ea typeface="Calibri" pitchFamily="34" charset="-122"/>
-                <a:cs typeface="Calibri" pitchFamily="34" charset="-120"/>
+                <a:cs typeface="Amiri" pitchFamily="2" charset="-78"/>
               </a:rPr>
               <a:t>taking initiative</a:t>
             </a:r>
@@ -33082,8 +32449,7 @@
                   <a:srgbClr val="5A6472"/>
                 </a:solidFill>
                 <a:latin typeface="Calibri" pitchFamily="34" charset="0"/>
-                <a:ea typeface="Calibri" pitchFamily="34" charset="-122"/>
-                <a:cs typeface="Calibri" pitchFamily="34" charset="-120"/>
+                <a:cs typeface="Amiri" pitchFamily="2" charset="-78"/>
               </a:rPr>
               <a:t>al-mu-bā-da-ra-tu fī al-mu-ḥā-da-tha-ti</a:t>
             </a:r>
@@ -33121,8 +32487,7 @@
                   <a:srgbClr val="8A93A0"/>
                 </a:solidFill>
                 <a:latin typeface="Calibri" pitchFamily="34" charset="0"/>
-                <a:ea typeface="Calibri" pitchFamily="34" charset="-122"/>
-                <a:cs typeface="Calibri" pitchFamily="34" charset="-120"/>
+                <a:cs typeface="Amiri" pitchFamily="2" charset="-78"/>
               </a:rPr>
               <a:t>9 / 20</a:t>
             </a:r>

--- a/Progression_P6/P6-L07_Paper_3_Topic_Conversation.pptx
+++ b/Progression_P6/P6-L07_Paper_3_Topic_Conversation.pptx
@@ -518,7 +518,11 @@
           <a:lstStyle/>
           <a:p>
             <a:r>
-              <a:rPr lang="en-US" dirty="0"/>
+              <a:rPr lang="ar-SA" dirty="0">
+                <a:latin typeface="Amiri" pitchFamily="2" charset="-78"/>
+                <a:ea typeface="Amiri" pitchFamily="2" charset="-78"/>
+                <a:cs typeface="Amiri" pitchFamily="2" charset="-78"/>
+              </a:rPr>
               <a:t>LESSON AT A GLANCE — planned for 56 minutes, leaving about 4 minutes for Teams delays.
 0–1 Welcome · 1–2 Map · 2–8 Do Now + answers · 8–9 Objectives · 9–13 Conversation words · 13–16 Band 2 · 3 · 5 · 16–18 The mark scheme · 18–21 I Do: build a Band 5 answer · 21–23 Pause-and-think phrases · 23–38 The full conversation in pairs · 38–45 Question bank · 45–51 Emergency sentences · 51–55 Reflection + self-check · 55–57 Preparation for the mock.
 FLEX slides are optional. Use them if the class is moving quickly; otherwise the same activities are on the website for homework.
@@ -618,7 +622,11 @@
           <a:lstStyle/>
           <a:p>
             <a:r>
-              <a:rPr lang="en-US" dirty="0"/>
+              <a:rPr lang="ar-SA" dirty="0">
+                <a:latin typeface="Amiri" pitchFamily="2" charset="-78"/>
+                <a:ea typeface="Amiri" pitchFamily="2" charset="-78"/>
+                <a:cs typeface="Amiri" pitchFamily="2" charset="-78"/>
+              </a:rPr>
               <a:t>TEACH (3 min) — the website cards. Read Band 2 and Band 3 aloud; ask: what does Band 3 add? (a reason — لِأَنَّ). The full Band 5 answer is built on the I Do slide.
 WEBSITE BAND 3: يُعَانِي كَثِيرٌ مِنَ الطُّلَّابِ مِنَ الضَّغْطِ. فِي رَأْيِي هُوَ مُفِيدٌ أَحْيَانًا لِأَنَّهُ يُحَفِّزُ.
 WEBSITE CARDS “What a Band 5 answer looks like”: Band 2 — minimal: A bare opinion, no development. (الضَّغْطُ الدِّرَاسِيُّ صَعْبٌ. لَا أُحِبُّهُ.) · Band 3 — adequate: An opinion with one reason. (يُعَانِي كَثِيرٌ مِنَ الطُّلَّابِ مِنَ الضَّغْطِ. فِي رَأْيِي هُوَ مُفِيدٌ أَحْيَانًا لِأَنَّهُ يُحَفِّزُ.) · Band 5 — developed: Evidence + concession-refutation + conditional + subjunctive. (يُشَارُ إِلَى أَنَّ الضَّغْطَ فِي تَصَاعُدٍ. صَحِيحٌ أَنَّ بَعْضَهُ يُحَفِّزُ، غَيْرَ أَنَّهُ إِذَا تَجَاوَزَ حَدَّهُ سَيُؤَدِّي إِلَى الاحْتِرَاقِ. لِذَا يَتَطَلَّبُ الأَمْرُ أَنْ تُوَفِّرَ المَدَارِسُ بِيئَةً أَقَلَّ ضَغْطًا.)</a:t>
@@ -797,7 +805,11 @@
           <a:lstStyle/>
           <a:p>
             <a:r>
-              <a:rPr lang="en-US" dirty="0"/>
+              <a:rPr lang="ar-SA" dirty="0">
+                <a:latin typeface="Amiri" pitchFamily="2" charset="-78"/>
+                <a:ea typeface="Amiri" pitchFamily="2" charset="-78"/>
+                <a:cs typeface="Amiri" pitchFamily="2" charset="-78"/>
+              </a:rPr>
               <a:t>I DO (4 min). Build the answer live, one sentence at a time, naming each step: (1) EVIDENCE — يُشَارُ إِلَى أَنَّ (passive, P4-L05) · (2) CONCESSION — صَحِيحٌ أَنَّ … غَيْرَ أَنَّ (P5) · (3) CONDITIONAL — إِذَا تَجَاوَزَ … سَيُؤَدِّي (P4) · (4) SUBJUNCTIVE CONCLUSION — يَتَطَلَّبُ الأَمْرُ أَنْ تُوَفِّرَ (P5-L03). Then students find the four chips. Vocabulary: تَصَاعُدٌ = rise · الاحْتِرَاقُ = burnout.</a:t>
             </a:r>
             <a:endParaRPr lang="en-US" dirty="0"/>
@@ -974,7 +986,11 @@
           <a:lstStyle/>
           <a:p>
             <a:r>
-              <a:rPr lang="en-US" dirty="0"/>
+              <a:rPr lang="ar-SA" dirty="0">
+                <a:latin typeface="Amiri" pitchFamily="2" charset="-78"/>
+                <a:ea typeface="Amiri" pitchFamily="2" charset="-78"/>
+                <a:cs typeface="Amiri" pitchFamily="2" charset="-78"/>
+              </a:rPr>
               <a:t>YOU DO (15 min) — pairs, three questions each, then swap. The examiner times one minute and ticks: opinion ✓ reason ✓ example ✓ concession ✓ conditional ✓ subjunctive ✓. Core: question 1 with the green start. Question 3 needs the TYPE 2 conditional: لَوْ كُنْتُ … لَمَنَعْتُ / لَغَيَّرْتُ (P4).
 WEBSITE MODEL: Examiner: مَا رَأْيُكَ فِي الضَّغْطِ الدِّرَاسِيِّ؟ (Question 1) · You: يُشَارُ إِلَى أَنَّ الضَّغْطَ فِي تَصَاعُدٍ. صَحِيحٌ أَنَّ بَعْضَهُ يُحَفِّزُ، غَيْرَ أَنَّهُ إِذَا تَجَاوَزَ حَدَّهُ سَيَضُرُّ. يَتَطَلَّبُ الأَمْرُ أَنْ تُوَفِّرَ المَدَارِسُ دَعْمًا نَفْسِيًّا. (Band 5 development)
 Website feedback prompt: Feedback note (which structures appeared spontaneously?)</a:t>
@@ -1064,7 +1080,11 @@
           <a:lstStyle/>
           <a:p>
             <a:r>
-              <a:rPr lang="en-US" dirty="0"/>
+              <a:rPr lang="ar-SA" dirty="0">
+                <a:latin typeface="Amiri" pitchFamily="2" charset="-78"/>
+                <a:ea typeface="Amiri" pitchFamily="2" charset="-78"/>
+                <a:cs typeface="Amiri" pitchFamily="2" charset="-78"/>
+              </a:rPr>
               <a:t>YOU DO (7 min) — each partner chooses two questions they have NOT prepared, to practise the unexpected. Question 3 needs two tenses: كُنْتُ أَقْضِي (past habit, P3) + present.</a:t>
             </a:r>
             <a:endParaRPr lang="en-US" dirty="0"/>
@@ -1510,7 +1530,11 @@
           <a:lstStyle/>
           <a:p>
             <a:r>
-              <a:rPr lang="en-US" dirty="0"/>
+              <a:rPr lang="ar-SA" dirty="0">
+                <a:latin typeface="Amiri" pitchFamily="2" charset="-78"/>
+                <a:ea typeface="Amiri" pitchFamily="2" charset="-78"/>
+                <a:cs typeface="Amiri" pitchFamily="2" charset="-78"/>
+              </a:rPr>
               <a:t>WELCOME (1 min) — while students join.
 • Greet each student by name as they arrive: السَّلَامُ عَلَيْكُمْ. Take the register (Pastoral Tracker: attendance 0/1).
 • 2-MINUTE CHECK-IN (SEND training): a private chat to any student who seemed unsettled last lesson — “Are you okay today? 👍 / 👎”.
@@ -2053,7 +2077,11 @@
           <a:lstStyle/>
           <a:p>
             <a:r>
-              <a:rPr lang="en-US" dirty="0"/>
+              <a:rPr lang="ar-SA" dirty="0">
+                <a:latin typeface="Amiri" pitchFamily="2" charset="-78"/>
+                <a:ea typeface="Amiri" pitchFamily="2" charset="-78"/>
+                <a:cs typeface="Amiri" pitchFamily="2" charset="-78"/>
+              </a:rPr>
               <a:t>KEY WORDS — HOW TO TEACH EACH GROUP (EAL pre-teaching routine, 7 min)
 1. HEAR IT: say the word twice, clearly, with a gesture where possible.
 2. SAY IT: choral repetition — “I say, you say” — then two volunteers.
@@ -2722,6 +2750,7 @@
                   <a:srgbClr val="D4AF37"/>
                 </a:solidFill>
                 <a:latin typeface="Amiri" pitchFamily="2" charset="-78"/>
+                <a:ea typeface="Amiri" pitchFamily="2" charset="-78"/>
                 <a:cs typeface="Amiri" pitchFamily="2" charset="-78"/>
               </a:rPr>
               <a:t>م</a:t>
@@ -2928,6 +2957,7 @@
                   <a:srgbClr val="D4AF37"/>
                 </a:solidFill>
                 <a:latin typeface="Amiri" pitchFamily="2" charset="-78"/>
+                <a:ea typeface="Amiri" pitchFamily="2" charset="-78"/>
                 <a:cs typeface="Amiri" pitchFamily="2" charset="-78"/>
               </a:rPr>
               <a:t>الوَرَقَةُ الثَّالِثَةُ — المُحَادَثَةُ المَوْضُوعِيَّةُ</a:t>
@@ -3385,6 +3415,7 @@
                   <a:srgbClr val="D4AF37"/>
                 </a:solidFill>
                 <a:latin typeface="Amiri" pitchFamily="2" charset="-78"/>
+                <a:ea typeface="Amiri" pitchFamily="2" charset="-78"/>
                 <a:cs typeface="Amiri" pitchFamily="2" charset="-78"/>
               </a:rPr>
               <a:t>م</a:t>
@@ -3705,6 +3736,7 @@
                   <a:srgbClr val="8A6D1E"/>
                 </a:solidFill>
                 <a:latin typeface="Amiri" pitchFamily="2" charset="-78"/>
+                <a:ea typeface="Amiri" pitchFamily="2" charset="-78"/>
                 <a:cs typeface="Amiri" pitchFamily="2" charset="-78"/>
               </a:rPr>
               <a:t>مِنْ ٢ إِلَى ٥</a:t>
@@ -4228,6 +4260,7 @@
                   <a:srgbClr val="1B3B6F"/>
                 </a:solidFill>
                 <a:latin typeface="Amiri" pitchFamily="2" charset="-78"/>
+                <a:ea typeface="Amiri" pitchFamily="2" charset="-78"/>
                 <a:cs typeface="Amiri" pitchFamily="2" charset="-78"/>
               </a:rPr>
               <a:t>الضَّغْطُ الدِّرَاسِيُّ صَعْبٌ. لَا أُحِبُّهُ.</a:t>
@@ -4327,6 +4360,7 @@
                   <a:srgbClr val="1B3B6F"/>
                 </a:solidFill>
                 <a:latin typeface="Amiri" pitchFamily="2" charset="-78"/>
+                <a:ea typeface="Amiri" pitchFamily="2" charset="-78"/>
                 <a:cs typeface="Amiri" pitchFamily="2" charset="-78"/>
               </a:rPr>
               <a:t>فِي رَأْيِي هُوَ مُفِيدٌ أَحْيَانًا لِأَنَّهُ يُحَفِّزُ.</a:t>
@@ -4426,6 +4460,7 @@
                   <a:srgbClr val="1B3B6F"/>
                 </a:solidFill>
                 <a:latin typeface="Amiri" pitchFamily="2" charset="-78"/>
+                <a:ea typeface="Amiri" pitchFamily="2" charset="-78"/>
                 <a:cs typeface="Amiri" pitchFamily="2" charset="-78"/>
               </a:rPr>
               <a:t>صَحِيحٌ أَنَّ بَعْضَهُ يُحَفِّزُ، غَيْرَ أَنَّهُ …</a:t>
@@ -4707,6 +4742,7 @@
                   <a:srgbClr val="D4AF37"/>
                 </a:solidFill>
                 <a:latin typeface="Amiri" pitchFamily="2" charset="-78"/>
+                <a:ea typeface="Amiri" pitchFamily="2" charset="-78"/>
                 <a:cs typeface="Amiri" pitchFamily="2" charset="-78"/>
               </a:rPr>
               <a:t>م</a:t>
@@ -5027,6 +5063,7 @@
                   <a:srgbClr val="8A6D1E"/>
                 </a:solidFill>
                 <a:latin typeface="Amiri" pitchFamily="2" charset="-78"/>
+                <a:ea typeface="Amiri" pitchFamily="2" charset="-78"/>
                 <a:cs typeface="Amiri" pitchFamily="2" charset="-78"/>
               </a:rPr>
               <a:t>مِعْيَارُ المُحَادَثَةِ</a:t>
@@ -5722,6 +5759,7 @@
                   <a:srgbClr val="D4AF37"/>
                 </a:solidFill>
                 <a:latin typeface="Amiri" pitchFamily="2" charset="-78"/>
+                <a:ea typeface="Amiri" pitchFamily="2" charset="-78"/>
                 <a:cs typeface="Amiri" pitchFamily="2" charset="-78"/>
               </a:rPr>
               <a:t>م</a:t>
@@ -6042,6 +6080,7 @@
                   <a:srgbClr val="8A6D1E"/>
                 </a:solidFill>
                 <a:latin typeface="Amiri" pitchFamily="2" charset="-78"/>
+                <a:ea typeface="Amiri" pitchFamily="2" charset="-78"/>
                 <a:cs typeface="Amiri" pitchFamily="2" charset="-78"/>
               </a:rPr>
               <a:t>إِجَابَةُ المُسْتَوَى الخَامِسِ</a:t>
@@ -6155,6 +6194,7 @@
                   <a:srgbClr val="1F2A37"/>
                 </a:solidFill>
                 <a:latin typeface="Amiri" pitchFamily="2" charset="-78"/>
+                <a:ea typeface="Amiri" pitchFamily="2" charset="-78"/>
                 <a:cs typeface="Amiri" pitchFamily="2" charset="-78"/>
               </a:rPr>
               <a:t>يُشَارُ إِلَى أَنَّ الضَّغْطَ فِي تَصَاعُدٍ. صَحِيحٌ أَنَّ بَعْضَهُ يُحَفِّزُ، غَيْرَ أَنَّهُ إِذَا تَجَاوَزَ حَدَّهُ سَيُؤَدِّي إِلَى الاحْتِرَاقِ. لِذَا يَتَطَلَّبُ الأَمْرُ أَنْ تُوَفِّرَ المَدَارِسُ بِيئَةً أَقَلَّ ضَغْطًا.</a:t>
@@ -6318,11 +6358,12 @@
               <a:buNone/>
             </a:pPr>
             <a:r>
-              <a:rPr lang="en-US" sz="950" b="1" dirty="0">
+              <a:rPr lang="ar-SA" sz="950" b="1" dirty="0">
                 <a:solidFill>
                   <a:srgbClr val="FFFFFF"/>
                 </a:solidFill>
                 <a:latin typeface="Calibri" pitchFamily="34" charset="0"/>
+                <a:ea typeface="Amiri" pitchFamily="2" charset="-78"/>
                 <a:cs typeface="Amiri" pitchFamily="2" charset="-78"/>
               </a:rPr>
               <a:t>يُشَارُ إِلَى أَنَّ</a:t>
@@ -6383,11 +6424,12 @@
               <a:buNone/>
             </a:pPr>
             <a:r>
-              <a:rPr lang="en-US" sz="950" b="1" dirty="0">
+              <a:rPr lang="ar-SA" sz="950" b="1" dirty="0">
                 <a:solidFill>
                   <a:srgbClr val="FFFFFF"/>
                 </a:solidFill>
                 <a:latin typeface="Calibri" pitchFamily="34" charset="0"/>
+                <a:ea typeface="Amiri" pitchFamily="2" charset="-78"/>
                 <a:cs typeface="Amiri" pitchFamily="2" charset="-78"/>
               </a:rPr>
               <a:t>صَحِيحٌ أَنَّ … غَيْرَ أَنَّ</a:t>
@@ -6448,11 +6490,12 @@
               <a:buNone/>
             </a:pPr>
             <a:r>
-              <a:rPr lang="en-US" sz="950" b="1" dirty="0">
+              <a:rPr lang="ar-SA" sz="950" b="1" dirty="0">
                 <a:solidFill>
                   <a:srgbClr val="FFFFFF"/>
                 </a:solidFill>
                 <a:latin typeface="Calibri" pitchFamily="34" charset="0"/>
+                <a:ea typeface="Amiri" pitchFamily="2" charset="-78"/>
                 <a:cs typeface="Amiri" pitchFamily="2" charset="-78"/>
               </a:rPr>
               <a:t>إِذَا … سَيُؤَدِّي</a:t>
@@ -6513,11 +6556,12 @@
               <a:buNone/>
             </a:pPr>
             <a:r>
-              <a:rPr lang="en-US" sz="950" b="1" dirty="0">
+              <a:rPr lang="ar-SA" sz="950" b="1" dirty="0">
                 <a:solidFill>
                   <a:srgbClr val="FFFFFF"/>
                 </a:solidFill>
                 <a:latin typeface="Calibri" pitchFamily="34" charset="0"/>
+                <a:ea typeface="Amiri" pitchFamily="2" charset="-78"/>
                 <a:cs typeface="Amiri" pitchFamily="2" charset="-78"/>
               </a:rPr>
               <a:t>يَتَطَلَّبُ الأَمْرُ أَنْ</a:t>
@@ -6651,6 +6695,7 @@
                   <a:srgbClr val="D4AF37"/>
                 </a:solidFill>
                 <a:latin typeface="Amiri" pitchFamily="2" charset="-78"/>
+                <a:ea typeface="Amiri" pitchFamily="2" charset="-78"/>
                 <a:cs typeface="Amiri" pitchFamily="2" charset="-78"/>
               </a:rPr>
               <a:t>م</a:t>
@@ -6971,6 +7016,7 @@
                   <a:srgbClr val="8A6D1E"/>
                 </a:solidFill>
                 <a:latin typeface="Amiri" pitchFamily="2" charset="-78"/>
+                <a:ea typeface="Amiri" pitchFamily="2" charset="-78"/>
                 <a:cs typeface="Amiri" pitchFamily="2" charset="-78"/>
               </a:rPr>
               <a:t>لُغَةُ التَّوَقُّفِ وَالتَّفْكِيرِ</a:t>
@@ -7397,6 +7443,7 @@
                   <a:srgbClr val="1F2A37"/>
                 </a:solidFill>
                 <a:latin typeface="Amiri" pitchFamily="2" charset="-78"/>
+                <a:ea typeface="Amiri" pitchFamily="2" charset="-78"/>
                 <a:cs typeface="Amiri" pitchFamily="2" charset="-78"/>
               </a:rPr>
               <a:t>عَفْوًا، أَقْصِدُ</a:t>
@@ -7621,6 +7668,7 @@
                   <a:srgbClr val="1B3B6F"/>
                 </a:solidFill>
                 <a:latin typeface="Amiri" pitchFamily="2" charset="-78"/>
+                <a:ea typeface="Amiri" pitchFamily="2" charset="-78"/>
                 <a:cs typeface="Amiri" pitchFamily="2" charset="-78"/>
               </a:rPr>
               <a:t>هٰذَا سُؤَالٌ مُهِمٌّ …</a:t>
@@ -7720,6 +7768,7 @@
                   <a:srgbClr val="1B3B6F"/>
                 </a:solidFill>
                 <a:latin typeface="Amiri" pitchFamily="2" charset="-78"/>
+                <a:ea typeface="Amiri" pitchFamily="2" charset="-78"/>
                 <a:cs typeface="Amiri" pitchFamily="2" charset="-78"/>
               </a:rPr>
               <a:t>فِي الحَقِيقَةِ، لَمْ أُفَكِّرْ فِي ذٰلِكَ مِنْ قَبْلُ، لٰكِنْ …</a:t>
@@ -7819,6 +7868,7 @@
                   <a:srgbClr val="1B3B6F"/>
                 </a:solidFill>
                 <a:latin typeface="Amiri" pitchFamily="2" charset="-78"/>
+                <a:ea typeface="Amiri" pitchFamily="2" charset="-78"/>
                 <a:cs typeface="Amiri" pitchFamily="2" charset="-78"/>
               </a:rPr>
               <a:t>مِنْ نَاحِيَةٍ … وَمِنْ نَاحِيَةٍ أُخْرَى …</a:t>
@@ -7990,6 +8040,7 @@
                   <a:srgbClr val="D4AF37"/>
                 </a:solidFill>
                 <a:latin typeface="Amiri" pitchFamily="2" charset="-78"/>
+                <a:ea typeface="Amiri" pitchFamily="2" charset="-78"/>
                 <a:cs typeface="Amiri" pitchFamily="2" charset="-78"/>
               </a:rPr>
               <a:t>م</a:t>
@@ -8310,6 +8361,7 @@
                   <a:srgbClr val="8A6D1E"/>
                 </a:solidFill>
                 <a:latin typeface="Amiri" pitchFamily="2" charset="-78"/>
+                <a:ea typeface="Amiri" pitchFamily="2" charset="-78"/>
                 <a:cs typeface="Amiri" pitchFamily="2" charset="-78"/>
               </a:rPr>
               <a:t>المُحَادَثَةُ الكَامِلَةُ</a:t>
@@ -8552,6 +8604,7 @@
                   <a:srgbClr val="1B3B6F"/>
                 </a:solidFill>
                 <a:latin typeface="Amiri" pitchFamily="2" charset="-78"/>
+                <a:ea typeface="Amiri" pitchFamily="2" charset="-78"/>
                 <a:cs typeface="Amiri" pitchFamily="2" charset="-78"/>
               </a:rPr>
               <a:t>فِي رَأْيِي، الضَّغْطُ الدِّرَاسِيُّ … لِأَنَّ … فَمَثَلًا …</a:t>
@@ -8631,6 +8684,7 @@
                   <a:srgbClr val="1B3B6F"/>
                 </a:solidFill>
                 <a:latin typeface="Amiri" pitchFamily="2" charset="-78"/>
+                <a:ea typeface="Amiri" pitchFamily="2" charset="-78"/>
                 <a:cs typeface="Amiri" pitchFamily="2" charset="-78"/>
               </a:rPr>
               <a:t>مَا رَأْيُكَ فِي الضَّغْطِ الدِّرَاسِيِّ، وَكَيْفَ يُمْكِنُ التَّعَامُلُ مَعَهُ؟</a:t>
@@ -8761,6 +8815,7 @@
                   <a:srgbClr val="1B3B6F"/>
                 </a:solidFill>
                 <a:latin typeface="Amiri" pitchFamily="2" charset="-78"/>
+                <a:ea typeface="Amiri" pitchFamily="2" charset="-78"/>
                 <a:cs typeface="Amiri" pitchFamily="2" charset="-78"/>
               </a:rPr>
               <a:t>صَحِيحٌ أَنَّ التِّقْنِيَّةَ تُسَاعِدُ، غَيْرَ أَنَّ …</a:t>
@@ -8837,6 +8892,7 @@
                   <a:srgbClr val="1B3B6F"/>
                 </a:solidFill>
                 <a:latin typeface="Amiri" pitchFamily="2" charset="-78"/>
+                <a:ea typeface="Amiri" pitchFamily="2" charset="-78"/>
                 <a:cs typeface="Amiri" pitchFamily="2" charset="-78"/>
               </a:rPr>
               <a:t>هَلْ تُعَمِّقُ التِّقْنِيَّةُ عَدَمَ المُسَاوَاةِ أَمْ تُقَلِّلُهَا؟</a:t>
@@ -8902,6 +8958,7 @@
                   <a:srgbClr val="1B3B6F"/>
                 </a:solidFill>
                 <a:latin typeface="Amiri" pitchFamily="2" charset="-78"/>
+                <a:ea typeface="Amiri" pitchFamily="2" charset="-78"/>
                 <a:cs typeface="Amiri" pitchFamily="2" charset="-78"/>
               </a:rPr>
               <a:t>لَوْ كُنْتُ مَسْؤُولًا عَنِ البِيئَةِ، لَمَنَعْتُ …</a:t>
@@ -8978,6 +9035,7 @@
                   <a:srgbClr val="1B3B6F"/>
                 </a:solidFill>
                 <a:latin typeface="Amiri" pitchFamily="2" charset="-78"/>
+                <a:ea typeface="Amiri" pitchFamily="2" charset="-78"/>
                 <a:cs typeface="Amiri" pitchFamily="2" charset="-78"/>
               </a:rPr>
               <a:t>لَوْ كُنْتَ مَسْؤُولًا عَنِ البِيئَةِ، مَاذَا كُنْتَ سَتُغَيِّرُ أَوَّلًا؟</a:t>
@@ -9149,6 +9207,7 @@
                   <a:srgbClr val="D4AF37"/>
                 </a:solidFill>
                 <a:latin typeface="Amiri" pitchFamily="2" charset="-78"/>
+                <a:ea typeface="Amiri" pitchFamily="2" charset="-78"/>
                 <a:cs typeface="Amiri" pitchFamily="2" charset="-78"/>
               </a:rPr>
               <a:t>م</a:t>
@@ -9469,6 +9528,7 @@
                   <a:srgbClr val="8A6D1E"/>
                 </a:solidFill>
                 <a:latin typeface="Amiri" pitchFamily="2" charset="-78"/>
+                <a:ea typeface="Amiri" pitchFamily="2" charset="-78"/>
                 <a:cs typeface="Amiri" pitchFamily="2" charset="-78"/>
               </a:rPr>
               <a:t>بَنْكُ الأَسْئِلَةِ</a:t>
@@ -9711,6 +9771,7 @@
                   <a:srgbClr val="1B3B6F"/>
                 </a:solidFill>
                 <a:latin typeface="Amiri" pitchFamily="2" charset="-78"/>
+                <a:ea typeface="Amiri" pitchFamily="2" charset="-78"/>
                 <a:cs typeface="Amiri" pitchFamily="2" charset="-78"/>
               </a:rPr>
               <a:t>أُحَافِظُ عَلَى المَشْيِ يَوْمِيًّا لِأَنَّهُ …</a:t>
@@ -9787,6 +9848,7 @@
                   <a:srgbClr val="1B3B6F"/>
                 </a:solidFill>
                 <a:latin typeface="Amiri" pitchFamily="2" charset="-78"/>
+                <a:ea typeface="Amiri" pitchFamily="2" charset="-78"/>
                 <a:cs typeface="Amiri" pitchFamily="2" charset="-78"/>
               </a:rPr>
               <a:t>صِفْ عَادَةً صِحِّيَّةً تُحَافِظُ عَلَيْهَا، وَلِمَاذَا.</a:t>
@@ -9917,6 +9979,7 @@
                   <a:srgbClr val="1B3B6F"/>
                 </a:solidFill>
                 <a:latin typeface="Amiri" pitchFamily="2" charset="-78"/>
+                <a:ea typeface="Amiri" pitchFamily="2" charset="-78"/>
                 <a:cs typeface="Amiri" pitchFamily="2" charset="-78"/>
               </a:rPr>
               <a:t>أَرَى أَنَّ التُّرَاثَ يَرْبِطُنَا بِتَارِيخِنَا، فَمَثَلًا …</a:t>
@@ -9993,6 +10056,7 @@
                   <a:srgbClr val="1B3B6F"/>
                 </a:solidFill>
                 <a:latin typeface="Amiri" pitchFamily="2" charset="-78"/>
+                <a:ea typeface="Amiri" pitchFamily="2" charset="-78"/>
                 <a:cs typeface="Amiri" pitchFamily="2" charset="-78"/>
               </a:rPr>
               <a:t>مَا أَهَمِّيَّةُ الحِفَاظِ عَلَى التُّرَاثِ فِي رَأْيِكَ؟</a:t>
@@ -10058,6 +10122,7 @@
                   <a:srgbClr val="1B3B6F"/>
                 </a:solidFill>
                 <a:latin typeface="Amiri" pitchFamily="2" charset="-78"/>
+                <a:ea typeface="Amiri" pitchFamily="2" charset="-78"/>
                 <a:cs typeface="Amiri" pitchFamily="2" charset="-78"/>
               </a:rPr>
               <a:t>كُنْتُ أَقْضِي وَقْتِي فِي …، أَمَّا الآنَ فَأَقْضِيهِ فِي …</a:t>
@@ -10134,6 +10199,7 @@
                   <a:srgbClr val="1B3B6F"/>
                 </a:solidFill>
                 <a:latin typeface="Amiri" pitchFamily="2" charset="-78"/>
+                <a:ea typeface="Amiri" pitchFamily="2" charset="-78"/>
                 <a:cs typeface="Amiri" pitchFamily="2" charset="-78"/>
               </a:rPr>
               <a:t>كَيْفَ تَقْضِي وَقْتَ فَرَاغِكَ، وَهَلْ تَغَيَّرَ ذٰلِكَ؟</a:t>
@@ -10264,6 +10330,7 @@
                   <a:srgbClr val="1B3B6F"/>
                 </a:solidFill>
                 <a:latin typeface="Amiri" pitchFamily="2" charset="-78"/>
+                <a:ea typeface="Amiri" pitchFamily="2" charset="-78"/>
                 <a:cs typeface="Amiri" pitchFamily="2" charset="-78"/>
               </a:rPr>
               <a:t>يَجِبُ عَلَى الشَّبَابِ أَنْ يُشَارِكُوا فِي …</a:t>
@@ -10340,6 +10407,7 @@
                   <a:srgbClr val="1B3B6F"/>
                 </a:solidFill>
                 <a:latin typeface="Amiri" pitchFamily="2" charset="-78"/>
+                <a:ea typeface="Amiri" pitchFamily="2" charset="-78"/>
                 <a:cs typeface="Amiri" pitchFamily="2" charset="-78"/>
               </a:rPr>
               <a:t>مَا دَوْرُ الشَّبَابِ فِي تَغْيِيرِ المُجْتَمَعِ؟</a:t>
@@ -10511,6 +10579,7 @@
                   <a:srgbClr val="D4AF37"/>
                 </a:solidFill>
                 <a:latin typeface="Amiri" pitchFamily="2" charset="-78"/>
+                <a:ea typeface="Amiri" pitchFamily="2" charset="-78"/>
                 <a:cs typeface="Amiri" pitchFamily="2" charset="-78"/>
               </a:rPr>
               <a:t>م</a:t>
@@ -10831,6 +10900,7 @@
                   <a:srgbClr val="8A6D1E"/>
                 </a:solidFill>
                 <a:latin typeface="Amiri" pitchFamily="2" charset="-78"/>
+                <a:ea typeface="Amiri" pitchFamily="2" charset="-78"/>
                 <a:cs typeface="Amiri" pitchFamily="2" charset="-78"/>
               </a:rPr>
               <a:t>جُمَلُ الطَّوَارِئِ</a:t>
@@ -11111,6 +11181,7 @@
                   <a:srgbClr val="1B3B6F"/>
                 </a:solidFill>
                 <a:latin typeface="Amiri" pitchFamily="2" charset="-78"/>
+                <a:ea typeface="Amiri" pitchFamily="2" charset="-78"/>
                 <a:cs typeface="Amiri" pitchFamily="2" charset="-78"/>
               </a:rPr>
               <a:t>يُشَارُ إِلَى أَنَّ الشَّبَابَ يَقْضُونَ وَقْتًا طَوِيلًا أَمَامَ الشَّاشَاتِ.</a:t>
@@ -11317,6 +11388,7 @@
                   <a:srgbClr val="1B3B6F"/>
                 </a:solidFill>
                 <a:latin typeface="Amiri" pitchFamily="2" charset="-78"/>
+                <a:ea typeface="Amiri" pitchFamily="2" charset="-78"/>
                 <a:cs typeface="Amiri" pitchFamily="2" charset="-78"/>
               </a:rPr>
               <a:t>إِذَا تَعَاوَنَّا، سَنُحَقِّقُ نَتَائِجَ أَفْضَلَ.</a:t>
@@ -11523,6 +11595,7 @@
                   <a:srgbClr val="1B3B6F"/>
                 </a:solidFill>
                 <a:latin typeface="Amiri" pitchFamily="2" charset="-78"/>
+                <a:ea typeface="Amiri" pitchFamily="2" charset="-78"/>
                 <a:cs typeface="Amiri" pitchFamily="2" charset="-78"/>
               </a:rPr>
               <a:t>لِذَا يَتَطَلَّبُ الأَمْرُ أَنْ نَتَحَمَّلَ مَسْؤُولِيَّتَنَا جَمِيعًا.</a:t>
@@ -11797,6 +11870,7 @@
                   <a:srgbClr val="D4AF37"/>
                 </a:solidFill>
                 <a:latin typeface="Amiri" pitchFamily="2" charset="-78"/>
+                <a:ea typeface="Amiri" pitchFamily="2" charset="-78"/>
                 <a:cs typeface="Amiri" pitchFamily="2" charset="-78"/>
               </a:rPr>
               <a:t>م</a:t>
@@ -12117,6 +12191,7 @@
                   <a:srgbClr val="8A6D1E"/>
                 </a:solidFill>
                 <a:latin typeface="Amiri" pitchFamily="2" charset="-78"/>
+                <a:ea typeface="Amiri" pitchFamily="2" charset="-78"/>
                 <a:cs typeface="Amiri" pitchFamily="2" charset="-78"/>
               </a:rPr>
               <a:t>التَّأَمُّلُ</a:t>
@@ -12641,6 +12716,7 @@
                   <a:srgbClr val="1B3B6F"/>
                 </a:solidFill>
                 <a:latin typeface="Amiri" pitchFamily="2" charset="-78"/>
+                <a:ea typeface="Amiri" pitchFamily="2" charset="-78"/>
                 <a:cs typeface="Amiri" pitchFamily="2" charset="-78"/>
               </a:rPr>
               <a:t>سَبَبٍ وَمِثَالٍ</a:t>
@@ -12717,6 +12793,7 @@
                   <a:srgbClr val="1B3B6F"/>
                 </a:solidFill>
                 <a:latin typeface="Amiri" pitchFamily="2" charset="-78"/>
+                <a:ea typeface="Amiri" pitchFamily="2" charset="-78"/>
                 <a:cs typeface="Amiri" pitchFamily="2" charset="-78"/>
               </a:rPr>
               <a:t>أَسْتَطِيعُ الآنَ أَنْ أُطَوِّرَ إِجَابَتِي بِإِضَافَةِ ______ .</a:t>
@@ -12888,6 +12965,7 @@
                   <a:srgbClr val="D4AF37"/>
                 </a:solidFill>
                 <a:latin typeface="Amiri" pitchFamily="2" charset="-78"/>
+                <a:ea typeface="Amiri" pitchFamily="2" charset="-78"/>
                 <a:cs typeface="Amiri" pitchFamily="2" charset="-78"/>
               </a:rPr>
               <a:t>م</a:t>
@@ -13208,6 +13286,7 @@
                   <a:srgbClr val="8A6D1E"/>
                 </a:solidFill>
                 <a:latin typeface="Amiri" pitchFamily="2" charset="-78"/>
+                <a:ea typeface="Amiri" pitchFamily="2" charset="-78"/>
                 <a:cs typeface="Amiri" pitchFamily="2" charset="-78"/>
               </a:rPr>
               <a:t>قَيِّمْ عَمَلَكَ</a:t>
@@ -14365,6 +14444,7 @@
                   <a:srgbClr val="D4AF37"/>
                 </a:solidFill>
                 <a:latin typeface="Amiri" pitchFamily="2" charset="-78"/>
+                <a:ea typeface="Amiri" pitchFamily="2" charset="-78"/>
                 <a:cs typeface="Amiri" pitchFamily="2" charset="-78"/>
               </a:rPr>
               <a:t>م</a:t>
@@ -14685,6 +14765,7 @@
                   <a:srgbClr val="8A6D1E"/>
                 </a:solidFill>
                 <a:latin typeface="Amiri" pitchFamily="2" charset="-78"/>
+                <a:ea typeface="Amiri" pitchFamily="2" charset="-78"/>
                 <a:cs typeface="Amiri" pitchFamily="2" charset="-78"/>
               </a:rPr>
               <a:t>التَّحْضِيرُ لِلدَّرْسِ القَادِمِ</a:t>
@@ -14898,6 +14979,7 @@
                   <a:srgbClr val="1B3B6F"/>
                 </a:solidFill>
                 <a:latin typeface="Amiri" pitchFamily="2" charset="-78"/>
+                <a:ea typeface="Amiri" pitchFamily="2" charset="-78"/>
                 <a:cs typeface="Amiri" pitchFamily="2" charset="-78"/>
               </a:rPr>
               <a:t>اسْتِرَاتِيجِيَّاتُ الاسْتِمَاعِ</a:t>
@@ -14987,6 +15069,7 @@
                   <a:srgbClr val="1B3B6F"/>
                 </a:solidFill>
                 <a:latin typeface="Amiri" pitchFamily="2" charset="-78"/>
+                <a:ea typeface="Amiri" pitchFamily="2" charset="-78"/>
                 <a:cs typeface="Amiri" pitchFamily="2" charset="-78"/>
               </a:rPr>
               <a:t>قِرَاءَةُ الأَسْئِلَةِ مُسْبَقًا</a:t>
@@ -15076,6 +15159,7 @@
                   <a:srgbClr val="1B3B6F"/>
                 </a:solidFill>
                 <a:latin typeface="Amiri" pitchFamily="2" charset="-78"/>
+                <a:ea typeface="Amiri" pitchFamily="2" charset="-78"/>
                 <a:cs typeface="Amiri" pitchFamily="2" charset="-78"/>
               </a:rPr>
               <a:t>التَّنَبُّؤُ بِالمُحْتَوَى</a:t>
@@ -15165,6 +15249,7 @@
                   <a:srgbClr val="1B3B6F"/>
                 </a:solidFill>
                 <a:latin typeface="Amiri" pitchFamily="2" charset="-78"/>
+                <a:ea typeface="Amiri" pitchFamily="2" charset="-78"/>
                 <a:cs typeface="Amiri" pitchFamily="2" charset="-78"/>
               </a:rPr>
               <a:t>مُشَتِّتَاتُ الاسْتِمَاعِ</a:t>
@@ -15211,11 +15296,12 @@
               <a:buNone/>
             </a:pPr>
             <a:r>
-              <a:rPr lang="en-US" sz="1000" i="1" dirty="0">
+              <a:rPr lang="ar-SA" sz="1000" i="1" dirty="0">
                 <a:solidFill>
                   <a:srgbClr val="5A6472"/>
                 </a:solidFill>
                 <a:latin typeface="Calibri" pitchFamily="34" charset="0"/>
+                <a:ea typeface="Amiri" pitchFamily="2" charset="-78"/>
                 <a:cs typeface="Amiri" pitchFamily="2" charset="-78"/>
               </a:rPr>
               <a:t>  sg. مُشَتِّتٌ</a:t>
@@ -15254,6 +15340,7 @@
                   <a:srgbClr val="1B3B6F"/>
                 </a:solidFill>
                 <a:latin typeface="Amiri" pitchFamily="2" charset="-78"/>
+                <a:ea typeface="Amiri" pitchFamily="2" charset="-78"/>
                 <a:cs typeface="Amiri" pitchFamily="2" charset="-78"/>
               </a:rPr>
               <a:t>التَّحَقُّقُ فِي الاسْتِمَاعِ الثَّانِي</a:t>
@@ -15422,6 +15509,7 @@
                   <a:srgbClr val="1B3B6F"/>
                 </a:solidFill>
                 <a:latin typeface="Amiri" pitchFamily="2" charset="-78"/>
+                <a:ea typeface="Amiri" pitchFamily="2" charset="-78"/>
                 <a:cs typeface="Amiri" pitchFamily="2" charset="-78"/>
               </a:rPr>
               <a:t>سَأَقْرَأُ ______ مُسْبَقًا، ثُمَّ سَأُرَكِّزُ عَلَى ______ .</a:t>
@@ -16004,6 +16092,7 @@
                   <a:srgbClr val="D4AF37"/>
                 </a:solidFill>
                 <a:latin typeface="Amiri" pitchFamily="2" charset="-78"/>
+                <a:ea typeface="Amiri" pitchFamily="2" charset="-78"/>
                 <a:cs typeface="Amiri" pitchFamily="2" charset="-78"/>
               </a:rPr>
               <a:t>م</a:t>
@@ -16324,6 +16413,7 @@
                   <a:srgbClr val="8A6D1E"/>
                 </a:solidFill>
                 <a:latin typeface="Amiri" pitchFamily="2" charset="-78"/>
+                <a:ea typeface="Amiri" pitchFamily="2" charset="-78"/>
                 <a:cs typeface="Amiri" pitchFamily="2" charset="-78"/>
               </a:rPr>
               <a:t>آدَابُ الصَّفِّ</a:t>
@@ -17942,6 +18032,7 @@
                   <a:srgbClr val="FFFFFF"/>
                 </a:solidFill>
                 <a:latin typeface="Amiri" pitchFamily="2" charset="-78"/>
+                <a:ea typeface="Amiri" pitchFamily="2" charset="-78"/>
                 <a:cs typeface="Amiri" pitchFamily="2" charset="-78"/>
               </a:rPr>
               <a:t>أَحْسَنْتُمْ! إِلَى اللِّقَاءِ</a:t>
@@ -18094,6 +18185,7 @@
                   <a:srgbClr val="D4AF37"/>
                 </a:solidFill>
                 <a:latin typeface="Amiri" pitchFamily="2" charset="-78"/>
+                <a:ea typeface="Amiri" pitchFamily="2" charset="-78"/>
                 <a:cs typeface="Amiri" pitchFamily="2" charset="-78"/>
               </a:rPr>
               <a:t>امْتِحَانٌ تَجْرِيبِيٌّ — الوَرَقَةُ الأُولَى: الاسْتِمَاعُ</a:t>
@@ -18227,6 +18319,7 @@
                   <a:srgbClr val="D4AF37"/>
                 </a:solidFill>
                 <a:latin typeface="Amiri" pitchFamily="2" charset="-78"/>
+                <a:ea typeface="Amiri" pitchFamily="2" charset="-78"/>
                 <a:cs typeface="Amiri" pitchFamily="2" charset="-78"/>
               </a:rPr>
               <a:t>م</a:t>
@@ -18547,6 +18640,7 @@
                   <a:srgbClr val="8A6D1E"/>
                 </a:solidFill>
                 <a:latin typeface="Amiri" pitchFamily="2" charset="-78"/>
+                <a:ea typeface="Amiri" pitchFamily="2" charset="-78"/>
                 <a:cs typeface="Amiri" pitchFamily="2" charset="-78"/>
               </a:rPr>
               <a:t>خَرِيطَةُ الدَّرْسِ</a:t>
@@ -18861,6 +18955,7 @@
                   <a:srgbClr val="0E7C86"/>
                 </a:solidFill>
                 <a:latin typeface="Amiri" pitchFamily="2" charset="-78"/>
+                <a:ea typeface="Amiri" pitchFamily="2" charset="-78"/>
                 <a:cs typeface="Amiri" pitchFamily="2" charset="-78"/>
               </a:rPr>
               <a:t>اِبْدَأِ الآنَ</a:t>
@@ -19137,6 +19232,7 @@
                   <a:srgbClr val="1B3B6F"/>
                 </a:solidFill>
                 <a:latin typeface="Amiri" pitchFamily="2" charset="-78"/>
+                <a:ea typeface="Amiri" pitchFamily="2" charset="-78"/>
                 <a:cs typeface="Amiri" pitchFamily="2" charset="-78"/>
               </a:rPr>
               <a:t>المَعَايِيرُ</a:t>
@@ -19413,6 +19509,7 @@
                   <a:srgbClr val="6B4C9A"/>
                 </a:solidFill>
                 <a:latin typeface="Amiri" pitchFamily="2" charset="-78"/>
+                <a:ea typeface="Amiri" pitchFamily="2" charset="-78"/>
                 <a:cs typeface="Amiri" pitchFamily="2" charset="-78"/>
               </a:rPr>
               <a:t>شَاهِدْ</a:t>
@@ -19689,6 +19786,7 @@
                   <a:srgbClr val="1E6B52"/>
                 </a:solidFill>
                 <a:latin typeface="Amiri" pitchFamily="2" charset="-78"/>
+                <a:ea typeface="Amiri" pitchFamily="2" charset="-78"/>
                 <a:cs typeface="Amiri" pitchFamily="2" charset="-78"/>
               </a:rPr>
               <a:t>تَحَدَّثْ</a:t>
@@ -19965,6 +20063,7 @@
                   <a:srgbClr val="8A6D1E"/>
                 </a:solidFill>
                 <a:latin typeface="Amiri" pitchFamily="2" charset="-78"/>
+                <a:ea typeface="Amiri" pitchFamily="2" charset="-78"/>
                 <a:cs typeface="Amiri" pitchFamily="2" charset="-78"/>
               </a:rPr>
               <a:t>قَيِّمْ</a:t>
@@ -20241,6 +20340,7 @@
                   <a:srgbClr val="C45A3C"/>
                 </a:solidFill>
                 <a:latin typeface="Amiri" pitchFamily="2" charset="-78"/>
+                <a:ea typeface="Amiri" pitchFamily="2" charset="-78"/>
                 <a:cs typeface="Amiri" pitchFamily="2" charset="-78"/>
               </a:rPr>
               <a:t>اِسْتَعِدَّ</a:t>
@@ -20484,6 +20584,7 @@
                   <a:srgbClr val="D4AF37"/>
                 </a:solidFill>
                 <a:latin typeface="Amiri" pitchFamily="2" charset="-78"/>
+                <a:ea typeface="Amiri" pitchFamily="2" charset="-78"/>
                 <a:cs typeface="Amiri" pitchFamily="2" charset="-78"/>
               </a:rPr>
               <a:t>م</a:t>
@@ -20804,6 +20905,7 @@
                   <a:srgbClr val="8A6D1E"/>
                 </a:solidFill>
                 <a:latin typeface="Amiri" pitchFamily="2" charset="-78"/>
+                <a:ea typeface="Amiri" pitchFamily="2" charset="-78"/>
                 <a:cs typeface="Amiri" pitchFamily="2" charset="-78"/>
               </a:rPr>
               <a:t>اِبْدَأِ الآنَ</a:t>
@@ -20990,6 +21092,7 @@
                   <a:srgbClr val="1B3B6F"/>
                 </a:solidFill>
                 <a:latin typeface="Amiri" pitchFamily="2" charset="-78"/>
+                <a:ea typeface="Amiri" pitchFamily="2" charset="-78"/>
                 <a:cs typeface="Amiri" pitchFamily="2" charset="-78"/>
               </a:rPr>
               <a:t>التَّوْسِيعُ فِي الإِجَابَةِ</a:t>
@@ -21454,6 +21557,7 @@
                   <a:srgbClr val="1B3B6F"/>
                 </a:solidFill>
                 <a:latin typeface="Amiri" pitchFamily="2" charset="-78"/>
+                <a:ea typeface="Amiri" pitchFamily="2" charset="-78"/>
                 <a:cs typeface="Amiri" pitchFamily="2" charset="-78"/>
               </a:rPr>
               <a:t>الرَّأْيُ مَعَ الأَسْبَابِ</a:t>
@@ -21918,6 +22022,7 @@
                   <a:srgbClr val="1B3B6F"/>
                 </a:solidFill>
                 <a:latin typeface="Amiri" pitchFamily="2" charset="-78"/>
+                <a:ea typeface="Amiri" pitchFamily="2" charset="-78"/>
                 <a:cs typeface="Amiri" pitchFamily="2" charset="-78"/>
               </a:rPr>
               <a:t>التَّعَافِي مِنَ الأَخْطَاءِ</a:t>
@@ -22382,6 +22487,7 @@
                   <a:srgbClr val="1B3B6F"/>
                 </a:solidFill>
                 <a:latin typeface="Amiri" pitchFamily="2" charset="-78"/>
+                <a:ea typeface="Amiri" pitchFamily="2" charset="-78"/>
                 <a:cs typeface="Amiri" pitchFamily="2" charset="-78"/>
               </a:rPr>
               <a:t>أَنَّ التِّقْنِيَّةَ مُفِيدَةٌ، غَيْرَ أَنَّ</a:t>
@@ -22496,6 +22602,7 @@
                   <a:srgbClr val="1F2A37"/>
                 </a:solidFill>
                 <a:latin typeface="Amiri" pitchFamily="2" charset="-78"/>
+                <a:ea typeface="Amiri" pitchFamily="2" charset="-78"/>
                 <a:cs typeface="Amiri" pitchFamily="2" charset="-78"/>
               </a:rPr>
               <a:t>لِأَنَّ</a:t>
@@ -22597,6 +22704,7 @@
                   <a:srgbClr val="1F2A37"/>
                 </a:solidFill>
                 <a:latin typeface="Amiri" pitchFamily="2" charset="-78"/>
+                <a:ea typeface="Amiri" pitchFamily="2" charset="-78"/>
                 <a:cs typeface="Amiri" pitchFamily="2" charset="-78"/>
               </a:rPr>
               <a:t>لَوْ</a:t>
@@ -22698,6 +22806,7 @@
                   <a:srgbClr val="1F2A37"/>
                 </a:solidFill>
                 <a:latin typeface="Amiri" pitchFamily="2" charset="-78"/>
+                <a:ea typeface="Amiri" pitchFamily="2" charset="-78"/>
                 <a:cs typeface="Amiri" pitchFamily="2" charset="-78"/>
               </a:rPr>
               <a:t>صَحِيحٌ</a:t>
@@ -22846,6 +22955,7 @@
                   <a:srgbClr val="1B3B6F"/>
                 </a:solidFill>
                 <a:latin typeface="Amiri" pitchFamily="2" charset="-78"/>
+                <a:ea typeface="Amiri" pitchFamily="2" charset="-78"/>
                 <a:cs typeface="Amiri" pitchFamily="2" charset="-78"/>
               </a:rPr>
               <a:t>يَتَطَلَّبُ الأَمْرُ أَنْ</a:t>
@@ -22872,6 +22982,7 @@
                   <a:srgbClr val="1B3B6F"/>
                 </a:solidFill>
                 <a:latin typeface="Amiri" pitchFamily="2" charset="-78"/>
+                <a:ea typeface="Amiri" pitchFamily="2" charset="-78"/>
                 <a:cs typeface="Amiri" pitchFamily="2" charset="-78"/>
               </a:rPr>
               <a:t>المَدَارِسُ دَعْمًا</a:t>
@@ -22986,6 +23097,7 @@
                   <a:srgbClr val="1F2A37"/>
                 </a:solidFill>
                 <a:latin typeface="Amiri" pitchFamily="2" charset="-78"/>
+                <a:ea typeface="Amiri" pitchFamily="2" charset="-78"/>
                 <a:cs typeface="Amiri" pitchFamily="2" charset="-78"/>
               </a:rPr>
               <a:t>تُوَفِّرَ</a:t>
@@ -23087,6 +23199,7 @@
                   <a:srgbClr val="1F2A37"/>
                 </a:solidFill>
                 <a:latin typeface="Amiri" pitchFamily="2" charset="-78"/>
+                <a:ea typeface="Amiri" pitchFamily="2" charset="-78"/>
                 <a:cs typeface="Amiri" pitchFamily="2" charset="-78"/>
               </a:rPr>
               <a:t>تُوَفِّرُ</a:t>
@@ -23188,6 +23301,7 @@
                   <a:srgbClr val="1F2A37"/>
                 </a:solidFill>
                 <a:latin typeface="Amiri" pitchFamily="2" charset="-78"/>
+                <a:ea typeface="Amiri" pitchFamily="2" charset="-78"/>
                 <a:cs typeface="Amiri" pitchFamily="2" charset="-78"/>
               </a:rPr>
               <a:t>وَفَّرَتْ</a:t>
@@ -23523,6 +23637,7 @@
                   <a:srgbClr val="D4AF37"/>
                 </a:solidFill>
                 <a:latin typeface="Amiri" pitchFamily="2" charset="-78"/>
+                <a:ea typeface="Amiri" pitchFamily="2" charset="-78"/>
                 <a:cs typeface="Amiri" pitchFamily="2" charset="-78"/>
               </a:rPr>
               <a:t>م</a:t>
@@ -23843,6 +23958,7 @@
                   <a:srgbClr val="8A6D1E"/>
                 </a:solidFill>
                 <a:latin typeface="Amiri" pitchFamily="2" charset="-78"/>
+                <a:ea typeface="Amiri" pitchFamily="2" charset="-78"/>
                 <a:cs typeface="Amiri" pitchFamily="2" charset="-78"/>
               </a:rPr>
               <a:t>الإِجَابَاتُ وَالتَّعْلِيلُ</a:t>
@@ -24029,6 +24145,7 @@
                   <a:srgbClr val="1B3B6F"/>
                 </a:solidFill>
                 <a:latin typeface="Amiri" pitchFamily="2" charset="-78"/>
+                <a:ea typeface="Amiri" pitchFamily="2" charset="-78"/>
                 <a:cs typeface="Amiri" pitchFamily="2" charset="-78"/>
               </a:rPr>
               <a:t>التَّوْسِيعُ فِي الإِجَابَةِ</a:t>
@@ -24558,6 +24675,7 @@
                   <a:srgbClr val="1B3B6F"/>
                 </a:solidFill>
                 <a:latin typeface="Amiri" pitchFamily="2" charset="-78"/>
+                <a:ea typeface="Amiri" pitchFamily="2" charset="-78"/>
                 <a:cs typeface="Amiri" pitchFamily="2" charset="-78"/>
               </a:rPr>
               <a:t>الرَّأْيُ مَعَ الأَسْبَابِ</a:t>
@@ -25087,6 +25205,7 @@
                   <a:srgbClr val="1B3B6F"/>
                 </a:solidFill>
                 <a:latin typeface="Amiri" pitchFamily="2" charset="-78"/>
+                <a:ea typeface="Amiri" pitchFamily="2" charset="-78"/>
                 <a:cs typeface="Amiri" pitchFamily="2" charset="-78"/>
               </a:rPr>
               <a:t>التَّعَافِي مِنَ الأَخْطَاءِ</a:t>
@@ -25616,6 +25735,7 @@
                   <a:srgbClr val="1B3B6F"/>
                 </a:solidFill>
                 <a:latin typeface="Amiri" pitchFamily="2" charset="-78"/>
+                <a:ea typeface="Amiri" pitchFamily="2" charset="-78"/>
                 <a:cs typeface="Amiri" pitchFamily="2" charset="-78"/>
               </a:rPr>
               <a:t>أَنَّ التِّقْنِيَّةَ مُفِيدَةٌ، غَيْرَ أَنَّ</a:t>
@@ -25730,6 +25850,7 @@
                   <a:srgbClr val="9AA1AB"/>
                 </a:solidFill>
                 <a:latin typeface="Amiri" pitchFamily="2" charset="-78"/>
+                <a:ea typeface="Amiri" pitchFamily="2" charset="-78"/>
                 <a:cs typeface="Amiri" pitchFamily="2" charset="-78"/>
               </a:rPr>
               <a:t>لِأَنَّ</a:t>
@@ -25831,6 +25952,7 @@
                   <a:srgbClr val="9AA1AB"/>
                 </a:solidFill>
                 <a:latin typeface="Amiri" pitchFamily="2" charset="-78"/>
+                <a:ea typeface="Amiri" pitchFamily="2" charset="-78"/>
                 <a:cs typeface="Amiri" pitchFamily="2" charset="-78"/>
               </a:rPr>
               <a:t>لَوْ</a:t>
@@ -25959,6 +26081,7 @@
                   <a:srgbClr val="1F2A37"/>
                 </a:solidFill>
                 <a:latin typeface="Amiri" pitchFamily="2" charset="-78"/>
+                <a:ea typeface="Amiri" pitchFamily="2" charset="-78"/>
                 <a:cs typeface="Amiri" pitchFamily="2" charset="-78"/>
               </a:rPr>
               <a:t>صَحِيحٌ</a:t>
@@ -26145,6 +26268,7 @@
                   <a:srgbClr val="1B3B6F"/>
                 </a:solidFill>
                 <a:latin typeface="Amiri" pitchFamily="2" charset="-78"/>
+                <a:ea typeface="Amiri" pitchFamily="2" charset="-78"/>
                 <a:cs typeface="Amiri" pitchFamily="2" charset="-78"/>
               </a:rPr>
               <a:t>يَتَطَلَّبُ الأَمْرُ أَنْ</a:t>
@@ -26171,6 +26295,7 @@
                   <a:srgbClr val="1B3B6F"/>
                 </a:solidFill>
                 <a:latin typeface="Amiri" pitchFamily="2" charset="-78"/>
+                <a:ea typeface="Amiri" pitchFamily="2" charset="-78"/>
                 <a:cs typeface="Amiri" pitchFamily="2" charset="-78"/>
               </a:rPr>
               <a:t>المَدَارِسُ دَعْمًا</a:t>
@@ -26312,6 +26437,7 @@
                   <a:srgbClr val="1F2A37"/>
                 </a:solidFill>
                 <a:latin typeface="Amiri" pitchFamily="2" charset="-78"/>
+                <a:ea typeface="Amiri" pitchFamily="2" charset="-78"/>
                 <a:cs typeface="Amiri" pitchFamily="2" charset="-78"/>
               </a:rPr>
               <a:t>تُوَفِّرَ</a:t>
@@ -26413,6 +26539,7 @@
                   <a:srgbClr val="9AA1AB"/>
                 </a:solidFill>
                 <a:latin typeface="Amiri" pitchFamily="2" charset="-78"/>
+                <a:ea typeface="Amiri" pitchFamily="2" charset="-78"/>
                 <a:cs typeface="Amiri" pitchFamily="2" charset="-78"/>
               </a:rPr>
               <a:t>تُوَفِّرُ</a:t>
@@ -26514,6 +26641,7 @@
                   <a:srgbClr val="9AA1AB"/>
                 </a:solidFill>
                 <a:latin typeface="Amiri" pitchFamily="2" charset="-78"/>
+                <a:ea typeface="Amiri" pitchFamily="2" charset="-78"/>
                 <a:cs typeface="Amiri" pitchFamily="2" charset="-78"/>
               </a:rPr>
               <a:t>وَفَّرَتْ</a:t>
@@ -26703,6 +26831,7 @@
                   <a:srgbClr val="1B3B6F"/>
                 </a:solidFill>
                 <a:latin typeface="Amiri" pitchFamily="2" charset="-78"/>
+                <a:ea typeface="Amiri" pitchFamily="2" charset="-78"/>
                 <a:cs typeface="Amiri" pitchFamily="2" charset="-78"/>
               </a:rPr>
               <a:t>فِي رَأْيِي … لِأَنَّ … فَمَثَلًا … لِذَا يَتَطَلَّبُ الأَمْرُ أَنْ …</a:t>
@@ -26836,6 +26965,7 @@
                   <a:srgbClr val="D4AF37"/>
                 </a:solidFill>
                 <a:latin typeface="Amiri" pitchFamily="2" charset="-78"/>
+                <a:ea typeface="Amiri" pitchFamily="2" charset="-78"/>
                 <a:cs typeface="Amiri" pitchFamily="2" charset="-78"/>
               </a:rPr>
               <a:t>م</a:t>
@@ -27156,6 +27286,7 @@
                   <a:srgbClr val="8A6D1E"/>
                 </a:solidFill>
                 <a:latin typeface="Amiri" pitchFamily="2" charset="-78"/>
+                <a:ea typeface="Amiri" pitchFamily="2" charset="-78"/>
                 <a:cs typeface="Amiri" pitchFamily="2" charset="-78"/>
               </a:rPr>
               <a:t>الأَهْدَافُ وَمَعَايِيرُ النَّجَاحِ</a:t>
@@ -27304,6 +27435,7 @@
                   <a:srgbClr val="8A6D1E"/>
                 </a:solidFill>
                 <a:latin typeface="Amiri" pitchFamily="2" charset="-78"/>
+                <a:ea typeface="Amiri" pitchFamily="2" charset="-78"/>
                 <a:cs typeface="Amiri" pitchFamily="2" charset="-78"/>
               </a:rPr>
               <a:t>سَتَتَعَلَّمُ اليَوْمَ</a:t>
@@ -28562,6 +28694,7 @@
                   <a:srgbClr val="D4AF37"/>
                 </a:solidFill>
                 <a:latin typeface="Amiri" pitchFamily="2" charset="-78"/>
+                <a:ea typeface="Amiri" pitchFamily="2" charset="-78"/>
                 <a:cs typeface="Amiri" pitchFamily="2" charset="-78"/>
               </a:rPr>
               <a:t>كَلِمَاتُ الدَّرْسِ</a:t>
@@ -28784,6 +28917,7 @@
                   <a:srgbClr val="1B3B6F"/>
                 </a:solidFill>
                 <a:latin typeface="Amiri" pitchFamily="2" charset="-78"/>
+                <a:ea typeface="Amiri" pitchFamily="2" charset="-78"/>
                 <a:cs typeface="Amiri" pitchFamily="2" charset="-78"/>
               </a:rPr>
               <a:t>رَأْيٌ</a:t>
@@ -28817,11 +28951,12 @@
               <a:buNone/>
             </a:pPr>
             <a:r>
-              <a:rPr lang="ur-PK" altLang="en-US" sz="1400" b="1" dirty="0">
+              <a:rPr lang="ar-SA" altLang="en-US" sz="1400" b="1" dirty="0">
                 <a:solidFill>
                   <a:srgbClr val="2E8B57"/>
                 </a:solidFill>
                 <a:latin typeface="Amiri" pitchFamily="2" charset="-78"/>
+                <a:ea typeface="Amiri" pitchFamily="2" charset="-78"/>
                 <a:cs typeface="Amiri" pitchFamily="2" charset="-78"/>
               </a:rPr>
               <a:t>‎رائے‎ </a:t>
@@ -28873,6 +29008,7 @@
                   <a:srgbClr val="1B3B6F"/>
                 </a:solidFill>
                 <a:latin typeface="Amiri" pitchFamily="2" charset="-78"/>
+                <a:ea typeface="Amiri" pitchFamily="2" charset="-78"/>
                 <a:cs typeface="Amiri" pitchFamily="2" charset="-78"/>
               </a:rPr>
               <a:t>مِثَالٌ</a:t>
@@ -28906,11 +29042,12 @@
               <a:buNone/>
             </a:pPr>
             <a:r>
-              <a:rPr lang="ur-PK" altLang="en-US" sz="1400" b="1" dirty="0">
+              <a:rPr lang="ar-SA" altLang="en-US" sz="1400" b="1" dirty="0">
                 <a:solidFill>
                   <a:srgbClr val="2E8B57"/>
                 </a:solidFill>
                 <a:latin typeface="Amiri" pitchFamily="2" charset="-78"/>
+                <a:ea typeface="Amiri" pitchFamily="2" charset="-78"/>
                 <a:cs typeface="Amiri" pitchFamily="2" charset="-78"/>
               </a:rPr>
               <a:t>‎مثال‎ </a:t>
@@ -28962,6 +29099,7 @@
                   <a:srgbClr val="1B3B6F"/>
                 </a:solidFill>
                 <a:latin typeface="Amiri" pitchFamily="2" charset="-78"/>
+                <a:ea typeface="Amiri" pitchFamily="2" charset="-78"/>
                 <a:cs typeface="Amiri" pitchFamily="2" charset="-78"/>
               </a:rPr>
               <a:t>سَبَبٌ</a:t>
@@ -28995,11 +29133,12 @@
               <a:buNone/>
             </a:pPr>
             <a:r>
-              <a:rPr lang="ur-PK" altLang="en-US" sz="1400" b="1" dirty="0">
+              <a:rPr lang="ar-SA" altLang="en-US" sz="1400" b="1" dirty="0">
                 <a:solidFill>
                   <a:srgbClr val="2E8B57"/>
                 </a:solidFill>
                 <a:latin typeface="Amiri" pitchFamily="2" charset="-78"/>
+                <a:ea typeface="Amiri" pitchFamily="2" charset="-78"/>
                 <a:cs typeface="Amiri" pitchFamily="2" charset="-78"/>
               </a:rPr>
               <a:t>‎سبب‎ </a:t>
@@ -29051,6 +29190,7 @@
                   <a:srgbClr val="1B3B6F"/>
                 </a:solidFill>
                 <a:latin typeface="Amiri" pitchFamily="2" charset="-78"/>
+                <a:ea typeface="Amiri" pitchFamily="2" charset="-78"/>
                 <a:cs typeface="Amiri" pitchFamily="2" charset="-78"/>
               </a:rPr>
               <a:t>مَوْضُوعٌ</a:t>
@@ -29084,11 +29224,12 @@
               <a:buNone/>
             </a:pPr>
             <a:r>
-              <a:rPr lang="ur-PK" altLang="en-US" sz="1400" b="1" dirty="0">
+              <a:rPr lang="ar-SA" altLang="en-US" sz="1400" b="1" dirty="0">
                 <a:solidFill>
                   <a:srgbClr val="2E8B57"/>
                 </a:solidFill>
                 <a:latin typeface="Amiri" pitchFamily="2" charset="-78"/>
+                <a:ea typeface="Amiri" pitchFamily="2" charset="-78"/>
                 <a:cs typeface="Amiri" pitchFamily="2" charset="-78"/>
               </a:rPr>
               <a:t>‎موضوع‎ </a:t>
@@ -29140,6 +29281,7 @@
                   <a:srgbClr val="1B3B6F"/>
                 </a:solidFill>
                 <a:latin typeface="Amiri" pitchFamily="2" charset="-78"/>
+                <a:ea typeface="Amiri" pitchFamily="2" charset="-78"/>
                 <a:cs typeface="Amiri" pitchFamily="2" charset="-78"/>
               </a:rPr>
               <a:t>دَلِيلٌ</a:t>
@@ -29173,11 +29315,12 @@
               <a:buNone/>
             </a:pPr>
             <a:r>
-              <a:rPr lang="ur-PK" altLang="en-US" sz="1400" b="1" dirty="0">
+              <a:rPr lang="ar-SA" altLang="en-US" sz="1400" b="1" dirty="0">
                 <a:solidFill>
                   <a:srgbClr val="2E8B57"/>
                 </a:solidFill>
                 <a:latin typeface="Amiri" pitchFamily="2" charset="-78"/>
+                <a:ea typeface="Amiri" pitchFamily="2" charset="-78"/>
                 <a:cs typeface="Amiri" pitchFamily="2" charset="-78"/>
               </a:rPr>
               <a:t>‎دلیل‎ </a:t>
@@ -29324,6 +29467,7 @@
                   <a:srgbClr val="D4AF37"/>
                 </a:solidFill>
                 <a:latin typeface="Amiri" pitchFamily="2" charset="-78"/>
+                <a:ea typeface="Amiri" pitchFamily="2" charset="-78"/>
                 <a:cs typeface="Amiri" pitchFamily="2" charset="-78"/>
               </a:rPr>
               <a:t>م</a:t>
@@ -29644,6 +29788,7 @@
                   <a:srgbClr val="8A6D1E"/>
                 </a:solidFill>
                 <a:latin typeface="Amiri" pitchFamily="2" charset="-78"/>
+                <a:ea typeface="Amiri" pitchFamily="2" charset="-78"/>
                 <a:cs typeface="Amiri" pitchFamily="2" charset="-78"/>
               </a:rPr>
               <a:t>كَلِمَاتُ الدَّرْسِ</a:t>
@@ -29882,6 +30027,7 @@
                   <a:srgbClr val="1B3B6F"/>
                 </a:solidFill>
                 <a:latin typeface="Amiri" pitchFamily="2" charset="-78"/>
+                <a:ea typeface="Amiri" pitchFamily="2" charset="-78"/>
                 <a:cs typeface="Amiri" pitchFamily="2" charset="-78"/>
               </a:rPr>
               <a:t>المُحَادَثَةُ المَوْضُوعِيَّةُ</a:t>
@@ -30136,6 +30282,7 @@
                   <a:srgbClr val="1B3B6F"/>
                 </a:solidFill>
                 <a:latin typeface="Amiri" pitchFamily="2" charset="-78"/>
+                <a:ea typeface="Amiri" pitchFamily="2" charset="-78"/>
                 <a:cs typeface="Amiri" pitchFamily="2" charset="-78"/>
               </a:rPr>
               <a:t>التَّوْسِيعُ فِي الإِجَابَةِ</a:t>
@@ -30455,6 +30602,7 @@
                   <a:srgbClr val="1B3B6F"/>
                 </a:solidFill>
                 <a:latin typeface="Amiri" pitchFamily="2" charset="-78"/>
+                <a:ea typeface="Amiri" pitchFamily="2" charset="-78"/>
                 <a:cs typeface="Amiri" pitchFamily="2" charset="-78"/>
               </a:rPr>
               <a:t>الرَّأْيُ مَعَ الأَسْبَابِ</a:t>
@@ -30612,6 +30760,7 @@
                   <a:srgbClr val="1B3B6F"/>
                 </a:solidFill>
                 <a:latin typeface="Amiri" pitchFamily="2" charset="-78"/>
+                <a:ea typeface="Amiri" pitchFamily="2" charset="-78"/>
                 <a:cs typeface="Amiri" pitchFamily="2" charset="-78"/>
               </a:rPr>
               <a:t>آرَاءٌ</a:t>
@@ -30715,6 +30864,7 @@
                   <a:srgbClr val="1B3B6F"/>
                 </a:solidFill>
                 <a:latin typeface="Amiri" pitchFamily="2" charset="-78"/>
+                <a:ea typeface="Amiri" pitchFamily="2" charset="-78"/>
                 <a:cs typeface="Amiri" pitchFamily="2" charset="-78"/>
               </a:rPr>
               <a:t>سَبَبٌ</a:t>
@@ -30980,6 +31130,7 @@
                   <a:srgbClr val="1B3B6F"/>
                 </a:solidFill>
                 <a:latin typeface="Amiri" pitchFamily="2" charset="-78"/>
+                <a:ea typeface="Amiri" pitchFamily="2" charset="-78"/>
                 <a:cs typeface="Amiri" pitchFamily="2" charset="-78"/>
               </a:rPr>
               <a:t>الأَمْثِلَةُ الدَّاعِمَةُ</a:t>
@@ -31137,6 +31288,7 @@
                   <a:srgbClr val="1B3B6F"/>
                 </a:solidFill>
                 <a:latin typeface="Amiri" pitchFamily="2" charset="-78"/>
+                <a:ea typeface="Amiri" pitchFamily="2" charset="-78"/>
                 <a:cs typeface="Amiri" pitchFamily="2" charset="-78"/>
               </a:rPr>
               <a:t>مِثَالٌ دَاعِمٌ</a:t>
@@ -31270,6 +31422,7 @@
                   <a:srgbClr val="D4AF37"/>
                 </a:solidFill>
                 <a:latin typeface="Amiri" pitchFamily="2" charset="-78"/>
+                <a:ea typeface="Amiri" pitchFamily="2" charset="-78"/>
                 <a:cs typeface="Amiri" pitchFamily="2" charset="-78"/>
               </a:rPr>
               <a:t>م</a:t>
@@ -31590,6 +31743,7 @@
                   <a:srgbClr val="8A6D1E"/>
                 </a:solidFill>
                 <a:latin typeface="Amiri" pitchFamily="2" charset="-78"/>
+                <a:ea typeface="Amiri" pitchFamily="2" charset="-78"/>
                 <a:cs typeface="Amiri" pitchFamily="2" charset="-78"/>
               </a:rPr>
               <a:t>كَلِمَاتُ الدَّرْسِ</a:t>
@@ -31763,6 +31917,7 @@
                   <a:srgbClr val="1B3B6F"/>
                 </a:solidFill>
                 <a:latin typeface="Amiri" pitchFamily="2" charset="-78"/>
+                <a:ea typeface="Amiri" pitchFamily="2" charset="-78"/>
                 <a:cs typeface="Amiri" pitchFamily="2" charset="-78"/>
               </a:rPr>
               <a:t>الطَّلَاقَةُ مَعَ الدِّقَّةِ</a:t>
@@ -31952,6 +32107,7 @@
                   <a:srgbClr val="1B3B6F"/>
                 </a:solidFill>
                 <a:latin typeface="Amiri" pitchFamily="2" charset="-78"/>
+                <a:ea typeface="Amiri" pitchFamily="2" charset="-78"/>
                 <a:cs typeface="Amiri" pitchFamily="2" charset="-78"/>
               </a:rPr>
               <a:t>التَّعَافِي مِنَ الأَخْطَاءِ</a:t>
@@ -32206,6 +32362,7 @@
                   <a:srgbClr val="1B3B6F"/>
                 </a:solidFill>
                 <a:latin typeface="Amiri" pitchFamily="2" charset="-78"/>
+                <a:ea typeface="Amiri" pitchFamily="2" charset="-78"/>
                 <a:cs typeface="Amiri" pitchFamily="2" charset="-78"/>
               </a:rPr>
               <a:t>لُغَةُ التَّوَقُّفِ وَالتَّفْكِيرِ</a:t>
@@ -32395,6 +32552,7 @@
                   <a:srgbClr val="1B3B6F"/>
                 </a:solidFill>
                 <a:latin typeface="Amiri" pitchFamily="2" charset="-78"/>
+                <a:ea typeface="Amiri" pitchFamily="2" charset="-78"/>
                 <a:cs typeface="Amiri" pitchFamily="2" charset="-78"/>
               </a:rPr>
               <a:t>المُبَادَرَةُ فِي المُحَادَثَةِ</a:t>
@@ -32547,13 +32705,9 @@
     <a:fontScheme name="Office">
       <a:majorFont>
         <a:latin typeface="Calibri Light" panose="020F0302020204030204"/>
-        <a:ea typeface=""/>
-        <a:cs typeface=""/>
-        <a:font script="Jpan" typeface="游ゴシック Light"/>
-        <a:font script="Hang" typeface="맑은 고딕"/>
-        <a:font script="Hans" typeface="等线 Light"/>
-        <a:font script="Hant" typeface="新細明體"/>
-        <a:font script="Arab" typeface="Times New Roman"/>
+        <a:ea typeface="Amiri" pitchFamily="2" charset="-78"/>
+        <a:cs typeface="Amiri" pitchFamily="2" charset="-78"/>
+        <a:font script="Arab" typeface="Amiri"/>
         <a:font script="Hebr" typeface="Times New Roman"/>
         <a:font script="Thai" typeface="Angsana New"/>
         <a:font script="Ethi" typeface="Nyala"/>
@@ -32599,13 +32753,9 @@
       </a:majorFont>
       <a:minorFont>
         <a:latin typeface="Calibri" panose="020F0502020204030204"/>
-        <a:ea typeface=""/>
-        <a:cs typeface=""/>
-        <a:font script="Jpan" typeface="游ゴシック"/>
-        <a:font script="Hang" typeface="맑은 고딕"/>
-        <a:font script="Hans" typeface="等线"/>
-        <a:font script="Hant" typeface="新細明體"/>
-        <a:font script="Arab" typeface="Arial"/>
+        <a:ea typeface="Amiri" pitchFamily="2" charset="-78"/>
+        <a:cs typeface="Amiri" pitchFamily="2" charset="-78"/>
+        <a:font script="Arab" typeface="Amiri"/>
         <a:font script="Hebr" typeface="Arial"/>
         <a:font script="Thai" typeface="Cordia New"/>
         <a:font script="Ethi" typeface="Nyala"/>

--- a/Progression_P6/P6-L07_Paper_3_Topic_Conversation.pptx
+++ b/Progression_P6/P6-L07_Paper_3_Topic_Conversation.pptx
@@ -6362,7 +6362,7 @@
                 <a:solidFill>
                   <a:srgbClr val="FFFFFF"/>
                 </a:solidFill>
-                <a:latin typeface="Calibri" pitchFamily="34" charset="0"/>
+                <a:latin typeface="Amiri" pitchFamily="2" charset="-78"/>
                 <a:ea typeface="Amiri" pitchFamily="2" charset="-78"/>
                 <a:cs typeface="Amiri" pitchFamily="2" charset="-78"/>
               </a:rPr>
@@ -6428,7 +6428,7 @@
                 <a:solidFill>
                   <a:srgbClr val="FFFFFF"/>
                 </a:solidFill>
-                <a:latin typeface="Calibri" pitchFamily="34" charset="0"/>
+                <a:latin typeface="Amiri" pitchFamily="2" charset="-78"/>
                 <a:ea typeface="Amiri" pitchFamily="2" charset="-78"/>
                 <a:cs typeface="Amiri" pitchFamily="2" charset="-78"/>
               </a:rPr>
@@ -6494,7 +6494,7 @@
                 <a:solidFill>
                   <a:srgbClr val="FFFFFF"/>
                 </a:solidFill>
-                <a:latin typeface="Calibri" pitchFamily="34" charset="0"/>
+                <a:latin typeface="Amiri" pitchFamily="2" charset="-78"/>
                 <a:ea typeface="Amiri" pitchFamily="2" charset="-78"/>
                 <a:cs typeface="Amiri" pitchFamily="2" charset="-78"/>
               </a:rPr>
@@ -6560,7 +6560,7 @@
                 <a:solidFill>
                   <a:srgbClr val="FFFFFF"/>
                 </a:solidFill>
-                <a:latin typeface="Calibri" pitchFamily="34" charset="0"/>
+                <a:latin typeface="Amiri" pitchFamily="2" charset="-78"/>
                 <a:ea typeface="Amiri" pitchFamily="2" charset="-78"/>
                 <a:cs typeface="Amiri" pitchFamily="2" charset="-78"/>
               </a:rPr>
